--- a/docs/PhDapp_Supervisor_Overview.pptx
+++ b/docs/PhDapp_Supervisor_Overview.pptx
@@ -21,9 +21,10 @@
     <p:sldId id="269" r:id="rId15"/>
     <p:sldId id="270" r:id="rId16"/>
     <p:sldId id="271" r:id="rId17"/>
+    <p:sldId id="272" r:id="rId18"/>
   </p:sldIdLst>
   <p:notesMasterIdLst>
-    <p:notesMasterId r:id="rId18"/>
+    <p:notesMasterId r:id="rId19"/>
   </p:notesMasterIdLst>
   <p:sldSz cx="12192000" cy="6858000"/>
   <p:notesSz cx="6858000" cy="12192000"/>
@@ -1157,6 +1158,94 @@
             <a:fld id="{F7021451-1387-4CA6-816F-3879F97B5CBC}" type="slidenum">
               <a:rPr lang="en-US"/>
               <a:t>16</a:t>
+            </a:fld>
+            <a:endParaRPr lang="en-US"/>
+          </a:p>
+        </p:txBody>
+      </p:sp>
+    </p:spTree>
+    <p:extLst>
+      <p:ext uri="{BB962C8B-B14F-4D97-AF65-F5344CB8AC3E}">
+        <p14:creationId xmlns:p14="http://schemas.microsoft.com/office/powerpoint/2010/main" val="1024086991"/>
+      </p:ext>
+    </p:extLst>
+  </p:cSld>
+  <p:clrMapOvr>
+    <a:masterClrMapping/>
+  </p:clrMapOvr>
+</p:notes>
+</file>
+
+<file path=ppt/notesSlides/notesSlide17.xml><?xml version="1.0" encoding="utf-8"?>
+<p:notes xmlns:a="http://schemas.openxmlformats.org/drawingml/2006/main" xmlns:r="http://schemas.openxmlformats.org/officeDocument/2006/relationships" xmlns:p="http://schemas.openxmlformats.org/presentationml/2006/main">
+  <p:cSld>
+    <p:spTree>
+      <p:nvGrpSpPr>
+        <p:cNvPr id="1" name=""/>
+        <p:cNvGrpSpPr/>
+        <p:nvPr/>
+      </p:nvGrpSpPr>
+      <p:grpSpPr>
+        <a:xfrm>
+          <a:off x="0" y="0"/>
+          <a:ext cx="0" cy="0"/>
+          <a:chOff x="0" y="0"/>
+          <a:chExt cx="0" cy="0"/>
+        </a:xfrm>
+      </p:grpSpPr>
+      <p:sp>
+        <p:nvSpPr>
+          <p:cNvPr id="2" name="Slide Image Placeholder 1"/>
+          <p:cNvSpPr>
+            <a:spLocks noGrp="1" noRot="1" noChangeAspect="1"/>
+          </p:cNvSpPr>
+          <p:nvPr>
+            <p:ph type="sldImg"/>
+          </p:nvPr>
+        </p:nvSpPr>
+        <p:spPr/>
+      </p:sp>
+      <p:sp>
+        <p:nvSpPr>
+          <p:cNvPr id="3" name="Notes Placeholder 2"/>
+          <p:cNvSpPr>
+            <a:spLocks noGrp="1"/>
+          </p:cNvSpPr>
+          <p:nvPr>
+            <p:ph type="body" idx="1"/>
+          </p:nvPr>
+        </p:nvSpPr>
+        <p:spPr/>
+        <p:txBody>
+          <a:bodyPr/>
+          <a:lstStyle/>
+          <a:p>
+            <a:r>
+              <a:rPr lang="en-US" dirty="0"/>
+              <a:t/>
+            </a:r>
+            <a:endParaRPr lang="en-US" dirty="0"/>
+          </a:p>
+        </p:txBody>
+      </p:sp>
+      <p:sp>
+        <p:nvSpPr>
+          <p:cNvPr id="4" name="Slide Number Placeholder 3"/>
+          <p:cNvSpPr>
+            <a:spLocks noGrp="1"/>
+          </p:cNvSpPr>
+          <p:nvPr>
+            <p:ph type="sldNum" sz="quarter" idx="10"/>
+          </p:nvPr>
+        </p:nvSpPr>
+        <p:spPr/>
+        <p:txBody>
+          <a:bodyPr/>
+          <a:lstStyle/>
+          <a:p>
+            <a:fld id="{F7021451-1387-4CA6-816F-3879F97B5CBC}" type="slidenum">
+              <a:rPr lang="en-US"/>
+              <a:t>17</a:t>
             </a:fld>
             <a:endParaRPr lang="en-US"/>
           </a:p>
@@ -2321,7 +2410,7 @@
         <p:spPr>
           <a:xfrm>
             <a:off x="914400" y="5166360"/>
-            <a:ext cx="10058400" cy="731520"/>
+            <a:ext cx="10058400" cy="822960"/>
           </a:xfrm>
           <a:prstGeom prst="rect">
             <a:avLst/>
@@ -2337,7 +2426,7 @@
               <a:buNone/>
             </a:pPr>
             <a:r>
-              <a:rPr lang="en-US" sz="2200" dirty="0">
+              <a:rPr lang="en-US" sz="2400" dirty="0">
                 <a:solidFill>
                   <a:srgbClr val="FFFFFF">
                     <a:alpha val="90000"/>
@@ -2349,7 +2438,7 @@
               </a:rPr>
               <a:t>Students, tasks, calendar, chat — and everything that connects them.</a:t>
             </a:r>
-            <a:endParaRPr lang="en-US" sz="2200" dirty="0"/>
+            <a:endParaRPr lang="en-US" sz="2400" dirty="0"/>
           </a:p>
         </p:txBody>
       </p:sp>
@@ -2441,7 +2530,7 @@
             </a:avLst>
           </a:prstGeom>
           <a:solidFill>
-            <a:srgbClr val="6F4CFF"/>
+            <a:srgbClr val="00CA72"/>
           </a:solidFill>
           <a:ln/>
         </p:spPr>
@@ -2497,13 +2586,13 @@
             <a:r>
               <a:rPr lang="en-US" sz="1400" b="1" spc="400" kern="0" dirty="0">
                 <a:solidFill>
-                  <a:srgbClr val="6F4CFF"/>
-                </a:solidFill>
-                <a:latin typeface="Inter" pitchFamily="34" charset="0"/>
-                <a:ea typeface="Inter" pitchFamily="34" charset="-122"/>
-                <a:cs typeface="Inter" pitchFamily="34" charset="-120"/>
-              </a:rPr>
-              <a:t>READING</a:t>
+                  <a:srgbClr val="00CA72"/>
+                </a:solidFill>
+                <a:latin typeface="Inter" pitchFamily="34" charset="0"/>
+                <a:ea typeface="Inter" pitchFamily="34" charset="-122"/>
+                <a:cs typeface="Inter" pitchFamily="34" charset="-120"/>
+              </a:rPr>
+              <a:t>CHAT</a:t>
             </a:r>
             <a:endParaRPr lang="en-US" sz="1400" dirty="0"/>
           </a:p>
@@ -2518,7 +2607,7 @@
         <p:spPr>
           <a:xfrm>
             <a:off x="1261872" y="749808"/>
-            <a:ext cx="10381183" cy="640080"/>
+            <a:ext cx="10381183" cy="713232"/>
           </a:xfrm>
           <a:prstGeom prst="rect">
             <a:avLst/>
@@ -2534,7 +2623,7 @@
               <a:buNone/>
             </a:pPr>
             <a:r>
-              <a:rPr lang="en-US" sz="3600" b="1" dirty="0">
+              <a:rPr lang="en-US" sz="4000" b="1" dirty="0">
                 <a:solidFill>
                   <a:srgbClr val="0F172A"/>
                 </a:solidFill>
@@ -2542,9 +2631,9 @@
                 <a:ea typeface="Inter" pitchFamily="34" charset="-122"/>
                 <a:cs typeface="Inter" pitchFamily="34" charset="-120"/>
               </a:rPr>
-              <a:t>Reading, thesis &amp; publications</a:t>
-            </a:r>
-            <a:endParaRPr lang="en-US" sz="3600" dirty="0"/>
+              <a:t>Chat · channels for the team</a:t>
+            </a:r>
+            <a:endParaRPr lang="en-US" sz="4000" dirty="0"/>
           </a:p>
         </p:txBody>
       </p:sp>
@@ -2557,7 +2646,7 @@
         <p:spPr>
           <a:xfrm>
             <a:off x="548640" y="1828800"/>
-            <a:ext cx="5486400" cy="3291840"/>
+            <a:ext cx="5486400" cy="3931920"/>
           </a:xfrm>
           <a:prstGeom prst="rect">
             <a:avLst/>
@@ -2589,13 +2678,13 @@
         <p:spPr>
           <a:xfrm>
             <a:off x="548640" y="1828800"/>
-            <a:ext cx="73152" cy="3291840"/>
+            <a:ext cx="73152" cy="3931920"/>
           </a:xfrm>
           <a:prstGeom prst="rect">
             <a:avLst/>
           </a:prstGeom>
           <a:solidFill>
-            <a:srgbClr val="6F4CFF"/>
+            <a:srgbClr val="00CA72"/>
           </a:solidFill>
           <a:ln/>
         </p:spPr>
@@ -2609,7 +2698,7 @@
         <p:spPr>
           <a:xfrm>
             <a:off x="749808" y="1993392"/>
-            <a:ext cx="5166360" cy="502920"/>
+            <a:ext cx="5166360" cy="594360"/>
           </a:xfrm>
           <a:prstGeom prst="rect">
             <a:avLst/>
@@ -2625,7 +2714,7 @@
               <a:buNone/>
             </a:pPr>
             <a:r>
-              <a:rPr lang="en-US" sz="1800" b="1" dirty="0">
+              <a:rPr lang="en-US" sz="2200" b="1" dirty="0">
                 <a:solidFill>
                   <a:srgbClr val="0F172A"/>
                 </a:solidFill>
@@ -2633,9 +2722,9 @@
                 <a:ea typeface="Inter" pitchFamily="34" charset="-122"/>
                 <a:cs typeface="Inter" pitchFamily="34" charset="-120"/>
               </a:rPr>
-              <a:t>Reading approval flow</a:t>
-            </a:r>
-            <a:endParaRPr lang="en-US" sz="1800" dirty="0"/>
+              <a:t>Channels</a:t>
+            </a:r>
+            <a:endParaRPr lang="en-US" sz="2200" dirty="0"/>
           </a:p>
         </p:txBody>
       </p:sp>
@@ -2647,8 +2736,8 @@
         </p:nvSpPr>
         <p:spPr>
           <a:xfrm>
-            <a:off x="777240" y="2377440"/>
-            <a:ext cx="5074920" cy="2651760"/>
+            <a:off x="777240" y="2697480"/>
+            <a:ext cx="5074920" cy="2926080"/>
           </a:xfrm>
           <a:prstGeom prst="rect">
             <a:avLst/>
@@ -2662,13 +2751,13 @@
           <a:p>
             <a:pPr marL="342900" indent="-342900">
               <a:spcAft>
-                <a:spcPts val="400"/>
+                <a:spcPts val="600"/>
               </a:spcAft>
               <a:buSzPct val="100000"/>
               <a:buChar char="•"/>
             </a:pPr>
             <a:r>
-              <a:rPr lang="en-US" sz="1300" dirty="0">
+              <a:rPr lang="en-US" sz="1800" dirty="0">
                 <a:solidFill>
                   <a:srgbClr val="334155"/>
                 </a:solidFill>
@@ -2676,20 +2765,20 @@
                 <a:ea typeface="Inter" pitchFamily="34" charset="-122"/>
                 <a:cs typeface="Inter" pitchFamily="34" charset="-120"/>
               </a:rPr>
-              <a:t>Students propose papers with a ‘Why relevant?’ note.</a:t>
-            </a:r>
-            <a:endParaRPr lang="en-US" sz="1300" dirty="0"/>
+              <a:t>Auto Team · ‹student› channel includes the whole supervision team + the student.</a:t>
+            </a:r>
+            <a:endParaRPr lang="en-US" sz="1800" dirty="0"/>
           </a:p>
           <a:p>
             <a:pPr marL="342900" indent="-342900">
               <a:spcAft>
-                <a:spcPts val="400"/>
+                <a:spcPts val="600"/>
               </a:spcAft>
               <a:buSzPct val="100000"/>
               <a:buChar char="•"/>
             </a:pPr>
             <a:r>
-              <a:rPr lang="en-US" sz="1300" dirty="0">
+              <a:rPr lang="en-US" sz="1800" dirty="0">
                 <a:solidFill>
                   <a:srgbClr val="334155"/>
                 </a:solidFill>
@@ -2697,20 +2786,20 @@
                 <a:ea typeface="Inter" pitchFamily="34" charset="-122"/>
                 <a:cs typeface="Inter" pitchFamily="34" charset="-120"/>
               </a:rPr>
-              <a:t>You see them in the Pending Approval card.</a:t>
-            </a:r>
-            <a:endParaRPr lang="en-US" sz="1300" dirty="0"/>
+              <a:t>Spin up co-supervisor or 1:1 channels as needed.</a:t>
+            </a:r>
+            <a:endParaRPr lang="en-US" sz="1800" dirty="0"/>
           </a:p>
           <a:p>
             <a:pPr marL="342900" indent="-342900">
               <a:spcAft>
-                <a:spcPts val="400"/>
+                <a:spcPts val="600"/>
               </a:spcAft>
               <a:buSzPct val="100000"/>
               <a:buChar char="•"/>
             </a:pPr>
             <a:r>
-              <a:rPr lang="en-US" sz="1300" dirty="0">
+              <a:rPr lang="en-US" sz="1800" dirty="0">
                 <a:solidFill>
                   <a:srgbClr val="334155"/>
                 </a:solidFill>
@@ -2718,20 +2807,20 @@
                 <a:ea typeface="Inter" pitchFamily="34" charset="-122"/>
                 <a:cs typeface="Inter" pitchFamily="34" charset="-120"/>
               </a:rPr>
-              <a:t>Approve (with optional comment) or reject (with reason) — the student is notified.</a:t>
-            </a:r>
-            <a:endParaRPr lang="en-US" sz="1300" dirty="0"/>
+              <a:t>Edit channel: name, description, colour and members (member changes confirmed).</a:t>
+            </a:r>
+            <a:endParaRPr lang="en-US" sz="1800" dirty="0"/>
           </a:p>
           <a:p>
             <a:pPr marL="342900" indent="-342900">
               <a:spcAft>
-                <a:spcPts val="400"/>
+                <a:spcPts val="600"/>
               </a:spcAft>
               <a:buSzPct val="100000"/>
               <a:buChar char="•"/>
             </a:pPr>
             <a:r>
-              <a:rPr lang="en-US" sz="1300" dirty="0">
+              <a:rPr lang="en-US" sz="1800" dirty="0">
                 <a:solidFill>
                   <a:srgbClr val="334155"/>
                 </a:solidFill>
@@ -2739,9 +2828,9 @@
                 <a:ea typeface="Inter" pitchFamily="34" charset="-122"/>
                 <a:cs typeface="Inter" pitchFamily="34" charset="-120"/>
               </a:rPr>
-              <a:t>Approved items appear in the main queue with status tracking.</a:t>
-            </a:r>
-            <a:endParaRPr lang="en-US" sz="1300" dirty="0"/>
+              <a:t>Delete a channel removes all messages (no undo).</a:t>
+            </a:r>
+            <a:endParaRPr lang="en-US" sz="1800" dirty="0"/>
           </a:p>
         </p:txBody>
       </p:sp>
@@ -2754,7 +2843,7 @@
         <p:spPr>
           <a:xfrm>
             <a:off x="6400800" y="1828800"/>
-            <a:ext cx="5242255" cy="3291840"/>
+            <a:ext cx="5242255" cy="3931920"/>
           </a:xfrm>
           <a:prstGeom prst="rect">
             <a:avLst/>
@@ -2786,13 +2875,13 @@
         <p:spPr>
           <a:xfrm>
             <a:off x="6400800" y="1828800"/>
-            <a:ext cx="73152" cy="3291840"/>
+            <a:ext cx="73152" cy="3931920"/>
           </a:xfrm>
           <a:prstGeom prst="rect">
             <a:avLst/>
           </a:prstGeom>
           <a:solidFill>
-            <a:srgbClr val="6F4CFF"/>
+            <a:srgbClr val="00CA72"/>
           </a:solidFill>
           <a:ln/>
         </p:spPr>
@@ -2806,7 +2895,7 @@
         <p:spPr>
           <a:xfrm>
             <a:off x="6601968" y="1993392"/>
-            <a:ext cx="4922215" cy="502920"/>
+            <a:ext cx="4922215" cy="594360"/>
           </a:xfrm>
           <a:prstGeom prst="rect">
             <a:avLst/>
@@ -2822,7 +2911,7 @@
               <a:buNone/>
             </a:pPr>
             <a:r>
-              <a:rPr lang="en-US" sz="1800" b="1" dirty="0">
+              <a:rPr lang="en-US" sz="2200" b="1" dirty="0">
                 <a:solidFill>
                   <a:srgbClr val="0F172A"/>
                 </a:solidFill>
@@ -2830,9 +2919,9 @@
                 <a:ea typeface="Inter" pitchFamily="34" charset="-122"/>
                 <a:cs typeface="Inter" pitchFamily="34" charset="-120"/>
               </a:rPr>
-              <a:t>Thesis &amp; publications</a:t>
-            </a:r>
-            <a:endParaRPr lang="en-US" sz="1800" dirty="0"/>
+              <a:t>Conversation features</a:t>
+            </a:r>
+            <a:endParaRPr lang="en-US" sz="2200" dirty="0"/>
           </a:p>
         </p:txBody>
       </p:sp>
@@ -2844,8 +2933,8 @@
         </p:nvSpPr>
         <p:spPr>
           <a:xfrm>
-            <a:off x="6629400" y="2377440"/>
-            <a:ext cx="4876495" cy="2651760"/>
+            <a:off x="6629400" y="2697480"/>
+            <a:ext cx="4876495" cy="2926080"/>
           </a:xfrm>
           <a:prstGeom prst="rect">
             <a:avLst/>
@@ -2859,13 +2948,13 @@
           <a:p>
             <a:pPr marL="342900" indent="-342900">
               <a:spcAft>
-                <a:spcPts val="400"/>
+                <a:spcPts val="600"/>
               </a:spcAft>
               <a:buSzPct val="100000"/>
               <a:buChar char="•"/>
             </a:pPr>
             <a:r>
-              <a:rPr lang="en-US" sz="1300" dirty="0">
+              <a:rPr lang="en-US" sz="1800" dirty="0">
                 <a:solidFill>
                   <a:srgbClr val="334155"/>
                 </a:solidFill>
@@ -2873,20 +2962,20 @@
                 <a:ea typeface="Inter" pitchFamily="34" charset="-122"/>
                 <a:cs typeface="Inter" pitchFamily="34" charset="-120"/>
               </a:rPr>
-              <a:t>Chapters (planned → drafting → in review → revising → done) and pubs (in prep → published).</a:t>
-            </a:r>
-            <a:endParaRPr lang="en-US" sz="1300" dirty="0"/>
+              <a:t>Reply to a message; quoted snippet in the bubble.</a:t>
+            </a:r>
+            <a:endParaRPr lang="en-US" sz="1800" dirty="0"/>
           </a:p>
           <a:p>
             <a:pPr marL="342900" indent="-342900">
               <a:spcAft>
-                <a:spcPts val="400"/>
+                <a:spcPts val="600"/>
               </a:spcAft>
               <a:buSzPct val="100000"/>
               <a:buChar char="•"/>
             </a:pPr>
             <a:r>
-              <a:rPr lang="en-US" sz="1300" dirty="0">
+              <a:rPr lang="en-US" sz="1800" dirty="0">
                 <a:solidFill>
                   <a:srgbClr val="334155"/>
                 </a:solidFill>
@@ -2894,20 +2983,20 @@
                 <a:ea typeface="Inter" pitchFamily="34" charset="-122"/>
                 <a:cs typeface="Inter" pitchFamily="34" charset="-120"/>
               </a:rPr>
-              <a:t>Drive picker per item.</a:t>
-            </a:r>
-            <a:endParaRPr lang="en-US" sz="1300" dirty="0"/>
+              <a:t>Drag-and-drop files; Ctrl/⌘+V paste images.</a:t>
+            </a:r>
+            <a:endParaRPr lang="en-US" sz="1800" dirty="0"/>
           </a:p>
           <a:p>
             <a:pPr marL="342900" indent="-342900">
               <a:spcAft>
-                <a:spcPts val="400"/>
+                <a:spcPts val="600"/>
               </a:spcAft>
               <a:buSzPct val="100000"/>
               <a:buChar char="•"/>
             </a:pPr>
             <a:r>
-              <a:rPr lang="en-US" sz="1300" dirty="0">
+              <a:rPr lang="en-US" sz="1800" dirty="0">
                 <a:solidFill>
                   <a:srgbClr val="334155"/>
                 </a:solidFill>
@@ -2915,9 +3004,30 @@
                 <a:ea typeface="Inter" pitchFamily="34" charset="-122"/>
                 <a:cs typeface="Inter" pitchFamily="34" charset="-120"/>
               </a:rPr>
-              <a:t>Feeds the Annual review export (print to PDF).</a:t>
-            </a:r>
-            <a:endParaRPr lang="en-US" sz="1300" dirty="0"/>
+              <a:t>Delivery ticks (sent/delivered/seen).</a:t>
+            </a:r>
+            <a:endParaRPr lang="en-US" sz="1800" dirty="0"/>
+          </a:p>
+          <a:p>
+            <a:pPr marL="342900" indent="-342900">
+              <a:spcAft>
+                <a:spcPts val="600"/>
+              </a:spcAft>
+              <a:buSzPct val="100000"/>
+              <a:buChar char="•"/>
+            </a:pPr>
+            <a:r>
+              <a:rPr lang="en-US" sz="1800" dirty="0">
+                <a:solidFill>
+                  <a:srgbClr val="334155"/>
+                </a:solidFill>
+                <a:latin typeface="Inter" pitchFamily="34" charset="0"/>
+                <a:ea typeface="Inter" pitchFamily="34" charset="-122"/>
+                <a:cs typeface="Inter" pitchFamily="34" charset="-120"/>
+              </a:rPr>
+              <a:t>Configure notification sound + volume (⋮ → Notification sound).</a:t>
+            </a:r>
+            <a:endParaRPr lang="en-US" sz="1800" dirty="0"/>
           </a:p>
         </p:txBody>
       </p:sp>
@@ -2969,7 +3079,7 @@
               <a:buNone/>
             </a:pPr>
             <a:r>
-              <a:rPr lang="en-US" sz="1100" dirty="0">
+              <a:rPr lang="en-US" sz="1300" dirty="0">
                 <a:solidFill>
                   <a:srgbClr val="64748B"/>
                 </a:solidFill>
@@ -2979,7 +3089,7 @@
               </a:rPr>
               <a:t>PhDapp · for supervisors</a:t>
             </a:r>
-            <a:endParaRPr lang="en-US" sz="1100" dirty="0"/>
+            <a:endParaRPr lang="en-US" sz="1300" dirty="0"/>
           </a:p>
         </p:txBody>
       </p:sp>
@@ -3008,7 +3118,7 @@
               <a:buNone/>
             </a:pPr>
             <a:r>
-              <a:rPr lang="en-US" sz="1100" dirty="0">
+              <a:rPr lang="en-US" sz="1300" dirty="0">
                 <a:solidFill>
                   <a:srgbClr val="64748B"/>
                 </a:solidFill>
@@ -3016,9 +3126,9 @@
                 <a:ea typeface="Inter" pitchFamily="34" charset="-122"/>
                 <a:cs typeface="Inter" pitchFamily="34" charset="-120"/>
               </a:rPr>
-              <a:t>10 / 16</a:t>
-            </a:r>
-            <a:endParaRPr lang="en-US" sz="1100" dirty="0"/>
+              <a:t>10 / 17</a:t>
+            </a:r>
+            <a:endParaRPr lang="en-US" sz="1300" dirty="0"/>
           </a:p>
         </p:txBody>
       </p:sp>
@@ -3071,7 +3181,7 @@
             </a:avLst>
           </a:prstGeom>
           <a:solidFill>
-            <a:srgbClr val="FF7A45"/>
+            <a:srgbClr val="6F4CFF"/>
           </a:solidFill>
           <a:ln/>
         </p:spPr>
@@ -3127,13 +3237,13 @@
             <a:r>
               <a:rPr lang="en-US" sz="1400" b="1" spc="400" kern="0" dirty="0">
                 <a:solidFill>
-                  <a:srgbClr val="FF7A45"/>
-                </a:solidFill>
-                <a:latin typeface="Inter" pitchFamily="34" charset="0"/>
-                <a:ea typeface="Inter" pitchFamily="34" charset="-122"/>
-                <a:cs typeface="Inter" pitchFamily="34" charset="-120"/>
-              </a:rPr>
-              <a:t>TASKS</a:t>
+                  <a:srgbClr val="6F4CFF"/>
+                </a:solidFill>
+                <a:latin typeface="Inter" pitchFamily="34" charset="0"/>
+                <a:ea typeface="Inter" pitchFamily="34" charset="-122"/>
+                <a:cs typeface="Inter" pitchFamily="34" charset="-120"/>
+              </a:rPr>
+              <a:t>READING</a:t>
             </a:r>
             <a:endParaRPr lang="en-US" sz="1400" dirty="0"/>
           </a:p>
@@ -3148,7 +3258,7 @@
         <p:spPr>
           <a:xfrm>
             <a:off x="1261872" y="749808"/>
-            <a:ext cx="10381183" cy="640080"/>
+            <a:ext cx="10381183" cy="713232"/>
           </a:xfrm>
           <a:prstGeom prst="rect">
             <a:avLst/>
@@ -3164,7 +3274,7 @@
               <a:buNone/>
             </a:pPr>
             <a:r>
-              <a:rPr lang="en-US" sz="3600" b="1" dirty="0">
+              <a:rPr lang="en-US" sz="4000" b="1" dirty="0">
                 <a:solidFill>
                   <a:srgbClr val="0F172A"/>
                 </a:solidFill>
@@ -3172,9 +3282,9 @@
                 <a:ea typeface="Inter" pitchFamily="34" charset="-122"/>
                 <a:cs typeface="Inter" pitchFamily="34" charset="-120"/>
               </a:rPr>
-              <a:t>Weekly check-ins &amp; wellbeing (private)</a:t>
-            </a:r>
-            <a:endParaRPr lang="en-US" sz="3600" dirty="0"/>
+              <a:t>Reading, thesis &amp; publications</a:t>
+            </a:r>
+            <a:endParaRPr lang="en-US" sz="4000" dirty="0"/>
           </a:p>
         </p:txBody>
       </p:sp>
@@ -3187,7 +3297,7 @@
         <p:spPr>
           <a:xfrm>
             <a:off x="548640" y="1828800"/>
-            <a:ext cx="5486400" cy="3291840"/>
+            <a:ext cx="5486400" cy="3931920"/>
           </a:xfrm>
           <a:prstGeom prst="rect">
             <a:avLst/>
@@ -3219,13 +3329,13 @@
         <p:spPr>
           <a:xfrm>
             <a:off x="548640" y="1828800"/>
-            <a:ext cx="73152" cy="3291840"/>
+            <a:ext cx="73152" cy="3931920"/>
           </a:xfrm>
           <a:prstGeom prst="rect">
             <a:avLst/>
           </a:prstGeom>
           <a:solidFill>
-            <a:srgbClr val="FF7A45"/>
+            <a:srgbClr val="6F4CFF"/>
           </a:solidFill>
           <a:ln/>
         </p:spPr>
@@ -3239,7 +3349,7 @@
         <p:spPr>
           <a:xfrm>
             <a:off x="749808" y="1993392"/>
-            <a:ext cx="5166360" cy="502920"/>
+            <a:ext cx="5166360" cy="594360"/>
           </a:xfrm>
           <a:prstGeom prst="rect">
             <a:avLst/>
@@ -3255,7 +3365,7 @@
               <a:buNone/>
             </a:pPr>
             <a:r>
-              <a:rPr lang="en-US" sz="1800" b="1" dirty="0">
+              <a:rPr lang="en-US" sz="2200" b="1" dirty="0">
                 <a:solidFill>
                   <a:srgbClr val="0F172A"/>
                 </a:solidFill>
@@ -3263,9 +3373,9 @@
                 <a:ea typeface="Inter" pitchFamily="34" charset="-122"/>
                 <a:cs typeface="Inter" pitchFamily="34" charset="-120"/>
               </a:rPr>
-              <a:t>Check-ins</a:t>
-            </a:r>
-            <a:endParaRPr lang="en-US" sz="1800" dirty="0"/>
+              <a:t>Reading approval flow</a:t>
+            </a:r>
+            <a:endParaRPr lang="en-US" sz="2200" dirty="0"/>
           </a:p>
         </p:txBody>
       </p:sp>
@@ -3277,8 +3387,8 @@
         </p:nvSpPr>
         <p:spPr>
           <a:xfrm>
-            <a:off x="777240" y="2377440"/>
-            <a:ext cx="5074920" cy="2651760"/>
+            <a:off x="777240" y="2697480"/>
+            <a:ext cx="5074920" cy="2926080"/>
           </a:xfrm>
           <a:prstGeom prst="rect">
             <a:avLst/>
@@ -3292,13 +3402,13 @@
           <a:p>
             <a:pPr marL="342900" indent="-342900">
               <a:spcAft>
-                <a:spcPts val="400"/>
+                <a:spcPts val="600"/>
               </a:spcAft>
               <a:buSzPct val="100000"/>
               <a:buChar char="•"/>
             </a:pPr>
             <a:r>
-              <a:rPr lang="en-US" sz="1300" dirty="0">
+              <a:rPr lang="en-US" sz="1800" dirty="0">
                 <a:solidFill>
                   <a:srgbClr val="334155"/>
                 </a:solidFill>
@@ -3306,20 +3416,20 @@
                 <a:ea typeface="Inter" pitchFamily="34" charset="-122"/>
                 <a:cs typeface="Inter" pitchFamily="34" charset="-120"/>
               </a:rPr>
-              <a:t>Per-week: did / blockers / next.</a:t>
-            </a:r>
-            <a:endParaRPr lang="en-US" sz="1300" dirty="0"/>
+              <a:t>Students propose papers with a ‘Why relevant?’ note.</a:t>
+            </a:r>
+            <a:endParaRPr lang="en-US" sz="1800" dirty="0"/>
           </a:p>
           <a:p>
             <a:pPr marL="342900" indent="-342900">
               <a:spcAft>
-                <a:spcPts val="400"/>
+                <a:spcPts val="600"/>
               </a:spcAft>
               <a:buSzPct val="100000"/>
               <a:buChar char="•"/>
             </a:pPr>
             <a:r>
-              <a:rPr lang="en-US" sz="1300" dirty="0">
+              <a:rPr lang="en-US" sz="1800" dirty="0">
                 <a:solidFill>
                   <a:srgbClr val="334155"/>
                 </a:solidFill>
@@ -3327,20 +3437,20 @@
                 <a:ea typeface="Inter" pitchFamily="34" charset="-122"/>
                 <a:cs typeface="Inter" pitchFamily="34" charset="-120"/>
               </a:rPr>
-              <a:t>All in one card on the student's profile, with history.</a:t>
-            </a:r>
-            <a:endParaRPr lang="en-US" sz="1300" dirty="0"/>
+              <a:t>You see them in the Pending Approval card.</a:t>
+            </a:r>
+            <a:endParaRPr lang="en-US" sz="1800" dirty="0"/>
           </a:p>
           <a:p>
             <a:pPr marL="342900" indent="-342900">
               <a:spcAft>
-                <a:spcPts val="400"/>
+                <a:spcPts val="600"/>
               </a:spcAft>
               <a:buSzPct val="100000"/>
               <a:buChar char="•"/>
             </a:pPr>
             <a:r>
-              <a:rPr lang="en-US" sz="1300" dirty="0">
+              <a:rPr lang="en-US" sz="1800" dirty="0">
                 <a:solidFill>
                   <a:srgbClr val="334155"/>
                 </a:solidFill>
@@ -3348,9 +3458,30 @@
                 <a:ea typeface="Inter" pitchFamily="34" charset="-122"/>
                 <a:cs typeface="Inter" pitchFamily="34" charset="-120"/>
               </a:rPr>
-              <a:t>A no-check-in week is highlighted so you don't miss it.</a:t>
-            </a:r>
-            <a:endParaRPr lang="en-US" sz="1300" dirty="0"/>
+              <a:t>Approve (with optional comment) or reject (with reason) — the student is notified.</a:t>
+            </a:r>
+            <a:endParaRPr lang="en-US" sz="1800" dirty="0"/>
+          </a:p>
+          <a:p>
+            <a:pPr marL="342900" indent="-342900">
+              <a:spcAft>
+                <a:spcPts val="600"/>
+              </a:spcAft>
+              <a:buSzPct val="100000"/>
+              <a:buChar char="•"/>
+            </a:pPr>
+            <a:r>
+              <a:rPr lang="en-US" sz="1800" dirty="0">
+                <a:solidFill>
+                  <a:srgbClr val="334155"/>
+                </a:solidFill>
+                <a:latin typeface="Inter" pitchFamily="34" charset="0"/>
+                <a:ea typeface="Inter" pitchFamily="34" charset="-122"/>
+                <a:cs typeface="Inter" pitchFamily="34" charset="-120"/>
+              </a:rPr>
+              <a:t>Approved items appear in the main queue with status tracking.</a:t>
+            </a:r>
+            <a:endParaRPr lang="en-US" sz="1800" dirty="0"/>
           </a:p>
         </p:txBody>
       </p:sp>
@@ -3363,7 +3494,7 @@
         <p:spPr>
           <a:xfrm>
             <a:off x="6400800" y="1828800"/>
-            <a:ext cx="5242255" cy="3291840"/>
+            <a:ext cx="5242255" cy="3931920"/>
           </a:xfrm>
           <a:prstGeom prst="rect">
             <a:avLst/>
@@ -3395,13 +3526,13 @@
         <p:spPr>
           <a:xfrm>
             <a:off x="6400800" y="1828800"/>
-            <a:ext cx="73152" cy="3291840"/>
+            <a:ext cx="73152" cy="3931920"/>
           </a:xfrm>
           <a:prstGeom prst="rect">
             <a:avLst/>
           </a:prstGeom>
           <a:solidFill>
-            <a:srgbClr val="FF3D8B"/>
+            <a:srgbClr val="6F4CFF"/>
           </a:solidFill>
           <a:ln/>
         </p:spPr>
@@ -3415,7 +3546,7 @@
         <p:spPr>
           <a:xfrm>
             <a:off x="6601968" y="1993392"/>
-            <a:ext cx="4922215" cy="502920"/>
+            <a:ext cx="4922215" cy="594360"/>
           </a:xfrm>
           <a:prstGeom prst="rect">
             <a:avLst/>
@@ -3431,7 +3562,7 @@
               <a:buNone/>
             </a:pPr>
             <a:r>
-              <a:rPr lang="en-US" sz="1800" b="1" dirty="0">
+              <a:rPr lang="en-US" sz="2200" b="1" dirty="0">
                 <a:solidFill>
                   <a:srgbClr val="0F172A"/>
                 </a:solidFill>
@@ -3439,9 +3570,9 @@
                 <a:ea typeface="Inter" pitchFamily="34" charset="-122"/>
                 <a:cs typeface="Inter" pitchFamily="34" charset="-120"/>
               </a:rPr>
-              <a:t>Wellbeing</a:t>
-            </a:r>
-            <a:endParaRPr lang="en-US" sz="1800" dirty="0"/>
+              <a:t>Thesis &amp; publications</a:t>
+            </a:r>
+            <a:endParaRPr lang="en-US" sz="2200" dirty="0"/>
           </a:p>
         </p:txBody>
       </p:sp>
@@ -3453,8 +3584,8 @@
         </p:nvSpPr>
         <p:spPr>
           <a:xfrm>
-            <a:off x="6629400" y="2377440"/>
-            <a:ext cx="4876495" cy="2651760"/>
+            <a:off x="6629400" y="2697480"/>
+            <a:ext cx="4876495" cy="2926080"/>
           </a:xfrm>
           <a:prstGeom prst="rect">
             <a:avLst/>
@@ -3468,13 +3599,13 @@
           <a:p>
             <a:pPr marL="342900" indent="-342900">
               <a:spcAft>
-                <a:spcPts val="400"/>
+                <a:spcPts val="600"/>
               </a:spcAft>
               <a:buSzPct val="100000"/>
               <a:buChar char="•"/>
             </a:pPr>
             <a:r>
-              <a:rPr lang="en-US" sz="1300" dirty="0">
+              <a:rPr lang="en-US" sz="1800" dirty="0">
                 <a:solidFill>
                   <a:srgbClr val="334155"/>
                 </a:solidFill>
@@ -3482,20 +3613,20 @@
                 <a:ea typeface="Inter" pitchFamily="34" charset="-122"/>
                 <a:cs typeface="Inter" pitchFamily="34" charset="-120"/>
               </a:rPr>
-              <a:t>1–5 score, optional, supervisor-private.</a:t>
-            </a:r>
-            <a:endParaRPr lang="en-US" sz="1300" dirty="0"/>
+              <a:t>Chapters (planned → drafting → in review → revising → done) and pubs (in prep → published).</a:t>
+            </a:r>
+            <a:endParaRPr lang="en-US" sz="1800" dirty="0"/>
           </a:p>
           <a:p>
             <a:pPr marL="342900" indent="-342900">
               <a:spcAft>
-                <a:spcPts val="400"/>
+                <a:spcPts val="600"/>
               </a:spcAft>
               <a:buSzPct val="100000"/>
               <a:buChar char="•"/>
             </a:pPr>
             <a:r>
-              <a:rPr lang="en-US" sz="1300" dirty="0">
+              <a:rPr lang="en-US" sz="1800" dirty="0">
                 <a:solidFill>
                   <a:srgbClr val="334155"/>
                 </a:solidFill>
@@ -3503,20 +3634,20 @@
                 <a:ea typeface="Inter" pitchFamily="34" charset="-122"/>
                 <a:cs typeface="Inter" pitchFamily="34" charset="-120"/>
               </a:rPr>
-              <a:t>Aggregated into the digest only for supervisors/admin/team advisors.</a:t>
-            </a:r>
-            <a:endParaRPr lang="en-US" sz="1300" dirty="0"/>
+              <a:t>Drive picker per item.</a:t>
+            </a:r>
+            <a:endParaRPr lang="en-US" sz="1800" dirty="0"/>
           </a:p>
           <a:p>
             <a:pPr marL="342900" indent="-342900">
               <a:spcAft>
-                <a:spcPts val="400"/>
+                <a:spcPts val="600"/>
               </a:spcAft>
               <a:buSzPct val="100000"/>
               <a:buChar char="•"/>
             </a:pPr>
             <a:r>
-              <a:rPr lang="en-US" sz="1300" dirty="0">
+              <a:rPr lang="en-US" sz="1800" dirty="0">
                 <a:solidFill>
                   <a:srgbClr val="334155"/>
                 </a:solidFill>
@@ -3524,9 +3655,9 @@
                 <a:ea typeface="Inter" pitchFamily="34" charset="-122"/>
                 <a:cs typeface="Inter" pitchFamily="34" charset="-120"/>
               </a:rPr>
-              <a:t>Never visible to other students, external advisors, or committee.</a:t>
-            </a:r>
-            <a:endParaRPr lang="en-US" sz="1300" dirty="0"/>
+              <a:t>Feeds the Annual review export (print to PDF).</a:t>
+            </a:r>
+            <a:endParaRPr lang="en-US" sz="1800" dirty="0"/>
           </a:p>
         </p:txBody>
       </p:sp>
@@ -3578,7 +3709,7 @@
               <a:buNone/>
             </a:pPr>
             <a:r>
-              <a:rPr lang="en-US" sz="1100" dirty="0">
+              <a:rPr lang="en-US" sz="1300" dirty="0">
                 <a:solidFill>
                   <a:srgbClr val="64748B"/>
                 </a:solidFill>
@@ -3588,7 +3719,7 @@
               </a:rPr>
               <a:t>PhDapp · for supervisors</a:t>
             </a:r>
-            <a:endParaRPr lang="en-US" sz="1100" dirty="0"/>
+            <a:endParaRPr lang="en-US" sz="1300" dirty="0"/>
           </a:p>
         </p:txBody>
       </p:sp>
@@ -3617,7 +3748,7 @@
               <a:buNone/>
             </a:pPr>
             <a:r>
-              <a:rPr lang="en-US" sz="1100" dirty="0">
+              <a:rPr lang="en-US" sz="1300" dirty="0">
                 <a:solidFill>
                   <a:srgbClr val="64748B"/>
                 </a:solidFill>
@@ -3625,9 +3756,9 @@
                 <a:ea typeface="Inter" pitchFamily="34" charset="-122"/>
                 <a:cs typeface="Inter" pitchFamily="34" charset="-120"/>
               </a:rPr>
-              <a:t>11 / 16</a:t>
-            </a:r>
-            <a:endParaRPr lang="en-US" sz="1100" dirty="0"/>
+              <a:t>11 / 17</a:t>
+            </a:r>
+            <a:endParaRPr lang="en-US" sz="1300" dirty="0"/>
           </a:p>
         </p:txBody>
       </p:sp>
@@ -3680,7 +3811,7 @@
             </a:avLst>
           </a:prstGeom>
           <a:solidFill>
-            <a:srgbClr val="E2445C"/>
+            <a:srgbClr val="FF7A45"/>
           </a:solidFill>
           <a:ln/>
         </p:spPr>
@@ -3736,13 +3867,13 @@
             <a:r>
               <a:rPr lang="en-US" sz="1400" b="1" spc="400" kern="0" dirty="0">
                 <a:solidFill>
-                  <a:srgbClr val="E2445C"/>
-                </a:solidFill>
-                <a:latin typeface="Inter" pitchFamily="34" charset="0"/>
-                <a:ea typeface="Inter" pitchFamily="34" charset="-122"/>
-                <a:cs typeface="Inter" pitchFamily="34" charset="-120"/>
-              </a:rPr>
-              <a:t>LOG</a:t>
+                  <a:srgbClr val="FF7A45"/>
+                </a:solidFill>
+                <a:latin typeface="Inter" pitchFamily="34" charset="0"/>
+                <a:ea typeface="Inter" pitchFamily="34" charset="-122"/>
+                <a:cs typeface="Inter" pitchFamily="34" charset="-120"/>
+              </a:rPr>
+              <a:t>TASKS</a:t>
             </a:r>
             <a:endParaRPr lang="en-US" sz="1400" dirty="0"/>
           </a:p>
@@ -3757,7 +3888,7 @@
         <p:spPr>
           <a:xfrm>
             <a:off x="1261872" y="749808"/>
-            <a:ext cx="10381183" cy="640080"/>
+            <a:ext cx="10381183" cy="713232"/>
           </a:xfrm>
           <a:prstGeom prst="rect">
             <a:avLst/>
@@ -3773,7 +3904,7 @@
               <a:buNone/>
             </a:pPr>
             <a:r>
-              <a:rPr lang="en-US" sz="3600" b="1" dirty="0">
+              <a:rPr lang="en-US" sz="4000" b="1" dirty="0">
                 <a:solidFill>
                   <a:srgbClr val="0F172A"/>
                 </a:solidFill>
@@ -3781,9 +3912,9 @@
                 <a:ea typeface="Inter" pitchFamily="34" charset="-122"/>
                 <a:cs typeface="Inter" pitchFamily="34" charset="-120"/>
               </a:rPr>
-              <a:t>Activity log &amp; history</a:t>
-            </a:r>
-            <a:endParaRPr lang="en-US" sz="3600" dirty="0"/>
+              <a:t>Weekly check-ins &amp; wellbeing (private)</a:t>
+            </a:r>
+            <a:endParaRPr lang="en-US" sz="4000" dirty="0"/>
           </a:p>
         </p:txBody>
       </p:sp>
@@ -3796,7 +3927,7 @@
         <p:spPr>
           <a:xfrm>
             <a:off x="548640" y="1828800"/>
-            <a:ext cx="5486400" cy="3291840"/>
+            <a:ext cx="5486400" cy="3931920"/>
           </a:xfrm>
           <a:prstGeom prst="rect">
             <a:avLst/>
@@ -3828,13 +3959,13 @@
         <p:spPr>
           <a:xfrm>
             <a:off x="548640" y="1828800"/>
-            <a:ext cx="73152" cy="3291840"/>
+            <a:ext cx="73152" cy="3931920"/>
           </a:xfrm>
           <a:prstGeom prst="rect">
             <a:avLst/>
           </a:prstGeom>
           <a:solidFill>
-            <a:srgbClr val="E2445C"/>
+            <a:srgbClr val="FF7A45"/>
           </a:solidFill>
           <a:ln/>
         </p:spPr>
@@ -3848,7 +3979,7 @@
         <p:spPr>
           <a:xfrm>
             <a:off x="749808" y="1993392"/>
-            <a:ext cx="5166360" cy="502920"/>
+            <a:ext cx="5166360" cy="594360"/>
           </a:xfrm>
           <a:prstGeom prst="rect">
             <a:avLst/>
@@ -3864,7 +3995,7 @@
               <a:buNone/>
             </a:pPr>
             <a:r>
-              <a:rPr lang="en-US" sz="1800" b="1" dirty="0">
+              <a:rPr lang="en-US" sz="2200" b="1" dirty="0">
                 <a:solidFill>
                   <a:srgbClr val="0F172A"/>
                 </a:solidFill>
@@ -3872,9 +4003,9 @@
                 <a:ea typeface="Inter" pitchFamily="34" charset="-122"/>
                 <a:cs typeface="Inter" pitchFamily="34" charset="-120"/>
               </a:rPr>
-              <a:t>What gets logged</a:t>
-            </a:r>
-            <a:endParaRPr lang="en-US" sz="1800" dirty="0"/>
+              <a:t>Check-ins</a:t>
+            </a:r>
+            <a:endParaRPr lang="en-US" sz="2200" dirty="0"/>
           </a:p>
         </p:txBody>
       </p:sp>
@@ -3886,8 +4017,8 @@
         </p:nvSpPr>
         <p:spPr>
           <a:xfrm>
-            <a:off x="777240" y="2377440"/>
-            <a:ext cx="5074920" cy="2651760"/>
+            <a:off x="777240" y="2697480"/>
+            <a:ext cx="5074920" cy="2926080"/>
           </a:xfrm>
           <a:prstGeom prst="rect">
             <a:avLst/>
@@ -3901,13 +4032,13 @@
           <a:p>
             <a:pPr marL="342900" indent="-342900">
               <a:spcAft>
-                <a:spcPts val="400"/>
+                <a:spcPts val="600"/>
               </a:spcAft>
               <a:buSzPct val="100000"/>
               <a:buChar char="•"/>
             </a:pPr>
             <a:r>
-              <a:rPr lang="en-US" sz="1300" dirty="0">
+              <a:rPr lang="en-US" sz="1800" dirty="0">
                 <a:solidFill>
                   <a:srgbClr val="334155"/>
                 </a:solidFill>
@@ -3915,20 +4046,20 @@
                 <a:ea typeface="Inter" pitchFamily="34" charset="-122"/>
                 <a:cs typeface="Inter" pitchFamily="34" charset="-120"/>
               </a:rPr>
-              <a:t>Task / event / reading / availability / student-profile changes.</a:t>
-            </a:r>
-            <a:endParaRPr lang="en-US" sz="1300" dirty="0"/>
+              <a:t>Per-week: did / blockers / next.</a:t>
+            </a:r>
+            <a:endParaRPr lang="en-US" sz="1800" dirty="0"/>
           </a:p>
           <a:p>
             <a:pPr marL="342900" indent="-342900">
               <a:spcAft>
-                <a:spcPts val="400"/>
+                <a:spcPts val="600"/>
               </a:spcAft>
               <a:buSzPct val="100000"/>
               <a:buChar char="•"/>
             </a:pPr>
             <a:r>
-              <a:rPr lang="en-US" sz="1300" dirty="0">
+              <a:rPr lang="en-US" sz="1800" dirty="0">
                 <a:solidFill>
                   <a:srgbClr val="334155"/>
                 </a:solidFill>
@@ -3936,20 +4067,20 @@
                 <a:ea typeface="Inter" pitchFamily="34" charset="-122"/>
                 <a:cs typeface="Inter" pitchFamily="34" charset="-120"/>
               </a:rPr>
-              <a:t>Only meaningful changes — auto-save bursts coalesce into one entry.</a:t>
-            </a:r>
-            <a:endParaRPr lang="en-US" sz="1300" dirty="0"/>
+              <a:t>All in one card on the student's profile, with history.</a:t>
+            </a:r>
+            <a:endParaRPr lang="en-US" sz="1800" dirty="0"/>
           </a:p>
           <a:p>
             <a:pPr marL="342900" indent="-342900">
               <a:spcAft>
-                <a:spcPts val="400"/>
+                <a:spcPts val="600"/>
               </a:spcAft>
               <a:buSzPct val="100000"/>
               <a:buChar char="•"/>
             </a:pPr>
             <a:r>
-              <a:rPr lang="en-US" sz="1300" dirty="0">
+              <a:rPr lang="en-US" sz="1800" dirty="0">
                 <a:solidFill>
                   <a:srgbClr val="334155"/>
                 </a:solidFill>
@@ -3957,30 +4088,9 @@
                 <a:ea typeface="Inter" pitchFamily="34" charset="-122"/>
                 <a:cs typeface="Inter" pitchFamily="34" charset="-120"/>
               </a:rPr>
-              <a:t>Summaries are human-readable: ‘Title — moved to In progress, due May 20’.</a:t>
-            </a:r>
-            <a:endParaRPr lang="en-US" sz="1300" dirty="0"/>
-          </a:p>
-          <a:p>
-            <a:pPr marL="342900" indent="-342900">
-              <a:spcAft>
-                <a:spcPts val="400"/>
-              </a:spcAft>
-              <a:buSzPct val="100000"/>
-              <a:buChar char="•"/>
-            </a:pPr>
-            <a:r>
-              <a:rPr lang="en-US" sz="1300" dirty="0">
-                <a:solidFill>
-                  <a:srgbClr val="334155"/>
-                </a:solidFill>
-                <a:latin typeface="Inter" pitchFamily="34" charset="0"/>
-                <a:ea typeface="Inter" pitchFamily="34" charset="-122"/>
-                <a:cs typeface="Inter" pitchFamily="34" charset="-120"/>
-              </a:rPr>
-              <a:t>Each task has its own History panel from the detail dialog.</a:t>
-            </a:r>
-            <a:endParaRPr lang="en-US" sz="1300" dirty="0"/>
+              <a:t>A no-check-in week is highlighted so you don't miss it.</a:t>
+            </a:r>
+            <a:endParaRPr lang="en-US" sz="1800" dirty="0"/>
           </a:p>
         </p:txBody>
       </p:sp>
@@ -3993,7 +4103,7 @@
         <p:spPr>
           <a:xfrm>
             <a:off x="6400800" y="1828800"/>
-            <a:ext cx="5242255" cy="3291840"/>
+            <a:ext cx="5242255" cy="3931920"/>
           </a:xfrm>
           <a:prstGeom prst="rect">
             <a:avLst/>
@@ -4025,13 +4135,13 @@
         <p:spPr>
           <a:xfrm>
             <a:off x="6400800" y="1828800"/>
-            <a:ext cx="73152" cy="3291840"/>
+            <a:ext cx="73152" cy="3931920"/>
           </a:xfrm>
           <a:prstGeom prst="rect">
             <a:avLst/>
           </a:prstGeom>
           <a:solidFill>
-            <a:srgbClr val="E2445C"/>
+            <a:srgbClr val="FF3D8B"/>
           </a:solidFill>
           <a:ln/>
         </p:spPr>
@@ -4045,7 +4155,7 @@
         <p:spPr>
           <a:xfrm>
             <a:off x="6601968" y="1993392"/>
-            <a:ext cx="4922215" cy="502920"/>
+            <a:ext cx="4922215" cy="594360"/>
           </a:xfrm>
           <a:prstGeom prst="rect">
             <a:avLst/>
@@ -4061,7 +4171,7 @@
               <a:buNone/>
             </a:pPr>
             <a:r>
-              <a:rPr lang="en-US" sz="1800" b="1" dirty="0">
+              <a:rPr lang="en-US" sz="2200" b="1" dirty="0">
                 <a:solidFill>
                   <a:srgbClr val="0F172A"/>
                 </a:solidFill>
@@ -4069,9 +4179,9 @@
                 <a:ea typeface="Inter" pitchFamily="34" charset="-122"/>
                 <a:cs typeface="Inter" pitchFamily="34" charset="-120"/>
               </a:rPr>
-              <a:t>Visibility</a:t>
-            </a:r>
-            <a:endParaRPr lang="en-US" sz="1800" dirty="0"/>
+              <a:t>Wellbeing</a:t>
+            </a:r>
+            <a:endParaRPr lang="en-US" sz="2200" dirty="0"/>
           </a:p>
         </p:txBody>
       </p:sp>
@@ -4083,8 +4193,8 @@
         </p:nvSpPr>
         <p:spPr>
           <a:xfrm>
-            <a:off x="6629400" y="2377440"/>
-            <a:ext cx="4876495" cy="2651760"/>
+            <a:off x="6629400" y="2697480"/>
+            <a:ext cx="4876495" cy="2926080"/>
           </a:xfrm>
           <a:prstGeom prst="rect">
             <a:avLst/>
@@ -4098,13 +4208,13 @@
           <a:p>
             <a:pPr marL="342900" indent="-342900">
               <a:spcAft>
-                <a:spcPts val="400"/>
+                <a:spcPts val="600"/>
               </a:spcAft>
               <a:buSzPct val="100000"/>
               <a:buChar char="•"/>
             </a:pPr>
             <a:r>
-              <a:rPr lang="en-US" sz="1300" dirty="0">
+              <a:rPr lang="en-US" sz="1800" dirty="0">
                 <a:solidFill>
                   <a:srgbClr val="334155"/>
                 </a:solidFill>
@@ -4112,20 +4222,20 @@
                 <a:ea typeface="Inter" pitchFamily="34" charset="-122"/>
                 <a:cs typeface="Inter" pitchFamily="34" charset="-120"/>
               </a:rPr>
-              <a:t>Students see only their own actions.</a:t>
-            </a:r>
-            <a:endParaRPr lang="en-US" sz="1300" dirty="0"/>
+              <a:t>1–5 score, optional, supervisor-private.</a:t>
+            </a:r>
+            <a:endParaRPr lang="en-US" sz="1800" dirty="0"/>
           </a:p>
           <a:p>
             <a:pPr marL="342900" indent="-342900">
               <a:spcAft>
-                <a:spcPts val="400"/>
+                <a:spcPts val="600"/>
               </a:spcAft>
               <a:buSzPct val="100000"/>
               <a:buChar char="•"/>
             </a:pPr>
             <a:r>
-              <a:rPr lang="en-US" sz="1300" dirty="0">
+              <a:rPr lang="en-US" sz="1800" dirty="0">
                 <a:solidFill>
                   <a:srgbClr val="334155"/>
                 </a:solidFill>
@@ -4133,20 +4243,20 @@
                 <a:ea typeface="Inter" pitchFamily="34" charset="-122"/>
                 <a:cs typeface="Inter" pitchFamily="34" charset="-120"/>
               </a:rPr>
-              <a:t>Supervisors see everything for their students + co-supervisors' actions.</a:t>
-            </a:r>
-            <a:endParaRPr lang="en-US" sz="1300" dirty="0"/>
+              <a:t>Aggregated into the digest only for supervisors/admin/team advisors.</a:t>
+            </a:r>
+            <a:endParaRPr lang="en-US" sz="1800" dirty="0"/>
           </a:p>
           <a:p>
             <a:pPr marL="342900" indent="-342900">
               <a:spcAft>
-                <a:spcPts val="400"/>
+                <a:spcPts val="600"/>
               </a:spcAft>
               <a:buSzPct val="100000"/>
               <a:buChar char="•"/>
             </a:pPr>
             <a:r>
-              <a:rPr lang="en-US" sz="1300" dirty="0">
+              <a:rPr lang="en-US" sz="1800" dirty="0">
                 <a:solidFill>
                   <a:srgbClr val="334155"/>
                 </a:solidFill>
@@ -4154,9 +4264,9 @@
                 <a:ea typeface="Inter" pitchFamily="34" charset="-122"/>
                 <a:cs typeface="Inter" pitchFamily="34" charset="-120"/>
               </a:rPr>
-              <a:t>Admins see everything; can export or purge the log.</a:t>
-            </a:r>
-            <a:endParaRPr lang="en-US" sz="1300" dirty="0"/>
+              <a:t>Never visible to other students, external advisors, or committee.</a:t>
+            </a:r>
+            <a:endParaRPr lang="en-US" sz="1800" dirty="0"/>
           </a:p>
         </p:txBody>
       </p:sp>
@@ -4208,7 +4318,7 @@
               <a:buNone/>
             </a:pPr>
             <a:r>
-              <a:rPr lang="en-US" sz="1100" dirty="0">
+              <a:rPr lang="en-US" sz="1300" dirty="0">
                 <a:solidFill>
                   <a:srgbClr val="64748B"/>
                 </a:solidFill>
@@ -4218,7 +4328,7 @@
               </a:rPr>
               <a:t>PhDapp · for supervisors</a:t>
             </a:r>
-            <a:endParaRPr lang="en-US" sz="1100" dirty="0"/>
+            <a:endParaRPr lang="en-US" sz="1300" dirty="0"/>
           </a:p>
         </p:txBody>
       </p:sp>
@@ -4247,7 +4357,7 @@
               <a:buNone/>
             </a:pPr>
             <a:r>
-              <a:rPr lang="en-US" sz="1100" dirty="0">
+              <a:rPr lang="en-US" sz="1300" dirty="0">
                 <a:solidFill>
                   <a:srgbClr val="64748B"/>
                 </a:solidFill>
@@ -4255,9 +4365,9 @@
                 <a:ea typeface="Inter" pitchFamily="34" charset="-122"/>
                 <a:cs typeface="Inter" pitchFamily="34" charset="-120"/>
               </a:rPr>
-              <a:t>12 / 16</a:t>
-            </a:r>
-            <a:endParaRPr lang="en-US" sz="1100" dirty="0"/>
+              <a:t>12 / 17</a:t>
+            </a:r>
+            <a:endParaRPr lang="en-US" sz="1300" dirty="0"/>
           </a:p>
         </p:txBody>
       </p:sp>
@@ -4310,7 +4420,7 @@
             </a:avLst>
           </a:prstGeom>
           <a:solidFill>
-            <a:srgbClr val="F59E0B"/>
+            <a:srgbClr val="E2445C"/>
           </a:solidFill>
           <a:ln/>
         </p:spPr>
@@ -4366,13 +4476,13 @@
             <a:r>
               <a:rPr lang="en-US" sz="1400" b="1" spc="400" kern="0" dirty="0">
                 <a:solidFill>
-                  <a:srgbClr val="F59E0B"/>
-                </a:solidFill>
-                <a:latin typeface="Inter" pitchFamily="34" charset="0"/>
-                <a:ea typeface="Inter" pitchFamily="34" charset="-122"/>
-                <a:cs typeface="Inter" pitchFamily="34" charset="-120"/>
-              </a:rPr>
-              <a:t>TEAM</a:t>
+                  <a:srgbClr val="E2445C"/>
+                </a:solidFill>
+                <a:latin typeface="Inter" pitchFamily="34" charset="0"/>
+                <a:ea typeface="Inter" pitchFamily="34" charset="-122"/>
+                <a:cs typeface="Inter" pitchFamily="34" charset="-120"/>
+              </a:rPr>
+              <a:t>LOG</a:t>
             </a:r>
             <a:endParaRPr lang="en-US" sz="1400" dirty="0"/>
           </a:p>
@@ -4387,7 +4497,7 @@
         <p:spPr>
           <a:xfrm>
             <a:off x="1261872" y="749808"/>
-            <a:ext cx="10381183" cy="640080"/>
+            <a:ext cx="10381183" cy="713232"/>
           </a:xfrm>
           <a:prstGeom prst="rect">
             <a:avLst/>
@@ -4403,7 +4513,7 @@
               <a:buNone/>
             </a:pPr>
             <a:r>
-              <a:rPr lang="en-US" sz="3600" b="1" dirty="0">
+              <a:rPr lang="en-US" sz="4000" b="1" dirty="0">
                 <a:solidFill>
                   <a:srgbClr val="0F172A"/>
                 </a:solidFill>
@@ -4411,9 +4521,9 @@
                 <a:ea typeface="Inter" pitchFamily="34" charset="-122"/>
                 <a:cs typeface="Inter" pitchFamily="34" charset="-120"/>
               </a:rPr>
-              <a:t>Team workspace, advisors &amp; workload</a:t>
-            </a:r>
-            <a:endParaRPr lang="en-US" sz="3600" dirty="0"/>
+              <a:t>Activity log &amp; history</a:t>
+            </a:r>
+            <a:endParaRPr lang="en-US" sz="4000" dirty="0"/>
           </a:p>
         </p:txBody>
       </p:sp>
@@ -4426,7 +4536,7 @@
         <p:spPr>
           <a:xfrm>
             <a:off x="548640" y="1828800"/>
-            <a:ext cx="3703320" cy="3291840"/>
+            <a:ext cx="5486400" cy="3931920"/>
           </a:xfrm>
           <a:prstGeom prst="rect">
             <a:avLst/>
@@ -4458,13 +4568,13 @@
         <p:spPr>
           <a:xfrm>
             <a:off x="548640" y="1828800"/>
-            <a:ext cx="73152" cy="3291840"/>
+            <a:ext cx="73152" cy="3931920"/>
           </a:xfrm>
           <a:prstGeom prst="rect">
             <a:avLst/>
           </a:prstGeom>
           <a:solidFill>
-            <a:srgbClr val="F59E0B"/>
+            <a:srgbClr val="E2445C"/>
           </a:solidFill>
           <a:ln/>
         </p:spPr>
@@ -4478,7 +4588,7 @@
         <p:spPr>
           <a:xfrm>
             <a:off x="749808" y="1993392"/>
-            <a:ext cx="3383280" cy="502920"/>
+            <a:ext cx="5166360" cy="594360"/>
           </a:xfrm>
           <a:prstGeom prst="rect">
             <a:avLst/>
@@ -4494,7 +4604,7 @@
               <a:buNone/>
             </a:pPr>
             <a:r>
-              <a:rPr lang="en-US" sz="1800" b="1" dirty="0">
+              <a:rPr lang="en-US" sz="2200" b="1" dirty="0">
                 <a:solidFill>
                   <a:srgbClr val="0F172A"/>
                 </a:solidFill>
@@ -4502,9 +4612,9 @@
                 <a:ea typeface="Inter" pitchFamily="34" charset="-122"/>
                 <a:cs typeface="Inter" pitchFamily="34" charset="-120"/>
               </a:rPr>
-              <a:t>Workspace</a:t>
-            </a:r>
-            <a:endParaRPr lang="en-US" sz="1800" dirty="0"/>
+              <a:t>What gets logged</a:t>
+            </a:r>
+            <a:endParaRPr lang="en-US" sz="2200" dirty="0"/>
           </a:p>
         </p:txBody>
       </p:sp>
@@ -4516,8 +4626,8 @@
         </p:nvSpPr>
         <p:spPr>
           <a:xfrm>
-            <a:off x="777240" y="2377440"/>
-            <a:ext cx="3291840" cy="2011680"/>
+            <a:off x="777240" y="2697480"/>
+            <a:ext cx="5074920" cy="2926080"/>
           </a:xfrm>
           <a:prstGeom prst="rect">
             <a:avLst/>
@@ -4531,13 +4641,13 @@
           <a:p>
             <a:pPr marL="342900" indent="-342900">
               <a:spcAft>
-                <a:spcPts val="400"/>
+                <a:spcPts val="600"/>
               </a:spcAft>
               <a:buSzPct val="100000"/>
               <a:buChar char="•"/>
             </a:pPr>
             <a:r>
-              <a:rPr lang="en-US" sz="1200" dirty="0">
+              <a:rPr lang="en-US" sz="1800" dirty="0">
                 <a:solidFill>
                   <a:srgbClr val="334155"/>
                 </a:solidFill>
@@ -4545,20 +4655,20 @@
                 <a:ea typeface="Inter" pitchFamily="34" charset="-122"/>
                 <a:cs typeface="Inter" pitchFamily="34" charset="-120"/>
               </a:rPr>
-              <a:t>Group notes shared by supervisors+admin only.</a:t>
-            </a:r>
-            <a:endParaRPr lang="en-US" sz="1200" dirty="0"/>
+              <a:t>Task / event / reading / availability / student-profile changes.</a:t>
+            </a:r>
+            <a:endParaRPr lang="en-US" sz="1800" dirty="0"/>
           </a:p>
           <a:p>
             <a:pPr marL="342900" indent="-342900">
               <a:spcAft>
-                <a:spcPts val="400"/>
+                <a:spcPts val="600"/>
               </a:spcAft>
               <a:buSzPct val="100000"/>
               <a:buChar char="•"/>
             </a:pPr>
             <a:r>
-              <a:rPr lang="en-US" sz="1200" dirty="0">
+              <a:rPr lang="en-US" sz="1800" dirty="0">
                 <a:solidFill>
                   <a:srgbClr val="334155"/>
                 </a:solidFill>
@@ -4566,20 +4676,20 @@
                 <a:ea typeface="Inter" pitchFamily="34" charset="-122"/>
                 <a:cs typeface="Inter" pitchFamily="34" charset="-120"/>
               </a:rPr>
-              <a:t>A single shared Drive folder (admin-set).</a:t>
-            </a:r>
-            <a:endParaRPr lang="en-US" sz="1200" dirty="0"/>
+              <a:t>Only meaningful changes — auto-save bursts coalesce into one entry.</a:t>
+            </a:r>
+            <a:endParaRPr lang="en-US" sz="1800" dirty="0"/>
           </a:p>
           <a:p>
             <a:pPr marL="342900" indent="-342900">
               <a:spcAft>
-                <a:spcPts val="400"/>
+                <a:spcPts val="600"/>
               </a:spcAft>
               <a:buSzPct val="100000"/>
               <a:buChar char="•"/>
             </a:pPr>
             <a:r>
-              <a:rPr lang="en-US" sz="1200" dirty="0">
+              <a:rPr lang="en-US" sz="1800" dirty="0">
                 <a:solidFill>
                   <a:srgbClr val="334155"/>
                 </a:solidFill>
@@ -4587,9 +4697,30 @@
                 <a:ea typeface="Inter" pitchFamily="34" charset="-122"/>
                 <a:cs typeface="Inter" pitchFamily="34" charset="-120"/>
               </a:rPr>
-              <a:t>Hidden from students/advisors/committee.</a:t>
-            </a:r>
-            <a:endParaRPr lang="en-US" sz="1200" dirty="0"/>
+              <a:t>Summaries are human-readable: ‘Title — moved to In progress, due May 20’.</a:t>
+            </a:r>
+            <a:endParaRPr lang="en-US" sz="1800" dirty="0"/>
+          </a:p>
+          <a:p>
+            <a:pPr marL="342900" indent="-342900">
+              <a:spcAft>
+                <a:spcPts val="600"/>
+              </a:spcAft>
+              <a:buSzPct val="100000"/>
+              <a:buChar char="•"/>
+            </a:pPr>
+            <a:r>
+              <a:rPr lang="en-US" sz="1800" dirty="0">
+                <a:solidFill>
+                  <a:srgbClr val="334155"/>
+                </a:solidFill>
+                <a:latin typeface="Inter" pitchFamily="34" charset="0"/>
+                <a:ea typeface="Inter" pitchFamily="34" charset="-122"/>
+                <a:cs typeface="Inter" pitchFamily="34" charset="-120"/>
+              </a:rPr>
+              <a:t>Each task has its own History panel from the detail dialog.</a:t>
+            </a:r>
+            <a:endParaRPr lang="en-US" sz="1800" dirty="0"/>
           </a:p>
         </p:txBody>
       </p:sp>
@@ -4601,8 +4732,8 @@
         </p:nvSpPr>
         <p:spPr>
           <a:xfrm>
-            <a:off x="4389120" y="1828800"/>
-            <a:ext cx="3703320" cy="3291840"/>
+            <a:off x="6400800" y="1828800"/>
+            <a:ext cx="5242255" cy="3931920"/>
           </a:xfrm>
           <a:prstGeom prst="rect">
             <a:avLst/>
@@ -4633,14 +4764,14 @@
         </p:nvSpPr>
         <p:spPr>
           <a:xfrm>
-            <a:off x="4389120" y="1828800"/>
-            <a:ext cx="73152" cy="3291840"/>
+            <a:off x="6400800" y="1828800"/>
+            <a:ext cx="73152" cy="3931920"/>
           </a:xfrm>
           <a:prstGeom prst="rect">
             <a:avLst/>
           </a:prstGeom>
           <a:solidFill>
-            <a:srgbClr val="6F4CFF"/>
+            <a:srgbClr val="E2445C"/>
           </a:solidFill>
           <a:ln/>
         </p:spPr>
@@ -4653,8 +4784,8 @@
         </p:nvSpPr>
         <p:spPr>
           <a:xfrm>
-            <a:off x="4590288" y="1993392"/>
-            <a:ext cx="3383280" cy="502920"/>
+            <a:off x="6601968" y="1993392"/>
+            <a:ext cx="4922215" cy="594360"/>
           </a:xfrm>
           <a:prstGeom prst="rect">
             <a:avLst/>
@@ -4670,7 +4801,7 @@
               <a:buNone/>
             </a:pPr>
             <a:r>
-              <a:rPr lang="en-US" sz="1800" b="1" dirty="0">
+              <a:rPr lang="en-US" sz="2200" b="1" dirty="0">
                 <a:solidFill>
                   <a:srgbClr val="0F172A"/>
                 </a:solidFill>
@@ -4678,9 +4809,9 @@
                 <a:ea typeface="Inter" pitchFamily="34" charset="-122"/>
                 <a:cs typeface="Inter" pitchFamily="34" charset="-120"/>
               </a:rPr>
-              <a:t>Advisor suggestions</a:t>
-            </a:r>
-            <a:endParaRPr lang="en-US" sz="1800" dirty="0"/>
+              <a:t>Visibility</a:t>
+            </a:r>
+            <a:endParaRPr lang="en-US" sz="2200" dirty="0"/>
           </a:p>
         </p:txBody>
       </p:sp>
@@ -4692,8 +4823,8 @@
         </p:nvSpPr>
         <p:spPr>
           <a:xfrm>
-            <a:off x="4617720" y="2377440"/>
-            <a:ext cx="3291840" cy="2011680"/>
+            <a:off x="6629400" y="2697480"/>
+            <a:ext cx="4876495" cy="2926080"/>
           </a:xfrm>
           <a:prstGeom prst="rect">
             <a:avLst/>
@@ -4707,13 +4838,13 @@
           <a:p>
             <a:pPr marL="342900" indent="-342900">
               <a:spcAft>
-                <a:spcPts val="400"/>
+                <a:spcPts val="600"/>
               </a:spcAft>
               <a:buSzPct val="100000"/>
               <a:buChar char="•"/>
             </a:pPr>
             <a:r>
-              <a:rPr lang="en-US" sz="1200" dirty="0">
+              <a:rPr lang="en-US" sz="1800" dirty="0">
                 <a:solidFill>
                   <a:srgbClr val="334155"/>
                 </a:solidFill>
@@ -4721,20 +4852,20 @@
                 <a:ea typeface="Inter" pitchFamily="34" charset="-122"/>
                 <a:cs typeface="Inter" pitchFamily="34" charset="-120"/>
               </a:rPr>
-              <a:t>Read-only Team Advisors post suggestions tagged with students.</a:t>
-            </a:r>
-            <a:endParaRPr lang="en-US" sz="1200" dirty="0"/>
+              <a:t>Students see only their own actions.</a:t>
+            </a:r>
+            <a:endParaRPr lang="en-US" sz="1800" dirty="0"/>
           </a:p>
           <a:p>
             <a:pPr marL="342900" indent="-342900">
               <a:spcAft>
-                <a:spcPts val="400"/>
+                <a:spcPts val="600"/>
               </a:spcAft>
               <a:buSzPct val="100000"/>
               <a:buChar char="•"/>
             </a:pPr>
             <a:r>
-              <a:rPr lang="en-US" sz="1200" dirty="0">
+              <a:rPr lang="en-US" sz="1800" dirty="0">
                 <a:solidFill>
                   <a:srgbClr val="334155"/>
                 </a:solidFill>
@@ -4742,20 +4873,20 @@
                 <a:ea typeface="Inter" pitchFamily="34" charset="-122"/>
                 <a:cs typeface="Inter" pitchFamily="34" charset="-120"/>
               </a:rPr>
-              <a:t>Violet bubble on the Team sidebar when new ones arrive.</a:t>
-            </a:r>
-            <a:endParaRPr lang="en-US" sz="1200" dirty="0"/>
+              <a:t>Supervisors see everything for their students + co-supervisors' actions.</a:t>
+            </a:r>
+            <a:endParaRPr lang="en-US" sz="1800" dirty="0"/>
           </a:p>
           <a:p>
             <a:pPr marL="342900" indent="-342900">
               <a:spcAft>
-                <a:spcPts val="400"/>
+                <a:spcPts val="600"/>
               </a:spcAft>
               <a:buSzPct val="100000"/>
               <a:buChar char="•"/>
             </a:pPr>
             <a:r>
-              <a:rPr lang="en-US" sz="1200" dirty="0">
+              <a:rPr lang="en-US" sz="1800" dirty="0">
                 <a:solidFill>
                   <a:srgbClr val="334155"/>
                 </a:solidFill>
@@ -4763,9 +4894,9 @@
                 <a:ea typeface="Inter" pitchFamily="34" charset="-122"/>
                 <a:cs typeface="Inter" pitchFamily="34" charset="-120"/>
               </a:rPr>
-              <a:t>Supervisors read; advisors author.</a:t>
-            </a:r>
-            <a:endParaRPr lang="en-US" sz="1200" dirty="0"/>
+              <a:t>Admins see everything; can export or purge the log.</a:t>
+            </a:r>
+            <a:endParaRPr lang="en-US" sz="1800" dirty="0"/>
           </a:p>
         </p:txBody>
       </p:sp>
@@ -4777,60 +4908,31 @@
         </p:nvSpPr>
         <p:spPr>
           <a:xfrm>
-            <a:off x="8229600" y="1828800"/>
-            <a:ext cx="3413455" cy="3291840"/>
-          </a:xfrm>
-          <a:prstGeom prst="rect">
-            <a:avLst/>
-          </a:prstGeom>
-          <a:solidFill>
-            <a:srgbClr val="FFFFFF"/>
-          </a:solidFill>
+            <a:off x="548640" y="6355080"/>
+            <a:ext cx="11094415" cy="0"/>
+          </a:xfrm>
+          <a:prstGeom prst="line">
+            <a:avLst/>
+          </a:prstGeom>
+          <a:noFill/>
           <a:ln w="9525">
             <a:solidFill>
               <a:srgbClr val="E2E8F0"/>
             </a:solidFill>
             <a:prstDash val="solid"/>
           </a:ln>
-          <a:effectLst>
-            <a:outerShdw sx="100000" sy="100000" kx="0" ky="0" algn="bl" rotWithShape="0" blurRad="76200" dist="12700" dir="5400000">
-              <a:srgbClr val="94A3B8">
-                <a:alpha val="12000"/>
-              </a:srgbClr>
-            </a:outerShdw>
-          </a:effectLst>
-        </p:spPr>
-      </p:sp>
-      <p:sp>
-        <p:nvSpPr>
-          <p:cNvPr id="15" name="Shape 12"/>
-          <p:cNvSpPr/>
-          <p:nvPr/>
-        </p:nvSpPr>
-        <p:spPr>
-          <a:xfrm>
-            <a:off x="8229600" y="1828800"/>
-            <a:ext cx="73152" cy="3291840"/>
-          </a:xfrm>
-          <a:prstGeom prst="rect">
-            <a:avLst/>
-          </a:prstGeom>
-          <a:solidFill>
-            <a:srgbClr val="F59E0B"/>
-          </a:solidFill>
-          <a:ln/>
-        </p:spPr>
-      </p:sp>
-      <p:sp>
-        <p:nvSpPr>
-          <p:cNvPr id="16" name="Text 13"/>
-          <p:cNvSpPr/>
-          <p:nvPr/>
-        </p:nvSpPr>
-        <p:spPr>
-          <a:xfrm>
-            <a:off x="8430768" y="1993392"/>
-            <a:ext cx="3093415" cy="502920"/>
+        </p:spPr>
+      </p:sp>
+      <p:sp>
+        <p:nvSpPr>
+          <p:cNvPr id="15" name="Text 12"/>
+          <p:cNvSpPr/>
+          <p:nvPr/>
+        </p:nvSpPr>
+        <p:spPr>
+          <a:xfrm>
+            <a:off x="548640" y="6446520"/>
+            <a:ext cx="5486400" cy="274320"/>
           </a:xfrm>
           <a:prstGeom prst="rect">
             <a:avLst/>
@@ -4846,154 +4948,7 @@
               <a:buNone/>
             </a:pPr>
             <a:r>
-              <a:rPr lang="en-US" sz="1800" b="1" dirty="0">
-                <a:solidFill>
-                  <a:srgbClr val="0F172A"/>
-                </a:solidFill>
-                <a:latin typeface="Inter" pitchFamily="34" charset="0"/>
-                <a:ea typeface="Inter" pitchFamily="34" charset="-122"/>
-                <a:cs typeface="Inter" pitchFamily="34" charset="-120"/>
-              </a:rPr>
-              <a:t>Workload</a:t>
-            </a:r>
-            <a:endParaRPr lang="en-US" sz="1800" dirty="0"/>
-          </a:p>
-        </p:txBody>
-      </p:sp>
-      <p:sp>
-        <p:nvSpPr>
-          <p:cNvPr id="17" name="Text 14"/>
-          <p:cNvSpPr/>
-          <p:nvPr/>
-        </p:nvSpPr>
-        <p:spPr>
-          <a:xfrm>
-            <a:off x="8458200" y="2377440"/>
-            <a:ext cx="3047695" cy="2011680"/>
-          </a:xfrm>
-          <a:prstGeom prst="rect">
-            <a:avLst/>
-          </a:prstGeom>
-          <a:noFill/>
-          <a:ln/>
-        </p:spPr>
-        <p:txBody>
-          <a:bodyPr wrap="square" lIns="0" tIns="0" rIns="0" bIns="0" rtlCol="0" anchor="t"/>
-          <a:lstStyle/>
-          <a:p>
-            <a:pPr marL="342900" indent="-342900">
-              <a:spcAft>
-                <a:spcPts val="400"/>
-              </a:spcAft>
-              <a:buSzPct val="100000"/>
-              <a:buChar char="•"/>
-            </a:pPr>
-            <a:r>
-              <a:rPr lang="en-US" sz="1200" dirty="0">
-                <a:solidFill>
-                  <a:srgbClr val="334155"/>
-                </a:solidFill>
-                <a:latin typeface="Inter" pitchFamily="34" charset="0"/>
-                <a:ea typeface="Inter" pitchFamily="34" charset="-122"/>
-                <a:cs typeface="Inter" pitchFamily="34" charset="-120"/>
-              </a:rPr>
-              <a:t>Per-supervisor: students, open tasks, overdue.</a:t>
-            </a:r>
-            <a:endParaRPr lang="en-US" sz="1200" dirty="0"/>
-          </a:p>
-          <a:p>
-            <a:pPr marL="342900" indent="-342900">
-              <a:spcAft>
-                <a:spcPts val="400"/>
-              </a:spcAft>
-              <a:buSzPct val="100000"/>
-              <a:buChar char="•"/>
-            </a:pPr>
-            <a:r>
-              <a:rPr lang="en-US" sz="1200" dirty="0">
-                <a:solidFill>
-                  <a:srgbClr val="334155"/>
-                </a:solidFill>
-                <a:latin typeface="Inter" pitchFamily="34" charset="0"/>
-                <a:ea typeface="Inter" pitchFamily="34" charset="-122"/>
-                <a:cs typeface="Inter" pitchFamily="34" charset="-120"/>
-              </a:rPr>
-              <a:t>Per-student: status, open, overdue.</a:t>
-            </a:r>
-            <a:endParaRPr lang="en-US" sz="1200" dirty="0"/>
-          </a:p>
-          <a:p>
-            <a:pPr marL="342900" indent="-342900">
-              <a:spcAft>
-                <a:spcPts val="400"/>
-              </a:spcAft>
-              <a:buSzPct val="100000"/>
-              <a:buChar char="•"/>
-            </a:pPr>
-            <a:r>
-              <a:rPr lang="en-US" sz="1200" dirty="0">
-                <a:solidFill>
-                  <a:srgbClr val="334155"/>
-                </a:solidFill>
-                <a:latin typeface="Inter" pitchFamily="34" charset="0"/>
-                <a:ea typeface="Inter" pitchFamily="34" charset="-122"/>
-                <a:cs typeface="Inter" pitchFamily="34" charset="-120"/>
-              </a:rPr>
-              <a:t>Sorted by load — spot who's overloaded.</a:t>
-            </a:r>
-            <a:endParaRPr lang="en-US" sz="1200" dirty="0"/>
-          </a:p>
-        </p:txBody>
-      </p:sp>
-      <p:sp>
-        <p:nvSpPr>
-          <p:cNvPr id="18" name="Shape 15"/>
-          <p:cNvSpPr/>
-          <p:nvPr/>
-        </p:nvSpPr>
-        <p:spPr>
-          <a:xfrm>
-            <a:off x="548640" y="6355080"/>
-            <a:ext cx="11094415" cy="0"/>
-          </a:xfrm>
-          <a:prstGeom prst="line">
-            <a:avLst/>
-          </a:prstGeom>
-          <a:noFill/>
-          <a:ln w="9525">
-            <a:solidFill>
-              <a:srgbClr val="E2E8F0"/>
-            </a:solidFill>
-            <a:prstDash val="solid"/>
-          </a:ln>
-        </p:spPr>
-      </p:sp>
-      <p:sp>
-        <p:nvSpPr>
-          <p:cNvPr id="19" name="Text 16"/>
-          <p:cNvSpPr/>
-          <p:nvPr/>
-        </p:nvSpPr>
-        <p:spPr>
-          <a:xfrm>
-            <a:off x="548640" y="6446520"/>
-            <a:ext cx="5486400" cy="274320"/>
-          </a:xfrm>
-          <a:prstGeom prst="rect">
-            <a:avLst/>
-          </a:prstGeom>
-          <a:noFill/>
-          <a:ln/>
-        </p:spPr>
-        <p:txBody>
-          <a:bodyPr wrap="square" lIns="0" tIns="0" rIns="0" bIns="0" rtlCol="0" anchor="ctr"/>
-          <a:lstStyle/>
-          <a:p>
-            <a:pPr indent="0" marL="0">
-              <a:buNone/>
-            </a:pPr>
-            <a:r>
-              <a:rPr lang="en-US" sz="1100" dirty="0">
+              <a:rPr lang="en-US" sz="1300" dirty="0">
                 <a:solidFill>
                   <a:srgbClr val="64748B"/>
                 </a:solidFill>
@@ -5003,13 +4958,13 @@
               </a:rPr>
               <a:t>PhDapp · for supervisors</a:t>
             </a:r>
-            <a:endParaRPr lang="en-US" sz="1100" dirty="0"/>
-          </a:p>
-        </p:txBody>
-      </p:sp>
-      <p:sp>
-        <p:nvSpPr>
-          <p:cNvPr id="20" name="Text 17"/>
+            <a:endParaRPr lang="en-US" sz="1300" dirty="0"/>
+          </a:p>
+        </p:txBody>
+      </p:sp>
+      <p:sp>
+        <p:nvSpPr>
+          <p:cNvPr id="16" name="Text 13"/>
           <p:cNvSpPr/>
           <p:nvPr/>
         </p:nvSpPr>
@@ -5032,7 +4987,7 @@
               <a:buNone/>
             </a:pPr>
             <a:r>
-              <a:rPr lang="en-US" sz="1100" dirty="0">
+              <a:rPr lang="en-US" sz="1300" dirty="0">
                 <a:solidFill>
                   <a:srgbClr val="64748B"/>
                 </a:solidFill>
@@ -5040,9 +4995,9 @@
                 <a:ea typeface="Inter" pitchFamily="34" charset="-122"/>
                 <a:cs typeface="Inter" pitchFamily="34" charset="-120"/>
               </a:rPr>
-              <a:t>13 / 16</a:t>
-            </a:r>
-            <a:endParaRPr lang="en-US" sz="1100" dirty="0"/>
+              <a:t>13 / 17</a:t>
+            </a:r>
+            <a:endParaRPr lang="en-US" sz="1300" dirty="0"/>
           </a:p>
         </p:txBody>
       </p:sp>
@@ -5095,7 +5050,7 @@
             </a:avLst>
           </a:prstGeom>
           <a:solidFill>
-            <a:srgbClr val="FF3D8B"/>
+            <a:srgbClr val="F59E0B"/>
           </a:solidFill>
           <a:ln/>
         </p:spPr>
@@ -5151,13 +5106,13 @@
             <a:r>
               <a:rPr lang="en-US" sz="1400" b="1" spc="400" kern="0" dirty="0">
                 <a:solidFill>
-                  <a:srgbClr val="FF3D8B"/>
-                </a:solidFill>
-                <a:latin typeface="Inter" pitchFamily="34" charset="0"/>
-                <a:ea typeface="Inter" pitchFamily="34" charset="-122"/>
-                <a:cs typeface="Inter" pitchFamily="34" charset="-120"/>
-              </a:rPr>
-              <a:t>NOTIFICATIONS</a:t>
+                  <a:srgbClr val="F59E0B"/>
+                </a:solidFill>
+                <a:latin typeface="Inter" pitchFamily="34" charset="0"/>
+                <a:ea typeface="Inter" pitchFamily="34" charset="-122"/>
+                <a:cs typeface="Inter" pitchFamily="34" charset="-120"/>
+              </a:rPr>
+              <a:t>TEAM</a:t>
             </a:r>
             <a:endParaRPr lang="en-US" sz="1400" dirty="0"/>
           </a:p>
@@ -5172,7 +5127,7 @@
         <p:spPr>
           <a:xfrm>
             <a:off x="1261872" y="749808"/>
-            <a:ext cx="10381183" cy="640080"/>
+            <a:ext cx="10381183" cy="713232"/>
           </a:xfrm>
           <a:prstGeom prst="rect">
             <a:avLst/>
@@ -5188,7 +5143,7 @@
               <a:buNone/>
             </a:pPr>
             <a:r>
-              <a:rPr lang="en-US" sz="3600" b="1" dirty="0">
+              <a:rPr lang="en-US" sz="4000" b="1" dirty="0">
                 <a:solidFill>
                   <a:srgbClr val="0F172A"/>
                 </a:solidFill>
@@ -5196,9 +5151,9 @@
                 <a:ea typeface="Inter" pitchFamily="34" charset="-122"/>
                 <a:cs typeface="Inter" pitchFamily="34" charset="-120"/>
               </a:rPr>
-              <a:t>Notifications &amp; email digest</a:t>
-            </a:r>
-            <a:endParaRPr lang="en-US" sz="3600" dirty="0"/>
+              <a:t>Team workspace, advisors &amp; workload</a:t>
+            </a:r>
+            <a:endParaRPr lang="en-US" sz="4000" dirty="0"/>
           </a:p>
         </p:txBody>
       </p:sp>
@@ -5210,8 +5165,8 @@
         </p:nvSpPr>
         <p:spPr>
           <a:xfrm>
-            <a:off x="548640" y="1828800"/>
-            <a:ext cx="5486400" cy="3291840"/>
+            <a:off x="548640" y="2194560"/>
+            <a:ext cx="3611880" cy="3566160"/>
           </a:xfrm>
           <a:prstGeom prst="rect">
             <a:avLst/>
@@ -5242,14 +5197,14 @@
         </p:nvSpPr>
         <p:spPr>
           <a:xfrm>
-            <a:off x="548640" y="1828800"/>
-            <a:ext cx="73152" cy="3291840"/>
+            <a:off x="548640" y="2194560"/>
+            <a:ext cx="73152" cy="3566160"/>
           </a:xfrm>
           <a:prstGeom prst="rect">
             <a:avLst/>
           </a:prstGeom>
           <a:solidFill>
-            <a:srgbClr val="FF3D8B"/>
+            <a:srgbClr val="F59E0B"/>
           </a:solidFill>
           <a:ln/>
         </p:spPr>
@@ -5262,8 +5217,8 @@
         </p:nvSpPr>
         <p:spPr>
           <a:xfrm>
-            <a:off x="749808" y="1993392"/>
-            <a:ext cx="5166360" cy="502920"/>
+            <a:off x="749808" y="2359152"/>
+            <a:ext cx="3291840" cy="594360"/>
           </a:xfrm>
           <a:prstGeom prst="rect">
             <a:avLst/>
@@ -5279,7 +5234,7 @@
               <a:buNone/>
             </a:pPr>
             <a:r>
-              <a:rPr lang="en-US" sz="1800" b="1" dirty="0">
+              <a:rPr lang="en-US" sz="2200" b="1" dirty="0">
                 <a:solidFill>
                   <a:srgbClr val="0F172A"/>
                 </a:solidFill>
@@ -5287,9 +5242,9 @@
                 <a:ea typeface="Inter" pitchFamily="34" charset="-122"/>
                 <a:cs typeface="Inter" pitchFamily="34" charset="-120"/>
               </a:rPr>
-              <a:t>In-app</a:t>
-            </a:r>
-            <a:endParaRPr lang="en-US" sz="1800" dirty="0"/>
+              <a:t>Team workspace</a:t>
+            </a:r>
+            <a:endParaRPr lang="en-US" sz="2200" dirty="0"/>
           </a:p>
         </p:txBody>
       </p:sp>
@@ -5301,8 +5256,8 @@
         </p:nvSpPr>
         <p:spPr>
           <a:xfrm>
-            <a:off x="777240" y="2377440"/>
-            <a:ext cx="5074920" cy="2651760"/>
+            <a:off x="777240" y="3063240"/>
+            <a:ext cx="3246120" cy="2532888"/>
           </a:xfrm>
           <a:prstGeom prst="rect">
             <a:avLst/>
@@ -5316,13 +5271,13 @@
           <a:p>
             <a:pPr marL="342900" indent="-342900">
               <a:spcAft>
-                <a:spcPts val="400"/>
+                <a:spcPts val="600"/>
               </a:spcAft>
               <a:buSzPct val="100000"/>
               <a:buChar char="•"/>
             </a:pPr>
             <a:r>
-              <a:rPr lang="en-US" sz="1300" dirty="0">
+              <a:rPr lang="en-US" sz="1800" dirty="0">
                 <a:solidFill>
                   <a:srgbClr val="334155"/>
                 </a:solidFill>
@@ -5330,20 +5285,20 @@
                 <a:ea typeface="Inter" pitchFamily="34" charset="-122"/>
                 <a:cs typeface="Inter" pitchFamily="34" charset="-120"/>
               </a:rPr>
-              <a:t>🔔 bell: task/event/reading changes; co-supervisor away periods; student completion requests.</a:t>
-            </a:r>
-            <a:endParaRPr lang="en-US" sz="1300" dirty="0"/>
+              <a:t>Notes shared by supervisors + admin.</a:t>
+            </a:r>
+            <a:endParaRPr lang="en-US" sz="1800" dirty="0"/>
           </a:p>
           <a:p>
             <a:pPr marL="342900" indent="-342900">
               <a:spcAft>
-                <a:spcPts val="400"/>
+                <a:spcPts val="600"/>
               </a:spcAft>
               <a:buSzPct val="100000"/>
               <a:buChar char="•"/>
             </a:pPr>
             <a:r>
-              <a:rPr lang="en-US" sz="1300" dirty="0">
+              <a:rPr lang="en-US" sz="1800" dirty="0">
                 <a:solidFill>
                   <a:srgbClr val="334155"/>
                 </a:solidFill>
@@ -5351,20 +5306,20 @@
                 <a:ea typeface="Inter" pitchFamily="34" charset="-122"/>
                 <a:cs typeface="Inter" pitchFamily="34" charset="-120"/>
               </a:rPr>
-              <a:t>Sidebar badges per module; coloured ring/banner on new/updated items.</a:t>
-            </a:r>
-            <a:endParaRPr lang="en-US" sz="1300" dirty="0"/>
+              <a:t>One shared team Drive folder.</a:t>
+            </a:r>
+            <a:endParaRPr lang="en-US" sz="1800" dirty="0"/>
           </a:p>
           <a:p>
             <a:pPr marL="342900" indent="-342900">
               <a:spcAft>
-                <a:spcPts val="400"/>
+                <a:spcPts val="600"/>
               </a:spcAft>
               <a:buSzPct val="100000"/>
               <a:buChar char="•"/>
             </a:pPr>
             <a:r>
-              <a:rPr lang="en-US" sz="1300" dirty="0">
+              <a:rPr lang="en-US" sz="1800" dirty="0">
                 <a:solidFill>
                   <a:srgbClr val="334155"/>
                 </a:solidFill>
@@ -5372,30 +5327,9 @@
                 <a:ea typeface="Inter" pitchFamily="34" charset="-122"/>
                 <a:cs typeface="Inter" pitchFamily="34" charset="-120"/>
               </a:rPr>
-              <a:t>Tab title + favicon + sound when chat is unread.</a:t>
-            </a:r>
-            <a:endParaRPr lang="en-US" sz="1300" dirty="0"/>
-          </a:p>
-          <a:p>
-            <a:pPr marL="342900" indent="-342900">
-              <a:spcAft>
-                <a:spcPts val="400"/>
-              </a:spcAft>
-              <a:buSzPct val="100000"/>
-              <a:buChar char="•"/>
-            </a:pPr>
-            <a:r>
-              <a:rPr lang="en-US" sz="1300" dirty="0">
-                <a:solidFill>
-                  <a:srgbClr val="334155"/>
-                </a:solidFill>
-                <a:latin typeface="Inter" pitchFamily="34" charset="0"/>
-                <a:ea typeface="Inter" pitchFamily="34" charset="-122"/>
-                <a:cs typeface="Inter" pitchFamily="34" charset="-120"/>
-              </a:rPr>
-              <a:t>When you comment / change a student's task meaningfully, they're notified directly (bell + email).</a:t>
-            </a:r>
-            <a:endParaRPr lang="en-US" sz="1300" dirty="0"/>
+              <a:t>Hidden from students + advisors.</a:t>
+            </a:r>
+            <a:endParaRPr lang="en-US" sz="1800" dirty="0"/>
           </a:p>
         </p:txBody>
       </p:sp>
@@ -5407,8 +5341,8 @@
         </p:nvSpPr>
         <p:spPr>
           <a:xfrm>
-            <a:off x="6400800" y="1828800"/>
-            <a:ext cx="5242255" cy="3291840"/>
+            <a:off x="4343400" y="2194560"/>
+            <a:ext cx="3611880" cy="3566160"/>
           </a:xfrm>
           <a:prstGeom prst="rect">
             <a:avLst/>
@@ -5439,14 +5373,14 @@
         </p:nvSpPr>
         <p:spPr>
           <a:xfrm>
-            <a:off x="6400800" y="1828800"/>
-            <a:ext cx="73152" cy="3291840"/>
+            <a:off x="4343400" y="2194560"/>
+            <a:ext cx="73152" cy="3566160"/>
           </a:xfrm>
           <a:prstGeom prst="rect">
             <a:avLst/>
           </a:prstGeom>
           <a:solidFill>
-            <a:srgbClr val="00CA72"/>
+            <a:srgbClr val="6F4CFF"/>
           </a:solidFill>
           <a:ln/>
         </p:spPr>
@@ -5459,8 +5393,8 @@
         </p:nvSpPr>
         <p:spPr>
           <a:xfrm>
-            <a:off x="6601968" y="1993392"/>
-            <a:ext cx="4922215" cy="502920"/>
+            <a:off x="4544568" y="2359152"/>
+            <a:ext cx="3291840" cy="594360"/>
           </a:xfrm>
           <a:prstGeom prst="rect">
             <a:avLst/>
@@ -5476,7 +5410,7 @@
               <a:buNone/>
             </a:pPr>
             <a:r>
-              <a:rPr lang="en-US" sz="1800" b="1" dirty="0">
+              <a:rPr lang="en-US" sz="2200" b="1" dirty="0">
                 <a:solidFill>
                   <a:srgbClr val="0F172A"/>
                 </a:solidFill>
@@ -5484,9 +5418,9 @@
                 <a:ea typeface="Inter" pitchFamily="34" charset="-122"/>
                 <a:cs typeface="Inter" pitchFamily="34" charset="-120"/>
               </a:rPr>
-              <a:t>Weekly email digest</a:t>
-            </a:r>
-            <a:endParaRPr lang="en-US" sz="1800" dirty="0"/>
+              <a:t>Advisor suggestions</a:t>
+            </a:r>
+            <a:endParaRPr lang="en-US" sz="2200" dirty="0"/>
           </a:p>
         </p:txBody>
       </p:sp>
@@ -5498,8 +5432,8 @@
         </p:nvSpPr>
         <p:spPr>
           <a:xfrm>
-            <a:off x="6629400" y="2377440"/>
-            <a:ext cx="4876495" cy="2651760"/>
+            <a:off x="4572000" y="3063240"/>
+            <a:ext cx="3246120" cy="2532888"/>
           </a:xfrm>
           <a:prstGeom prst="rect">
             <a:avLst/>
@@ -5513,13 +5447,13 @@
           <a:p>
             <a:pPr marL="342900" indent="-342900">
               <a:spcAft>
-                <a:spcPts val="400"/>
+                <a:spcPts val="600"/>
               </a:spcAft>
               <a:buSzPct val="100000"/>
               <a:buChar char="•"/>
             </a:pPr>
             <a:r>
-              <a:rPr lang="en-US" sz="1300" dirty="0">
+              <a:rPr lang="en-US" sz="1800" dirty="0">
                 <a:solidFill>
                   <a:srgbClr val="334155"/>
                 </a:solidFill>
@@ -5527,20 +5461,20 @@
                 <a:ea typeface="Inter" pitchFamily="34" charset="-122"/>
                 <a:cs typeface="Inter" pitchFamily="34" charset="-120"/>
               </a:rPr>
-              <a:t>Monday morning per-supervisor summary (when Resend is configured).</a:t>
-            </a:r>
-            <a:endParaRPr lang="en-US" sz="1300" dirty="0"/>
+              <a:t>Advisors post tagged suggestions.</a:t>
+            </a:r>
+            <a:endParaRPr lang="en-US" sz="1800" dirty="0"/>
           </a:p>
           <a:p>
             <a:pPr marL="342900" indent="-342900">
               <a:spcAft>
-                <a:spcPts val="400"/>
+                <a:spcPts val="600"/>
               </a:spcAft>
               <a:buSzPct val="100000"/>
               <a:buChar char="•"/>
             </a:pPr>
             <a:r>
-              <a:rPr lang="en-US" sz="1300" dirty="0">
+              <a:rPr lang="en-US" sz="1800" dirty="0">
                 <a:solidFill>
                   <a:srgbClr val="334155"/>
                 </a:solidFill>
@@ -5548,20 +5482,20 @@
                 <a:ea typeface="Inter" pitchFamily="34" charset="-122"/>
                 <a:cs typeface="Inter" pitchFamily="34" charset="-120"/>
               </a:rPr>
-              <a:t>Counts of overdue tasks, low-wellbeing check-ins, new readings.</a:t>
-            </a:r>
-            <a:endParaRPr lang="en-US" sz="1300" dirty="0"/>
+              <a:t>Violet bubble on Team sidebar.</a:t>
+            </a:r>
+            <a:endParaRPr lang="en-US" sz="1800" dirty="0"/>
           </a:p>
           <a:p>
             <a:pPr marL="342900" indent="-342900">
               <a:spcAft>
-                <a:spcPts val="400"/>
+                <a:spcPts val="600"/>
               </a:spcAft>
               <a:buSzPct val="100000"/>
               <a:buChar char="•"/>
             </a:pPr>
             <a:r>
-              <a:rPr lang="en-US" sz="1300" dirty="0">
+              <a:rPr lang="en-US" sz="1800" dirty="0">
                 <a:solidFill>
                   <a:srgbClr val="334155"/>
                 </a:solidFill>
@@ -5569,9 +5503,9 @@
                 <a:ea typeface="Inter" pitchFamily="34" charset="-122"/>
                 <a:cs typeface="Inter" pitchFamily="34" charset="-120"/>
               </a:rPr>
-              <a:t>Opt-out in Settings → Notifications.</a:t>
-            </a:r>
-            <a:endParaRPr lang="en-US" sz="1300" dirty="0"/>
+              <a:t>Supervisors read; advisors author.</a:t>
+            </a:r>
+            <a:endParaRPr lang="en-US" sz="1800" dirty="0"/>
           </a:p>
         </p:txBody>
       </p:sp>
@@ -5583,24 +5517,200 @@
         </p:nvSpPr>
         <p:spPr>
           <a:xfrm>
-            <a:off x="548640" y="6355080"/>
-            <a:ext cx="11094415" cy="0"/>
-          </a:xfrm>
-          <a:prstGeom prst="line">
-            <a:avLst/>
-          </a:prstGeom>
-          <a:noFill/>
+            <a:off x="8138160" y="2194560"/>
+            <a:ext cx="3611880" cy="3566160"/>
+          </a:xfrm>
+          <a:prstGeom prst="rect">
+            <a:avLst/>
+          </a:prstGeom>
+          <a:solidFill>
+            <a:srgbClr val="FFFFFF"/>
+          </a:solidFill>
           <a:ln w="9525">
             <a:solidFill>
               <a:srgbClr val="E2E8F0"/>
             </a:solidFill>
             <a:prstDash val="solid"/>
           </a:ln>
-        </p:spPr>
-      </p:sp>
-      <p:sp>
-        <p:nvSpPr>
-          <p:cNvPr id="15" name="Text 12"/>
+          <a:effectLst>
+            <a:outerShdw sx="100000" sy="100000" kx="0" ky="0" algn="bl" rotWithShape="0" blurRad="76200" dist="12700" dir="5400000">
+              <a:srgbClr val="94A3B8">
+                <a:alpha val="12000"/>
+              </a:srgbClr>
+            </a:outerShdw>
+          </a:effectLst>
+        </p:spPr>
+      </p:sp>
+      <p:sp>
+        <p:nvSpPr>
+          <p:cNvPr id="15" name="Shape 12"/>
+          <p:cNvSpPr/>
+          <p:nvPr/>
+        </p:nvSpPr>
+        <p:spPr>
+          <a:xfrm>
+            <a:off x="8138160" y="2194560"/>
+            <a:ext cx="73152" cy="3566160"/>
+          </a:xfrm>
+          <a:prstGeom prst="rect">
+            <a:avLst/>
+          </a:prstGeom>
+          <a:solidFill>
+            <a:srgbClr val="F59E0B"/>
+          </a:solidFill>
+          <a:ln/>
+        </p:spPr>
+      </p:sp>
+      <p:sp>
+        <p:nvSpPr>
+          <p:cNvPr id="16" name="Text 13"/>
+          <p:cNvSpPr/>
+          <p:nvPr/>
+        </p:nvSpPr>
+        <p:spPr>
+          <a:xfrm>
+            <a:off x="8339328" y="2359152"/>
+            <a:ext cx="3291840" cy="594360"/>
+          </a:xfrm>
+          <a:prstGeom prst="rect">
+            <a:avLst/>
+          </a:prstGeom>
+          <a:noFill/>
+          <a:ln/>
+        </p:spPr>
+        <p:txBody>
+          <a:bodyPr wrap="square" lIns="0" tIns="0" rIns="0" bIns="0" rtlCol="0" anchor="ctr"/>
+          <a:lstStyle/>
+          <a:p>
+            <a:pPr indent="0" marL="0">
+              <a:buNone/>
+            </a:pPr>
+            <a:r>
+              <a:rPr lang="en-US" sz="2200" b="1" dirty="0">
+                <a:solidFill>
+                  <a:srgbClr val="0F172A"/>
+                </a:solidFill>
+                <a:latin typeface="Inter" pitchFamily="34" charset="0"/>
+                <a:ea typeface="Inter" pitchFamily="34" charset="-122"/>
+                <a:cs typeface="Inter" pitchFamily="34" charset="-120"/>
+              </a:rPr>
+              <a:t>Workload table</a:t>
+            </a:r>
+            <a:endParaRPr lang="en-US" sz="2200" dirty="0"/>
+          </a:p>
+        </p:txBody>
+      </p:sp>
+      <p:sp>
+        <p:nvSpPr>
+          <p:cNvPr id="17" name="Text 14"/>
+          <p:cNvSpPr/>
+          <p:nvPr/>
+        </p:nvSpPr>
+        <p:spPr>
+          <a:xfrm>
+            <a:off x="8366760" y="3063240"/>
+            <a:ext cx="3246120" cy="2532888"/>
+          </a:xfrm>
+          <a:prstGeom prst="rect">
+            <a:avLst/>
+          </a:prstGeom>
+          <a:noFill/>
+          <a:ln/>
+        </p:spPr>
+        <p:txBody>
+          <a:bodyPr wrap="square" lIns="0" tIns="0" rIns="0" bIns="0" rtlCol="0" anchor="t"/>
+          <a:lstStyle/>
+          <a:p>
+            <a:pPr marL="342900" indent="-342900">
+              <a:spcAft>
+                <a:spcPts val="600"/>
+              </a:spcAft>
+              <a:buSzPct val="100000"/>
+              <a:buChar char="•"/>
+            </a:pPr>
+            <a:r>
+              <a:rPr lang="en-US" sz="1800" dirty="0">
+                <a:solidFill>
+                  <a:srgbClr val="334155"/>
+                </a:solidFill>
+                <a:latin typeface="Inter" pitchFamily="34" charset="0"/>
+                <a:ea typeface="Inter" pitchFamily="34" charset="-122"/>
+                <a:cs typeface="Inter" pitchFamily="34" charset="-120"/>
+              </a:rPr>
+              <a:t>Per-supervisor: students, open, overdue.</a:t>
+            </a:r>
+            <a:endParaRPr lang="en-US" sz="1800" dirty="0"/>
+          </a:p>
+          <a:p>
+            <a:pPr marL="342900" indent="-342900">
+              <a:spcAft>
+                <a:spcPts val="600"/>
+              </a:spcAft>
+              <a:buSzPct val="100000"/>
+              <a:buChar char="•"/>
+            </a:pPr>
+            <a:r>
+              <a:rPr lang="en-US" sz="1800" dirty="0">
+                <a:solidFill>
+                  <a:srgbClr val="334155"/>
+                </a:solidFill>
+                <a:latin typeface="Inter" pitchFamily="34" charset="0"/>
+                <a:ea typeface="Inter" pitchFamily="34" charset="-122"/>
+                <a:cs typeface="Inter" pitchFamily="34" charset="-120"/>
+              </a:rPr>
+              <a:t>Per-student: status, open, overdue.</a:t>
+            </a:r>
+            <a:endParaRPr lang="en-US" sz="1800" dirty="0"/>
+          </a:p>
+          <a:p>
+            <a:pPr marL="342900" indent="-342900">
+              <a:spcAft>
+                <a:spcPts val="600"/>
+              </a:spcAft>
+              <a:buSzPct val="100000"/>
+              <a:buChar char="•"/>
+            </a:pPr>
+            <a:r>
+              <a:rPr lang="en-US" sz="1800" dirty="0">
+                <a:solidFill>
+                  <a:srgbClr val="334155"/>
+                </a:solidFill>
+                <a:latin typeface="Inter" pitchFamily="34" charset="0"/>
+                <a:ea typeface="Inter" pitchFamily="34" charset="-122"/>
+                <a:cs typeface="Inter" pitchFamily="34" charset="-120"/>
+              </a:rPr>
+              <a:t>Sorted by load — spot overloads.</a:t>
+            </a:r>
+            <a:endParaRPr lang="en-US" sz="1800" dirty="0"/>
+          </a:p>
+        </p:txBody>
+      </p:sp>
+      <p:sp>
+        <p:nvSpPr>
+          <p:cNvPr id="18" name="Shape 15"/>
+          <p:cNvSpPr/>
+          <p:nvPr/>
+        </p:nvSpPr>
+        <p:spPr>
+          <a:xfrm>
+            <a:off x="548640" y="6355080"/>
+            <a:ext cx="11094415" cy="0"/>
+          </a:xfrm>
+          <a:prstGeom prst="line">
+            <a:avLst/>
+          </a:prstGeom>
+          <a:noFill/>
+          <a:ln w="9525">
+            <a:solidFill>
+              <a:srgbClr val="E2E8F0"/>
+            </a:solidFill>
+            <a:prstDash val="solid"/>
+          </a:ln>
+        </p:spPr>
+      </p:sp>
+      <p:sp>
+        <p:nvSpPr>
+          <p:cNvPr id="19" name="Text 16"/>
           <p:cNvSpPr/>
           <p:nvPr/>
         </p:nvSpPr>
@@ -5623,7 +5733,7 @@
               <a:buNone/>
             </a:pPr>
             <a:r>
-              <a:rPr lang="en-US" sz="1100" dirty="0">
+              <a:rPr lang="en-US" sz="1300" dirty="0">
                 <a:solidFill>
                   <a:srgbClr val="64748B"/>
                 </a:solidFill>
@@ -5633,13 +5743,13 @@
               </a:rPr>
               <a:t>PhDapp · for supervisors</a:t>
             </a:r>
-            <a:endParaRPr lang="en-US" sz="1100" dirty="0"/>
-          </a:p>
-        </p:txBody>
-      </p:sp>
-      <p:sp>
-        <p:nvSpPr>
-          <p:cNvPr id="16" name="Text 13"/>
+            <a:endParaRPr lang="en-US" sz="1300" dirty="0"/>
+          </a:p>
+        </p:txBody>
+      </p:sp>
+      <p:sp>
+        <p:nvSpPr>
+          <p:cNvPr id="20" name="Text 17"/>
           <p:cNvSpPr/>
           <p:nvPr/>
         </p:nvSpPr>
@@ -5662,7 +5772,7 @@
               <a:buNone/>
             </a:pPr>
             <a:r>
-              <a:rPr lang="en-US" sz="1100" dirty="0">
+              <a:rPr lang="en-US" sz="1300" dirty="0">
                 <a:solidFill>
                   <a:srgbClr val="64748B"/>
                 </a:solidFill>
@@ -5670,9 +5780,9 @@
                 <a:ea typeface="Inter" pitchFamily="34" charset="-122"/>
                 <a:cs typeface="Inter" pitchFamily="34" charset="-120"/>
               </a:rPr>
-              <a:t>14 / 16</a:t>
-            </a:r>
-            <a:endParaRPr lang="en-US" sz="1100" dirty="0"/>
+              <a:t>14 / 17</a:t>
+            </a:r>
+            <a:endParaRPr lang="en-US" sz="1300" dirty="0"/>
           </a:p>
         </p:txBody>
       </p:sp>
@@ -5725,7 +5835,7 @@
             </a:avLst>
           </a:prstGeom>
           <a:solidFill>
-            <a:srgbClr val="6F4CFF"/>
+            <a:srgbClr val="FF3D8B"/>
           </a:solidFill>
           <a:ln/>
         </p:spPr>
@@ -5781,13 +5891,13 @@
             <a:r>
               <a:rPr lang="en-US" sz="1400" b="1" spc="400" kern="0" dirty="0">
                 <a:solidFill>
-                  <a:srgbClr val="6F4CFF"/>
-                </a:solidFill>
-                <a:latin typeface="Inter" pitchFamily="34" charset="0"/>
-                <a:ea typeface="Inter" pitchFamily="34" charset="-122"/>
-                <a:cs typeface="Inter" pitchFamily="34" charset="-120"/>
-              </a:rPr>
-              <a:t>FEEDBACK</a:t>
+                  <a:srgbClr val="FF3D8B"/>
+                </a:solidFill>
+                <a:latin typeface="Inter" pitchFamily="34" charset="0"/>
+                <a:ea typeface="Inter" pitchFamily="34" charset="-122"/>
+                <a:cs typeface="Inter" pitchFamily="34" charset="-120"/>
+              </a:rPr>
+              <a:t>NOTIFICATIONS</a:t>
             </a:r>
             <a:endParaRPr lang="en-US" sz="1400" dirty="0"/>
           </a:p>
@@ -5802,7 +5912,7 @@
         <p:spPr>
           <a:xfrm>
             <a:off x="1261872" y="749808"/>
-            <a:ext cx="10381183" cy="640080"/>
+            <a:ext cx="10381183" cy="713232"/>
           </a:xfrm>
           <a:prstGeom prst="rect">
             <a:avLst/>
@@ -5818,7 +5928,7 @@
               <a:buNone/>
             </a:pPr>
             <a:r>
-              <a:rPr lang="en-US" sz="3600" b="1" dirty="0">
+              <a:rPr lang="en-US" sz="4000" b="1" dirty="0">
                 <a:solidFill>
                   <a:srgbClr val="0F172A"/>
                 </a:solidFill>
@@ -5826,9 +5936,9 @@
                 <a:ea typeface="Inter" pitchFamily="34" charset="-122"/>
                 <a:cs typeface="Inter" pitchFamily="34" charset="-120"/>
               </a:rPr>
-              <a:t>Feedback to admin · Annual review</a:t>
-            </a:r>
-            <a:endParaRPr lang="en-US" sz="3600" dirty="0"/>
+              <a:t>Notifications &amp; email digest</a:t>
+            </a:r>
+            <a:endParaRPr lang="en-US" sz="4000" dirty="0"/>
           </a:p>
         </p:txBody>
       </p:sp>
@@ -5841,7 +5951,7 @@
         <p:spPr>
           <a:xfrm>
             <a:off x="548640" y="1828800"/>
-            <a:ext cx="5486400" cy="3291840"/>
+            <a:ext cx="5486400" cy="3931920"/>
           </a:xfrm>
           <a:prstGeom prst="rect">
             <a:avLst/>
@@ -5873,13 +5983,13 @@
         <p:spPr>
           <a:xfrm>
             <a:off x="548640" y="1828800"/>
-            <a:ext cx="73152" cy="3291840"/>
+            <a:ext cx="73152" cy="3931920"/>
           </a:xfrm>
           <a:prstGeom prst="rect">
             <a:avLst/>
           </a:prstGeom>
           <a:solidFill>
-            <a:srgbClr val="6F4CFF"/>
+            <a:srgbClr val="FF3D8B"/>
           </a:solidFill>
           <a:ln/>
         </p:spPr>
@@ -5893,7 +6003,7 @@
         <p:spPr>
           <a:xfrm>
             <a:off x="749808" y="1993392"/>
-            <a:ext cx="5166360" cy="502920"/>
+            <a:ext cx="5166360" cy="594360"/>
           </a:xfrm>
           <a:prstGeom prst="rect">
             <a:avLst/>
@@ -5909,7 +6019,7 @@
               <a:buNone/>
             </a:pPr>
             <a:r>
-              <a:rPr lang="en-US" sz="1800" b="1" dirty="0">
+              <a:rPr lang="en-US" sz="2200" b="1" dirty="0">
                 <a:solidFill>
                   <a:srgbClr val="0F172A"/>
                 </a:solidFill>
@@ -5917,9 +6027,9 @@
                 <a:ea typeface="Inter" pitchFamily="34" charset="-122"/>
                 <a:cs typeface="Inter" pitchFamily="34" charset="-120"/>
               </a:rPr>
-              <a:t>Feedback</a:t>
-            </a:r>
-            <a:endParaRPr lang="en-US" sz="1800" dirty="0"/>
+              <a:t>In-app</a:t>
+            </a:r>
+            <a:endParaRPr lang="en-US" sz="2200" dirty="0"/>
           </a:p>
         </p:txBody>
       </p:sp>
@@ -5931,8 +6041,8 @@
         </p:nvSpPr>
         <p:spPr>
           <a:xfrm>
-            <a:off x="777240" y="2377440"/>
-            <a:ext cx="5074920" cy="2651760"/>
+            <a:off x="777240" y="2697480"/>
+            <a:ext cx="5074920" cy="2926080"/>
           </a:xfrm>
           <a:prstGeom prst="rect">
             <a:avLst/>
@@ -5946,13 +6056,13 @@
           <a:p>
             <a:pPr marL="342900" indent="-342900">
               <a:spcAft>
-                <a:spcPts val="400"/>
+                <a:spcPts val="600"/>
               </a:spcAft>
               <a:buSzPct val="100000"/>
               <a:buChar char="•"/>
             </a:pPr>
             <a:r>
-              <a:rPr lang="en-US" sz="1300" dirty="0">
+              <a:rPr lang="en-US" sz="1800" dirty="0">
                 <a:solidFill>
                   <a:srgbClr val="334155"/>
                 </a:solidFill>
@@ -5960,20 +6070,20 @@
                 <a:ea typeface="Inter" pitchFamily="34" charset="-122"/>
                 <a:cs typeface="Inter" pitchFamily="34" charset="-120"/>
               </a:rPr>
-              <a:t>Bug / Suggestion / Other, with an optional photo.</a:t>
-            </a:r>
-            <a:endParaRPr lang="en-US" sz="1300" dirty="0"/>
+              <a:t>🔔 bell: task/event/reading changes; co-supervisor away periods; student completion requests.</a:t>
+            </a:r>
+            <a:endParaRPr lang="en-US" sz="1800" dirty="0"/>
           </a:p>
           <a:p>
             <a:pPr marL="342900" indent="-342900">
               <a:spcAft>
-                <a:spcPts val="400"/>
+                <a:spcPts val="600"/>
               </a:spcAft>
               <a:buSzPct val="100000"/>
               <a:buChar char="•"/>
             </a:pPr>
             <a:r>
-              <a:rPr lang="en-US" sz="1300" dirty="0">
+              <a:rPr lang="en-US" sz="1800" dirty="0">
                 <a:solidFill>
                   <a:srgbClr val="334155"/>
                 </a:solidFill>
@@ -5981,20 +6091,20 @@
                 <a:ea typeface="Inter" pitchFamily="34" charset="-122"/>
                 <a:cs typeface="Inter" pitchFamily="34" charset="-120"/>
               </a:rPr>
-              <a:t>Status (Open / Planned / In progress / Done / Declined) + admin reply inline.</a:t>
-            </a:r>
-            <a:endParaRPr lang="en-US" sz="1300" dirty="0"/>
+              <a:t>Sidebar badges per module; coloured ring/banner on new/updated items.</a:t>
+            </a:r>
+            <a:endParaRPr lang="en-US" sz="1800" dirty="0"/>
           </a:p>
           <a:p>
             <a:pPr marL="342900" indent="-342900">
               <a:spcAft>
-                <a:spcPts val="400"/>
+                <a:spcPts val="600"/>
               </a:spcAft>
               <a:buSzPct val="100000"/>
               <a:buChar char="•"/>
             </a:pPr>
             <a:r>
-              <a:rPr lang="en-US" sz="1300" dirty="0">
+              <a:rPr lang="en-US" sz="1800" dirty="0">
                 <a:solidFill>
                   <a:srgbClr val="334155"/>
                 </a:solidFill>
@@ -6002,9 +6112,30 @@
                 <a:ea typeface="Inter" pitchFamily="34" charset="-122"/>
                 <a:cs typeface="Inter" pitchFamily="34" charset="-120"/>
               </a:rPr>
-              <a:t>Collapse old entries; it remembers your collapsed set.</a:t>
-            </a:r>
-            <a:endParaRPr lang="en-US" sz="1300" dirty="0"/>
+              <a:t>Tab title + favicon + sound when chat is unread.</a:t>
+            </a:r>
+            <a:endParaRPr lang="en-US" sz="1800" dirty="0"/>
+          </a:p>
+          <a:p>
+            <a:pPr marL="342900" indent="-342900">
+              <a:spcAft>
+                <a:spcPts val="600"/>
+              </a:spcAft>
+              <a:buSzPct val="100000"/>
+              <a:buChar char="•"/>
+            </a:pPr>
+            <a:r>
+              <a:rPr lang="en-US" sz="1800" dirty="0">
+                <a:solidFill>
+                  <a:srgbClr val="334155"/>
+                </a:solidFill>
+                <a:latin typeface="Inter" pitchFamily="34" charset="0"/>
+                <a:ea typeface="Inter" pitchFamily="34" charset="-122"/>
+                <a:cs typeface="Inter" pitchFamily="34" charset="-120"/>
+              </a:rPr>
+              <a:t>When you comment / change a student's task meaningfully, they're notified directly (bell + email).</a:t>
+            </a:r>
+            <a:endParaRPr lang="en-US" sz="1800" dirty="0"/>
           </a:p>
         </p:txBody>
       </p:sp>
@@ -6017,7 +6148,7 @@
         <p:spPr>
           <a:xfrm>
             <a:off x="6400800" y="1828800"/>
-            <a:ext cx="5242255" cy="3291840"/>
+            <a:ext cx="5242255" cy="3931920"/>
           </a:xfrm>
           <a:prstGeom prst="rect">
             <a:avLst/>
@@ -6049,13 +6180,13 @@
         <p:spPr>
           <a:xfrm>
             <a:off x="6400800" y="1828800"/>
-            <a:ext cx="73152" cy="3291840"/>
+            <a:ext cx="73152" cy="3931920"/>
           </a:xfrm>
           <a:prstGeom prst="rect">
             <a:avLst/>
           </a:prstGeom>
           <a:solidFill>
-            <a:srgbClr val="E2445C"/>
+            <a:srgbClr val="00CA72"/>
           </a:solidFill>
           <a:ln/>
         </p:spPr>
@@ -6069,7 +6200,7 @@
         <p:spPr>
           <a:xfrm>
             <a:off x="6601968" y="1993392"/>
-            <a:ext cx="4922215" cy="502920"/>
+            <a:ext cx="4922215" cy="594360"/>
           </a:xfrm>
           <a:prstGeom prst="rect">
             <a:avLst/>
@@ -6085,7 +6216,7 @@
               <a:buNone/>
             </a:pPr>
             <a:r>
-              <a:rPr lang="en-US" sz="1800" b="1" dirty="0">
+              <a:rPr lang="en-US" sz="2200" b="1" dirty="0">
                 <a:solidFill>
                   <a:srgbClr val="0F172A"/>
                 </a:solidFill>
@@ -6093,9 +6224,9 @@
                 <a:ea typeface="Inter" pitchFamily="34" charset="-122"/>
                 <a:cs typeface="Inter" pitchFamily="34" charset="-120"/>
               </a:rPr>
-              <a:t>Annual review export</a:t>
-            </a:r>
-            <a:endParaRPr lang="en-US" sz="1800" dirty="0"/>
+              <a:t>Weekly email digest</a:t>
+            </a:r>
+            <a:endParaRPr lang="en-US" sz="2200" dirty="0"/>
           </a:p>
         </p:txBody>
       </p:sp>
@@ -6107,8 +6238,8 @@
         </p:nvSpPr>
         <p:spPr>
           <a:xfrm>
-            <a:off x="6629400" y="2377440"/>
-            <a:ext cx="4876495" cy="2651760"/>
+            <a:off x="6629400" y="2697480"/>
+            <a:ext cx="4876495" cy="2926080"/>
           </a:xfrm>
           <a:prstGeom prst="rect">
             <a:avLst/>
@@ -6122,13 +6253,13 @@
           <a:p>
             <a:pPr marL="342900" indent="-342900">
               <a:spcAft>
-                <a:spcPts val="400"/>
+                <a:spcPts val="600"/>
               </a:spcAft>
               <a:buSzPct val="100000"/>
               <a:buChar char="•"/>
             </a:pPr>
             <a:r>
-              <a:rPr lang="en-US" sz="1300" dirty="0">
+              <a:rPr lang="en-US" sz="1800" dirty="0">
                 <a:solidFill>
                   <a:srgbClr val="334155"/>
                 </a:solidFill>
@@ -6136,20 +6267,20 @@
                 <a:ea typeface="Inter" pitchFamily="34" charset="-122"/>
                 <a:cs typeface="Inter" pitchFamily="34" charset="-120"/>
               </a:rPr>
-              <a:t>Print-styled page at /students/[id]/review?from=&amp;to=.</a:t>
-            </a:r>
-            <a:endParaRPr lang="en-US" sz="1300" dirty="0"/>
+              <a:t>Monday morning per-supervisor summary (when Resend is configured).</a:t>
+            </a:r>
+            <a:endParaRPr lang="en-US" sz="1800" dirty="0"/>
           </a:p>
           <a:p>
             <a:pPr marL="342900" indent="-342900">
               <a:spcAft>
-                <a:spcPts val="400"/>
+                <a:spcPts val="600"/>
               </a:spcAft>
               <a:buSzPct val="100000"/>
               <a:buChar char="•"/>
             </a:pPr>
             <a:r>
-              <a:rPr lang="en-US" sz="1300" dirty="0">
+              <a:rPr lang="en-US" sz="1800" dirty="0">
                 <a:solidFill>
                   <a:srgbClr val="334155"/>
                 </a:solidFill>
@@ -6157,20 +6288,20 @@
                 <a:ea typeface="Inter" pitchFamily="34" charset="-122"/>
                 <a:cs typeface="Inter" pitchFamily="34" charset="-120"/>
               </a:rPr>
-              <a:t>Header is a student-details block; then thesis, publications, completed/overdue tasks, meetings, check-in text.</a:t>
-            </a:r>
-            <a:endParaRPr lang="en-US" sz="1300" dirty="0"/>
+              <a:t>Counts of overdue tasks, low-wellbeing check-ins, new readings.</a:t>
+            </a:r>
+            <a:endParaRPr lang="en-US" sz="1800" dirty="0"/>
           </a:p>
           <a:p>
             <a:pPr marL="342900" indent="-342900">
               <a:spcAft>
-                <a:spcPts val="400"/>
+                <a:spcPts val="600"/>
               </a:spcAft>
               <a:buSzPct val="100000"/>
               <a:buChar char="•"/>
             </a:pPr>
             <a:r>
-              <a:rPr lang="en-US" sz="1300" dirty="0">
+              <a:rPr lang="en-US" sz="1800" dirty="0">
                 <a:solidFill>
                   <a:srgbClr val="334155"/>
                 </a:solidFill>
@@ -6178,30 +6309,9 @@
                 <a:ea typeface="Inter" pitchFamily="34" charset="-122"/>
                 <a:cs typeface="Inter" pitchFamily="34" charset="-120"/>
               </a:rPr>
-              <a:t>Hard-excludes private supervisor notes and wellbeing scores.</a:t>
-            </a:r>
-            <a:endParaRPr lang="en-US" sz="1300" dirty="0"/>
-          </a:p>
-          <a:p>
-            <a:pPr marL="342900" indent="-342900">
-              <a:spcAft>
-                <a:spcPts val="400"/>
-              </a:spcAft>
-              <a:buSzPct val="100000"/>
-              <a:buChar char="•"/>
-            </a:pPr>
-            <a:r>
-              <a:rPr lang="en-US" sz="1300" dirty="0">
-                <a:solidFill>
-                  <a:srgbClr val="334155"/>
-                </a:solidFill>
-                <a:latin typeface="Inter" pitchFamily="34" charset="0"/>
-                <a:ea typeface="Inter" pitchFamily="34" charset="-122"/>
-                <a:cs typeface="Inter" pitchFamily="34" charset="-120"/>
-              </a:rPr>
-              <a:t>Cmd+P → Save as PDF for a clean document.</a:t>
-            </a:r>
-            <a:endParaRPr lang="en-US" sz="1300" dirty="0"/>
+              <a:t>Opt-out in Settings → Notifications.</a:t>
+            </a:r>
+            <a:endParaRPr lang="en-US" sz="1800" dirty="0"/>
           </a:p>
         </p:txBody>
       </p:sp>
@@ -6253,7 +6363,7 @@
               <a:buNone/>
             </a:pPr>
             <a:r>
-              <a:rPr lang="en-US" sz="1100" dirty="0">
+              <a:rPr lang="en-US" sz="1300" dirty="0">
                 <a:solidFill>
                   <a:srgbClr val="64748B"/>
                 </a:solidFill>
@@ -6263,7 +6373,7 @@
               </a:rPr>
               <a:t>PhDapp · for supervisors</a:t>
             </a:r>
-            <a:endParaRPr lang="en-US" sz="1100" dirty="0"/>
+            <a:endParaRPr lang="en-US" sz="1300" dirty="0"/>
           </a:p>
         </p:txBody>
       </p:sp>
@@ -6292,7 +6402,7 @@
               <a:buNone/>
             </a:pPr>
             <a:r>
-              <a:rPr lang="en-US" sz="1100" dirty="0">
+              <a:rPr lang="en-US" sz="1300" dirty="0">
                 <a:solidFill>
                   <a:srgbClr val="64748B"/>
                 </a:solidFill>
@@ -6300,9 +6410,9 @@
                 <a:ea typeface="Inter" pitchFamily="34" charset="-122"/>
                 <a:cs typeface="Inter" pitchFamily="34" charset="-120"/>
               </a:rPr>
-              <a:t>15 / 16</a:t>
-            </a:r>
-            <a:endParaRPr lang="en-US" sz="1100" dirty="0"/>
+              <a:t>15 / 17</a:t>
+            </a:r>
+            <a:endParaRPr lang="en-US" sz="1300" dirty="0"/>
           </a:p>
         </p:txBody>
       </p:sp>
@@ -6355,7 +6465,7 @@
             </a:avLst>
           </a:prstGeom>
           <a:solidFill>
-            <a:srgbClr val="2196F3"/>
+            <a:srgbClr val="6F4CFF"/>
           </a:solidFill>
           <a:ln/>
         </p:spPr>
@@ -6411,13 +6521,13 @@
             <a:r>
               <a:rPr lang="en-US" sz="1400" b="1" spc="400" kern="0" dirty="0">
                 <a:solidFill>
-                  <a:srgbClr val="2196F3"/>
-                </a:solidFill>
-                <a:latin typeface="Inter" pitchFamily="34" charset="0"/>
-                <a:ea typeface="Inter" pitchFamily="34" charset="-122"/>
-                <a:cs typeface="Inter" pitchFamily="34" charset="-120"/>
-              </a:rPr>
-              <a:t>TIPS</a:t>
+                  <a:srgbClr val="6F4CFF"/>
+                </a:solidFill>
+                <a:latin typeface="Inter" pitchFamily="34" charset="0"/>
+                <a:ea typeface="Inter" pitchFamily="34" charset="-122"/>
+                <a:cs typeface="Inter" pitchFamily="34" charset="-120"/>
+              </a:rPr>
+              <a:t>FEEDBACK</a:t>
             </a:r>
             <a:endParaRPr lang="en-US" sz="1400" dirty="0"/>
           </a:p>
@@ -6432,7 +6542,7 @@
         <p:spPr>
           <a:xfrm>
             <a:off x="1261872" y="749808"/>
-            <a:ext cx="10381183" cy="640080"/>
+            <a:ext cx="10381183" cy="713232"/>
           </a:xfrm>
           <a:prstGeom prst="rect">
             <a:avLst/>
@@ -6448,7 +6558,7 @@
               <a:buNone/>
             </a:pPr>
             <a:r>
-              <a:rPr lang="en-US" sz="3600" b="1" dirty="0">
+              <a:rPr lang="en-US" sz="4000" b="1" dirty="0">
                 <a:solidFill>
                   <a:srgbClr val="0F172A"/>
                 </a:solidFill>
@@ -6456,9 +6566,9 @@
                 <a:ea typeface="Inter" pitchFamily="34" charset="-122"/>
                 <a:cs typeface="Inter" pitchFamily="34" charset="-120"/>
               </a:rPr>
-              <a:t>Tips &amp; if something breaks</a:t>
-            </a:r>
-            <a:endParaRPr lang="en-US" sz="3600" dirty="0"/>
+              <a:t>Feedback to admin · Annual review</a:t>
+            </a:r>
+            <a:endParaRPr lang="en-US" sz="4000" dirty="0"/>
           </a:p>
         </p:txBody>
       </p:sp>
@@ -6471,7 +6581,7 @@
         <p:spPr>
           <a:xfrm>
             <a:off x="548640" y="1828800"/>
-            <a:ext cx="5486400" cy="3291840"/>
+            <a:ext cx="5486400" cy="3931920"/>
           </a:xfrm>
           <a:prstGeom prst="rect">
             <a:avLst/>
@@ -6503,13 +6613,13 @@
         <p:spPr>
           <a:xfrm>
             <a:off x="548640" y="1828800"/>
-            <a:ext cx="73152" cy="3291840"/>
+            <a:ext cx="73152" cy="3931920"/>
           </a:xfrm>
           <a:prstGeom prst="rect">
             <a:avLst/>
           </a:prstGeom>
           <a:solidFill>
-            <a:srgbClr val="2196F3"/>
+            <a:srgbClr val="6F4CFF"/>
           </a:solidFill>
           <a:ln/>
         </p:spPr>
@@ -6523,7 +6633,7 @@
         <p:spPr>
           <a:xfrm>
             <a:off x="749808" y="1993392"/>
-            <a:ext cx="5166360" cy="502920"/>
+            <a:ext cx="5166360" cy="594360"/>
           </a:xfrm>
           <a:prstGeom prst="rect">
             <a:avLst/>
@@ -6539,7 +6649,7 @@
               <a:buNone/>
             </a:pPr>
             <a:r>
-              <a:rPr lang="en-US" sz="1800" b="1" dirty="0">
+              <a:rPr lang="en-US" sz="2200" b="1" dirty="0">
                 <a:solidFill>
                   <a:srgbClr val="0F172A"/>
                 </a:solidFill>
@@ -6547,9 +6657,9 @@
                 <a:ea typeface="Inter" pitchFamily="34" charset="-122"/>
                 <a:cs typeface="Inter" pitchFamily="34" charset="-120"/>
               </a:rPr>
-              <a:t>Tips</a:t>
-            </a:r>
-            <a:endParaRPr lang="en-US" sz="1800" dirty="0"/>
+              <a:t>Feedback</a:t>
+            </a:r>
+            <a:endParaRPr lang="en-US" sz="2200" dirty="0"/>
           </a:p>
         </p:txBody>
       </p:sp>
@@ -6561,8 +6671,8 @@
         </p:nvSpPr>
         <p:spPr>
           <a:xfrm>
-            <a:off x="777240" y="2377440"/>
-            <a:ext cx="5074920" cy="2651760"/>
+            <a:off x="777240" y="2697480"/>
+            <a:ext cx="5074920" cy="2926080"/>
           </a:xfrm>
           <a:prstGeom prst="rect">
             <a:avLst/>
@@ -6576,13 +6686,13 @@
           <a:p>
             <a:pPr marL="342900" indent="-342900">
               <a:spcAft>
-                <a:spcPts val="400"/>
+                <a:spcPts val="600"/>
               </a:spcAft>
               <a:buSzPct val="100000"/>
               <a:buChar char="•"/>
             </a:pPr>
             <a:r>
-              <a:rPr lang="en-US" sz="1300" dirty="0">
+              <a:rPr lang="en-US" sz="1800" dirty="0">
                 <a:solidFill>
                   <a:srgbClr val="334155"/>
                 </a:solidFill>
@@ -6590,20 +6700,20 @@
                 <a:ea typeface="Inter" pitchFamily="34" charset="-122"/>
                 <a:cs typeface="Inter" pitchFamily="34" charset="-120"/>
               </a:rPr>
-              <a:t>Use the ✨ Catch-up before a 1:1 — paste it into the meeting notes.</a:t>
-            </a:r>
-            <a:endParaRPr lang="en-US" sz="1300" dirty="0"/>
+              <a:t>Bug / Suggestion / Other, with an optional photo.</a:t>
+            </a:r>
+            <a:endParaRPr lang="en-US" sz="1800" dirty="0"/>
           </a:p>
           <a:p>
             <a:pPr marL="342900" indent="-342900">
               <a:spcAft>
-                <a:spcPts val="400"/>
+                <a:spcPts val="600"/>
               </a:spcAft>
               <a:buSzPct val="100000"/>
               <a:buChar char="•"/>
             </a:pPr>
             <a:r>
-              <a:rPr lang="en-US" sz="1300" dirty="0">
+              <a:rPr lang="en-US" sz="1800" dirty="0">
                 <a:solidFill>
                   <a:srgbClr val="334155"/>
                 </a:solidFill>
@@ -6611,20 +6721,20 @@
                 <a:ea typeface="Inter" pitchFamily="34" charset="-122"/>
                 <a:cs typeface="Inter" pitchFamily="34" charset="-120"/>
               </a:rPr>
-              <a:t>Filter by group when you discuss a specific work-package.</a:t>
-            </a:r>
-            <a:endParaRPr lang="en-US" sz="1300" dirty="0"/>
+              <a:t>Status (Open / Planned / In progress / Done / Declined) + admin reply inline.</a:t>
+            </a:r>
+            <a:endParaRPr lang="en-US" sz="1800" dirty="0"/>
           </a:p>
           <a:p>
             <a:pPr marL="342900" indent="-342900">
               <a:spcAft>
-                <a:spcPts val="400"/>
+                <a:spcPts val="600"/>
               </a:spcAft>
               <a:buSzPct val="100000"/>
               <a:buChar char="•"/>
             </a:pPr>
             <a:r>
-              <a:rPr lang="en-US" sz="1300" dirty="0">
+              <a:rPr lang="en-US" sz="1800" dirty="0">
                 <a:solidFill>
                   <a:srgbClr val="334155"/>
                 </a:solidFill>
@@ -6632,30 +6742,9 @@
                 <a:ea typeface="Inter" pitchFamily="34" charset="-122"/>
                 <a:cs typeface="Inter" pitchFamily="34" charset="-120"/>
               </a:rPr>
-              <a:t>Comment on a task for nudges; chat for back-and-forth.</a:t>
-            </a:r>
-            <a:endParaRPr lang="en-US" sz="1300" dirty="0"/>
-          </a:p>
-          <a:p>
-            <a:pPr marL="342900" indent="-342900">
-              <a:spcAft>
-                <a:spcPts val="400"/>
-              </a:spcAft>
-              <a:buSzPct val="100000"/>
-              <a:buChar char="•"/>
-            </a:pPr>
-            <a:r>
-              <a:rPr lang="en-US" sz="1300" dirty="0">
-                <a:solidFill>
-                  <a:srgbClr val="334155"/>
-                </a:solidFill>
-                <a:latin typeface="Inter" pitchFamily="34" charset="0"/>
-                <a:ea typeface="Inter" pitchFamily="34" charset="-122"/>
-                <a:cs typeface="Inter" pitchFamily="34" charset="-120"/>
-              </a:rPr>
-              <a:t>Run the admin Backfill missing team channels once after this release.</a:t>
-            </a:r>
-            <a:endParaRPr lang="en-US" sz="1300" dirty="0"/>
+              <a:t>Collapse old entries; it remembers your collapsed set.</a:t>
+            </a:r>
+            <a:endParaRPr lang="en-US" sz="1800" dirty="0"/>
           </a:p>
         </p:txBody>
       </p:sp>
@@ -6668,7 +6757,7 @@
         <p:spPr>
           <a:xfrm>
             <a:off x="6400800" y="1828800"/>
-            <a:ext cx="5242255" cy="3291840"/>
+            <a:ext cx="5242255" cy="3931920"/>
           </a:xfrm>
           <a:prstGeom prst="rect">
             <a:avLst/>
@@ -6700,7 +6789,7 @@
         <p:spPr>
           <a:xfrm>
             <a:off x="6400800" y="1828800"/>
-            <a:ext cx="73152" cy="3291840"/>
+            <a:ext cx="73152" cy="3931920"/>
           </a:xfrm>
           <a:prstGeom prst="rect">
             <a:avLst/>
@@ -6720,7 +6809,7 @@
         <p:spPr>
           <a:xfrm>
             <a:off x="6601968" y="1993392"/>
-            <a:ext cx="4922215" cy="502920"/>
+            <a:ext cx="4922215" cy="594360"/>
           </a:xfrm>
           <a:prstGeom prst="rect">
             <a:avLst/>
@@ -6736,7 +6825,7 @@
               <a:buNone/>
             </a:pPr>
             <a:r>
-              <a:rPr lang="en-US" sz="1800" b="1" dirty="0">
+              <a:rPr lang="en-US" sz="2200" b="1" dirty="0">
                 <a:solidFill>
                   <a:srgbClr val="0F172A"/>
                 </a:solidFill>
@@ -6744,9 +6833,9 @@
                 <a:ea typeface="Inter" pitchFamily="34" charset="-122"/>
                 <a:cs typeface="Inter" pitchFamily="34" charset="-120"/>
               </a:rPr>
-              <a:t>Troubleshooting</a:t>
-            </a:r>
-            <a:endParaRPr lang="en-US" sz="1800" dirty="0"/>
+              <a:t>Annual review export</a:t>
+            </a:r>
+            <a:endParaRPr lang="en-US" sz="2200" dirty="0"/>
           </a:p>
         </p:txBody>
       </p:sp>
@@ -6758,8 +6847,8 @@
         </p:nvSpPr>
         <p:spPr>
           <a:xfrm>
-            <a:off x="6629400" y="2377440"/>
-            <a:ext cx="4876495" cy="2651760"/>
+            <a:off x="6629400" y="2697480"/>
+            <a:ext cx="4876495" cy="2926080"/>
           </a:xfrm>
           <a:prstGeom prst="rect">
             <a:avLst/>
@@ -6773,13 +6862,13 @@
           <a:p>
             <a:pPr marL="342900" indent="-342900">
               <a:spcAft>
-                <a:spcPts val="400"/>
+                <a:spcPts val="600"/>
               </a:spcAft>
               <a:buSzPct val="100000"/>
               <a:buChar char="•"/>
             </a:pPr>
             <a:r>
-              <a:rPr lang="en-US" sz="1300" dirty="0">
+              <a:rPr lang="en-US" sz="1800" dirty="0">
                 <a:solidFill>
                   <a:srgbClr val="334155"/>
                 </a:solidFill>
@@ -6787,20 +6876,20 @@
                 <a:ea typeface="Inter" pitchFamily="34" charset="-122"/>
                 <a:cs typeface="Inter" pitchFamily="34" charset="-120"/>
               </a:rPr>
-              <a:t>Calendar sync to iCal: use https://www.google.com/calendar/syncselect to tick the shared calendar.</a:t>
-            </a:r>
-            <a:endParaRPr lang="en-US" sz="1300" dirty="0"/>
+              <a:t>Print-styled page at /students/[id]/review?from=&amp;to=.</a:t>
+            </a:r>
+            <a:endParaRPr lang="en-US" sz="1800" dirty="0"/>
           </a:p>
           <a:p>
             <a:pPr marL="342900" indent="-342900">
               <a:spcAft>
-                <a:spcPts val="400"/>
+                <a:spcPts val="600"/>
               </a:spcAft>
               <a:buSzPct val="100000"/>
               <a:buChar char="•"/>
             </a:pPr>
             <a:r>
-              <a:rPr lang="en-US" sz="1300" dirty="0">
+              <a:rPr lang="en-US" sz="1800" dirty="0">
                 <a:solidFill>
                   <a:srgbClr val="334155"/>
                 </a:solidFill>
@@ -6808,20 +6897,20 @@
                 <a:ea typeface="Inter" pitchFamily="34" charset="-122"/>
                 <a:cs typeface="Inter" pitchFamily="34" charset="-120"/>
               </a:rPr>
-              <a:t>If push to Google fails → ‘Sync calendar’ from the student profile retries ACL grants.</a:t>
-            </a:r>
-            <a:endParaRPr lang="en-US" sz="1300" dirty="0"/>
+              <a:t>Header is a student-details block; then thesis, publications, completed/overdue tasks, meetings, check-in text.</a:t>
+            </a:r>
+            <a:endParaRPr lang="en-US" sz="1800" dirty="0"/>
           </a:p>
           <a:p>
             <a:pPr marL="342900" indent="-342900">
               <a:spcAft>
-                <a:spcPts val="400"/>
+                <a:spcPts val="600"/>
               </a:spcAft>
               <a:buSzPct val="100000"/>
               <a:buChar char="•"/>
             </a:pPr>
             <a:r>
-              <a:rPr lang="en-US" sz="1300" dirty="0">
+              <a:rPr lang="en-US" sz="1800" dirty="0">
                 <a:solidFill>
                   <a:srgbClr val="334155"/>
                 </a:solidFill>
@@ -6829,20 +6918,20 @@
                 <a:ea typeface="Inter" pitchFamily="34" charset="-122"/>
                 <a:cs typeface="Inter" pitchFamily="34" charset="-120"/>
               </a:rPr>
-              <a:t>Stale data → reload (polls reconcile within 8s).</a:t>
-            </a:r>
-            <a:endParaRPr lang="en-US" sz="1300" dirty="0"/>
+              <a:t>Hard-excludes private supervisor notes and wellbeing scores.</a:t>
+            </a:r>
+            <a:endParaRPr lang="en-US" sz="1800" dirty="0"/>
           </a:p>
           <a:p>
             <a:pPr marL="342900" indent="-342900">
               <a:spcAft>
-                <a:spcPts val="400"/>
+                <a:spcPts val="600"/>
               </a:spcAft>
               <a:buSzPct val="100000"/>
               <a:buChar char="•"/>
             </a:pPr>
             <a:r>
-              <a:rPr lang="en-US" sz="1300" dirty="0">
+              <a:rPr lang="en-US" sz="1800" dirty="0">
                 <a:solidFill>
                   <a:srgbClr val="334155"/>
                 </a:solidFill>
@@ -6850,9 +6939,9 @@
                 <a:ea typeface="Inter" pitchFamily="34" charset="-122"/>
                 <a:cs typeface="Inter" pitchFamily="34" charset="-120"/>
               </a:rPr>
-              <a:t>Bug? Feedback module, attach a screenshot.</a:t>
-            </a:r>
-            <a:endParaRPr lang="en-US" sz="1300" dirty="0"/>
+              <a:t>Cmd+P → Save as PDF for a clean document.</a:t>
+            </a:r>
+            <a:endParaRPr lang="en-US" sz="1800" dirty="0"/>
           </a:p>
         </p:txBody>
       </p:sp>
@@ -6904,7 +6993,7 @@
               <a:buNone/>
             </a:pPr>
             <a:r>
-              <a:rPr lang="en-US" sz="1100" dirty="0">
+              <a:rPr lang="en-US" sz="1300" dirty="0">
                 <a:solidFill>
                   <a:srgbClr val="64748B"/>
                 </a:solidFill>
@@ -6914,7 +7003,7 @@
               </a:rPr>
               <a:t>PhDapp · for supervisors</a:t>
             </a:r>
-            <a:endParaRPr lang="en-US" sz="1100" dirty="0"/>
+            <a:endParaRPr lang="en-US" sz="1300" dirty="0"/>
           </a:p>
         </p:txBody>
       </p:sp>
@@ -6943,7 +7032,7 @@
               <a:buNone/>
             </a:pPr>
             <a:r>
-              <a:rPr lang="en-US" sz="1100" dirty="0">
+              <a:rPr lang="en-US" sz="1300" dirty="0">
                 <a:solidFill>
                   <a:srgbClr val="64748B"/>
                 </a:solidFill>
@@ -6951,9 +7040,660 @@
                 <a:ea typeface="Inter" pitchFamily="34" charset="-122"/>
                 <a:cs typeface="Inter" pitchFamily="34" charset="-120"/>
               </a:rPr>
-              <a:t>16 / 16</a:t>
-            </a:r>
-            <a:endParaRPr lang="en-US" sz="1100" dirty="0"/>
+              <a:t>16 / 17</a:t>
+            </a:r>
+            <a:endParaRPr lang="en-US" sz="1300" dirty="0"/>
+          </a:p>
+        </p:txBody>
+      </p:sp>
+    </p:spTree>
+  </p:cSld>
+  <p:clrMapOvr>
+    <a:masterClrMapping/>
+  </p:clrMapOvr>
+</p:sld>
+</file>
+
+<file path=ppt/slides/slide17.xml><?xml version="1.0" encoding="utf-8"?>
+<p:sld xmlns:a="http://schemas.openxmlformats.org/drawingml/2006/main" xmlns:r="http://schemas.openxmlformats.org/officeDocument/2006/relationships" xmlns:p="http://schemas.openxmlformats.org/presentationml/2006/main">
+  <p:cSld name="Slide 17">
+    <p:bg>
+      <p:bgPr>
+        <a:solidFill>
+          <a:srgbClr val="FFFFFF"/>
+        </a:solidFill>
+      </p:bgPr>
+    </p:bg>
+    <p:spTree>
+      <p:nvGrpSpPr>
+        <p:cNvPr id="1" name=""/>
+        <p:cNvGrpSpPr/>
+        <p:nvPr/>
+      </p:nvGrpSpPr>
+      <p:grpSpPr>
+        <a:xfrm>
+          <a:off x="0" y="0"/>
+          <a:ext cx="0" cy="0"/>
+          <a:chOff x="0" y="0"/>
+          <a:chExt cx="0" cy="0"/>
+        </a:xfrm>
+      </p:grpSpPr>
+      <p:sp>
+        <p:nvSpPr>
+          <p:cNvPr id="2" name="Shape 0"/>
+          <p:cNvSpPr/>
+          <p:nvPr/>
+        </p:nvSpPr>
+        <p:spPr>
+          <a:xfrm>
+            <a:off x="548640" y="548640"/>
+            <a:ext cx="548640" cy="548640"/>
+          </a:xfrm>
+          <a:prstGeom prst="roundRect">
+            <a:avLst>
+              <a:gd name="adj" fmla="val 20000"/>
+            </a:avLst>
+          </a:prstGeom>
+          <a:solidFill>
+            <a:srgbClr val="2196F3"/>
+          </a:solidFill>
+          <a:ln/>
+        </p:spPr>
+      </p:sp>
+      <p:pic>
+        <p:nvPicPr>
+          <p:cNvPr id="3" name="Image 0" descr="preencoded.png">    </p:cNvPr>
+          <p:cNvPicPr>
+            <a:picLocks noChangeAspect="1"/>
+          </p:cNvPicPr>
+          <p:nvPr/>
+        </p:nvPicPr>
+        <p:blipFill>
+          <a:blip r:embed="rId1"/>
+          <a:stretch>
+            <a:fillRect/>
+          </a:stretch>
+        </p:blipFill>
+        <p:spPr>
+          <a:xfrm>
+            <a:off x="667512" y="667512"/>
+            <a:ext cx="310896" cy="310896"/>
+          </a:xfrm>
+          <a:prstGeom prst="rect">
+            <a:avLst/>
+          </a:prstGeom>
+        </p:spPr>
+      </p:pic>
+      <p:sp>
+        <p:nvSpPr>
+          <p:cNvPr id="4" name="Text 1"/>
+          <p:cNvSpPr/>
+          <p:nvPr/>
+        </p:nvSpPr>
+        <p:spPr>
+          <a:xfrm>
+            <a:off x="1261872" y="530352"/>
+            <a:ext cx="3657600" cy="292608"/>
+          </a:xfrm>
+          <a:prstGeom prst="rect">
+            <a:avLst/>
+          </a:prstGeom>
+          <a:noFill/>
+          <a:ln/>
+        </p:spPr>
+        <p:txBody>
+          <a:bodyPr wrap="square" lIns="0" tIns="0" rIns="0" bIns="0" rtlCol="0" anchor="ctr"/>
+          <a:lstStyle/>
+          <a:p>
+            <a:pPr indent="0" marL="0">
+              <a:buNone/>
+            </a:pPr>
+            <a:r>
+              <a:rPr lang="en-US" sz="1400" b="1" spc="400" kern="0" dirty="0">
+                <a:solidFill>
+                  <a:srgbClr val="2196F3"/>
+                </a:solidFill>
+                <a:latin typeface="Inter" pitchFamily="34" charset="0"/>
+                <a:ea typeface="Inter" pitchFamily="34" charset="-122"/>
+                <a:cs typeface="Inter" pitchFamily="34" charset="-120"/>
+              </a:rPr>
+              <a:t>TIPS</a:t>
+            </a:r>
+            <a:endParaRPr lang="en-US" sz="1400" dirty="0"/>
+          </a:p>
+        </p:txBody>
+      </p:sp>
+      <p:sp>
+        <p:nvSpPr>
+          <p:cNvPr id="5" name="Text 2"/>
+          <p:cNvSpPr/>
+          <p:nvPr/>
+        </p:nvSpPr>
+        <p:spPr>
+          <a:xfrm>
+            <a:off x="1261872" y="749808"/>
+            <a:ext cx="10381183" cy="713232"/>
+          </a:xfrm>
+          <a:prstGeom prst="rect">
+            <a:avLst/>
+          </a:prstGeom>
+          <a:noFill/>
+          <a:ln/>
+        </p:spPr>
+        <p:txBody>
+          <a:bodyPr wrap="square" lIns="0" tIns="0" rIns="0" bIns="0" rtlCol="0" anchor="ctr"/>
+          <a:lstStyle/>
+          <a:p>
+            <a:pPr indent="0" marL="0">
+              <a:buNone/>
+            </a:pPr>
+            <a:r>
+              <a:rPr lang="en-US" sz="4000" b="1" dirty="0">
+                <a:solidFill>
+                  <a:srgbClr val="0F172A"/>
+                </a:solidFill>
+                <a:latin typeface="Inter" pitchFamily="34" charset="0"/>
+                <a:ea typeface="Inter" pitchFamily="34" charset="-122"/>
+                <a:cs typeface="Inter" pitchFamily="34" charset="-120"/>
+              </a:rPr>
+              <a:t>Tips &amp; if something breaks</a:t>
+            </a:r>
+            <a:endParaRPr lang="en-US" sz="4000" dirty="0"/>
+          </a:p>
+        </p:txBody>
+      </p:sp>
+      <p:sp>
+        <p:nvSpPr>
+          <p:cNvPr id="6" name="Shape 3"/>
+          <p:cNvSpPr/>
+          <p:nvPr/>
+        </p:nvSpPr>
+        <p:spPr>
+          <a:xfrm>
+            <a:off x="548640" y="1828800"/>
+            <a:ext cx="5486400" cy="3931920"/>
+          </a:xfrm>
+          <a:prstGeom prst="rect">
+            <a:avLst/>
+          </a:prstGeom>
+          <a:solidFill>
+            <a:srgbClr val="FFFFFF"/>
+          </a:solidFill>
+          <a:ln w="9525">
+            <a:solidFill>
+              <a:srgbClr val="E2E8F0"/>
+            </a:solidFill>
+            <a:prstDash val="solid"/>
+          </a:ln>
+          <a:effectLst>
+            <a:outerShdw sx="100000" sy="100000" kx="0" ky="0" algn="bl" rotWithShape="0" blurRad="76200" dist="12700" dir="5400000">
+              <a:srgbClr val="94A3B8">
+                <a:alpha val="12000"/>
+              </a:srgbClr>
+            </a:outerShdw>
+          </a:effectLst>
+        </p:spPr>
+      </p:sp>
+      <p:sp>
+        <p:nvSpPr>
+          <p:cNvPr id="7" name="Shape 4"/>
+          <p:cNvSpPr/>
+          <p:nvPr/>
+        </p:nvSpPr>
+        <p:spPr>
+          <a:xfrm>
+            <a:off x="548640" y="1828800"/>
+            <a:ext cx="73152" cy="3931920"/>
+          </a:xfrm>
+          <a:prstGeom prst="rect">
+            <a:avLst/>
+          </a:prstGeom>
+          <a:solidFill>
+            <a:srgbClr val="2196F3"/>
+          </a:solidFill>
+          <a:ln/>
+        </p:spPr>
+      </p:sp>
+      <p:sp>
+        <p:nvSpPr>
+          <p:cNvPr id="8" name="Text 5"/>
+          <p:cNvSpPr/>
+          <p:nvPr/>
+        </p:nvSpPr>
+        <p:spPr>
+          <a:xfrm>
+            <a:off x="749808" y="1993392"/>
+            <a:ext cx="5166360" cy="594360"/>
+          </a:xfrm>
+          <a:prstGeom prst="rect">
+            <a:avLst/>
+          </a:prstGeom>
+          <a:noFill/>
+          <a:ln/>
+        </p:spPr>
+        <p:txBody>
+          <a:bodyPr wrap="square" lIns="0" tIns="0" rIns="0" bIns="0" rtlCol="0" anchor="ctr"/>
+          <a:lstStyle/>
+          <a:p>
+            <a:pPr indent="0" marL="0">
+              <a:buNone/>
+            </a:pPr>
+            <a:r>
+              <a:rPr lang="en-US" sz="2200" b="1" dirty="0">
+                <a:solidFill>
+                  <a:srgbClr val="0F172A"/>
+                </a:solidFill>
+                <a:latin typeface="Inter" pitchFamily="34" charset="0"/>
+                <a:ea typeface="Inter" pitchFamily="34" charset="-122"/>
+                <a:cs typeface="Inter" pitchFamily="34" charset="-120"/>
+              </a:rPr>
+              <a:t>Tips</a:t>
+            </a:r>
+            <a:endParaRPr lang="en-US" sz="2200" dirty="0"/>
+          </a:p>
+        </p:txBody>
+      </p:sp>
+      <p:sp>
+        <p:nvSpPr>
+          <p:cNvPr id="9" name="Text 6"/>
+          <p:cNvSpPr/>
+          <p:nvPr/>
+        </p:nvSpPr>
+        <p:spPr>
+          <a:xfrm>
+            <a:off x="777240" y="2697480"/>
+            <a:ext cx="5074920" cy="2926080"/>
+          </a:xfrm>
+          <a:prstGeom prst="rect">
+            <a:avLst/>
+          </a:prstGeom>
+          <a:noFill/>
+          <a:ln/>
+        </p:spPr>
+        <p:txBody>
+          <a:bodyPr wrap="square" lIns="0" tIns="0" rIns="0" bIns="0" rtlCol="0" anchor="t"/>
+          <a:lstStyle/>
+          <a:p>
+            <a:pPr marL="342900" indent="-342900">
+              <a:spcAft>
+                <a:spcPts val="600"/>
+              </a:spcAft>
+              <a:buSzPct val="100000"/>
+              <a:buChar char="•"/>
+            </a:pPr>
+            <a:r>
+              <a:rPr lang="en-US" sz="1800" dirty="0">
+                <a:solidFill>
+                  <a:srgbClr val="334155"/>
+                </a:solidFill>
+                <a:latin typeface="Inter" pitchFamily="34" charset="0"/>
+                <a:ea typeface="Inter" pitchFamily="34" charset="-122"/>
+                <a:cs typeface="Inter" pitchFamily="34" charset="-120"/>
+              </a:rPr>
+              <a:t>Use the ✨ Catch-up before a 1:1 — paste it into the meeting notes.</a:t>
+            </a:r>
+            <a:endParaRPr lang="en-US" sz="1800" dirty="0"/>
+          </a:p>
+          <a:p>
+            <a:pPr marL="342900" indent="-342900">
+              <a:spcAft>
+                <a:spcPts val="600"/>
+              </a:spcAft>
+              <a:buSzPct val="100000"/>
+              <a:buChar char="•"/>
+            </a:pPr>
+            <a:r>
+              <a:rPr lang="en-US" sz="1800" dirty="0">
+                <a:solidFill>
+                  <a:srgbClr val="334155"/>
+                </a:solidFill>
+                <a:latin typeface="Inter" pitchFamily="34" charset="0"/>
+                <a:ea typeface="Inter" pitchFamily="34" charset="-122"/>
+                <a:cs typeface="Inter" pitchFamily="34" charset="-120"/>
+              </a:rPr>
+              <a:t>Filter by group when you discuss a specific work-package.</a:t>
+            </a:r>
+            <a:endParaRPr lang="en-US" sz="1800" dirty="0"/>
+          </a:p>
+          <a:p>
+            <a:pPr marL="342900" indent="-342900">
+              <a:spcAft>
+                <a:spcPts val="600"/>
+              </a:spcAft>
+              <a:buSzPct val="100000"/>
+              <a:buChar char="•"/>
+            </a:pPr>
+            <a:r>
+              <a:rPr lang="en-US" sz="1800" dirty="0">
+                <a:solidFill>
+                  <a:srgbClr val="334155"/>
+                </a:solidFill>
+                <a:latin typeface="Inter" pitchFamily="34" charset="0"/>
+                <a:ea typeface="Inter" pitchFamily="34" charset="-122"/>
+                <a:cs typeface="Inter" pitchFamily="34" charset="-120"/>
+              </a:rPr>
+              <a:t>Comment on a task for nudges; chat for back-and-forth.</a:t>
+            </a:r>
+            <a:endParaRPr lang="en-US" sz="1800" dirty="0"/>
+          </a:p>
+          <a:p>
+            <a:pPr marL="342900" indent="-342900">
+              <a:spcAft>
+                <a:spcPts val="600"/>
+              </a:spcAft>
+              <a:buSzPct val="100000"/>
+              <a:buChar char="•"/>
+            </a:pPr>
+            <a:r>
+              <a:rPr lang="en-US" sz="1800" dirty="0">
+                <a:solidFill>
+                  <a:srgbClr val="334155"/>
+                </a:solidFill>
+                <a:latin typeface="Inter" pitchFamily="34" charset="0"/>
+                <a:ea typeface="Inter" pitchFamily="34" charset="-122"/>
+                <a:cs typeface="Inter" pitchFamily="34" charset="-120"/>
+              </a:rPr>
+              <a:t>Run the admin Backfill missing team channels once after this release.</a:t>
+            </a:r>
+            <a:endParaRPr lang="en-US" sz="1800" dirty="0"/>
+          </a:p>
+        </p:txBody>
+      </p:sp>
+      <p:sp>
+        <p:nvSpPr>
+          <p:cNvPr id="10" name="Shape 7"/>
+          <p:cNvSpPr/>
+          <p:nvPr/>
+        </p:nvSpPr>
+        <p:spPr>
+          <a:xfrm>
+            <a:off x="6400800" y="1828800"/>
+            <a:ext cx="5242255" cy="3931920"/>
+          </a:xfrm>
+          <a:prstGeom prst="rect">
+            <a:avLst/>
+          </a:prstGeom>
+          <a:solidFill>
+            <a:srgbClr val="FFFFFF"/>
+          </a:solidFill>
+          <a:ln w="9525">
+            <a:solidFill>
+              <a:srgbClr val="E2E8F0"/>
+            </a:solidFill>
+            <a:prstDash val="solid"/>
+          </a:ln>
+          <a:effectLst>
+            <a:outerShdw sx="100000" sy="100000" kx="0" ky="0" algn="bl" rotWithShape="0" blurRad="76200" dist="12700" dir="5400000">
+              <a:srgbClr val="94A3B8">
+                <a:alpha val="12000"/>
+              </a:srgbClr>
+            </a:outerShdw>
+          </a:effectLst>
+        </p:spPr>
+      </p:sp>
+      <p:sp>
+        <p:nvSpPr>
+          <p:cNvPr id="11" name="Shape 8"/>
+          <p:cNvSpPr/>
+          <p:nvPr/>
+        </p:nvSpPr>
+        <p:spPr>
+          <a:xfrm>
+            <a:off x="6400800" y="1828800"/>
+            <a:ext cx="73152" cy="3931920"/>
+          </a:xfrm>
+          <a:prstGeom prst="rect">
+            <a:avLst/>
+          </a:prstGeom>
+          <a:solidFill>
+            <a:srgbClr val="E2445C"/>
+          </a:solidFill>
+          <a:ln/>
+        </p:spPr>
+      </p:sp>
+      <p:sp>
+        <p:nvSpPr>
+          <p:cNvPr id="12" name="Text 9"/>
+          <p:cNvSpPr/>
+          <p:nvPr/>
+        </p:nvSpPr>
+        <p:spPr>
+          <a:xfrm>
+            <a:off x="6601968" y="1993392"/>
+            <a:ext cx="4922215" cy="594360"/>
+          </a:xfrm>
+          <a:prstGeom prst="rect">
+            <a:avLst/>
+          </a:prstGeom>
+          <a:noFill/>
+          <a:ln/>
+        </p:spPr>
+        <p:txBody>
+          <a:bodyPr wrap="square" lIns="0" tIns="0" rIns="0" bIns="0" rtlCol="0" anchor="ctr"/>
+          <a:lstStyle/>
+          <a:p>
+            <a:pPr indent="0" marL="0">
+              <a:buNone/>
+            </a:pPr>
+            <a:r>
+              <a:rPr lang="en-US" sz="2200" b="1" dirty="0">
+                <a:solidFill>
+                  <a:srgbClr val="0F172A"/>
+                </a:solidFill>
+                <a:latin typeface="Inter" pitchFamily="34" charset="0"/>
+                <a:ea typeface="Inter" pitchFamily="34" charset="-122"/>
+                <a:cs typeface="Inter" pitchFamily="34" charset="-120"/>
+              </a:rPr>
+              <a:t>Troubleshooting</a:t>
+            </a:r>
+            <a:endParaRPr lang="en-US" sz="2200" dirty="0"/>
+          </a:p>
+        </p:txBody>
+      </p:sp>
+      <p:sp>
+        <p:nvSpPr>
+          <p:cNvPr id="13" name="Text 10"/>
+          <p:cNvSpPr/>
+          <p:nvPr/>
+        </p:nvSpPr>
+        <p:spPr>
+          <a:xfrm>
+            <a:off x="6629400" y="2697480"/>
+            <a:ext cx="4876495" cy="2926080"/>
+          </a:xfrm>
+          <a:prstGeom prst="rect">
+            <a:avLst/>
+          </a:prstGeom>
+          <a:noFill/>
+          <a:ln/>
+        </p:spPr>
+        <p:txBody>
+          <a:bodyPr wrap="square" lIns="0" tIns="0" rIns="0" bIns="0" rtlCol="0" anchor="t"/>
+          <a:lstStyle/>
+          <a:p>
+            <a:pPr marL="342900" indent="-342900">
+              <a:spcAft>
+                <a:spcPts val="600"/>
+              </a:spcAft>
+              <a:buSzPct val="100000"/>
+              <a:buChar char="•"/>
+            </a:pPr>
+            <a:r>
+              <a:rPr lang="en-US" sz="1800" dirty="0">
+                <a:solidFill>
+                  <a:srgbClr val="334155"/>
+                </a:solidFill>
+                <a:latin typeface="Inter" pitchFamily="34" charset="0"/>
+                <a:ea typeface="Inter" pitchFamily="34" charset="-122"/>
+                <a:cs typeface="Inter" pitchFamily="34" charset="-120"/>
+              </a:rPr>
+              <a:t>Calendar sync to iCal: use https://www.google.com/calendar/syncselect to tick the shared calendar.</a:t>
+            </a:r>
+            <a:endParaRPr lang="en-US" sz="1800" dirty="0"/>
+          </a:p>
+          <a:p>
+            <a:pPr marL="342900" indent="-342900">
+              <a:spcAft>
+                <a:spcPts val="600"/>
+              </a:spcAft>
+              <a:buSzPct val="100000"/>
+              <a:buChar char="•"/>
+            </a:pPr>
+            <a:r>
+              <a:rPr lang="en-US" sz="1800" dirty="0">
+                <a:solidFill>
+                  <a:srgbClr val="334155"/>
+                </a:solidFill>
+                <a:latin typeface="Inter" pitchFamily="34" charset="0"/>
+                <a:ea typeface="Inter" pitchFamily="34" charset="-122"/>
+                <a:cs typeface="Inter" pitchFamily="34" charset="-120"/>
+              </a:rPr>
+              <a:t>If push to Google fails → ‘Sync calendar’ from the student profile retries ACL grants.</a:t>
+            </a:r>
+            <a:endParaRPr lang="en-US" sz="1800" dirty="0"/>
+          </a:p>
+          <a:p>
+            <a:pPr marL="342900" indent="-342900">
+              <a:spcAft>
+                <a:spcPts val="600"/>
+              </a:spcAft>
+              <a:buSzPct val="100000"/>
+              <a:buChar char="•"/>
+            </a:pPr>
+            <a:r>
+              <a:rPr lang="en-US" sz="1800" dirty="0">
+                <a:solidFill>
+                  <a:srgbClr val="334155"/>
+                </a:solidFill>
+                <a:latin typeface="Inter" pitchFamily="34" charset="0"/>
+                <a:ea typeface="Inter" pitchFamily="34" charset="-122"/>
+                <a:cs typeface="Inter" pitchFamily="34" charset="-120"/>
+              </a:rPr>
+              <a:t>Stale data → reload (polls reconcile within 8s).</a:t>
+            </a:r>
+            <a:endParaRPr lang="en-US" sz="1800" dirty="0"/>
+          </a:p>
+          <a:p>
+            <a:pPr marL="342900" indent="-342900">
+              <a:spcAft>
+                <a:spcPts val="600"/>
+              </a:spcAft>
+              <a:buSzPct val="100000"/>
+              <a:buChar char="•"/>
+            </a:pPr>
+            <a:r>
+              <a:rPr lang="en-US" sz="1800" dirty="0">
+                <a:solidFill>
+                  <a:srgbClr val="334155"/>
+                </a:solidFill>
+                <a:latin typeface="Inter" pitchFamily="34" charset="0"/>
+                <a:ea typeface="Inter" pitchFamily="34" charset="-122"/>
+                <a:cs typeface="Inter" pitchFamily="34" charset="-120"/>
+              </a:rPr>
+              <a:t>Bug? Feedback module, attach a screenshot.</a:t>
+            </a:r>
+            <a:endParaRPr lang="en-US" sz="1800" dirty="0"/>
+          </a:p>
+        </p:txBody>
+      </p:sp>
+      <p:sp>
+        <p:nvSpPr>
+          <p:cNvPr id="14" name="Shape 11"/>
+          <p:cNvSpPr/>
+          <p:nvPr/>
+        </p:nvSpPr>
+        <p:spPr>
+          <a:xfrm>
+            <a:off x="548640" y="6355080"/>
+            <a:ext cx="11094415" cy="0"/>
+          </a:xfrm>
+          <a:prstGeom prst="line">
+            <a:avLst/>
+          </a:prstGeom>
+          <a:noFill/>
+          <a:ln w="9525">
+            <a:solidFill>
+              <a:srgbClr val="E2E8F0"/>
+            </a:solidFill>
+            <a:prstDash val="solid"/>
+          </a:ln>
+        </p:spPr>
+      </p:sp>
+      <p:sp>
+        <p:nvSpPr>
+          <p:cNvPr id="15" name="Text 12"/>
+          <p:cNvSpPr/>
+          <p:nvPr/>
+        </p:nvSpPr>
+        <p:spPr>
+          <a:xfrm>
+            <a:off x="548640" y="6446520"/>
+            <a:ext cx="5486400" cy="274320"/>
+          </a:xfrm>
+          <a:prstGeom prst="rect">
+            <a:avLst/>
+          </a:prstGeom>
+          <a:noFill/>
+          <a:ln/>
+        </p:spPr>
+        <p:txBody>
+          <a:bodyPr wrap="square" lIns="0" tIns="0" rIns="0" bIns="0" rtlCol="0" anchor="ctr"/>
+          <a:lstStyle/>
+          <a:p>
+            <a:pPr indent="0" marL="0">
+              <a:buNone/>
+            </a:pPr>
+            <a:r>
+              <a:rPr lang="en-US" sz="1300" dirty="0">
+                <a:solidFill>
+                  <a:srgbClr val="64748B"/>
+                </a:solidFill>
+                <a:latin typeface="Inter" pitchFamily="34" charset="0"/>
+                <a:ea typeface="Inter" pitchFamily="34" charset="-122"/>
+                <a:cs typeface="Inter" pitchFamily="34" charset="-120"/>
+              </a:rPr>
+              <a:t>PhDapp · for supervisors</a:t>
+            </a:r>
+            <a:endParaRPr lang="en-US" sz="1300" dirty="0"/>
+          </a:p>
+        </p:txBody>
+      </p:sp>
+      <p:sp>
+        <p:nvSpPr>
+          <p:cNvPr id="16" name="Text 13"/>
+          <p:cNvSpPr/>
+          <p:nvPr/>
+        </p:nvSpPr>
+        <p:spPr>
+          <a:xfrm>
+            <a:off x="9814255" y="6446520"/>
+            <a:ext cx="1828800" cy="274320"/>
+          </a:xfrm>
+          <a:prstGeom prst="rect">
+            <a:avLst/>
+          </a:prstGeom>
+          <a:noFill/>
+          <a:ln/>
+        </p:spPr>
+        <p:txBody>
+          <a:bodyPr wrap="square" lIns="0" tIns="0" rIns="0" bIns="0" rtlCol="0" anchor="ctr"/>
+          <a:lstStyle/>
+          <a:p>
+            <a:pPr algn="r" indent="0" marL="0">
+              <a:buNone/>
+            </a:pPr>
+            <a:r>
+              <a:rPr lang="en-US" sz="1300" dirty="0">
+                <a:solidFill>
+                  <a:srgbClr val="64748B"/>
+                </a:solidFill>
+                <a:latin typeface="Inter" pitchFamily="34" charset="0"/>
+                <a:ea typeface="Inter" pitchFamily="34" charset="-122"/>
+                <a:cs typeface="Inter" pitchFamily="34" charset="-120"/>
+              </a:rPr>
+              <a:t>17 / 17</a:t>
+            </a:r>
+            <a:endParaRPr lang="en-US" sz="1300" dirty="0"/>
           </a:p>
         </p:txBody>
       </p:sp>
@@ -7083,7 +7823,7 @@
         <p:spPr>
           <a:xfrm>
             <a:off x="1261872" y="749808"/>
-            <a:ext cx="10381183" cy="640080"/>
+            <a:ext cx="10381183" cy="713232"/>
           </a:xfrm>
           <a:prstGeom prst="rect">
             <a:avLst/>
@@ -7099,7 +7839,7 @@
               <a:buNone/>
             </a:pPr>
             <a:r>
-              <a:rPr lang="en-US" sz="3600" b="1" dirty="0">
+              <a:rPr lang="en-US" sz="4000" b="1" dirty="0">
                 <a:solidFill>
                   <a:srgbClr val="0F172A"/>
                 </a:solidFill>
@@ -7109,7 +7849,7 @@
               </a:rPr>
               <a:t>What PhDapp is</a:t>
             </a:r>
-            <a:endParaRPr lang="en-US" sz="3600" dirty="0"/>
+            <a:endParaRPr lang="en-US" sz="4000" dirty="0"/>
           </a:p>
         </p:txBody>
       </p:sp>
@@ -7122,7 +7862,7 @@
         <p:spPr>
           <a:xfrm>
             <a:off x="548640" y="1508760"/>
-            <a:ext cx="11094415" cy="731520"/>
+            <a:ext cx="11094415" cy="822960"/>
           </a:xfrm>
           <a:prstGeom prst="rect">
             <a:avLst/>
@@ -7138,7 +7878,7 @@
               <a:buNone/>
             </a:pPr>
             <a:r>
-              <a:rPr lang="en-US" sz="1600" i="1" dirty="0">
+              <a:rPr lang="en-US" sz="2000" i="1" dirty="0">
                 <a:solidFill>
                   <a:srgbClr val="334155"/>
                 </a:solidFill>
@@ -7148,7 +7888,7 @@
               </a:rPr>
               <a:t>A single workspace covering everything you do day-to-day with PhD students.</a:t>
             </a:r>
-            <a:endParaRPr lang="en-US" sz="1600" dirty="0"/>
+            <a:endParaRPr lang="en-US" sz="2000" dirty="0"/>
           </a:p>
         </p:txBody>
       </p:sp>
@@ -7213,7 +7953,7 @@
         <p:spPr>
           <a:xfrm>
             <a:off x="749808" y="2359152"/>
-            <a:ext cx="2286000" cy="502920"/>
+            <a:ext cx="2286000" cy="594360"/>
           </a:xfrm>
           <a:prstGeom prst="rect">
             <a:avLst/>
@@ -7229,7 +7969,7 @@
               <a:buNone/>
             </a:pPr>
             <a:r>
-              <a:rPr lang="en-US" sz="1800" b="1" dirty="0">
+              <a:rPr lang="en-US" sz="2200" b="1" dirty="0">
                 <a:solidFill>
                   <a:srgbClr val="0F172A"/>
                 </a:solidFill>
@@ -7239,7 +7979,7 @@
               </a:rPr>
               <a:t>Students</a:t>
             </a:r>
-            <a:endParaRPr lang="en-US" sz="1800" dirty="0"/>
+            <a:endParaRPr lang="en-US" sz="2200" dirty="0"/>
           </a:p>
         </p:txBody>
       </p:sp>
@@ -7251,8 +7991,8 @@
         </p:nvSpPr>
         <p:spPr>
           <a:xfrm>
-            <a:off x="749808" y="2743200"/>
-            <a:ext cx="2286000" cy="1097280"/>
+            <a:off x="749808" y="3063240"/>
+            <a:ext cx="2286000" cy="749808"/>
           </a:xfrm>
           <a:prstGeom prst="rect">
             <a:avLst/>
@@ -7271,7 +8011,7 @@
               <a:buNone/>
             </a:pPr>
             <a:r>
-              <a:rPr lang="en-US" sz="1400" dirty="0">
+              <a:rPr lang="en-US" sz="1800" dirty="0">
                 <a:solidFill>
                   <a:srgbClr val="334155"/>
                 </a:solidFill>
@@ -7281,7 +8021,7 @@
               </a:rPr>
               <a:t>Per-student profile with team, thesis, publications, reading.</a:t>
             </a:r>
-            <a:endParaRPr lang="en-US" sz="1400" dirty="0"/>
+            <a:endParaRPr lang="en-US" sz="1800" dirty="0"/>
           </a:p>
         </p:txBody>
       </p:sp>
@@ -7346,7 +8086,7 @@
         <p:spPr>
           <a:xfrm>
             <a:off x="3584448" y="2359152"/>
-            <a:ext cx="2286000" cy="502920"/>
+            <a:ext cx="2286000" cy="594360"/>
           </a:xfrm>
           <a:prstGeom prst="rect">
             <a:avLst/>
@@ -7362,7 +8102,7 @@
               <a:buNone/>
             </a:pPr>
             <a:r>
-              <a:rPr lang="en-US" sz="1800" b="1" dirty="0">
+              <a:rPr lang="en-US" sz="2200" b="1" dirty="0">
                 <a:solidFill>
                   <a:srgbClr val="0F172A"/>
                 </a:solidFill>
@@ -7372,7 +8112,7 @@
               </a:rPr>
               <a:t>Tasks</a:t>
             </a:r>
-            <a:endParaRPr lang="en-US" sz="1800" dirty="0"/>
+            <a:endParaRPr lang="en-US" sz="2200" dirty="0"/>
           </a:p>
         </p:txBody>
       </p:sp>
@@ -7384,8 +8124,8 @@
         </p:nvSpPr>
         <p:spPr>
           <a:xfrm>
-            <a:off x="3584448" y="2743200"/>
-            <a:ext cx="2286000" cy="1097280"/>
+            <a:off x="3584448" y="3063240"/>
+            <a:ext cx="2286000" cy="749808"/>
           </a:xfrm>
           <a:prstGeom prst="rect">
             <a:avLst/>
@@ -7404,7 +8144,7 @@
               <a:buNone/>
             </a:pPr>
             <a:r>
-              <a:rPr lang="en-US" sz="1400" dirty="0">
+              <a:rPr lang="en-US" sz="1800" dirty="0">
                 <a:solidFill>
                   <a:srgbClr val="334155"/>
                 </a:solidFill>
@@ -7414,7 +8154,7 @@
               </a:rPr>
               <a:t>Board / List / Gantt with dependencies, groups, sub-tasks.</a:t>
             </a:r>
-            <a:endParaRPr lang="en-US" sz="1400" dirty="0"/>
+            <a:endParaRPr lang="en-US" sz="1800" dirty="0"/>
           </a:p>
         </p:txBody>
       </p:sp>
@@ -7479,7 +8219,7 @@
         <p:spPr>
           <a:xfrm>
             <a:off x="6419088" y="2359152"/>
-            <a:ext cx="2286000" cy="502920"/>
+            <a:ext cx="2286000" cy="594360"/>
           </a:xfrm>
           <a:prstGeom prst="rect">
             <a:avLst/>
@@ -7495,7 +8235,7 @@
               <a:buNone/>
             </a:pPr>
             <a:r>
-              <a:rPr lang="en-US" sz="1800" b="1" dirty="0">
+              <a:rPr lang="en-US" sz="2200" b="1" dirty="0">
                 <a:solidFill>
                   <a:srgbClr val="0F172A"/>
                 </a:solidFill>
@@ -7505,7 +8245,7 @@
               </a:rPr>
               <a:t>Calendar</a:t>
             </a:r>
-            <a:endParaRPr lang="en-US" sz="1800" dirty="0"/>
+            <a:endParaRPr lang="en-US" sz="2200" dirty="0"/>
           </a:p>
         </p:txBody>
       </p:sp>
@@ -7517,8 +8257,8 @@
         </p:nvSpPr>
         <p:spPr>
           <a:xfrm>
-            <a:off x="6419088" y="2743200"/>
-            <a:ext cx="2286000" cy="1097280"/>
+            <a:off x="6419088" y="3063240"/>
+            <a:ext cx="2286000" cy="749808"/>
           </a:xfrm>
           <a:prstGeom prst="rect">
             <a:avLst/>
@@ -7537,7 +8277,7 @@
               <a:buNone/>
             </a:pPr>
             <a:r>
-              <a:rPr lang="en-US" sz="1400" dirty="0">
+              <a:rPr lang="en-US" sz="1800" dirty="0">
                 <a:solidFill>
                   <a:srgbClr val="334155"/>
                 </a:solidFill>
@@ -7547,7 +8287,7 @@
               </a:rPr>
               <a:t>Shared per-student Google calendar + structured 1:1 meetings.</a:t>
             </a:r>
-            <a:endParaRPr lang="en-US" sz="1400" dirty="0"/>
+            <a:endParaRPr lang="en-US" sz="1800" dirty="0"/>
           </a:p>
         </p:txBody>
       </p:sp>
@@ -7612,7 +8352,7 @@
         <p:spPr>
           <a:xfrm>
             <a:off x="9253728" y="2359152"/>
-            <a:ext cx="2286000" cy="502920"/>
+            <a:ext cx="2286000" cy="594360"/>
           </a:xfrm>
           <a:prstGeom prst="rect">
             <a:avLst/>
@@ -7628,7 +8368,7 @@
               <a:buNone/>
             </a:pPr>
             <a:r>
-              <a:rPr lang="en-US" sz="1800" b="1" dirty="0">
+              <a:rPr lang="en-US" sz="2200" b="1" dirty="0">
                 <a:solidFill>
                   <a:srgbClr val="0F172A"/>
                 </a:solidFill>
@@ -7638,7 +8378,7 @@
               </a:rPr>
               <a:t>Chat</a:t>
             </a:r>
-            <a:endParaRPr lang="en-US" sz="1800" dirty="0"/>
+            <a:endParaRPr lang="en-US" sz="2200" dirty="0"/>
           </a:p>
         </p:txBody>
       </p:sp>
@@ -7650,8 +8390,8 @@
         </p:nvSpPr>
         <p:spPr>
           <a:xfrm>
-            <a:off x="9253728" y="2743200"/>
-            <a:ext cx="2286000" cy="1097280"/>
+            <a:off x="9253728" y="3063240"/>
+            <a:ext cx="2286000" cy="749808"/>
           </a:xfrm>
           <a:prstGeom prst="rect">
             <a:avLst/>
@@ -7670,7 +8410,7 @@
               <a:buNone/>
             </a:pPr>
             <a:r>
-              <a:rPr lang="en-US" sz="1400" dirty="0">
+              <a:rPr lang="en-US" sz="1800" dirty="0">
                 <a:solidFill>
                   <a:srgbClr val="334155"/>
                 </a:solidFill>
@@ -7680,7 +8420,7 @@
               </a:rPr>
               <a:t>Channels per student / co-supervisors; auto Team channel.</a:t>
             </a:r>
-            <a:endParaRPr lang="en-US" sz="1400" dirty="0"/>
+            <a:endParaRPr lang="en-US" sz="1800" dirty="0"/>
           </a:p>
         </p:txBody>
       </p:sp>
@@ -7745,7 +8485,7 @@
         <p:spPr>
           <a:xfrm>
             <a:off x="749808" y="4416552"/>
-            <a:ext cx="2286000" cy="502920"/>
+            <a:ext cx="2286000" cy="594360"/>
           </a:xfrm>
           <a:prstGeom prst="rect">
             <a:avLst/>
@@ -7761,7 +8501,7 @@
               <a:buNone/>
             </a:pPr>
             <a:r>
-              <a:rPr lang="en-US" sz="1800" b="1" dirty="0">
+              <a:rPr lang="en-US" sz="2200" b="1" dirty="0">
                 <a:solidFill>
                   <a:srgbClr val="0F172A"/>
                 </a:solidFill>
@@ -7771,7 +8511,7 @@
               </a:rPr>
               <a:t>Reading</a:t>
             </a:r>
-            <a:endParaRPr lang="en-US" sz="1800" dirty="0"/>
+            <a:endParaRPr lang="en-US" sz="2200" dirty="0"/>
           </a:p>
         </p:txBody>
       </p:sp>
@@ -7783,8 +8523,8 @@
         </p:nvSpPr>
         <p:spPr>
           <a:xfrm>
-            <a:off x="749808" y="4800600"/>
-            <a:ext cx="2286000" cy="1097280"/>
+            <a:off x="749808" y="5120640"/>
+            <a:ext cx="2286000" cy="749808"/>
           </a:xfrm>
           <a:prstGeom prst="rect">
             <a:avLst/>
@@ -7803,7 +8543,7 @@
               <a:buNone/>
             </a:pPr>
             <a:r>
-              <a:rPr lang="en-US" sz="1400" dirty="0">
+              <a:rPr lang="en-US" sz="1800" dirty="0">
                 <a:solidFill>
                   <a:srgbClr val="334155"/>
                 </a:solidFill>
@@ -7813,7 +8553,7 @@
               </a:rPr>
               <a:t>Reading list with student-proposal approval flow.</a:t>
             </a:r>
-            <a:endParaRPr lang="en-US" sz="1400" dirty="0"/>
+            <a:endParaRPr lang="en-US" sz="1800" dirty="0"/>
           </a:p>
         </p:txBody>
       </p:sp>
@@ -7878,7 +8618,7 @@
         <p:spPr>
           <a:xfrm>
             <a:off x="3584448" y="4416552"/>
-            <a:ext cx="2286000" cy="502920"/>
+            <a:ext cx="2286000" cy="594360"/>
           </a:xfrm>
           <a:prstGeom prst="rect">
             <a:avLst/>
@@ -7894,7 +8634,7 @@
               <a:buNone/>
             </a:pPr>
             <a:r>
-              <a:rPr lang="en-US" sz="1800" b="1" dirty="0">
+              <a:rPr lang="en-US" sz="2200" b="1" dirty="0">
                 <a:solidFill>
                   <a:srgbClr val="0F172A"/>
                 </a:solidFill>
@@ -7904,7 +8644,7 @@
               </a:rPr>
               <a:t>Check-ins</a:t>
             </a:r>
-            <a:endParaRPr lang="en-US" sz="1800" dirty="0"/>
+            <a:endParaRPr lang="en-US" sz="2200" dirty="0"/>
           </a:p>
         </p:txBody>
       </p:sp>
@@ -7916,8 +8656,8 @@
         </p:nvSpPr>
         <p:spPr>
           <a:xfrm>
-            <a:off x="3584448" y="4800600"/>
-            <a:ext cx="2286000" cy="1097280"/>
+            <a:off x="3584448" y="5120640"/>
+            <a:ext cx="2286000" cy="749808"/>
           </a:xfrm>
           <a:prstGeom prst="rect">
             <a:avLst/>
@@ -7936,7 +8676,7 @@
               <a:buNone/>
             </a:pPr>
             <a:r>
-              <a:rPr lang="en-US" sz="1400" dirty="0">
+              <a:rPr lang="en-US" sz="1800" dirty="0">
                 <a:solidFill>
                   <a:srgbClr val="334155"/>
                 </a:solidFill>
@@ -7946,7 +8686,7 @@
               </a:rPr>
               <a:t>Weekly reflection + private wellbeing score.</a:t>
             </a:r>
-            <a:endParaRPr lang="en-US" sz="1400" dirty="0"/>
+            <a:endParaRPr lang="en-US" sz="1800" dirty="0"/>
           </a:p>
         </p:txBody>
       </p:sp>
@@ -8011,7 +8751,7 @@
         <p:spPr>
           <a:xfrm>
             <a:off x="6419088" y="4416552"/>
-            <a:ext cx="2286000" cy="502920"/>
+            <a:ext cx="2286000" cy="594360"/>
           </a:xfrm>
           <a:prstGeom prst="rect">
             <a:avLst/>
@@ -8027,7 +8767,7 @@
               <a:buNone/>
             </a:pPr>
             <a:r>
-              <a:rPr lang="en-US" sz="1800" b="1" dirty="0">
+              <a:rPr lang="en-US" sz="2200" b="1" dirty="0">
                 <a:solidFill>
                   <a:srgbClr val="0F172A"/>
                 </a:solidFill>
@@ -8037,7 +8777,7 @@
               </a:rPr>
               <a:t>Annual review</a:t>
             </a:r>
-            <a:endParaRPr lang="en-US" sz="1800" dirty="0"/>
+            <a:endParaRPr lang="en-US" sz="2200" dirty="0"/>
           </a:p>
         </p:txBody>
       </p:sp>
@@ -8049,8 +8789,8 @@
         </p:nvSpPr>
         <p:spPr>
           <a:xfrm>
-            <a:off x="6419088" y="4800600"/>
-            <a:ext cx="2286000" cy="1097280"/>
+            <a:off x="6419088" y="5120640"/>
+            <a:ext cx="2286000" cy="749808"/>
           </a:xfrm>
           <a:prstGeom prst="rect">
             <a:avLst/>
@@ -8069,7 +8809,7 @@
               <a:buNone/>
             </a:pPr>
             <a:r>
-              <a:rPr lang="en-US" sz="1400" dirty="0">
+              <a:rPr lang="en-US" sz="1800" dirty="0">
                 <a:solidFill>
                   <a:srgbClr val="334155"/>
                 </a:solidFill>
@@ -8079,7 +8819,7 @@
               </a:rPr>
               <a:t>Printable per-student summary, ready as PDF.</a:t>
             </a:r>
-            <a:endParaRPr lang="en-US" sz="1400" dirty="0"/>
+            <a:endParaRPr lang="en-US" sz="1800" dirty="0"/>
           </a:p>
         </p:txBody>
       </p:sp>
@@ -8144,7 +8884,7 @@
         <p:spPr>
           <a:xfrm>
             <a:off x="9253728" y="4416552"/>
-            <a:ext cx="2286000" cy="502920"/>
+            <a:ext cx="2286000" cy="594360"/>
           </a:xfrm>
           <a:prstGeom prst="rect">
             <a:avLst/>
@@ -8160,7 +8900,7 @@
               <a:buNone/>
             </a:pPr>
             <a:r>
-              <a:rPr lang="en-US" sz="1800" b="1" dirty="0">
+              <a:rPr lang="en-US" sz="2200" b="1" dirty="0">
                 <a:solidFill>
                   <a:srgbClr val="0F172A"/>
                 </a:solidFill>
@@ -8170,7 +8910,7 @@
               </a:rPr>
               <a:t>Activity log</a:t>
             </a:r>
-            <a:endParaRPr lang="en-US" sz="1800" dirty="0"/>
+            <a:endParaRPr lang="en-US" sz="2200" dirty="0"/>
           </a:p>
         </p:txBody>
       </p:sp>
@@ -8182,8 +8922,8 @@
         </p:nvSpPr>
         <p:spPr>
           <a:xfrm>
-            <a:off x="9253728" y="4800600"/>
-            <a:ext cx="2286000" cy="1097280"/>
+            <a:off x="9253728" y="5120640"/>
+            <a:ext cx="2286000" cy="749808"/>
           </a:xfrm>
           <a:prstGeom prst="rect">
             <a:avLst/>
@@ -8202,7 +8942,7 @@
               <a:buNone/>
             </a:pPr>
             <a:r>
-              <a:rPr lang="en-US" sz="1400" dirty="0">
+              <a:rPr lang="en-US" sz="1800" dirty="0">
                 <a:solidFill>
                   <a:srgbClr val="334155"/>
                 </a:solidFill>
@@ -8212,7 +8952,7 @@
               </a:rPr>
               <a:t>Audit trail of who did what, when.</a:t>
             </a:r>
-            <a:endParaRPr lang="en-US" sz="1400" dirty="0"/>
+            <a:endParaRPr lang="en-US" sz="1800" dirty="0"/>
           </a:p>
         </p:txBody>
       </p:sp>
@@ -8264,7 +9004,7 @@
               <a:buNone/>
             </a:pPr>
             <a:r>
-              <a:rPr lang="en-US" sz="1100" dirty="0">
+              <a:rPr lang="en-US" sz="1300" dirty="0">
                 <a:solidFill>
                   <a:srgbClr val="64748B"/>
                 </a:solidFill>
@@ -8274,7 +9014,7 @@
               </a:rPr>
               <a:t>PhDapp · for supervisors</a:t>
             </a:r>
-            <a:endParaRPr lang="en-US" sz="1100" dirty="0"/>
+            <a:endParaRPr lang="en-US" sz="1300" dirty="0"/>
           </a:p>
         </p:txBody>
       </p:sp>
@@ -8303,7 +9043,7 @@
               <a:buNone/>
             </a:pPr>
             <a:r>
-              <a:rPr lang="en-US" sz="1100" dirty="0">
+              <a:rPr lang="en-US" sz="1300" dirty="0">
                 <a:solidFill>
                   <a:srgbClr val="64748B"/>
                 </a:solidFill>
@@ -8311,9 +9051,9 @@
                 <a:ea typeface="Inter" pitchFamily="34" charset="-122"/>
                 <a:cs typeface="Inter" pitchFamily="34" charset="-120"/>
               </a:rPr>
-              <a:t>2 / 16</a:t>
-            </a:r>
-            <a:endParaRPr lang="en-US" sz="1100" dirty="0"/>
+              <a:t>2 / 17</a:t>
+            </a:r>
+            <a:endParaRPr lang="en-US" sz="1300" dirty="0"/>
           </a:p>
         </p:txBody>
       </p:sp>
@@ -8443,7 +9183,7 @@
         <p:spPr>
           <a:xfrm>
             <a:off x="1261872" y="749808"/>
-            <a:ext cx="10381183" cy="640080"/>
+            <a:ext cx="10381183" cy="713232"/>
           </a:xfrm>
           <a:prstGeom prst="rect">
             <a:avLst/>
@@ -8459,7 +9199,7 @@
               <a:buNone/>
             </a:pPr>
             <a:r>
-              <a:rPr lang="en-US" sz="3600" b="1" dirty="0">
+              <a:rPr lang="en-US" sz="4000" b="1" dirty="0">
                 <a:solidFill>
                   <a:srgbClr val="0F172A"/>
                 </a:solidFill>
@@ -8469,7 +9209,7 @@
               </a:rPr>
               <a:t>Roles &amp; access</a:t>
             </a:r>
-            <a:endParaRPr lang="en-US" sz="3600" dirty="0"/>
+            <a:endParaRPr lang="en-US" sz="4000" dirty="0"/>
           </a:p>
         </p:txBody>
       </p:sp>
@@ -8482,7 +9222,7 @@
         <p:spPr>
           <a:xfrm>
             <a:off x="548640" y="1508760"/>
-            <a:ext cx="11094415" cy="731520"/>
+            <a:ext cx="11094415" cy="822960"/>
           </a:xfrm>
           <a:prstGeom prst="rect">
             <a:avLst/>
@@ -8498,7 +9238,7 @@
               <a:buNone/>
             </a:pPr>
             <a:r>
-              <a:rPr lang="en-US" sz="1600" i="1" dirty="0">
+              <a:rPr lang="en-US" sz="2000" i="1" dirty="0">
                 <a:solidFill>
                   <a:srgbClr val="334155"/>
                 </a:solidFill>
@@ -8508,7 +9248,7 @@
               </a:rPr>
               <a:t>Same student, different views. Roles set what each member can see and do.</a:t>
             </a:r>
-            <a:endParaRPr lang="en-US" sz="1600" dirty="0"/>
+            <a:endParaRPr lang="en-US" sz="2000" dirty="0"/>
           </a:p>
         </p:txBody>
       </p:sp>
@@ -8573,7 +9313,7 @@
         <p:spPr>
           <a:xfrm>
             <a:off x="749808" y="2039112"/>
-            <a:ext cx="3291840" cy="502920"/>
+            <a:ext cx="3291840" cy="594360"/>
           </a:xfrm>
           <a:prstGeom prst="rect">
             <a:avLst/>
@@ -8589,7 +9329,7 @@
               <a:buNone/>
             </a:pPr>
             <a:r>
-              <a:rPr lang="en-US" sz="1800" b="1" dirty="0">
+              <a:rPr lang="en-US" sz="2200" b="1" dirty="0">
                 <a:solidFill>
                   <a:srgbClr val="0F172A"/>
                 </a:solidFill>
@@ -8599,7 +9339,7 @@
               </a:rPr>
               <a:t>Supervisor</a:t>
             </a:r>
-            <a:endParaRPr lang="en-US" sz="1800" dirty="0"/>
+            <a:endParaRPr lang="en-US" sz="2200" dirty="0"/>
           </a:p>
         </p:txBody>
       </p:sp>
@@ -8611,8 +9351,8 @@
         </p:nvSpPr>
         <p:spPr>
           <a:xfrm>
-            <a:off x="749808" y="2423160"/>
-            <a:ext cx="3291840" cy="1097280"/>
+            <a:off x="749808" y="2743200"/>
+            <a:ext cx="3291840" cy="749808"/>
           </a:xfrm>
           <a:prstGeom prst="rect">
             <a:avLst/>
@@ -8631,7 +9371,7 @@
               <a:buNone/>
             </a:pPr>
             <a:r>
-              <a:rPr lang="en-US" sz="1400" dirty="0">
+              <a:rPr lang="en-US" sz="1800" dirty="0">
                 <a:solidFill>
                   <a:srgbClr val="334155"/>
                 </a:solidFill>
@@ -8641,7 +9381,7 @@
               </a:rPr>
               <a:t>Primary owner of a student. Full read + write.</a:t>
             </a:r>
-            <a:endParaRPr lang="en-US" sz="1400" dirty="0"/>
+            <a:endParaRPr lang="en-US" sz="1800" dirty="0"/>
           </a:p>
         </p:txBody>
       </p:sp>
@@ -8706,7 +9446,7 @@
         <p:spPr>
           <a:xfrm>
             <a:off x="4544568" y="2039112"/>
-            <a:ext cx="3291840" cy="502920"/>
+            <a:ext cx="3291840" cy="594360"/>
           </a:xfrm>
           <a:prstGeom prst="rect">
             <a:avLst/>
@@ -8722,7 +9462,7 @@
               <a:buNone/>
             </a:pPr>
             <a:r>
-              <a:rPr lang="en-US" sz="1800" b="1" dirty="0">
+              <a:rPr lang="en-US" sz="2200" b="1" dirty="0">
                 <a:solidFill>
                   <a:srgbClr val="0F172A"/>
                 </a:solidFill>
@@ -8732,7 +9472,7 @@
               </a:rPr>
               <a:t>Co-supervisor</a:t>
             </a:r>
-            <a:endParaRPr lang="en-US" sz="1800" dirty="0"/>
+            <a:endParaRPr lang="en-US" sz="2200" dirty="0"/>
           </a:p>
         </p:txBody>
       </p:sp>
@@ -8744,8 +9484,8 @@
         </p:nvSpPr>
         <p:spPr>
           <a:xfrm>
-            <a:off x="4544568" y="2423160"/>
-            <a:ext cx="3291840" cy="1097280"/>
+            <a:off x="4544568" y="2743200"/>
+            <a:ext cx="3291840" cy="749808"/>
           </a:xfrm>
           <a:prstGeom prst="rect">
             <a:avLst/>
@@ -8764,7 +9504,7 @@
               <a:buNone/>
             </a:pPr>
             <a:r>
-              <a:rPr lang="en-US" sz="1400" dirty="0">
+              <a:rPr lang="en-US" sz="1800" dirty="0">
                 <a:solidFill>
                   <a:srgbClr val="334155"/>
                 </a:solidFill>
@@ -8774,7 +9514,7 @@
               </a:rPr>
               <a:t>Also writes. Sits in the team chat. Co-decides.</a:t>
             </a:r>
-            <a:endParaRPr lang="en-US" sz="1400" dirty="0"/>
+            <a:endParaRPr lang="en-US" sz="1800" dirty="0"/>
           </a:p>
         </p:txBody>
       </p:sp>
@@ -8839,7 +9579,7 @@
         <p:spPr>
           <a:xfrm>
             <a:off x="8339328" y="2039112"/>
-            <a:ext cx="3291840" cy="502920"/>
+            <a:ext cx="3291840" cy="594360"/>
           </a:xfrm>
           <a:prstGeom prst="rect">
             <a:avLst/>
@@ -8855,7 +9595,7 @@
               <a:buNone/>
             </a:pPr>
             <a:r>
-              <a:rPr lang="en-US" sz="1800" b="1" dirty="0">
+              <a:rPr lang="en-US" sz="2200" b="1" dirty="0">
                 <a:solidFill>
                   <a:srgbClr val="0F172A"/>
                 </a:solidFill>
@@ -8865,7 +9605,7 @@
               </a:rPr>
               <a:t>Team advisor</a:t>
             </a:r>
-            <a:endParaRPr lang="en-US" sz="1800" dirty="0"/>
+            <a:endParaRPr lang="en-US" sz="2200" dirty="0"/>
           </a:p>
         </p:txBody>
       </p:sp>
@@ -8877,8 +9617,8 @@
         </p:nvSpPr>
         <p:spPr>
           <a:xfrm>
-            <a:off x="8339328" y="2423160"/>
-            <a:ext cx="3291840" cy="1097280"/>
+            <a:off x="8339328" y="2743200"/>
+            <a:ext cx="3291840" cy="749808"/>
           </a:xfrm>
           <a:prstGeom prst="rect">
             <a:avLst/>
@@ -8897,7 +9637,7 @@
               <a:buNone/>
             </a:pPr>
             <a:r>
-              <a:rPr lang="en-US" sz="1400" dirty="0">
+              <a:rPr lang="en-US" sz="1800" dirty="0">
                 <a:solidFill>
                   <a:srgbClr val="334155"/>
                 </a:solidFill>
@@ -8907,7 +9647,7 @@
               </a:rPr>
               <a:t>Senior peer, read-only — including private notes and wellbeing. Posts to the Advisor Suggestions thread.</a:t>
             </a:r>
-            <a:endParaRPr lang="en-US" sz="1400" dirty="0"/>
+            <a:endParaRPr lang="en-US" sz="1800" dirty="0"/>
           </a:p>
         </p:txBody>
       </p:sp>
@@ -8972,7 +9712,7 @@
         <p:spPr>
           <a:xfrm>
             <a:off x="749808" y="4050792"/>
-            <a:ext cx="3291840" cy="502920"/>
+            <a:ext cx="3291840" cy="594360"/>
           </a:xfrm>
           <a:prstGeom prst="rect">
             <a:avLst/>
@@ -8988,7 +9728,7 @@
               <a:buNone/>
             </a:pPr>
             <a:r>
-              <a:rPr lang="en-US" sz="1800" b="1" dirty="0">
+              <a:rPr lang="en-US" sz="2200" b="1" dirty="0">
                 <a:solidFill>
                   <a:srgbClr val="0F172A"/>
                 </a:solidFill>
@@ -8998,7 +9738,7 @@
               </a:rPr>
               <a:t>External advisor</a:t>
             </a:r>
-            <a:endParaRPr lang="en-US" sz="1800" dirty="0"/>
+            <a:endParaRPr lang="en-US" sz="2200" dirty="0"/>
           </a:p>
         </p:txBody>
       </p:sp>
@@ -9010,8 +9750,8 @@
         </p:nvSpPr>
         <p:spPr>
           <a:xfrm>
-            <a:off x="749808" y="4434840"/>
-            <a:ext cx="3291840" cy="1097280"/>
+            <a:off x="749808" y="4754880"/>
+            <a:ext cx="3291840" cy="749808"/>
           </a:xfrm>
           <a:prstGeom prst="rect">
             <a:avLst/>
@@ -9030,7 +9770,7 @@
               <a:buNone/>
             </a:pPr>
             <a:r>
-              <a:rPr lang="en-US" sz="1400" dirty="0">
+              <a:rPr lang="en-US" sz="1800" dirty="0">
                 <a:solidFill>
                   <a:srgbClr val="334155"/>
                 </a:solidFill>
@@ -9040,7 +9780,7 @@
               </a:rPr>
               <a:t>Read-only, no private material; can comment on tasks.</a:t>
             </a:r>
-            <a:endParaRPr lang="en-US" sz="1400" dirty="0"/>
+            <a:endParaRPr lang="en-US" sz="1800" dirty="0"/>
           </a:p>
         </p:txBody>
       </p:sp>
@@ -9105,7 +9845,7 @@
         <p:spPr>
           <a:xfrm>
             <a:off x="4544568" y="4050792"/>
-            <a:ext cx="3291840" cy="502920"/>
+            <a:ext cx="3291840" cy="594360"/>
           </a:xfrm>
           <a:prstGeom prst="rect">
             <a:avLst/>
@@ -9121,7 +9861,7 @@
               <a:buNone/>
             </a:pPr>
             <a:r>
-              <a:rPr lang="en-US" sz="1800" b="1" dirty="0">
+              <a:rPr lang="en-US" sz="2200" b="1" dirty="0">
                 <a:solidFill>
                   <a:srgbClr val="0F172A"/>
                 </a:solidFill>
@@ -9131,7 +9871,7 @@
               </a:rPr>
               <a:t>Committee</a:t>
             </a:r>
-            <a:endParaRPr lang="en-US" sz="1800" dirty="0"/>
+            <a:endParaRPr lang="en-US" sz="2200" dirty="0"/>
           </a:p>
         </p:txBody>
       </p:sp>
@@ -9143,8 +9883,8 @@
         </p:nvSpPr>
         <p:spPr>
           <a:xfrm>
-            <a:off x="4544568" y="4434840"/>
-            <a:ext cx="3291840" cy="1097280"/>
+            <a:off x="4544568" y="4754880"/>
+            <a:ext cx="3291840" cy="749808"/>
           </a:xfrm>
           <a:prstGeom prst="rect">
             <a:avLst/>
@@ -9163,7 +9903,7 @@
               <a:buNone/>
             </a:pPr>
             <a:r>
-              <a:rPr lang="en-US" sz="1400" dirty="0">
+              <a:rPr lang="en-US" sz="1800" dirty="0">
                 <a:solidFill>
                   <a:srgbClr val="334155"/>
                 </a:solidFill>
@@ -9173,7 +9913,7 @@
               </a:rPr>
               <a:t>Read-only access during reviews. No private material.</a:t>
             </a:r>
-            <a:endParaRPr lang="en-US" sz="1400" dirty="0"/>
+            <a:endParaRPr lang="en-US" sz="1800" dirty="0"/>
           </a:p>
         </p:txBody>
       </p:sp>
@@ -9238,7 +9978,7 @@
         <p:spPr>
           <a:xfrm>
             <a:off x="8339328" y="4050792"/>
-            <a:ext cx="3291840" cy="502920"/>
+            <a:ext cx="3291840" cy="594360"/>
           </a:xfrm>
           <a:prstGeom prst="rect">
             <a:avLst/>
@@ -9254,7 +9994,7 @@
               <a:buNone/>
             </a:pPr>
             <a:r>
-              <a:rPr lang="en-US" sz="1800" b="1" dirty="0">
+              <a:rPr lang="en-US" sz="2200" b="1" dirty="0">
                 <a:solidFill>
                   <a:srgbClr val="0F172A"/>
                 </a:solidFill>
@@ -9264,7 +10004,7 @@
               </a:rPr>
               <a:t>Admin</a:t>
             </a:r>
-            <a:endParaRPr lang="en-US" sz="1800" dirty="0"/>
+            <a:endParaRPr lang="en-US" sz="2200" dirty="0"/>
           </a:p>
         </p:txBody>
       </p:sp>
@@ -9276,8 +10016,8 @@
         </p:nvSpPr>
         <p:spPr>
           <a:xfrm>
-            <a:off x="8339328" y="4434840"/>
-            <a:ext cx="3291840" cy="1097280"/>
+            <a:off x="8339328" y="4754880"/>
+            <a:ext cx="3291840" cy="749808"/>
           </a:xfrm>
           <a:prstGeom prst="rect">
             <a:avLst/>
@@ -9296,7 +10036,7 @@
               <a:buNone/>
             </a:pPr>
             <a:r>
-              <a:rPr lang="en-US" sz="1400" dirty="0">
+              <a:rPr lang="en-US" sz="1800" dirty="0">
                 <a:solidFill>
                   <a:srgbClr val="334155"/>
                 </a:solidFill>
@@ -9306,7 +10046,7 @@
               </a:rPr>
               <a:t>App-wide owner. Adds users, manages settings, runs maintenance.</a:t>
             </a:r>
-            <a:endParaRPr lang="en-US" sz="1400" dirty="0"/>
+            <a:endParaRPr lang="en-US" sz="1800" dirty="0"/>
           </a:p>
         </p:txBody>
       </p:sp>
@@ -9358,7 +10098,7 @@
               <a:buNone/>
             </a:pPr>
             <a:r>
-              <a:rPr lang="en-US" sz="1100" dirty="0">
+              <a:rPr lang="en-US" sz="1300" dirty="0">
                 <a:solidFill>
                   <a:srgbClr val="64748B"/>
                 </a:solidFill>
@@ -9368,7 +10108,7 @@
               </a:rPr>
               <a:t>PhDapp · for supervisors</a:t>
             </a:r>
-            <a:endParaRPr lang="en-US" sz="1100" dirty="0"/>
+            <a:endParaRPr lang="en-US" sz="1300" dirty="0"/>
           </a:p>
         </p:txBody>
       </p:sp>
@@ -9397,7 +10137,7 @@
               <a:buNone/>
             </a:pPr>
             <a:r>
-              <a:rPr lang="en-US" sz="1100" dirty="0">
+              <a:rPr lang="en-US" sz="1300" dirty="0">
                 <a:solidFill>
                   <a:srgbClr val="64748B"/>
                 </a:solidFill>
@@ -9405,9 +10145,9 @@
                 <a:ea typeface="Inter" pitchFamily="34" charset="-122"/>
                 <a:cs typeface="Inter" pitchFamily="34" charset="-120"/>
               </a:rPr>
-              <a:t>3 / 16</a:t>
-            </a:r>
-            <a:endParaRPr lang="en-US" sz="1100" dirty="0"/>
+              <a:t>3 / 17</a:t>
+            </a:r>
+            <a:endParaRPr lang="en-US" sz="1300" dirty="0"/>
           </a:p>
         </p:txBody>
       </p:sp>
@@ -9537,7 +10277,7 @@
         <p:spPr>
           <a:xfrm>
             <a:off x="1261872" y="749808"/>
-            <a:ext cx="10381183" cy="640080"/>
+            <a:ext cx="10381183" cy="713232"/>
           </a:xfrm>
           <a:prstGeom prst="rect">
             <a:avLst/>
@@ -9553,7 +10293,7 @@
               <a:buNone/>
             </a:pPr>
             <a:r>
-              <a:rPr lang="en-US" sz="3600" b="1" dirty="0">
+              <a:rPr lang="en-US" sz="4000" b="1" dirty="0">
                 <a:solidFill>
                   <a:srgbClr val="0F172A"/>
                 </a:solidFill>
@@ -9563,7 +10303,7 @@
               </a:rPr>
               <a:t>Adding students &amp; teams</a:t>
             </a:r>
-            <a:endParaRPr lang="en-US" sz="3600" dirty="0"/>
+            <a:endParaRPr lang="en-US" sz="4000" dirty="0"/>
           </a:p>
         </p:txBody>
       </p:sp>
@@ -9576,7 +10316,7 @@
         <p:spPr>
           <a:xfrm>
             <a:off x="548640" y="1828800"/>
-            <a:ext cx="5486400" cy="3291840"/>
+            <a:ext cx="5486400" cy="3931920"/>
           </a:xfrm>
           <a:prstGeom prst="rect">
             <a:avLst/>
@@ -9608,7 +10348,7 @@
         <p:spPr>
           <a:xfrm>
             <a:off x="548640" y="1828800"/>
-            <a:ext cx="73152" cy="3291840"/>
+            <a:ext cx="73152" cy="3931920"/>
           </a:xfrm>
           <a:prstGeom prst="rect">
             <a:avLst/>
@@ -9628,7 +10368,7 @@
         <p:spPr>
           <a:xfrm>
             <a:off x="749808" y="1993392"/>
-            <a:ext cx="5166360" cy="502920"/>
+            <a:ext cx="5166360" cy="594360"/>
           </a:xfrm>
           <a:prstGeom prst="rect">
             <a:avLst/>
@@ -9644,7 +10384,7 @@
               <a:buNone/>
             </a:pPr>
             <a:r>
-              <a:rPr lang="en-US" sz="1800" b="1" dirty="0">
+              <a:rPr lang="en-US" sz="2200" b="1" dirty="0">
                 <a:solidFill>
                   <a:srgbClr val="0F172A"/>
                 </a:solidFill>
@@ -9654,7 +10394,7 @@
               </a:rPr>
               <a:t>New student</a:t>
             </a:r>
-            <a:endParaRPr lang="en-US" sz="1800" dirty="0"/>
+            <a:endParaRPr lang="en-US" sz="2200" dirty="0"/>
           </a:p>
         </p:txBody>
       </p:sp>
@@ -9666,8 +10406,8 @@
         </p:nvSpPr>
         <p:spPr>
           <a:xfrm>
-            <a:off x="777240" y="2377440"/>
-            <a:ext cx="5074920" cy="2651760"/>
+            <a:off x="777240" y="2697480"/>
+            <a:ext cx="5074920" cy="2926080"/>
           </a:xfrm>
           <a:prstGeom prst="rect">
             <a:avLst/>
@@ -9681,13 +10421,13 @@
           <a:p>
             <a:pPr marL="342900" indent="-342900">
               <a:spcAft>
-                <a:spcPts val="400"/>
+                <a:spcPts val="600"/>
               </a:spcAft>
               <a:buSzPct val="100000"/>
               <a:buChar char="•"/>
             </a:pPr>
             <a:r>
-              <a:rPr lang="en-US" sz="1300" dirty="0">
+              <a:rPr lang="en-US" sz="1800" dirty="0">
                 <a:solidFill>
                   <a:srgbClr val="334155"/>
                 </a:solidFill>
@@ -9695,20 +10435,20 @@
                 <a:ea typeface="Inter" pitchFamily="34" charset="-122"/>
                 <a:cs typeface="Inter" pitchFamily="34" charset="-120"/>
               </a:rPr>
-              <a:t>Admin or primary supervisor adds the student (name, email, year, status).</a:t>
-            </a:r>
-            <a:endParaRPr lang="en-US" sz="1300" dirty="0"/>
+              <a:t>Admin or supervisor adds them (name, email, year, status).</a:t>
+            </a:r>
+            <a:endParaRPr lang="en-US" sz="1800" dirty="0"/>
           </a:p>
           <a:p>
             <a:pPr marL="342900" indent="-342900">
               <a:spcAft>
-                <a:spcPts val="400"/>
+                <a:spcPts val="600"/>
               </a:spcAft>
               <a:buSzPct val="100000"/>
               <a:buChar char="•"/>
             </a:pPr>
             <a:r>
-              <a:rPr lang="en-US" sz="1300" dirty="0">
+              <a:rPr lang="en-US" sz="1800" dirty="0">
                 <a:solidFill>
                   <a:srgbClr val="334155"/>
                 </a:solidFill>
@@ -9716,20 +10456,20 @@
                 <a:ea typeface="Inter" pitchFamily="34" charset="-122"/>
                 <a:cs typeface="Inter" pitchFamily="34" charset="-120"/>
               </a:rPr>
-              <a:t>An auto Team chat channel is created with the whole team + the student.</a:t>
-            </a:r>
-            <a:endParaRPr lang="en-US" sz="1300" dirty="0"/>
+              <a:t>An auto Team channel is created for the whole team.</a:t>
+            </a:r>
+            <a:endParaRPr lang="en-US" sz="1800" dirty="0"/>
           </a:p>
           <a:p>
             <a:pPr marL="342900" indent="-342900">
               <a:spcAft>
-                <a:spcPts val="400"/>
+                <a:spcPts val="600"/>
               </a:spcAft>
               <a:buSzPct val="100000"/>
               <a:buChar char="•"/>
             </a:pPr>
             <a:r>
-              <a:rPr lang="en-US" sz="1300" dirty="0">
+              <a:rPr lang="en-US" sz="1800" dirty="0">
                 <a:solidFill>
                   <a:srgbClr val="334155"/>
                 </a:solidFill>
@@ -9737,20 +10477,20 @@
                 <a:ea typeface="Inter" pitchFamily="34" charset="-122"/>
                 <a:cs typeface="Inter" pitchFamily="34" charset="-120"/>
               </a:rPr>
-              <a:t>From the profile, Share Drive + Share calendar create shared resources (in your Google account).</a:t>
-            </a:r>
-            <a:endParaRPr lang="en-US" sz="1300" dirty="0"/>
+              <a:t>Profile → Share Drive + Share calendar set up shared resources.</a:t>
+            </a:r>
+            <a:endParaRPr lang="en-US" sz="1800" dirty="0"/>
           </a:p>
           <a:p>
             <a:pPr marL="342900" indent="-342900">
               <a:spcAft>
-                <a:spcPts val="400"/>
+                <a:spcPts val="600"/>
               </a:spcAft>
               <a:buSzPct val="100000"/>
               <a:buChar char="•"/>
             </a:pPr>
             <a:r>
-              <a:rPr lang="en-US" sz="1300" dirty="0">
+              <a:rPr lang="en-US" sz="1800" dirty="0">
                 <a:solidFill>
                   <a:srgbClr val="334155"/>
                 </a:solidFill>
@@ -9758,9 +10498,9 @@
                 <a:ea typeface="Inter" pitchFamily="34" charset="-122"/>
                 <a:cs typeface="Inter" pitchFamily="34" charset="-120"/>
               </a:rPr>
-              <a:t>If the student already exists in another Google account, the admin can backfill missing team channels.</a:t>
-            </a:r>
-            <a:endParaRPr lang="en-US" sz="1300" dirty="0"/>
+              <a:t>Admin can backfill missing team channels for older students.</a:t>
+            </a:r>
+            <a:endParaRPr lang="en-US" sz="1800" dirty="0"/>
           </a:p>
         </p:txBody>
       </p:sp>
@@ -9773,7 +10513,7 @@
         <p:spPr>
           <a:xfrm>
             <a:off x="6400800" y="1828800"/>
-            <a:ext cx="5242255" cy="3291840"/>
+            <a:ext cx="5242255" cy="3931920"/>
           </a:xfrm>
           <a:prstGeom prst="rect">
             <a:avLst/>
@@ -9805,7 +10545,7 @@
         <p:spPr>
           <a:xfrm>
             <a:off x="6400800" y="1828800"/>
-            <a:ext cx="73152" cy="3291840"/>
+            <a:ext cx="73152" cy="3931920"/>
           </a:xfrm>
           <a:prstGeom prst="rect">
             <a:avLst/>
@@ -9825,7 +10565,7 @@
         <p:spPr>
           <a:xfrm>
             <a:off x="6601968" y="1993392"/>
-            <a:ext cx="4922215" cy="502920"/>
+            <a:ext cx="4922215" cy="594360"/>
           </a:xfrm>
           <a:prstGeom prst="rect">
             <a:avLst/>
@@ -9841,7 +10581,7 @@
               <a:buNone/>
             </a:pPr>
             <a:r>
-              <a:rPr lang="en-US" sz="1800" b="1" dirty="0">
+              <a:rPr lang="en-US" sz="2200" b="1" dirty="0">
                 <a:solidFill>
                   <a:srgbClr val="0F172A"/>
                 </a:solidFill>
@@ -9851,7 +10591,7 @@
               </a:rPr>
               <a:t>Manage team</a:t>
             </a:r>
-            <a:endParaRPr lang="en-US" sz="1800" dirty="0"/>
+            <a:endParaRPr lang="en-US" sz="2200" dirty="0"/>
           </a:p>
         </p:txBody>
       </p:sp>
@@ -9863,8 +10603,8 @@
         </p:nvSpPr>
         <p:spPr>
           <a:xfrm>
-            <a:off x="6629400" y="2377440"/>
-            <a:ext cx="4876495" cy="2651760"/>
+            <a:off x="6629400" y="2697480"/>
+            <a:ext cx="4876495" cy="2926080"/>
           </a:xfrm>
           <a:prstGeom prst="rect">
             <a:avLst/>
@@ -9878,13 +10618,13 @@
           <a:p>
             <a:pPr marL="342900" indent="-342900">
               <a:spcAft>
-                <a:spcPts val="400"/>
+                <a:spcPts val="600"/>
               </a:spcAft>
               <a:buSzPct val="100000"/>
               <a:buChar char="•"/>
             </a:pPr>
             <a:r>
-              <a:rPr lang="en-US" sz="1300" dirty="0">
+              <a:rPr lang="en-US" sz="1800" dirty="0">
                 <a:solidFill>
                   <a:srgbClr val="334155"/>
                 </a:solidFill>
@@ -9894,18 +10634,18 @@
               </a:rPr>
               <a:t>Add co-supervisors, team advisors, external advisors, committee members.</a:t>
             </a:r>
-            <a:endParaRPr lang="en-US" sz="1300" dirty="0"/>
+            <a:endParaRPr lang="en-US" sz="1800" dirty="0"/>
           </a:p>
           <a:p>
             <a:pPr marL="342900" indent="-342900">
               <a:spcAft>
-                <a:spcPts val="400"/>
+                <a:spcPts val="600"/>
               </a:spcAft>
               <a:buSzPct val="100000"/>
               <a:buChar char="•"/>
             </a:pPr>
             <a:r>
-              <a:rPr lang="en-US" sz="1300" dirty="0">
+              <a:rPr lang="en-US" sz="1800" dirty="0">
                 <a:solidFill>
                   <a:srgbClr val="334155"/>
                 </a:solidFill>
@@ -9915,18 +10655,18 @@
               </a:rPr>
               <a:t>Change roles or remove members (with a confirm prompt).</a:t>
             </a:r>
-            <a:endParaRPr lang="en-US" sz="1300" dirty="0"/>
+            <a:endParaRPr lang="en-US" sz="1800" dirty="0"/>
           </a:p>
           <a:p>
             <a:pPr marL="342900" indent="-342900">
               <a:spcAft>
-                <a:spcPts val="400"/>
+                <a:spcPts val="600"/>
               </a:spcAft>
               <a:buSzPct val="100000"/>
               <a:buChar char="•"/>
             </a:pPr>
             <a:r>
-              <a:rPr lang="en-US" sz="1300" dirty="0">
+              <a:rPr lang="en-US" sz="1800" dirty="0">
                 <a:solidFill>
                   <a:srgbClr val="334155"/>
                 </a:solidFill>
@@ -9936,7 +10676,7 @@
               </a:rPr>
               <a:t>Each role is configured per-student — the same person can supervise A and team-advise B.</a:t>
             </a:r>
-            <a:endParaRPr lang="en-US" sz="1300" dirty="0"/>
+            <a:endParaRPr lang="en-US" sz="1800" dirty="0"/>
           </a:p>
         </p:txBody>
       </p:sp>
@@ -9988,7 +10728,7 @@
               <a:buNone/>
             </a:pPr>
             <a:r>
-              <a:rPr lang="en-US" sz="1100" dirty="0">
+              <a:rPr lang="en-US" sz="1300" dirty="0">
                 <a:solidFill>
                   <a:srgbClr val="64748B"/>
                 </a:solidFill>
@@ -9998,7 +10738,7 @@
               </a:rPr>
               <a:t>PhDapp · for supervisors</a:t>
             </a:r>
-            <a:endParaRPr lang="en-US" sz="1100" dirty="0"/>
+            <a:endParaRPr lang="en-US" sz="1300" dirty="0"/>
           </a:p>
         </p:txBody>
       </p:sp>
@@ -10027,7 +10767,7 @@
               <a:buNone/>
             </a:pPr>
             <a:r>
-              <a:rPr lang="en-US" sz="1100" dirty="0">
+              <a:rPr lang="en-US" sz="1300" dirty="0">
                 <a:solidFill>
                   <a:srgbClr val="64748B"/>
                 </a:solidFill>
@@ -10035,9 +10775,9 @@
                 <a:ea typeface="Inter" pitchFamily="34" charset="-122"/>
                 <a:cs typeface="Inter" pitchFamily="34" charset="-120"/>
               </a:rPr>
-              <a:t>4 / 16</a:t>
-            </a:r>
-            <a:endParaRPr lang="en-US" sz="1100" dirty="0"/>
+              <a:t>4 / 17</a:t>
+            </a:r>
+            <a:endParaRPr lang="en-US" sz="1300" dirty="0"/>
           </a:p>
         </p:txBody>
       </p:sp>
@@ -10152,7 +10892,7 @@
                 <a:ea typeface="Inter" pitchFamily="34" charset="-122"/>
                 <a:cs typeface="Inter" pitchFamily="34" charset="-120"/>
               </a:rPr>
-              <a:t>STUDENTS</a:t>
+              <a:t>PROFILE</a:t>
             </a:r>
             <a:endParaRPr lang="en-US" sz="1400" dirty="0"/>
           </a:p>
@@ -10167,7 +10907,7 @@
         <p:spPr>
           <a:xfrm>
             <a:off x="1261872" y="749808"/>
-            <a:ext cx="10381183" cy="640080"/>
+            <a:ext cx="10381183" cy="713232"/>
           </a:xfrm>
           <a:prstGeom prst="rect">
             <a:avLst/>
@@ -10183,7 +10923,7 @@
               <a:buNone/>
             </a:pPr>
             <a:r>
-              <a:rPr lang="en-US" sz="3600" b="1" dirty="0">
+              <a:rPr lang="en-US" sz="4000" b="1" dirty="0">
                 <a:solidFill>
                   <a:srgbClr val="0F172A"/>
                 </a:solidFill>
@@ -10191,22 +10931,61 @@
                 <a:ea typeface="Inter" pitchFamily="34" charset="-122"/>
                 <a:cs typeface="Inter" pitchFamily="34" charset="-120"/>
               </a:rPr>
-              <a:t>Student profile · the central page</a:t>
-            </a:r>
-            <a:endParaRPr lang="en-US" sz="3600" dirty="0"/>
-          </a:p>
-        </p:txBody>
-      </p:sp>
-      <p:sp>
-        <p:nvSpPr>
-          <p:cNvPr id="6" name="Shape 3"/>
-          <p:cNvSpPr/>
-          <p:nvPr/>
-        </p:nvSpPr>
-        <p:spPr>
-          <a:xfrm>
-            <a:off x="548640" y="1828800"/>
-            <a:ext cx="5486400" cy="3291840"/>
+              <a:t>Your profile · external links</a:t>
+            </a:r>
+            <a:endParaRPr lang="en-US" sz="4000" dirty="0"/>
+          </a:p>
+        </p:txBody>
+      </p:sp>
+      <p:sp>
+        <p:nvSpPr>
+          <p:cNvPr id="6" name="Text 3"/>
+          <p:cNvSpPr/>
+          <p:nvPr/>
+        </p:nvSpPr>
+        <p:spPr>
+          <a:xfrm>
+            <a:off x="548640" y="1508760"/>
+            <a:ext cx="11094415" cy="822960"/>
+          </a:xfrm>
+          <a:prstGeom prst="rect">
+            <a:avLst/>
+          </a:prstGeom>
+          <a:noFill/>
+          <a:ln/>
+        </p:spPr>
+        <p:txBody>
+          <a:bodyPr wrap="square" lIns="0" tIns="0" rIns="0" bIns="0" rtlCol="0" anchor="t"/>
+          <a:lstStyle/>
+          <a:p>
+            <a:pPr indent="0" marL="0">
+              <a:buNone/>
+            </a:pPr>
+            <a:r>
+              <a:rPr lang="en-US" sz="2000" i="1" dirty="0">
+                <a:solidFill>
+                  <a:srgbClr val="334155"/>
+                </a:solidFill>
+                <a:latin typeface="Inter" pitchFamily="34" charset="0"/>
+                <a:ea typeface="Inter" pitchFamily="34" charset="-122"/>
+                <a:cs typeface="Inter" pitchFamily="34" charset="-120"/>
+              </a:rPr>
+              <a:t>Every user — supervisor, advisor, committee — can attach professional profile links. They show as small icons beside your name everywhere you appear in the team.</a:t>
+            </a:r>
+            <a:endParaRPr lang="en-US" sz="2000" dirty="0"/>
+          </a:p>
+        </p:txBody>
+      </p:sp>
+      <p:sp>
+        <p:nvSpPr>
+          <p:cNvPr id="7" name="Shape 4"/>
+          <p:cNvSpPr/>
+          <p:nvPr/>
+        </p:nvSpPr>
+        <p:spPr>
+          <a:xfrm>
+            <a:off x="548640" y="2331720"/>
+            <a:ext cx="5486400" cy="3108960"/>
           </a:xfrm>
           <a:prstGeom prst="rect">
             <a:avLst/>
@@ -10231,14 +11010,14 @@
       </p:sp>
       <p:sp>
         <p:nvSpPr>
-          <p:cNvPr id="7" name="Shape 4"/>
-          <p:cNvSpPr/>
-          <p:nvPr/>
-        </p:nvSpPr>
-        <p:spPr>
-          <a:xfrm>
-            <a:off x="548640" y="1828800"/>
-            <a:ext cx="73152" cy="3291840"/>
+          <p:cNvPr id="8" name="Shape 5"/>
+          <p:cNvSpPr/>
+          <p:nvPr/>
+        </p:nvSpPr>
+        <p:spPr>
+          <a:xfrm>
+            <a:off x="548640" y="2331720"/>
+            <a:ext cx="73152" cy="3108960"/>
           </a:xfrm>
           <a:prstGeom prst="rect">
             <a:avLst/>
@@ -10251,14 +11030,14 @@
       </p:sp>
       <p:sp>
         <p:nvSpPr>
-          <p:cNvPr id="8" name="Text 5"/>
-          <p:cNvSpPr/>
-          <p:nvPr/>
-        </p:nvSpPr>
-        <p:spPr>
-          <a:xfrm>
-            <a:off x="749808" y="1993392"/>
-            <a:ext cx="5166360" cy="502920"/>
+          <p:cNvPr id="9" name="Text 6"/>
+          <p:cNvSpPr/>
+          <p:nvPr/>
+        </p:nvSpPr>
+        <p:spPr>
+          <a:xfrm>
+            <a:off x="749808" y="2496312"/>
+            <a:ext cx="5166360" cy="594360"/>
           </a:xfrm>
           <a:prstGeom prst="rect">
             <a:avLst/>
@@ -10274,7 +11053,7 @@
               <a:buNone/>
             </a:pPr>
             <a:r>
-              <a:rPr lang="en-US" sz="1800" b="1" dirty="0">
+              <a:rPr lang="en-US" sz="2200" b="1" dirty="0">
                 <a:solidFill>
                   <a:srgbClr val="0F172A"/>
                 </a:solidFill>
@@ -10282,22 +11061,22 @@
                 <a:ea typeface="Inter" pitchFamily="34" charset="-122"/>
                 <a:cs typeface="Inter" pitchFamily="34" charset="-120"/>
               </a:rPr>
-              <a:t>On the page</a:t>
-            </a:r>
-            <a:endParaRPr lang="en-US" sz="1800" dirty="0"/>
-          </a:p>
-        </p:txBody>
-      </p:sp>
-      <p:sp>
-        <p:nvSpPr>
-          <p:cNvPr id="9" name="Text 6"/>
-          <p:cNvSpPr/>
-          <p:nvPr/>
-        </p:nvSpPr>
-        <p:spPr>
-          <a:xfrm>
-            <a:off x="777240" y="2377440"/>
-            <a:ext cx="5074920" cy="2651760"/>
+              <a:t>Where to edit</a:t>
+            </a:r>
+            <a:endParaRPr lang="en-US" sz="2200" dirty="0"/>
+          </a:p>
+        </p:txBody>
+      </p:sp>
+      <p:sp>
+        <p:nvSpPr>
+          <p:cNvPr id="10" name="Text 7"/>
+          <p:cNvSpPr/>
+          <p:nvPr/>
+        </p:nvSpPr>
+        <p:spPr>
+          <a:xfrm>
+            <a:off x="777240" y="2971800"/>
+            <a:ext cx="5074920" cy="2377440"/>
           </a:xfrm>
           <a:prstGeom prst="rect">
             <a:avLst/>
@@ -10311,13 +11090,13 @@
           <a:p>
             <a:pPr marL="342900" indent="-342900">
               <a:spcAft>
-                <a:spcPts val="400"/>
+                <a:spcPts val="600"/>
               </a:spcAft>
               <a:buSzPct val="100000"/>
               <a:buChar char="•"/>
             </a:pPr>
             <a:r>
-              <a:rPr lang="en-US" sz="1300" dirty="0">
+              <a:rPr lang="en-US" sz="1800" dirty="0">
                 <a:solidFill>
                   <a:srgbClr val="334155"/>
                 </a:solidFill>
@@ -10325,20 +11104,20 @@
                 <a:ea typeface="Inter" pitchFamily="34" charset="-122"/>
                 <a:cs typeface="Inter" pitchFamily="34" charset="-120"/>
               </a:rPr>
-              <a:t>Header: alias/name, status, links (LinkedIn, ORCID, website).</a:t>
-            </a:r>
-            <a:endParaRPr lang="en-US" sz="1300" dirty="0"/>
+              <a:t>Settings → My profile (your own).</a:t>
+            </a:r>
+            <a:endParaRPr lang="en-US" sz="1800" dirty="0"/>
           </a:p>
           <a:p>
             <a:pPr marL="342900" indent="-342900">
               <a:spcAft>
-                <a:spcPts val="400"/>
+                <a:spcPts val="600"/>
               </a:spcAft>
               <a:buSzPct val="100000"/>
               <a:buChar char="•"/>
             </a:pPr>
             <a:r>
-              <a:rPr lang="en-US" sz="1300" dirty="0">
+              <a:rPr lang="en-US" sz="1800" dirty="0">
                 <a:solidFill>
                   <a:srgbClr val="334155"/>
                 </a:solidFill>
@@ -10346,20 +11125,20 @@
                 <a:ea typeface="Inter" pitchFamily="34" charset="-122"/>
                 <a:cs typeface="Inter" pitchFamily="34" charset="-120"/>
               </a:rPr>
-              <a:t>Quick actions: Tasks · Calendar · Drive · Chat · Annual review · ✨ Catch-up.</a:t>
-            </a:r>
-            <a:endParaRPr lang="en-US" sz="1300" dirty="0"/>
+              <a:t>Admin → user card (any user, admin only).</a:t>
+            </a:r>
+            <a:endParaRPr lang="en-US" sz="1800" dirty="0"/>
           </a:p>
           <a:p>
             <a:pPr marL="342900" indent="-342900">
               <a:spcAft>
-                <a:spcPts val="400"/>
+                <a:spcPts val="600"/>
               </a:spcAft>
               <a:buSzPct val="100000"/>
               <a:buChar char="•"/>
             </a:pPr>
             <a:r>
-              <a:rPr lang="en-US" sz="1300" dirty="0">
+              <a:rPr lang="en-US" sz="1800" dirty="0">
                 <a:solidFill>
                   <a:srgbClr val="334155"/>
                 </a:solidFill>
@@ -10367,20 +11146,20 @@
                 <a:ea typeface="Inter" pitchFamily="34" charset="-122"/>
                 <a:cs typeface="Inter" pitchFamily="34" charset="-120"/>
               </a:rPr>
-              <a:t>Cards: thesis, publications, supervision team, recent activity, upcoming meetings.</a:t>
-            </a:r>
-            <a:endParaRPr lang="en-US" sz="1300" dirty="0"/>
+              <a:t>Team page → click your card → ProfileEditor.</a:t>
+            </a:r>
+            <a:endParaRPr lang="en-US" sz="1800" dirty="0"/>
           </a:p>
           <a:p>
             <a:pPr marL="342900" indent="-342900">
               <a:spcAft>
-                <a:spcPts val="400"/>
+                <a:spcPts val="600"/>
               </a:spcAft>
               <a:buSzPct val="100000"/>
               <a:buChar char="•"/>
             </a:pPr>
             <a:r>
-              <a:rPr lang="en-US" sz="1300" dirty="0">
+              <a:rPr lang="en-US" sz="1800" dirty="0">
                 <a:solidFill>
                   <a:srgbClr val="334155"/>
                 </a:solidFill>
@@ -10388,22 +11167,22 @@
                 <a:ea typeface="Inter" pitchFamily="34" charset="-122"/>
                 <a:cs typeface="Inter" pitchFamily="34" charset="-120"/>
               </a:rPr>
-              <a:t>Edits (and Delete) gated to supervisors / admin.</a:t>
-            </a:r>
-            <a:endParaRPr lang="en-US" sz="1300" dirty="0"/>
-          </a:p>
-        </p:txBody>
-      </p:sp>
-      <p:sp>
-        <p:nvSpPr>
-          <p:cNvPr id="10" name="Shape 7"/>
-          <p:cNvSpPr/>
-          <p:nvPr/>
-        </p:nvSpPr>
-        <p:spPr>
-          <a:xfrm>
-            <a:off x="6400800" y="1828800"/>
-            <a:ext cx="5242255" cy="3291840"/>
+              <a:t>Students edit theirs from the student profile (Edit).</a:t>
+            </a:r>
+            <a:endParaRPr lang="en-US" sz="1800" dirty="0"/>
+          </a:p>
+        </p:txBody>
+      </p:sp>
+      <p:sp>
+        <p:nvSpPr>
+          <p:cNvPr id="11" name="Shape 8"/>
+          <p:cNvSpPr/>
+          <p:nvPr/>
+        </p:nvSpPr>
+        <p:spPr>
+          <a:xfrm>
+            <a:off x="6400800" y="2331720"/>
+            <a:ext cx="5242255" cy="3108960"/>
           </a:xfrm>
           <a:prstGeom prst="rect">
             <a:avLst/>
@@ -10428,14 +11207,14 @@
       </p:sp>
       <p:sp>
         <p:nvSpPr>
-          <p:cNvPr id="11" name="Shape 8"/>
-          <p:cNvSpPr/>
-          <p:nvPr/>
-        </p:nvSpPr>
-        <p:spPr>
-          <a:xfrm>
-            <a:off x="6400800" y="1828800"/>
-            <a:ext cx="73152" cy="3291840"/>
+          <p:cNvPr id="12" name="Shape 9"/>
+          <p:cNvSpPr/>
+          <p:nvPr/>
+        </p:nvSpPr>
+        <p:spPr>
+          <a:xfrm>
+            <a:off x="6400800" y="2331720"/>
+            <a:ext cx="73152" cy="3108960"/>
           </a:xfrm>
           <a:prstGeom prst="rect">
             <a:avLst/>
@@ -10448,14 +11227,14 @@
       </p:sp>
       <p:sp>
         <p:nvSpPr>
-          <p:cNvPr id="12" name="Text 9"/>
-          <p:cNvSpPr/>
-          <p:nvPr/>
-        </p:nvSpPr>
-        <p:spPr>
-          <a:xfrm>
-            <a:off x="6601968" y="1993392"/>
-            <a:ext cx="4922215" cy="502920"/>
+          <p:cNvPr id="13" name="Text 10"/>
+          <p:cNvSpPr/>
+          <p:nvPr/>
+        </p:nvSpPr>
+        <p:spPr>
+          <a:xfrm>
+            <a:off x="6601968" y="2496312"/>
+            <a:ext cx="4922215" cy="594360"/>
           </a:xfrm>
           <a:prstGeom prst="rect">
             <a:avLst/>
@@ -10471,7 +11250,7 @@
               <a:buNone/>
             </a:pPr>
             <a:r>
-              <a:rPr lang="en-US" sz="1800" b="1" dirty="0">
+              <a:rPr lang="en-US" sz="2200" b="1" dirty="0">
                 <a:solidFill>
                   <a:srgbClr val="0F172A"/>
                 </a:solidFill>
@@ -10479,22 +11258,22 @@
                 <a:ea typeface="Inter" pitchFamily="34" charset="-122"/>
                 <a:cs typeface="Inter" pitchFamily="34" charset="-120"/>
               </a:rPr>
-              <a:t>✨ Catch-up summary</a:t>
-            </a:r>
-            <a:endParaRPr lang="en-US" sz="1800" dirty="0"/>
-          </a:p>
-        </p:txBody>
-      </p:sp>
-      <p:sp>
-        <p:nvSpPr>
-          <p:cNvPr id="13" name="Text 10"/>
-          <p:cNvSpPr/>
-          <p:nvPr/>
-        </p:nvSpPr>
-        <p:spPr>
-          <a:xfrm>
-            <a:off x="6629400" y="2377440"/>
-            <a:ext cx="4876495" cy="2651760"/>
+              <a:t>Supported links</a:t>
+            </a:r>
+            <a:endParaRPr lang="en-US" sz="2200" dirty="0"/>
+          </a:p>
+        </p:txBody>
+      </p:sp>
+      <p:sp>
+        <p:nvSpPr>
+          <p:cNvPr id="14" name="Text 11"/>
+          <p:cNvSpPr/>
+          <p:nvPr/>
+        </p:nvSpPr>
+        <p:spPr>
+          <a:xfrm>
+            <a:off x="6629400" y="2971800"/>
+            <a:ext cx="4876495" cy="2377440"/>
           </a:xfrm>
           <a:prstGeom prst="rect">
             <a:avLst/>
@@ -10508,13 +11287,13 @@
           <a:p>
             <a:pPr marL="342900" indent="-342900">
               <a:spcAft>
-                <a:spcPts val="400"/>
+                <a:spcPts val="600"/>
               </a:spcAft>
               <a:buSzPct val="100000"/>
               <a:buChar char="•"/>
             </a:pPr>
             <a:r>
-              <a:rPr lang="en-US" sz="1300" dirty="0">
+              <a:rPr lang="en-US" sz="1800" dirty="0">
                 <a:solidFill>
                   <a:srgbClr val="334155"/>
                 </a:solidFill>
@@ -10522,20 +11301,20 @@
                 <a:ea typeface="Inter" pitchFamily="34" charset="-122"/>
                 <a:cs typeface="Inter" pitchFamily="34" charset="-120"/>
               </a:rPr>
-              <a:t>One click → a plain-text digest for any student.</a:t>
-            </a:r>
-            <a:endParaRPr lang="en-US" sz="1300" dirty="0"/>
+              <a:t>LinkedIn — paste a full URL or just the handle (e.g. ada-lovelace).</a:t>
+            </a:r>
+            <a:endParaRPr lang="en-US" sz="1800" dirty="0"/>
           </a:p>
           <a:p>
             <a:pPr marL="342900" indent="-342900">
               <a:spcAft>
-                <a:spcPts val="400"/>
+                <a:spcPts val="600"/>
               </a:spcAft>
               <a:buSzPct val="100000"/>
               <a:buChar char="•"/>
             </a:pPr>
             <a:r>
-              <a:rPr lang="en-US" sz="1300" dirty="0">
+              <a:rPr lang="en-US" sz="1800" dirty="0">
                 <a:solidFill>
                   <a:srgbClr val="334155"/>
                 </a:solidFill>
@@ -10543,20 +11322,20 @@
                 <a:ea typeface="Inter" pitchFamily="34" charset="-122"/>
                 <a:cs typeface="Inter" pitchFamily="34" charset="-120"/>
               </a:rPr>
-              <a:t>Active / overdue / blocked tasks · upcoming + recent events · thesis/pubs status · latest check-in.</a:t>
-            </a:r>
-            <a:endParaRPr lang="en-US" sz="1300" dirty="0"/>
+              <a:t>ORCID — the 0000-0000-0000-0000 id, or the orcid.org URL.</a:t>
+            </a:r>
+            <a:endParaRPr lang="en-US" sz="1800" dirty="0"/>
           </a:p>
           <a:p>
             <a:pPr marL="342900" indent="-342900">
               <a:spcAft>
-                <a:spcPts val="400"/>
+                <a:spcPts val="600"/>
               </a:spcAft>
               <a:buSzPct val="100000"/>
               <a:buChar char="•"/>
             </a:pPr>
             <a:r>
-              <a:rPr lang="en-US" sz="1300" dirty="0">
+              <a:rPr lang="en-US" sz="1800" dirty="0">
                 <a:solidFill>
                   <a:srgbClr val="334155"/>
                 </a:solidFill>
@@ -10564,20 +11343,20 @@
                 <a:ea typeface="Inter" pitchFamily="34" charset="-122"/>
                 <a:cs typeface="Inter" pitchFamily="34" charset="-120"/>
               </a:rPr>
-              <a:t>Copy button — drop into notes or a 1:1 email.</a:t>
-            </a:r>
-            <a:endParaRPr lang="en-US" sz="1300" dirty="0"/>
+              <a:t>Google Scholar — the citations URL, or just your Scholar user id.</a:t>
+            </a:r>
+            <a:endParaRPr lang="en-US" sz="1800" dirty="0"/>
           </a:p>
           <a:p>
             <a:pPr marL="342900" indent="-342900">
               <a:spcAft>
-                <a:spcPts val="400"/>
+                <a:spcPts val="600"/>
               </a:spcAft>
               <a:buSzPct val="100000"/>
               <a:buChar char="•"/>
             </a:pPr>
             <a:r>
-              <a:rPr lang="en-US" sz="1300" dirty="0">
+              <a:rPr lang="en-US" sz="1800" dirty="0">
                 <a:solidFill>
                   <a:srgbClr val="334155"/>
                 </a:solidFill>
@@ -10585,15 +11364,15 @@
                 <a:ea typeface="Inter" pitchFamily="34" charset="-122"/>
                 <a:cs typeface="Inter" pitchFamily="34" charset="-120"/>
               </a:rPr>
-              <a:t>Read-only; respects privacy (wellbeing only for supervisor-private viewers).</a:t>
-            </a:r>
-            <a:endParaRPr lang="en-US" sz="1300" dirty="0"/>
-          </a:p>
-        </p:txBody>
-      </p:sp>
-      <p:sp>
-        <p:nvSpPr>
-          <p:cNvPr id="14" name="Shape 11"/>
+              <a:t>Personal website (students only) — any URL.</a:t>
+            </a:r>
+            <a:endParaRPr lang="en-US" sz="1800" dirty="0"/>
+          </a:p>
+        </p:txBody>
+      </p:sp>
+      <p:sp>
+        <p:nvSpPr>
+          <p:cNvPr id="15" name="Shape 12"/>
           <p:cNvSpPr/>
           <p:nvPr/>
         </p:nvSpPr>
@@ -10616,7 +11395,7 @@
       </p:sp>
       <p:sp>
         <p:nvSpPr>
-          <p:cNvPr id="15" name="Text 12"/>
+          <p:cNvPr id="16" name="Text 13"/>
           <p:cNvSpPr/>
           <p:nvPr/>
         </p:nvSpPr>
@@ -10639,7 +11418,7 @@
               <a:buNone/>
             </a:pPr>
             <a:r>
-              <a:rPr lang="en-US" sz="1100" dirty="0">
+              <a:rPr lang="en-US" sz="1300" dirty="0">
                 <a:solidFill>
                   <a:srgbClr val="64748B"/>
                 </a:solidFill>
@@ -10649,13 +11428,13 @@
               </a:rPr>
               <a:t>PhDapp · for supervisors</a:t>
             </a:r>
-            <a:endParaRPr lang="en-US" sz="1100" dirty="0"/>
-          </a:p>
-        </p:txBody>
-      </p:sp>
-      <p:sp>
-        <p:nvSpPr>
-          <p:cNvPr id="16" name="Text 13"/>
+            <a:endParaRPr lang="en-US" sz="1300" dirty="0"/>
+          </a:p>
+        </p:txBody>
+      </p:sp>
+      <p:sp>
+        <p:nvSpPr>
+          <p:cNvPr id="17" name="Text 14"/>
           <p:cNvSpPr/>
           <p:nvPr/>
         </p:nvSpPr>
@@ -10678,7 +11457,7 @@
               <a:buNone/>
             </a:pPr>
             <a:r>
-              <a:rPr lang="en-US" sz="1100" dirty="0">
+              <a:rPr lang="en-US" sz="1300" dirty="0">
                 <a:solidFill>
                   <a:srgbClr val="64748B"/>
                 </a:solidFill>
@@ -10686,9 +11465,9 @@
                 <a:ea typeface="Inter" pitchFamily="34" charset="-122"/>
                 <a:cs typeface="Inter" pitchFamily="34" charset="-120"/>
               </a:rPr>
-              <a:t>5 / 16</a:t>
-            </a:r>
-            <a:endParaRPr lang="en-US" sz="1100" dirty="0"/>
+              <a:t>5 / 17</a:t>
+            </a:r>
+            <a:endParaRPr lang="en-US" sz="1300" dirty="0"/>
           </a:p>
         </p:txBody>
       </p:sp>
@@ -10741,7 +11520,7 @@
             </a:avLst>
           </a:prstGeom>
           <a:solidFill>
-            <a:srgbClr val="FF7A45"/>
+            <a:srgbClr val="FF3D8B"/>
           </a:solidFill>
           <a:ln/>
         </p:spPr>
@@ -10797,13 +11576,13 @@
             <a:r>
               <a:rPr lang="en-US" sz="1400" b="1" spc="400" kern="0" dirty="0">
                 <a:solidFill>
-                  <a:srgbClr val="FF7A45"/>
-                </a:solidFill>
-                <a:latin typeface="Inter" pitchFamily="34" charset="0"/>
-                <a:ea typeface="Inter" pitchFamily="34" charset="-122"/>
-                <a:cs typeface="Inter" pitchFamily="34" charset="-120"/>
-              </a:rPr>
-              <a:t>TASKS</a:t>
+                  <a:srgbClr val="FF3D8B"/>
+                </a:solidFill>
+                <a:latin typeface="Inter" pitchFamily="34" charset="0"/>
+                <a:ea typeface="Inter" pitchFamily="34" charset="-122"/>
+                <a:cs typeface="Inter" pitchFamily="34" charset="-120"/>
+              </a:rPr>
+              <a:t>STUDENTS</a:t>
             </a:r>
             <a:endParaRPr lang="en-US" sz="1400" dirty="0"/>
           </a:p>
@@ -10818,7 +11597,7 @@
         <p:spPr>
           <a:xfrm>
             <a:off x="1261872" y="749808"/>
-            <a:ext cx="10381183" cy="640080"/>
+            <a:ext cx="10381183" cy="713232"/>
           </a:xfrm>
           <a:prstGeom prst="rect">
             <a:avLst/>
@@ -10834,7 +11613,7 @@
               <a:buNone/>
             </a:pPr>
             <a:r>
-              <a:rPr lang="en-US" sz="3600" b="1" dirty="0">
+              <a:rPr lang="en-US" sz="4000" b="1" dirty="0">
                 <a:solidFill>
                   <a:srgbClr val="0F172A"/>
                 </a:solidFill>
@@ -10842,61 +11621,22 @@
                 <a:ea typeface="Inter" pitchFamily="34" charset="-122"/>
                 <a:cs typeface="Inter" pitchFamily="34" charset="-120"/>
               </a:rPr>
-              <a:t>Tasks · oversee a student or a portfolio</a:t>
-            </a:r>
-            <a:endParaRPr lang="en-US" sz="3600" dirty="0"/>
-          </a:p>
-        </p:txBody>
-      </p:sp>
-      <p:sp>
-        <p:nvSpPr>
-          <p:cNvPr id="6" name="Text 3"/>
-          <p:cNvSpPr/>
-          <p:nvPr/>
-        </p:nvSpPr>
-        <p:spPr>
-          <a:xfrm>
-            <a:off x="548640" y="1508760"/>
-            <a:ext cx="11094415" cy="731520"/>
-          </a:xfrm>
-          <a:prstGeom prst="rect">
-            <a:avLst/>
-          </a:prstGeom>
-          <a:noFill/>
-          <a:ln/>
-        </p:spPr>
-        <p:txBody>
-          <a:bodyPr wrap="square" lIns="0" tIns="0" rIns="0" bIns="0" rtlCol="0" anchor="t"/>
-          <a:lstStyle/>
-          <a:p>
-            <a:pPr indent="0" marL="0">
-              <a:buNone/>
-            </a:pPr>
-            <a:r>
-              <a:rPr lang="en-US" sz="1600" i="1" dirty="0">
-                <a:solidFill>
-                  <a:srgbClr val="334155"/>
-                </a:solidFill>
-                <a:latin typeface="Inter" pitchFamily="34" charset="0"/>
-                <a:ea typeface="Inter" pitchFamily="34" charset="-122"/>
-                <a:cs typeface="Inter" pitchFamily="34" charset="-120"/>
-              </a:rPr>
-              <a:t>Same Board / List / Gantt as the student — filtered by student, group, priority, category.</a:t>
-            </a:r>
-            <a:endParaRPr lang="en-US" sz="1600" dirty="0"/>
-          </a:p>
-        </p:txBody>
-      </p:sp>
-      <p:sp>
-        <p:nvSpPr>
-          <p:cNvPr id="7" name="Shape 4"/>
-          <p:cNvSpPr/>
-          <p:nvPr/>
-        </p:nvSpPr>
-        <p:spPr>
-          <a:xfrm>
-            <a:off x="548640" y="1965960"/>
-            <a:ext cx="3611880" cy="3749040"/>
+              <a:t>Student profile · the central page</a:t>
+            </a:r>
+            <a:endParaRPr lang="en-US" sz="4000" dirty="0"/>
+          </a:p>
+        </p:txBody>
+      </p:sp>
+      <p:sp>
+        <p:nvSpPr>
+          <p:cNvPr id="6" name="Shape 3"/>
+          <p:cNvSpPr/>
+          <p:nvPr/>
+        </p:nvSpPr>
+        <p:spPr>
+          <a:xfrm>
+            <a:off x="548640" y="1828800"/>
+            <a:ext cx="5486400" cy="3931920"/>
           </a:xfrm>
           <a:prstGeom prst="rect">
             <a:avLst/>
@@ -10921,34 +11661,34 @@
       </p:sp>
       <p:sp>
         <p:nvSpPr>
-          <p:cNvPr id="8" name="Shape 5"/>
-          <p:cNvSpPr/>
-          <p:nvPr/>
-        </p:nvSpPr>
-        <p:spPr>
-          <a:xfrm>
-            <a:off x="548640" y="1965960"/>
-            <a:ext cx="73152" cy="3749040"/>
+          <p:cNvPr id="7" name="Shape 4"/>
+          <p:cNvSpPr/>
+          <p:nvPr/>
+        </p:nvSpPr>
+        <p:spPr>
+          <a:xfrm>
+            <a:off x="548640" y="1828800"/>
+            <a:ext cx="73152" cy="3931920"/>
           </a:xfrm>
           <a:prstGeom prst="rect">
             <a:avLst/>
           </a:prstGeom>
           <a:solidFill>
-            <a:srgbClr val="FF7A45"/>
+            <a:srgbClr val="FF3D8B"/>
           </a:solidFill>
           <a:ln/>
         </p:spPr>
       </p:sp>
       <p:sp>
         <p:nvSpPr>
-          <p:cNvPr id="9" name="Text 6"/>
-          <p:cNvSpPr/>
-          <p:nvPr/>
-        </p:nvSpPr>
-        <p:spPr>
-          <a:xfrm>
-            <a:off x="749808" y="2130552"/>
-            <a:ext cx="3291840" cy="502920"/>
+          <p:cNvPr id="8" name="Text 5"/>
+          <p:cNvSpPr/>
+          <p:nvPr/>
+        </p:nvSpPr>
+        <p:spPr>
+          <a:xfrm>
+            <a:off x="749808" y="1993392"/>
+            <a:ext cx="5166360" cy="594360"/>
           </a:xfrm>
           <a:prstGeom prst="rect">
             <a:avLst/>
@@ -10964,7 +11704,7 @@
               <a:buNone/>
             </a:pPr>
             <a:r>
-              <a:rPr lang="en-US" sz="1800" b="1" dirty="0">
+              <a:rPr lang="en-US" sz="2200" b="1" dirty="0">
                 <a:solidFill>
                   <a:srgbClr val="0F172A"/>
                 </a:solidFill>
@@ -10972,64 +11712,22 @@
                 <a:ea typeface="Inter" pitchFamily="34" charset="-122"/>
                 <a:cs typeface="Inter" pitchFamily="34" charset="-120"/>
               </a:rPr>
-              <a:t>Board</a:t>
-            </a:r>
-            <a:endParaRPr lang="en-US" sz="1800" dirty="0"/>
-          </a:p>
-        </p:txBody>
-      </p:sp>
-      <p:sp>
-        <p:nvSpPr>
-          <p:cNvPr id="10" name="Text 7"/>
-          <p:cNvSpPr/>
-          <p:nvPr/>
-        </p:nvSpPr>
-        <p:spPr>
-          <a:xfrm>
-            <a:off x="749808" y="2514600"/>
-            <a:ext cx="3291840" cy="3063240"/>
-          </a:xfrm>
-          <a:prstGeom prst="rect">
-            <a:avLst/>
-          </a:prstGeom>
-          <a:noFill/>
-          <a:ln/>
-        </p:spPr>
-        <p:txBody>
-          <a:bodyPr wrap="square" lIns="0" tIns="0" rIns="0" bIns="0" rtlCol="0" anchor="t"/>
-          <a:lstStyle/>
-          <a:p>
-            <a:pPr indent="0" marL="0">
-              <a:spcAft>
-                <a:spcPts val="400"/>
-              </a:spcAft>
-              <a:buNone/>
-            </a:pPr>
-            <a:r>
-              <a:rPr lang="en-US" sz="1400" dirty="0">
-                <a:solidFill>
-                  <a:srgbClr val="334155"/>
-                </a:solidFill>
-                <a:latin typeface="Inter" pitchFamily="34" charset="0"/>
-                <a:ea typeface="Inter" pitchFamily="34" charset="-122"/>
-                <a:cs typeface="Inter" pitchFamily="34" charset="-120"/>
-              </a:rPr>
-              <a:t>Drag to change status. Sub-task progress, due-dates, group chips, dependency ⛓ marker.</a:t>
-            </a:r>
-            <a:endParaRPr lang="en-US" sz="1400" dirty="0"/>
-          </a:p>
-        </p:txBody>
-      </p:sp>
-      <p:sp>
-        <p:nvSpPr>
-          <p:cNvPr id="11" name="Text 8"/>
-          <p:cNvSpPr/>
-          <p:nvPr/>
-        </p:nvSpPr>
-        <p:spPr>
-          <a:xfrm>
-            <a:off x="749808" y="3291840"/>
-            <a:ext cx="3291840" cy="2331720"/>
+              <a:t>On the page</a:t>
+            </a:r>
+            <a:endParaRPr lang="en-US" sz="2200" dirty="0"/>
+          </a:p>
+        </p:txBody>
+      </p:sp>
+      <p:sp>
+        <p:nvSpPr>
+          <p:cNvPr id="9" name="Text 6"/>
+          <p:cNvSpPr/>
+          <p:nvPr/>
+        </p:nvSpPr>
+        <p:spPr>
+          <a:xfrm>
+            <a:off x="777240" y="2697480"/>
+            <a:ext cx="5074920" cy="2926080"/>
           </a:xfrm>
           <a:prstGeom prst="rect">
             <a:avLst/>
@@ -11043,13 +11741,13 @@
           <a:p>
             <a:pPr marL="342900" indent="-342900">
               <a:spcAft>
-                <a:spcPts val="400"/>
+                <a:spcPts val="600"/>
               </a:spcAft>
               <a:buSzPct val="100000"/>
               <a:buChar char="•"/>
             </a:pPr>
             <a:r>
-              <a:rPr lang="en-US" sz="1400" dirty="0">
+              <a:rPr lang="en-US" sz="1800" dirty="0">
                 <a:solidFill>
                   <a:srgbClr val="334155"/>
                 </a:solidFill>
@@ -11057,20 +11755,20 @@
                 <a:ea typeface="Inter" pitchFamily="34" charset="-122"/>
                 <a:cs typeface="Inter" pitchFamily="34" charset="-120"/>
               </a:rPr>
-              <a:t>Coloured banner on new / updated cards</a:t>
-            </a:r>
-            <a:endParaRPr lang="en-US" sz="1400" dirty="0"/>
+              <a:t>Header: name, alias, status, profile icon-links (LinkedIn · ORCID · Scholar · Website).</a:t>
+            </a:r>
+            <a:endParaRPr lang="en-US" sz="1800" dirty="0"/>
           </a:p>
           <a:p>
             <a:pPr marL="342900" indent="-342900">
               <a:spcAft>
-                <a:spcPts val="400"/>
+                <a:spcPts val="600"/>
               </a:spcAft>
               <a:buSzPct val="100000"/>
               <a:buChar char="•"/>
             </a:pPr>
             <a:r>
-              <a:rPr lang="en-US" sz="1400" dirty="0">
+              <a:rPr lang="en-US" sz="1800" dirty="0">
                 <a:solidFill>
                   <a:srgbClr val="334155"/>
                 </a:solidFill>
@@ -11078,20 +11776,20 @@
                 <a:ea typeface="Inter" pitchFamily="34" charset="-122"/>
                 <a:cs typeface="Inter" pitchFamily="34" charset="-120"/>
               </a:rPr>
-              <a:t>Drag to Done (or wait for student request)</a:t>
-            </a:r>
-            <a:endParaRPr lang="en-US" sz="1400" dirty="0"/>
+              <a:t>Quick actions: Tasks · Calendar · Drive · Chat · Annual review · ✨ Catch-up.</a:t>
+            </a:r>
+            <a:endParaRPr lang="en-US" sz="1800" dirty="0"/>
           </a:p>
           <a:p>
             <a:pPr marL="342900" indent="-342900">
               <a:spcAft>
-                <a:spcPts val="400"/>
+                <a:spcPts val="600"/>
               </a:spcAft>
               <a:buSzPct val="100000"/>
               <a:buChar char="•"/>
             </a:pPr>
             <a:r>
-              <a:rPr lang="en-US" sz="1400" dirty="0">
+              <a:rPr lang="en-US" sz="1800" dirty="0">
                 <a:solidFill>
                   <a:srgbClr val="334155"/>
                 </a:solidFill>
@@ -11099,22 +11797,43 @@
                 <a:ea typeface="Inter" pitchFamily="34" charset="-122"/>
                 <a:cs typeface="Inter" pitchFamily="34" charset="-120"/>
               </a:rPr>
-              <a:t>Filter by student, priority, category, group</a:t>
-            </a:r>
-            <a:endParaRPr lang="en-US" sz="1400" dirty="0"/>
-          </a:p>
-        </p:txBody>
-      </p:sp>
-      <p:sp>
-        <p:nvSpPr>
-          <p:cNvPr id="12" name="Shape 9"/>
-          <p:cNvSpPr/>
-          <p:nvPr/>
-        </p:nvSpPr>
-        <p:spPr>
-          <a:xfrm>
-            <a:off x="4343400" y="1965960"/>
-            <a:ext cx="3611880" cy="3749040"/>
+              <a:t>Cards: thesis, publications, supervision team, recent activity, upcoming meetings.</a:t>
+            </a:r>
+            <a:endParaRPr lang="en-US" sz="1800" dirty="0"/>
+          </a:p>
+          <a:p>
+            <a:pPr marL="342900" indent="-342900">
+              <a:spcAft>
+                <a:spcPts val="600"/>
+              </a:spcAft>
+              <a:buSzPct val="100000"/>
+              <a:buChar char="•"/>
+            </a:pPr>
+            <a:r>
+              <a:rPr lang="en-US" sz="1800" dirty="0">
+                <a:solidFill>
+                  <a:srgbClr val="334155"/>
+                </a:solidFill>
+                <a:latin typeface="Inter" pitchFamily="34" charset="0"/>
+                <a:ea typeface="Inter" pitchFamily="34" charset="-122"/>
+                <a:cs typeface="Inter" pitchFamily="34" charset="-120"/>
+              </a:rPr>
+              <a:t>Edits (and Delete) gated to supervisors / admin.</a:t>
+            </a:r>
+            <a:endParaRPr lang="en-US" sz="1800" dirty="0"/>
+          </a:p>
+        </p:txBody>
+      </p:sp>
+      <p:sp>
+        <p:nvSpPr>
+          <p:cNvPr id="10" name="Shape 7"/>
+          <p:cNvSpPr/>
+          <p:nvPr/>
+        </p:nvSpPr>
+        <p:spPr>
+          <a:xfrm>
+            <a:off x="6400800" y="1828800"/>
+            <a:ext cx="5242255" cy="3931920"/>
           </a:xfrm>
           <a:prstGeom prst="rect">
             <a:avLst/>
@@ -11139,34 +11858,34 @@
       </p:sp>
       <p:sp>
         <p:nvSpPr>
-          <p:cNvPr id="13" name="Shape 10"/>
-          <p:cNvSpPr/>
-          <p:nvPr/>
-        </p:nvSpPr>
-        <p:spPr>
-          <a:xfrm>
-            <a:off x="4343400" y="1965960"/>
-            <a:ext cx="73152" cy="3749040"/>
+          <p:cNvPr id="11" name="Shape 8"/>
+          <p:cNvSpPr/>
+          <p:nvPr/>
+        </p:nvSpPr>
+        <p:spPr>
+          <a:xfrm>
+            <a:off x="6400800" y="1828800"/>
+            <a:ext cx="73152" cy="3931920"/>
           </a:xfrm>
           <a:prstGeom prst="rect">
             <a:avLst/>
           </a:prstGeom>
           <a:solidFill>
-            <a:srgbClr val="FF7A45"/>
+            <a:srgbClr val="6F4CFF"/>
           </a:solidFill>
           <a:ln/>
         </p:spPr>
       </p:sp>
       <p:sp>
         <p:nvSpPr>
-          <p:cNvPr id="14" name="Text 11"/>
-          <p:cNvSpPr/>
-          <p:nvPr/>
-        </p:nvSpPr>
-        <p:spPr>
-          <a:xfrm>
-            <a:off x="4544568" y="2130552"/>
-            <a:ext cx="3291840" cy="502920"/>
+          <p:cNvPr id="12" name="Text 9"/>
+          <p:cNvSpPr/>
+          <p:nvPr/>
+        </p:nvSpPr>
+        <p:spPr>
+          <a:xfrm>
+            <a:off x="6601968" y="1993392"/>
+            <a:ext cx="4922215" cy="594360"/>
           </a:xfrm>
           <a:prstGeom prst="rect">
             <a:avLst/>
@@ -11182,7 +11901,7 @@
               <a:buNone/>
             </a:pPr>
             <a:r>
-              <a:rPr lang="en-US" sz="1800" b="1" dirty="0">
+              <a:rPr lang="en-US" sz="2200" b="1" dirty="0">
                 <a:solidFill>
                   <a:srgbClr val="0F172A"/>
                 </a:solidFill>
@@ -11190,64 +11909,22 @@
                 <a:ea typeface="Inter" pitchFamily="34" charset="-122"/>
                 <a:cs typeface="Inter" pitchFamily="34" charset="-120"/>
               </a:rPr>
-              <a:t>List</a:t>
-            </a:r>
-            <a:endParaRPr lang="en-US" sz="1800" dirty="0"/>
-          </a:p>
-        </p:txBody>
-      </p:sp>
-      <p:sp>
-        <p:nvSpPr>
-          <p:cNvPr id="15" name="Text 12"/>
-          <p:cNvSpPr/>
-          <p:nvPr/>
-        </p:nvSpPr>
-        <p:spPr>
-          <a:xfrm>
-            <a:off x="4544568" y="2514600"/>
-            <a:ext cx="3291840" cy="3063240"/>
-          </a:xfrm>
-          <a:prstGeom prst="rect">
-            <a:avLst/>
-          </a:prstGeom>
-          <a:noFill/>
-          <a:ln/>
-        </p:spPr>
-        <p:txBody>
-          <a:bodyPr wrap="square" lIns="0" tIns="0" rIns="0" bIns="0" rtlCol="0" anchor="t"/>
-          <a:lstStyle/>
-          <a:p>
-            <a:pPr indent="0" marL="0">
-              <a:spcAft>
-                <a:spcPts val="400"/>
-              </a:spcAft>
-              <a:buNone/>
-            </a:pPr>
-            <a:r>
-              <a:rPr lang="en-US" sz="1400" dirty="0">
-                <a:solidFill>
-                  <a:srgbClr val="334155"/>
-                </a:solidFill>
-                <a:latin typeface="Inter" pitchFamily="34" charset="0"/>
-                <a:ea typeface="Inter" pitchFamily="34" charset="-122"/>
-                <a:cs typeface="Inter" pitchFamily="34" charset="-120"/>
-              </a:rPr>
-              <a:t>Group → Task → Sub-task table, one section per student.</a:t>
-            </a:r>
-            <a:endParaRPr lang="en-US" sz="1400" dirty="0"/>
-          </a:p>
-        </p:txBody>
-      </p:sp>
-      <p:sp>
-        <p:nvSpPr>
-          <p:cNvPr id="16" name="Text 13"/>
-          <p:cNvSpPr/>
-          <p:nvPr/>
-        </p:nvSpPr>
-        <p:spPr>
-          <a:xfrm>
-            <a:off x="4544568" y="3291840"/>
-            <a:ext cx="3291840" cy="2331720"/>
+              <a:t>✨ Catch-up summary</a:t>
+            </a:r>
+            <a:endParaRPr lang="en-US" sz="2200" dirty="0"/>
+          </a:p>
+        </p:txBody>
+      </p:sp>
+      <p:sp>
+        <p:nvSpPr>
+          <p:cNvPr id="13" name="Text 10"/>
+          <p:cNvSpPr/>
+          <p:nvPr/>
+        </p:nvSpPr>
+        <p:spPr>
+          <a:xfrm>
+            <a:off x="6629400" y="2697480"/>
+            <a:ext cx="4876495" cy="2926080"/>
           </a:xfrm>
           <a:prstGeom prst="rect">
             <a:avLst/>
@@ -11261,13 +11938,13 @@
           <a:p>
             <a:pPr marL="342900" indent="-342900">
               <a:spcAft>
-                <a:spcPts val="400"/>
+                <a:spcPts val="600"/>
               </a:spcAft>
               <a:buSzPct val="100000"/>
               <a:buChar char="•"/>
             </a:pPr>
             <a:r>
-              <a:rPr lang="en-US" sz="1400" dirty="0">
+              <a:rPr lang="en-US" sz="1800" dirty="0">
                 <a:solidFill>
                   <a:srgbClr val="334155"/>
                 </a:solidFill>
@@ -11275,20 +11952,20 @@
                 <a:ea typeface="Inter" pitchFamily="34" charset="-122"/>
                 <a:cs typeface="Inter" pitchFamily="34" charset="-120"/>
               </a:rPr>
-              <a:t>Coloured left bar for grouped rows</a:t>
-            </a:r>
-            <a:endParaRPr lang="en-US" sz="1400" dirty="0"/>
+              <a:t>One click → a plain-text digest for any student.</a:t>
+            </a:r>
+            <a:endParaRPr lang="en-US" sz="1800" dirty="0"/>
           </a:p>
           <a:p>
             <a:pPr marL="342900" indent="-342900">
               <a:spcAft>
-                <a:spcPts val="400"/>
+                <a:spcPts val="600"/>
               </a:spcAft>
               <a:buSzPct val="100000"/>
               <a:buChar char="•"/>
             </a:pPr>
             <a:r>
-              <a:rPr lang="en-US" sz="1400" dirty="0">
+              <a:rPr lang="en-US" sz="1800" dirty="0">
                 <a:solidFill>
                   <a:srgbClr val="334155"/>
                 </a:solidFill>
@@ -11296,20 +11973,20 @@
                 <a:ea typeface="Inter" pitchFamily="34" charset="-122"/>
                 <a:cs typeface="Inter" pitchFamily="34" charset="-120"/>
               </a:rPr>
-              <a:t>‘Individual tasks’ header separates ungrouped</a:t>
-            </a:r>
-            <a:endParaRPr lang="en-US" sz="1400" dirty="0"/>
+              <a:t>Active / overdue / blocked tasks · upcoming + recent events · thesis/pubs status · latest check-in.</a:t>
+            </a:r>
+            <a:endParaRPr lang="en-US" sz="1800" dirty="0"/>
           </a:p>
           <a:p>
             <a:pPr marL="342900" indent="-342900">
               <a:spcAft>
-                <a:spcPts val="400"/>
+                <a:spcPts val="600"/>
               </a:spcAft>
               <a:buSzPct val="100000"/>
               <a:buChar char="•"/>
             </a:pPr>
             <a:r>
-              <a:rPr lang="en-US" sz="1400" dirty="0">
+              <a:rPr lang="en-US" sz="1800" dirty="0">
                 <a:solidFill>
                   <a:srgbClr val="334155"/>
                 </a:solidFill>
@@ -11317,74 +11994,66 @@
                 <a:ea typeface="Inter" pitchFamily="34" charset="-122"/>
                 <a:cs typeface="Inter" pitchFamily="34" charset="-120"/>
               </a:rPr>
-              <a:t>Multi-select to bulk-group or add to existing</a:t>
-            </a:r>
-            <a:endParaRPr lang="en-US" sz="1400" dirty="0"/>
-          </a:p>
-        </p:txBody>
-      </p:sp>
-      <p:sp>
-        <p:nvSpPr>
-          <p:cNvPr id="17" name="Shape 14"/>
-          <p:cNvSpPr/>
-          <p:nvPr/>
-        </p:nvSpPr>
-        <p:spPr>
-          <a:xfrm>
-            <a:off x="8138160" y="1965960"/>
-            <a:ext cx="3611880" cy="3749040"/>
-          </a:xfrm>
-          <a:prstGeom prst="rect">
-            <a:avLst/>
-          </a:prstGeom>
-          <a:solidFill>
-            <a:srgbClr val="FFFFFF"/>
-          </a:solidFill>
+              <a:t>Copy button — drop into notes or a 1:1 email.</a:t>
+            </a:r>
+            <a:endParaRPr lang="en-US" sz="1800" dirty="0"/>
+          </a:p>
+          <a:p>
+            <a:pPr marL="342900" indent="-342900">
+              <a:spcAft>
+                <a:spcPts val="600"/>
+              </a:spcAft>
+              <a:buSzPct val="100000"/>
+              <a:buChar char="•"/>
+            </a:pPr>
+            <a:r>
+              <a:rPr lang="en-US" sz="1800" dirty="0">
+                <a:solidFill>
+                  <a:srgbClr val="334155"/>
+                </a:solidFill>
+                <a:latin typeface="Inter" pitchFamily="34" charset="0"/>
+                <a:ea typeface="Inter" pitchFamily="34" charset="-122"/>
+                <a:cs typeface="Inter" pitchFamily="34" charset="-120"/>
+              </a:rPr>
+              <a:t>Read-only; respects privacy (wellbeing only for supervisor-private viewers).</a:t>
+            </a:r>
+            <a:endParaRPr lang="en-US" sz="1800" dirty="0"/>
+          </a:p>
+        </p:txBody>
+      </p:sp>
+      <p:sp>
+        <p:nvSpPr>
+          <p:cNvPr id="14" name="Shape 11"/>
+          <p:cNvSpPr/>
+          <p:nvPr/>
+        </p:nvSpPr>
+        <p:spPr>
+          <a:xfrm>
+            <a:off x="548640" y="6355080"/>
+            <a:ext cx="11094415" cy="0"/>
+          </a:xfrm>
+          <a:prstGeom prst="line">
+            <a:avLst/>
+          </a:prstGeom>
+          <a:noFill/>
           <a:ln w="9525">
             <a:solidFill>
               <a:srgbClr val="E2E8F0"/>
             </a:solidFill>
             <a:prstDash val="solid"/>
           </a:ln>
-          <a:effectLst>
-            <a:outerShdw sx="100000" sy="100000" kx="0" ky="0" algn="bl" rotWithShape="0" blurRad="76200" dist="12700" dir="5400000">
-              <a:srgbClr val="94A3B8">
-                <a:alpha val="12000"/>
-              </a:srgbClr>
-            </a:outerShdw>
-          </a:effectLst>
-        </p:spPr>
-      </p:sp>
-      <p:sp>
-        <p:nvSpPr>
-          <p:cNvPr id="18" name="Shape 15"/>
-          <p:cNvSpPr/>
-          <p:nvPr/>
-        </p:nvSpPr>
-        <p:spPr>
-          <a:xfrm>
-            <a:off x="8138160" y="1965960"/>
-            <a:ext cx="73152" cy="3749040"/>
-          </a:xfrm>
-          <a:prstGeom prst="rect">
-            <a:avLst/>
-          </a:prstGeom>
-          <a:solidFill>
-            <a:srgbClr val="FF7A45"/>
-          </a:solidFill>
-          <a:ln/>
-        </p:spPr>
-      </p:sp>
-      <p:sp>
-        <p:nvSpPr>
-          <p:cNvPr id="19" name="Text 16"/>
-          <p:cNvSpPr/>
-          <p:nvPr/>
-        </p:nvSpPr>
-        <p:spPr>
-          <a:xfrm>
-            <a:off x="8339328" y="2130552"/>
-            <a:ext cx="3291840" cy="502920"/>
+        </p:spPr>
+      </p:sp>
+      <p:sp>
+        <p:nvSpPr>
+          <p:cNvPr id="15" name="Text 12"/>
+          <p:cNvSpPr/>
+          <p:nvPr/>
+        </p:nvSpPr>
+        <p:spPr>
+          <a:xfrm>
+            <a:off x="548640" y="6446520"/>
+            <a:ext cx="5486400" cy="274320"/>
           </a:xfrm>
           <a:prstGeom prst="rect">
             <a:avLst/>
@@ -11400,196 +12069,7 @@
               <a:buNone/>
             </a:pPr>
             <a:r>
-              <a:rPr lang="en-US" sz="1800" b="1" dirty="0">
-                <a:solidFill>
-                  <a:srgbClr val="0F172A"/>
-                </a:solidFill>
-                <a:latin typeface="Inter" pitchFamily="34" charset="0"/>
-                <a:ea typeface="Inter" pitchFamily="34" charset="-122"/>
-                <a:cs typeface="Inter" pitchFamily="34" charset="-120"/>
-              </a:rPr>
-              <a:t>Gantt</a:t>
-            </a:r>
-            <a:endParaRPr lang="en-US" sz="1800" dirty="0"/>
-          </a:p>
-        </p:txBody>
-      </p:sp>
-      <p:sp>
-        <p:nvSpPr>
-          <p:cNvPr id="20" name="Text 17"/>
-          <p:cNvSpPr/>
-          <p:nvPr/>
-        </p:nvSpPr>
-        <p:spPr>
-          <a:xfrm>
-            <a:off x="8339328" y="2514600"/>
-            <a:ext cx="3291840" cy="3063240"/>
-          </a:xfrm>
-          <a:prstGeom prst="rect">
-            <a:avLst/>
-          </a:prstGeom>
-          <a:noFill/>
-          <a:ln/>
-        </p:spPr>
-        <p:txBody>
-          <a:bodyPr wrap="square" lIns="0" tIns="0" rIns="0" bIns="0" rtlCol="0" anchor="t"/>
-          <a:lstStyle/>
-          <a:p>
-            <a:pPr indent="0" marL="0">
-              <a:spcAft>
-                <a:spcPts val="400"/>
-              </a:spcAft>
-              <a:buNone/>
-            </a:pPr>
-            <a:r>
-              <a:rPr lang="en-US" sz="1400" dirty="0">
-                <a:solidFill>
-                  <a:srgbClr val="334155"/>
-                </a:solidFill>
-                <a:latin typeface="Inter" pitchFamily="34" charset="0"/>
-                <a:ea typeface="Inter" pitchFamily="34" charset="-122"/>
-                <a:cs typeface="Inter" pitchFamily="34" charset="-120"/>
-              </a:rPr>
-              <a:t>Dependency-ordered timeline grouped by student.</a:t>
-            </a:r>
-            <a:endParaRPr lang="en-US" sz="1400" dirty="0"/>
-          </a:p>
-        </p:txBody>
-      </p:sp>
-      <p:sp>
-        <p:nvSpPr>
-          <p:cNvPr id="21" name="Text 18"/>
-          <p:cNvSpPr/>
-          <p:nvPr/>
-        </p:nvSpPr>
-        <p:spPr>
-          <a:xfrm>
-            <a:off x="8339328" y="3291840"/>
-            <a:ext cx="3291840" cy="2331720"/>
-          </a:xfrm>
-          <a:prstGeom prst="rect">
-            <a:avLst/>
-          </a:prstGeom>
-          <a:noFill/>
-          <a:ln/>
-        </p:spPr>
-        <p:txBody>
-          <a:bodyPr wrap="square" lIns="0" tIns="0" rIns="0" bIns="0" rtlCol="0" anchor="t"/>
-          <a:lstStyle/>
-          <a:p>
-            <a:pPr marL="342900" indent="-342900">
-              <a:spcAft>
-                <a:spcPts val="400"/>
-              </a:spcAft>
-              <a:buSzPct val="100000"/>
-              <a:buChar char="•"/>
-            </a:pPr>
-            <a:r>
-              <a:rPr lang="en-US" sz="1400" dirty="0">
-                <a:solidFill>
-                  <a:srgbClr val="334155"/>
-                </a:solidFill>
-                <a:latin typeface="Inter" pitchFamily="34" charset="0"/>
-                <a:ea typeface="Inter" pitchFamily="34" charset="-122"/>
-                <a:cs typeface="Inter" pitchFamily="34" charset="-120"/>
-              </a:rPr>
-              <a:t>Click a task to expand / collapse its sub-tasks</a:t>
-            </a:r>
-            <a:endParaRPr lang="en-US" sz="1400" dirty="0"/>
-          </a:p>
-          <a:p>
-            <a:pPr marL="342900" indent="-342900">
-              <a:spcAft>
-                <a:spcPts val="400"/>
-              </a:spcAft>
-              <a:buSzPct val="100000"/>
-              <a:buChar char="•"/>
-            </a:pPr>
-            <a:r>
-              <a:rPr lang="en-US" sz="1400" dirty="0">
-                <a:solidFill>
-                  <a:srgbClr val="334155"/>
-                </a:solidFill>
-                <a:latin typeface="Inter" pitchFamily="34" charset="0"/>
-                <a:ea typeface="Inter" pitchFamily="34" charset="-122"/>
-                <a:cs typeface="Inter" pitchFamily="34" charset="-120"/>
-              </a:rPr>
-              <a:t>◆ markers on each sub-task deadline</a:t>
-            </a:r>
-            <a:endParaRPr lang="en-US" sz="1400" dirty="0"/>
-          </a:p>
-          <a:p>
-            <a:pPr marL="342900" indent="-342900">
-              <a:spcAft>
-                <a:spcPts val="400"/>
-              </a:spcAft>
-              <a:buSzPct val="100000"/>
-              <a:buChar char="•"/>
-            </a:pPr>
-            <a:r>
-              <a:rPr lang="en-US" sz="1400" dirty="0">
-                <a:solidFill>
-                  <a:srgbClr val="334155"/>
-                </a:solidFill>
-                <a:latin typeface="Inter" pitchFamily="34" charset="0"/>
-                <a:ea typeface="Inter" pitchFamily="34" charset="-122"/>
-                <a:cs typeface="Inter" pitchFamily="34" charset="-120"/>
-              </a:rPr>
-              <a:t>Dependents indented under their parent</a:t>
-            </a:r>
-            <a:endParaRPr lang="en-US" sz="1400" dirty="0"/>
-          </a:p>
-        </p:txBody>
-      </p:sp>
-      <p:sp>
-        <p:nvSpPr>
-          <p:cNvPr id="22" name="Shape 19"/>
-          <p:cNvSpPr/>
-          <p:nvPr/>
-        </p:nvSpPr>
-        <p:spPr>
-          <a:xfrm>
-            <a:off x="548640" y="6355080"/>
-            <a:ext cx="11094415" cy="0"/>
-          </a:xfrm>
-          <a:prstGeom prst="line">
-            <a:avLst/>
-          </a:prstGeom>
-          <a:noFill/>
-          <a:ln w="9525">
-            <a:solidFill>
-              <a:srgbClr val="E2E8F0"/>
-            </a:solidFill>
-            <a:prstDash val="solid"/>
-          </a:ln>
-        </p:spPr>
-      </p:sp>
-      <p:sp>
-        <p:nvSpPr>
-          <p:cNvPr id="23" name="Text 20"/>
-          <p:cNvSpPr/>
-          <p:nvPr/>
-        </p:nvSpPr>
-        <p:spPr>
-          <a:xfrm>
-            <a:off x="548640" y="6446520"/>
-            <a:ext cx="5486400" cy="274320"/>
-          </a:xfrm>
-          <a:prstGeom prst="rect">
-            <a:avLst/>
-          </a:prstGeom>
-          <a:noFill/>
-          <a:ln/>
-        </p:spPr>
-        <p:txBody>
-          <a:bodyPr wrap="square" lIns="0" tIns="0" rIns="0" bIns="0" rtlCol="0" anchor="ctr"/>
-          <a:lstStyle/>
-          <a:p>
-            <a:pPr indent="0" marL="0">
-              <a:buNone/>
-            </a:pPr>
-            <a:r>
-              <a:rPr lang="en-US" sz="1100" dirty="0">
+              <a:rPr lang="en-US" sz="1300" dirty="0">
                 <a:solidFill>
                   <a:srgbClr val="64748B"/>
                 </a:solidFill>
@@ -11599,13 +12079,13 @@
               </a:rPr>
               <a:t>PhDapp · for supervisors</a:t>
             </a:r>
-            <a:endParaRPr lang="en-US" sz="1100" dirty="0"/>
-          </a:p>
-        </p:txBody>
-      </p:sp>
-      <p:sp>
-        <p:nvSpPr>
-          <p:cNvPr id="24" name="Text 21"/>
+            <a:endParaRPr lang="en-US" sz="1300" dirty="0"/>
+          </a:p>
+        </p:txBody>
+      </p:sp>
+      <p:sp>
+        <p:nvSpPr>
+          <p:cNvPr id="16" name="Text 13"/>
           <p:cNvSpPr/>
           <p:nvPr/>
         </p:nvSpPr>
@@ -11628,7 +12108,7 @@
               <a:buNone/>
             </a:pPr>
             <a:r>
-              <a:rPr lang="en-US" sz="1100" dirty="0">
+              <a:rPr lang="en-US" sz="1300" dirty="0">
                 <a:solidFill>
                   <a:srgbClr val="64748B"/>
                 </a:solidFill>
@@ -11636,9 +12116,9 @@
                 <a:ea typeface="Inter" pitchFamily="34" charset="-122"/>
                 <a:cs typeface="Inter" pitchFamily="34" charset="-120"/>
               </a:rPr>
-              <a:t>6 / 16</a:t>
-            </a:r>
-            <a:endParaRPr lang="en-US" sz="1100" dirty="0"/>
+              <a:t>6 / 17</a:t>
+            </a:r>
+            <a:endParaRPr lang="en-US" sz="1300" dirty="0"/>
           </a:p>
         </p:txBody>
       </p:sp>
@@ -11768,7 +12248,7 @@
         <p:spPr>
           <a:xfrm>
             <a:off x="1261872" y="749808"/>
-            <a:ext cx="10381183" cy="640080"/>
+            <a:ext cx="10381183" cy="713232"/>
           </a:xfrm>
           <a:prstGeom prst="rect">
             <a:avLst/>
@@ -11784,7 +12264,7 @@
               <a:buNone/>
             </a:pPr>
             <a:r>
-              <a:rPr lang="en-US" sz="3600" b="1" dirty="0">
+              <a:rPr lang="en-US" sz="4000" b="1" dirty="0">
                 <a:solidFill>
                   <a:srgbClr val="0F172A"/>
                 </a:solidFill>
@@ -11792,22 +12272,61 @@
                 <a:ea typeface="Inter" pitchFamily="34" charset="-122"/>
                 <a:cs typeface="Inter" pitchFamily="34" charset="-120"/>
               </a:rPr>
-              <a:t>Tasks · approval, dependencies &amp; groups</a:t>
-            </a:r>
-            <a:endParaRPr lang="en-US" sz="3600" dirty="0"/>
-          </a:p>
-        </p:txBody>
-      </p:sp>
-      <p:sp>
-        <p:nvSpPr>
-          <p:cNvPr id="6" name="Shape 3"/>
-          <p:cNvSpPr/>
-          <p:nvPr/>
-        </p:nvSpPr>
-        <p:spPr>
-          <a:xfrm>
-            <a:off x="548640" y="1828800"/>
-            <a:ext cx="3703320" cy="2606040"/>
+              <a:t>Tasks · oversee a student or a portfolio</a:t>
+            </a:r>
+            <a:endParaRPr lang="en-US" sz="4000" dirty="0"/>
+          </a:p>
+        </p:txBody>
+      </p:sp>
+      <p:sp>
+        <p:nvSpPr>
+          <p:cNvPr id="6" name="Text 3"/>
+          <p:cNvSpPr/>
+          <p:nvPr/>
+        </p:nvSpPr>
+        <p:spPr>
+          <a:xfrm>
+            <a:off x="548640" y="1508760"/>
+            <a:ext cx="11094415" cy="822960"/>
+          </a:xfrm>
+          <a:prstGeom prst="rect">
+            <a:avLst/>
+          </a:prstGeom>
+          <a:noFill/>
+          <a:ln/>
+        </p:spPr>
+        <p:txBody>
+          <a:bodyPr wrap="square" lIns="0" tIns="0" rIns="0" bIns="0" rtlCol="0" anchor="t"/>
+          <a:lstStyle/>
+          <a:p>
+            <a:pPr indent="0" marL="0">
+              <a:buNone/>
+            </a:pPr>
+            <a:r>
+              <a:rPr lang="en-US" sz="2000" i="1" dirty="0">
+                <a:solidFill>
+                  <a:srgbClr val="334155"/>
+                </a:solidFill>
+                <a:latin typeface="Inter" pitchFamily="34" charset="0"/>
+                <a:ea typeface="Inter" pitchFamily="34" charset="-122"/>
+                <a:cs typeface="Inter" pitchFamily="34" charset="-120"/>
+              </a:rPr>
+              <a:t>Same Board / List / Gantt as the student — filtered by student, group, priority, category.</a:t>
+            </a:r>
+            <a:endParaRPr lang="en-US" sz="2000" dirty="0"/>
+          </a:p>
+        </p:txBody>
+      </p:sp>
+      <p:sp>
+        <p:nvSpPr>
+          <p:cNvPr id="7" name="Shape 4"/>
+          <p:cNvSpPr/>
+          <p:nvPr/>
+        </p:nvSpPr>
+        <p:spPr>
+          <a:xfrm>
+            <a:off x="548640" y="2423160"/>
+            <a:ext cx="3611880" cy="4023360"/>
           </a:xfrm>
           <a:prstGeom prst="rect">
             <a:avLst/>
@@ -11832,14 +12351,14 @@
       </p:sp>
       <p:sp>
         <p:nvSpPr>
-          <p:cNvPr id="7" name="Shape 4"/>
-          <p:cNvSpPr/>
-          <p:nvPr/>
-        </p:nvSpPr>
-        <p:spPr>
-          <a:xfrm>
-            <a:off x="548640" y="1828800"/>
-            <a:ext cx="73152" cy="2606040"/>
+          <p:cNvPr id="8" name="Shape 5"/>
+          <p:cNvSpPr/>
+          <p:nvPr/>
+        </p:nvSpPr>
+        <p:spPr>
+          <a:xfrm>
+            <a:off x="548640" y="2423160"/>
+            <a:ext cx="73152" cy="4023360"/>
           </a:xfrm>
           <a:prstGeom prst="rect">
             <a:avLst/>
@@ -11852,14 +12371,14 @@
       </p:sp>
       <p:sp>
         <p:nvSpPr>
-          <p:cNvPr id="8" name="Text 5"/>
-          <p:cNvSpPr/>
-          <p:nvPr/>
-        </p:nvSpPr>
-        <p:spPr>
-          <a:xfrm>
-            <a:off x="749808" y="1993392"/>
-            <a:ext cx="3383280" cy="502920"/>
+          <p:cNvPr id="9" name="Text 6"/>
+          <p:cNvSpPr/>
+          <p:nvPr/>
+        </p:nvSpPr>
+        <p:spPr>
+          <a:xfrm>
+            <a:off x="749808" y="2587752"/>
+            <a:ext cx="3291840" cy="594360"/>
           </a:xfrm>
           <a:prstGeom prst="rect">
             <a:avLst/>
@@ -11875,7 +12394,7 @@
               <a:buNone/>
             </a:pPr>
             <a:r>
-              <a:rPr lang="en-US" sz="1800" b="1" dirty="0">
+              <a:rPr lang="en-US" sz="2200" b="1" dirty="0">
                 <a:solidFill>
                   <a:srgbClr val="0F172A"/>
                 </a:solidFill>
@@ -11883,22 +12402,22 @@
                 <a:ea typeface="Inter" pitchFamily="34" charset="-122"/>
                 <a:cs typeface="Inter" pitchFamily="34" charset="-120"/>
               </a:rPr>
-              <a:t>Completion approval</a:t>
-            </a:r>
-            <a:endParaRPr lang="en-US" sz="1800" dirty="0"/>
-          </a:p>
-        </p:txBody>
-      </p:sp>
-      <p:sp>
-        <p:nvSpPr>
-          <p:cNvPr id="9" name="Text 6"/>
-          <p:cNvSpPr/>
-          <p:nvPr/>
-        </p:nvSpPr>
-        <p:spPr>
-          <a:xfrm>
-            <a:off x="777240" y="2377440"/>
-            <a:ext cx="3291840" cy="2011680"/>
+              <a:t>Board</a:t>
+            </a:r>
+            <a:endParaRPr lang="en-US" sz="2200" dirty="0"/>
+          </a:p>
+        </p:txBody>
+      </p:sp>
+      <p:sp>
+        <p:nvSpPr>
+          <p:cNvPr id="10" name="Text 7"/>
+          <p:cNvSpPr/>
+          <p:nvPr/>
+        </p:nvSpPr>
+        <p:spPr>
+          <a:xfrm>
+            <a:off x="749808" y="3291840"/>
+            <a:ext cx="3291840" cy="2990088"/>
           </a:xfrm>
           <a:prstGeom prst="rect">
             <a:avLst/>
@@ -11910,15 +12429,14 @@
           <a:bodyPr wrap="square" lIns="0" tIns="0" rIns="0" bIns="0" rtlCol="0" anchor="t"/>
           <a:lstStyle/>
           <a:p>
-            <a:pPr marL="342900" indent="-342900">
+            <a:pPr indent="0" marL="0">
               <a:spcAft>
                 <a:spcPts val="400"/>
               </a:spcAft>
-              <a:buSzPct val="100000"/>
-              <a:buChar char="•"/>
-            </a:pPr>
-            <a:r>
-              <a:rPr lang="en-US" sz="1200" dirty="0">
+              <a:buNone/>
+            </a:pPr>
+            <a:r>
+              <a:rPr lang="en-US" sz="1800" dirty="0">
                 <a:solidFill>
                   <a:srgbClr val="334155"/>
                 </a:solidFill>
@@ -11926,20 +12444,42 @@
                 <a:ea typeface="Inter" pitchFamily="34" charset="-122"/>
                 <a:cs typeface="Inter" pitchFamily="34" charset="-120"/>
               </a:rPr>
-              <a:t>Students request completion (or drag to Done).</a:t>
-            </a:r>
-            <a:endParaRPr lang="en-US" sz="1200" dirty="0"/>
-          </a:p>
+              <a:t>Drag to change status.</a:t>
+            </a:r>
+            <a:endParaRPr lang="en-US" sz="1800" dirty="0"/>
+          </a:p>
+        </p:txBody>
+      </p:sp>
+      <p:sp>
+        <p:nvSpPr>
+          <p:cNvPr id="11" name="Text 8"/>
+          <p:cNvSpPr/>
+          <p:nvPr/>
+        </p:nvSpPr>
+        <p:spPr>
+          <a:xfrm>
+            <a:off x="749808" y="4114800"/>
+            <a:ext cx="3291840" cy="2240280"/>
+          </a:xfrm>
+          <a:prstGeom prst="rect">
+            <a:avLst/>
+          </a:prstGeom>
+          <a:noFill/>
+          <a:ln/>
+        </p:spPr>
+        <p:txBody>
+          <a:bodyPr wrap="square" lIns="0" tIns="0" rIns="0" bIns="0" rtlCol="0" anchor="t"/>
+          <a:lstStyle/>
           <a:p>
             <a:pPr marL="342900" indent="-342900">
               <a:spcAft>
-                <a:spcPts val="400"/>
+                <a:spcPts val="600"/>
               </a:spcAft>
               <a:buSzPct val="100000"/>
               <a:buChar char="•"/>
             </a:pPr>
             <a:r>
-              <a:rPr lang="en-US" sz="1200" dirty="0">
+              <a:rPr lang="en-US" sz="1800" dirty="0">
                 <a:solidFill>
                   <a:srgbClr val="334155"/>
                 </a:solidFill>
@@ -11947,20 +12487,20 @@
                 <a:ea typeface="Inter" pitchFamily="34" charset="-122"/>
                 <a:cs typeface="Inter" pitchFamily="34" charset="-120"/>
               </a:rPr>
-              <a:t>You get bell + Tasks badge + email.</a:t>
-            </a:r>
-            <a:endParaRPr lang="en-US" sz="1200" dirty="0"/>
+              <a:t>Banner on new / updated cards.</a:t>
+            </a:r>
+            <a:endParaRPr lang="en-US" sz="1800" dirty="0"/>
           </a:p>
           <a:p>
             <a:pPr marL="342900" indent="-342900">
               <a:spcAft>
-                <a:spcPts val="400"/>
+                <a:spcPts val="600"/>
               </a:spcAft>
               <a:buSzPct val="100000"/>
               <a:buChar char="•"/>
             </a:pPr>
             <a:r>
-              <a:rPr lang="en-US" sz="1200" dirty="0">
+              <a:rPr lang="en-US" sz="1800" dirty="0">
                 <a:solidFill>
                   <a:srgbClr val="334155"/>
                 </a:solidFill>
@@ -11968,22 +12508,43 @@
                 <a:ea typeface="Inter" pitchFamily="34" charset="-122"/>
                 <a:cs typeface="Inter" pitchFamily="34" charset="-120"/>
               </a:rPr>
-              <a:t>Review → move to Done to confirm, or comment.</a:t>
-            </a:r>
-            <a:endParaRPr lang="en-US" sz="1200" dirty="0"/>
-          </a:p>
-        </p:txBody>
-      </p:sp>
-      <p:sp>
-        <p:nvSpPr>
-          <p:cNvPr id="10" name="Shape 7"/>
-          <p:cNvSpPr/>
-          <p:nvPr/>
-        </p:nvSpPr>
-        <p:spPr>
-          <a:xfrm>
-            <a:off x="4389120" y="1828800"/>
-            <a:ext cx="3703320" cy="2606040"/>
+              <a:t>Drag to Done, or confirm requests.</a:t>
+            </a:r>
+            <a:endParaRPr lang="en-US" sz="1800" dirty="0"/>
+          </a:p>
+          <a:p>
+            <a:pPr marL="342900" indent="-342900">
+              <a:spcAft>
+                <a:spcPts val="600"/>
+              </a:spcAft>
+              <a:buSzPct val="100000"/>
+              <a:buChar char="•"/>
+            </a:pPr>
+            <a:r>
+              <a:rPr lang="en-US" sz="1800" dirty="0">
+                <a:solidFill>
+                  <a:srgbClr val="334155"/>
+                </a:solidFill>
+                <a:latin typeface="Inter" pitchFamily="34" charset="0"/>
+                <a:ea typeface="Inter" pitchFamily="34" charset="-122"/>
+                <a:cs typeface="Inter" pitchFamily="34" charset="-120"/>
+              </a:rPr>
+              <a:t>Filter by student, priority, group.</a:t>
+            </a:r>
+            <a:endParaRPr lang="en-US" sz="1800" dirty="0"/>
+          </a:p>
+        </p:txBody>
+      </p:sp>
+      <p:sp>
+        <p:nvSpPr>
+          <p:cNvPr id="12" name="Shape 9"/>
+          <p:cNvSpPr/>
+          <p:nvPr/>
+        </p:nvSpPr>
+        <p:spPr>
+          <a:xfrm>
+            <a:off x="4343400" y="2423160"/>
+            <a:ext cx="3611880" cy="4023360"/>
           </a:xfrm>
           <a:prstGeom prst="rect">
             <a:avLst/>
@@ -12008,34 +12569,34 @@
       </p:sp>
       <p:sp>
         <p:nvSpPr>
-          <p:cNvPr id="11" name="Shape 8"/>
-          <p:cNvSpPr/>
-          <p:nvPr/>
-        </p:nvSpPr>
-        <p:spPr>
-          <a:xfrm>
-            <a:off x="4389120" y="1828800"/>
-            <a:ext cx="73152" cy="2606040"/>
+          <p:cNvPr id="13" name="Shape 10"/>
+          <p:cNvSpPr/>
+          <p:nvPr/>
+        </p:nvSpPr>
+        <p:spPr>
+          <a:xfrm>
+            <a:off x="4343400" y="2423160"/>
+            <a:ext cx="73152" cy="4023360"/>
           </a:xfrm>
           <a:prstGeom prst="rect">
             <a:avLst/>
           </a:prstGeom>
           <a:solidFill>
-            <a:srgbClr val="E2445C"/>
+            <a:srgbClr val="FF7A45"/>
           </a:solidFill>
           <a:ln/>
         </p:spPr>
       </p:sp>
       <p:sp>
         <p:nvSpPr>
-          <p:cNvPr id="12" name="Text 9"/>
-          <p:cNvSpPr/>
-          <p:nvPr/>
-        </p:nvSpPr>
-        <p:spPr>
-          <a:xfrm>
-            <a:off x="4590288" y="1993392"/>
-            <a:ext cx="3383280" cy="502920"/>
+          <p:cNvPr id="14" name="Text 11"/>
+          <p:cNvSpPr/>
+          <p:nvPr/>
+        </p:nvSpPr>
+        <p:spPr>
+          <a:xfrm>
+            <a:off x="4544568" y="2587752"/>
+            <a:ext cx="3291840" cy="594360"/>
           </a:xfrm>
           <a:prstGeom prst="rect">
             <a:avLst/>
@@ -12051,7 +12612,7 @@
               <a:buNone/>
             </a:pPr>
             <a:r>
-              <a:rPr lang="en-US" sz="1800" b="1" dirty="0">
+              <a:rPr lang="en-US" sz="2200" b="1" dirty="0">
                 <a:solidFill>
                   <a:srgbClr val="0F172A"/>
                 </a:solidFill>
@@ -12059,22 +12620,22 @@
                 <a:ea typeface="Inter" pitchFamily="34" charset="-122"/>
                 <a:cs typeface="Inter" pitchFamily="34" charset="-120"/>
               </a:rPr>
-              <a:t>Dependencies</a:t>
-            </a:r>
-            <a:endParaRPr lang="en-US" sz="1800" dirty="0"/>
-          </a:p>
-        </p:txBody>
-      </p:sp>
-      <p:sp>
-        <p:nvSpPr>
-          <p:cNvPr id="13" name="Text 10"/>
-          <p:cNvSpPr/>
-          <p:nvPr/>
-        </p:nvSpPr>
-        <p:spPr>
-          <a:xfrm>
-            <a:off x="4617720" y="2377440"/>
-            <a:ext cx="3291840" cy="2011680"/>
+              <a:t>List</a:t>
+            </a:r>
+            <a:endParaRPr lang="en-US" sz="2200" dirty="0"/>
+          </a:p>
+        </p:txBody>
+      </p:sp>
+      <p:sp>
+        <p:nvSpPr>
+          <p:cNvPr id="15" name="Text 12"/>
+          <p:cNvSpPr/>
+          <p:nvPr/>
+        </p:nvSpPr>
+        <p:spPr>
+          <a:xfrm>
+            <a:off x="4544568" y="3291840"/>
+            <a:ext cx="3291840" cy="2990088"/>
           </a:xfrm>
           <a:prstGeom prst="rect">
             <a:avLst/>
@@ -12086,15 +12647,14 @@
           <a:bodyPr wrap="square" lIns="0" tIns="0" rIns="0" bIns="0" rtlCol="0" anchor="t"/>
           <a:lstStyle/>
           <a:p>
-            <a:pPr marL="342900" indent="-342900">
+            <a:pPr indent="0" marL="0">
               <a:spcAft>
                 <a:spcPts val="400"/>
               </a:spcAft>
-              <a:buSzPct val="100000"/>
-              <a:buChar char="•"/>
-            </a:pPr>
-            <a:r>
-              <a:rPr lang="en-US" sz="1200" dirty="0">
+              <a:buNone/>
+            </a:pPr>
+            <a:r>
+              <a:rPr lang="en-US" sz="1800" dirty="0">
                 <a:solidFill>
                   <a:srgbClr val="334155"/>
                 </a:solidFill>
@@ -12102,20 +12662,42 @@
                 <a:ea typeface="Inter" pitchFamily="34" charset="-122"/>
                 <a:cs typeface="Inter" pitchFamily="34" charset="-120"/>
               </a:rPr>
-              <a:t>Pick parent tasks; child auto-Blocks.</a:t>
-            </a:r>
-            <a:endParaRPr lang="en-US" sz="1200" dirty="0"/>
-          </a:p>
+              <a:t>Group → Task → Sub-task table.</a:t>
+            </a:r>
+            <a:endParaRPr lang="en-US" sz="1800" dirty="0"/>
+          </a:p>
+        </p:txBody>
+      </p:sp>
+      <p:sp>
+        <p:nvSpPr>
+          <p:cNvPr id="16" name="Text 13"/>
+          <p:cNvSpPr/>
+          <p:nvPr/>
+        </p:nvSpPr>
+        <p:spPr>
+          <a:xfrm>
+            <a:off x="4544568" y="4114800"/>
+            <a:ext cx="3291840" cy="2240280"/>
+          </a:xfrm>
+          <a:prstGeom prst="rect">
+            <a:avLst/>
+          </a:prstGeom>
+          <a:noFill/>
+          <a:ln/>
+        </p:spPr>
+        <p:txBody>
+          <a:bodyPr wrap="square" lIns="0" tIns="0" rIns="0" bIns="0" rtlCol="0" anchor="t"/>
+          <a:lstStyle/>
           <a:p>
             <a:pPr marL="342900" indent="-342900">
               <a:spcAft>
-                <a:spcPts val="400"/>
+                <a:spcPts val="600"/>
               </a:spcAft>
               <a:buSzPct val="100000"/>
               <a:buChar char="•"/>
             </a:pPr>
             <a:r>
-              <a:rPr lang="en-US" sz="1200" dirty="0">
+              <a:rPr lang="en-US" sz="1800" dirty="0">
                 <a:solidFill>
                   <a:srgbClr val="334155"/>
                 </a:solidFill>
@@ -12123,20 +12705,20 @@
                 <a:ea typeface="Inter" pitchFamily="34" charset="-122"/>
                 <a:cs typeface="Inter" pitchFamily="34" charset="-120"/>
               </a:rPr>
-              <a:t>All parents Done → auto To do.</a:t>
-            </a:r>
-            <a:endParaRPr lang="en-US" sz="1200" dirty="0"/>
+              <a:t>Coloured bar for grouped rows.</a:t>
+            </a:r>
+            <a:endParaRPr lang="en-US" sz="1800" dirty="0"/>
           </a:p>
           <a:p>
             <a:pPr marL="342900" indent="-342900">
               <a:spcAft>
-                <a:spcPts val="400"/>
+                <a:spcPts val="600"/>
               </a:spcAft>
               <a:buSzPct val="100000"/>
               <a:buChar char="•"/>
             </a:pPr>
             <a:r>
-              <a:rPr lang="en-US" sz="1200" dirty="0">
+              <a:rPr lang="en-US" sz="1800" dirty="0">
                 <a:solidFill>
                   <a:srgbClr val="334155"/>
                 </a:solidFill>
@@ -12144,20 +12726,20 @@
                 <a:ea typeface="Inter" pitchFamily="34" charset="-122"/>
                 <a:cs typeface="Inter" pitchFamily="34" charset="-120"/>
               </a:rPr>
-              <a:t>Re-opening a parent re-blocks children.</a:t>
-            </a:r>
-            <a:endParaRPr lang="en-US" sz="1200" dirty="0"/>
+              <a:t>‘Individual tasks’ separates ungrouped.</a:t>
+            </a:r>
+            <a:endParaRPr lang="en-US" sz="1800" dirty="0"/>
           </a:p>
           <a:p>
             <a:pPr marL="342900" indent="-342900">
               <a:spcAft>
-                <a:spcPts val="400"/>
+                <a:spcPts val="600"/>
               </a:spcAft>
               <a:buSzPct val="100000"/>
               <a:buChar char="•"/>
             </a:pPr>
             <a:r>
-              <a:rPr lang="en-US" sz="1200" dirty="0">
+              <a:rPr lang="en-US" sz="1800" dirty="0">
                 <a:solidFill>
                   <a:srgbClr val="334155"/>
                 </a:solidFill>
@@ -12165,22 +12747,22 @@
                 <a:ea typeface="Inter" pitchFamily="34" charset="-122"/>
                 <a:cs typeface="Inter" pitchFamily="34" charset="-120"/>
               </a:rPr>
-              <a:t>Cycles and cross-student deps rejected.</a:t>
-            </a:r>
-            <a:endParaRPr lang="en-US" sz="1200" dirty="0"/>
-          </a:p>
-        </p:txBody>
-      </p:sp>
-      <p:sp>
-        <p:nvSpPr>
-          <p:cNvPr id="14" name="Shape 11"/>
-          <p:cNvSpPr/>
-          <p:nvPr/>
-        </p:nvSpPr>
-        <p:spPr>
-          <a:xfrm>
-            <a:off x="8229600" y="1828800"/>
-            <a:ext cx="3413455" cy="2606040"/>
+              <a:t>Multi-select to bulk-group / add.</a:t>
+            </a:r>
+            <a:endParaRPr lang="en-US" sz="1800" dirty="0"/>
+          </a:p>
+        </p:txBody>
+      </p:sp>
+      <p:sp>
+        <p:nvSpPr>
+          <p:cNvPr id="17" name="Shape 14"/>
+          <p:cNvSpPr/>
+          <p:nvPr/>
+        </p:nvSpPr>
+        <p:spPr>
+          <a:xfrm>
+            <a:off x="8138160" y="2423160"/>
+            <a:ext cx="3611880" cy="4023360"/>
           </a:xfrm>
           <a:prstGeom prst="rect">
             <a:avLst/>
@@ -12205,34 +12787,34 @@
       </p:sp>
       <p:sp>
         <p:nvSpPr>
-          <p:cNvPr id="15" name="Shape 12"/>
-          <p:cNvSpPr/>
-          <p:nvPr/>
-        </p:nvSpPr>
-        <p:spPr>
-          <a:xfrm>
-            <a:off x="8229600" y="1828800"/>
-            <a:ext cx="73152" cy="2606040"/>
+          <p:cNvPr id="18" name="Shape 15"/>
+          <p:cNvSpPr/>
+          <p:nvPr/>
+        </p:nvSpPr>
+        <p:spPr>
+          <a:xfrm>
+            <a:off x="8138160" y="2423160"/>
+            <a:ext cx="73152" cy="4023360"/>
           </a:xfrm>
           <a:prstGeom prst="rect">
             <a:avLst/>
           </a:prstGeom>
           <a:solidFill>
-            <a:srgbClr val="6F4CFF"/>
+            <a:srgbClr val="FF7A45"/>
           </a:solidFill>
           <a:ln/>
         </p:spPr>
       </p:sp>
       <p:sp>
         <p:nvSpPr>
-          <p:cNvPr id="16" name="Text 13"/>
-          <p:cNvSpPr/>
-          <p:nvPr/>
-        </p:nvSpPr>
-        <p:spPr>
-          <a:xfrm>
-            <a:off x="8430768" y="1993392"/>
-            <a:ext cx="3093415" cy="502920"/>
+          <p:cNvPr id="19" name="Text 16"/>
+          <p:cNvSpPr/>
+          <p:nvPr/>
+        </p:nvSpPr>
+        <p:spPr>
+          <a:xfrm>
+            <a:off x="8339328" y="2587752"/>
+            <a:ext cx="3291840" cy="594360"/>
           </a:xfrm>
           <a:prstGeom prst="rect">
             <a:avLst/>
@@ -12248,7 +12830,7 @@
               <a:buNone/>
             </a:pPr>
             <a:r>
-              <a:rPr lang="en-US" sz="1800" b="1" dirty="0">
+              <a:rPr lang="en-US" sz="2200" b="1" dirty="0">
                 <a:solidFill>
                   <a:srgbClr val="0F172A"/>
                 </a:solidFill>
@@ -12256,22 +12838,22 @@
                 <a:ea typeface="Inter" pitchFamily="34" charset="-122"/>
                 <a:cs typeface="Inter" pitchFamily="34" charset="-120"/>
               </a:rPr>
-              <a:t>Groups &amp; filters</a:t>
-            </a:r>
-            <a:endParaRPr lang="en-US" sz="1800" dirty="0"/>
-          </a:p>
-        </p:txBody>
-      </p:sp>
-      <p:sp>
-        <p:nvSpPr>
-          <p:cNvPr id="17" name="Text 14"/>
-          <p:cNvSpPr/>
-          <p:nvPr/>
-        </p:nvSpPr>
-        <p:spPr>
-          <a:xfrm>
-            <a:off x="8458200" y="2377440"/>
-            <a:ext cx="3047695" cy="2011680"/>
+              <a:t>Gantt</a:t>
+            </a:r>
+            <a:endParaRPr lang="en-US" sz="2200" dirty="0"/>
+          </a:p>
+        </p:txBody>
+      </p:sp>
+      <p:sp>
+        <p:nvSpPr>
+          <p:cNvPr id="20" name="Text 17"/>
+          <p:cNvSpPr/>
+          <p:nvPr/>
+        </p:nvSpPr>
+        <p:spPr>
+          <a:xfrm>
+            <a:off x="8339328" y="3291840"/>
+            <a:ext cx="3291840" cy="2990088"/>
           </a:xfrm>
           <a:prstGeom prst="rect">
             <a:avLst/>
@@ -12283,15 +12865,14 @@
           <a:bodyPr wrap="square" lIns="0" tIns="0" rIns="0" bIns="0" rtlCol="0" anchor="t"/>
           <a:lstStyle/>
           <a:p>
-            <a:pPr marL="342900" indent="-342900">
+            <a:pPr indent="0" marL="0">
               <a:spcAft>
                 <a:spcPts val="400"/>
               </a:spcAft>
-              <a:buSzPct val="100000"/>
-              <a:buChar char="•"/>
-            </a:pPr>
-            <a:r>
-              <a:rPr lang="en-US" sz="1200" dirty="0">
+              <a:buNone/>
+            </a:pPr>
+            <a:r>
+              <a:rPr lang="en-US" sz="1800" dirty="0">
                 <a:solidFill>
                   <a:srgbClr val="334155"/>
                 </a:solidFill>
@@ -12299,20 +12880,42 @@
                 <a:ea typeface="Inter" pitchFamily="34" charset="-122"/>
                 <a:cs typeface="Inter" pitchFamily="34" charset="-120"/>
               </a:rPr>
-              <a:t>Group from List multi-select OR from a task's detail panel.</a:t>
-            </a:r>
-            <a:endParaRPr lang="en-US" sz="1200" dirty="0"/>
-          </a:p>
+              <a:t>Dependency-ordered timeline.</a:t>
+            </a:r>
+            <a:endParaRPr lang="en-US" sz="1800" dirty="0"/>
+          </a:p>
+        </p:txBody>
+      </p:sp>
+      <p:sp>
+        <p:nvSpPr>
+          <p:cNvPr id="21" name="Text 18"/>
+          <p:cNvSpPr/>
+          <p:nvPr/>
+        </p:nvSpPr>
+        <p:spPr>
+          <a:xfrm>
+            <a:off x="8339328" y="4114800"/>
+            <a:ext cx="3291840" cy="2240280"/>
+          </a:xfrm>
+          <a:prstGeom prst="rect">
+            <a:avLst/>
+          </a:prstGeom>
+          <a:noFill/>
+          <a:ln/>
+        </p:spPr>
+        <p:txBody>
+          <a:bodyPr wrap="square" lIns="0" tIns="0" rIns="0" bIns="0" rtlCol="0" anchor="t"/>
+          <a:lstStyle/>
           <a:p>
             <a:pPr marL="342900" indent="-342900">
               <a:spcAft>
-                <a:spcPts val="400"/>
+                <a:spcPts val="600"/>
               </a:spcAft>
               <a:buSzPct val="100000"/>
               <a:buChar char="•"/>
             </a:pPr>
             <a:r>
-              <a:rPr lang="en-US" sz="1200" dirty="0">
+              <a:rPr lang="en-US" sz="1800" dirty="0">
                 <a:solidFill>
                   <a:srgbClr val="334155"/>
                 </a:solidFill>
@@ -12320,20 +12923,20 @@
                 <a:ea typeface="Inter" pitchFamily="34" charset="-122"/>
                 <a:cs typeface="Inter" pitchFamily="34" charset="-120"/>
               </a:rPr>
-              <a:t>Filter the board by specific group or Individual-only.</a:t>
-            </a:r>
-            <a:endParaRPr lang="en-US" sz="1200" dirty="0"/>
+              <a:t>Expand a task to see sub-tasks.</a:t>
+            </a:r>
+            <a:endParaRPr lang="en-US" sz="1800" dirty="0"/>
           </a:p>
           <a:p>
             <a:pPr marL="342900" indent="-342900">
               <a:spcAft>
-                <a:spcPts val="400"/>
+                <a:spcPts val="600"/>
               </a:spcAft>
               <a:buSzPct val="100000"/>
               <a:buChar char="•"/>
             </a:pPr>
             <a:r>
-              <a:rPr lang="en-US" sz="1200" dirty="0">
+              <a:rPr lang="en-US" sz="1800" dirty="0">
                 <a:solidFill>
                   <a:srgbClr val="334155"/>
                 </a:solidFill>
@@ -12341,20 +12944,20 @@
                 <a:ea typeface="Inter" pitchFamily="34" charset="-122"/>
                 <a:cs typeface="Inter" pitchFamily="34" charset="-120"/>
               </a:rPr>
-              <a:t>Group chip on every Board card.</a:t>
-            </a:r>
-            <a:endParaRPr lang="en-US" sz="1200" dirty="0"/>
+              <a:t>◆ markers on each sub-task due.</a:t>
+            </a:r>
+            <a:endParaRPr lang="en-US" sz="1800" dirty="0"/>
           </a:p>
           <a:p>
             <a:pPr marL="342900" indent="-342900">
               <a:spcAft>
-                <a:spcPts val="400"/>
+                <a:spcPts val="600"/>
               </a:spcAft>
               <a:buSzPct val="100000"/>
               <a:buChar char="•"/>
             </a:pPr>
             <a:r>
-              <a:rPr lang="en-US" sz="1200" dirty="0">
+              <a:rPr lang="en-US" sz="1800" dirty="0">
                 <a:solidFill>
                   <a:srgbClr val="334155"/>
                 </a:solidFill>
@@ -12362,15 +12965,15 @@
                 <a:ea typeface="Inter" pitchFamily="34" charset="-122"/>
                 <a:cs typeface="Inter" pitchFamily="34" charset="-120"/>
               </a:rPr>
-              <a:t>Disband/rename groups from the group header.</a:t>
-            </a:r>
-            <a:endParaRPr lang="en-US" sz="1200" dirty="0"/>
-          </a:p>
-        </p:txBody>
-      </p:sp>
-      <p:sp>
-        <p:nvSpPr>
-          <p:cNvPr id="18" name="Shape 15"/>
+              <a:t>Dependents indented under parent.</a:t>
+            </a:r>
+            <a:endParaRPr lang="en-US" sz="1800" dirty="0"/>
+          </a:p>
+        </p:txBody>
+      </p:sp>
+      <p:sp>
+        <p:nvSpPr>
+          <p:cNvPr id="22" name="Shape 19"/>
           <p:cNvSpPr/>
           <p:nvPr/>
         </p:nvSpPr>
@@ -12393,7 +12996,7 @@
       </p:sp>
       <p:sp>
         <p:nvSpPr>
-          <p:cNvPr id="19" name="Text 16"/>
+          <p:cNvPr id="23" name="Text 20"/>
           <p:cNvSpPr/>
           <p:nvPr/>
         </p:nvSpPr>
@@ -12416,7 +13019,7 @@
               <a:buNone/>
             </a:pPr>
             <a:r>
-              <a:rPr lang="en-US" sz="1100" dirty="0">
+              <a:rPr lang="en-US" sz="1300" dirty="0">
                 <a:solidFill>
                   <a:srgbClr val="64748B"/>
                 </a:solidFill>
@@ -12426,13 +13029,13 @@
               </a:rPr>
               <a:t>PhDapp · for supervisors</a:t>
             </a:r>
-            <a:endParaRPr lang="en-US" sz="1100" dirty="0"/>
-          </a:p>
-        </p:txBody>
-      </p:sp>
-      <p:sp>
-        <p:nvSpPr>
-          <p:cNvPr id="20" name="Text 17"/>
+            <a:endParaRPr lang="en-US" sz="1300" dirty="0"/>
+          </a:p>
+        </p:txBody>
+      </p:sp>
+      <p:sp>
+        <p:nvSpPr>
+          <p:cNvPr id="24" name="Text 21"/>
           <p:cNvSpPr/>
           <p:nvPr/>
         </p:nvSpPr>
@@ -12455,7 +13058,7 @@
               <a:buNone/>
             </a:pPr>
             <a:r>
-              <a:rPr lang="en-US" sz="1100" dirty="0">
+              <a:rPr lang="en-US" sz="1300" dirty="0">
                 <a:solidFill>
                   <a:srgbClr val="64748B"/>
                 </a:solidFill>
@@ -12463,9 +13066,9 @@
                 <a:ea typeface="Inter" pitchFamily="34" charset="-122"/>
                 <a:cs typeface="Inter" pitchFamily="34" charset="-120"/>
               </a:rPr>
-              <a:t>7 / 16</a:t>
-            </a:r>
-            <a:endParaRPr lang="en-US" sz="1100" dirty="0"/>
+              <a:t>7 / 17</a:t>
+            </a:r>
+            <a:endParaRPr lang="en-US" sz="1300" dirty="0"/>
           </a:p>
         </p:txBody>
       </p:sp>
@@ -12518,7 +13121,7 @@
             </a:avLst>
           </a:prstGeom>
           <a:solidFill>
-            <a:srgbClr val="00D1C1"/>
+            <a:srgbClr val="FF7A45"/>
           </a:solidFill>
           <a:ln/>
         </p:spPr>
@@ -12574,13 +13177,13 @@
             <a:r>
               <a:rPr lang="en-US" sz="1400" b="1" spc="400" kern="0" dirty="0">
                 <a:solidFill>
-                  <a:srgbClr val="00D1C1"/>
-                </a:solidFill>
-                <a:latin typeface="Inter" pitchFamily="34" charset="0"/>
-                <a:ea typeface="Inter" pitchFamily="34" charset="-122"/>
-                <a:cs typeface="Inter" pitchFamily="34" charset="-120"/>
-              </a:rPr>
-              <a:t>CALENDAR</a:t>
+                  <a:srgbClr val="FF7A45"/>
+                </a:solidFill>
+                <a:latin typeface="Inter" pitchFamily="34" charset="0"/>
+                <a:ea typeface="Inter" pitchFamily="34" charset="-122"/>
+                <a:cs typeface="Inter" pitchFamily="34" charset="-120"/>
+              </a:rPr>
+              <a:t>TASKS</a:t>
             </a:r>
             <a:endParaRPr lang="en-US" sz="1400" dirty="0"/>
           </a:p>
@@ -12595,7 +13198,7 @@
         <p:spPr>
           <a:xfrm>
             <a:off x="1261872" y="749808"/>
-            <a:ext cx="10381183" cy="640080"/>
+            <a:ext cx="10381183" cy="713232"/>
           </a:xfrm>
           <a:prstGeom prst="rect">
             <a:avLst/>
@@ -12611,7 +13214,7 @@
               <a:buNone/>
             </a:pPr>
             <a:r>
-              <a:rPr lang="en-US" sz="3600" b="1" dirty="0">
+              <a:rPr lang="en-US" sz="4000" b="1" dirty="0">
                 <a:solidFill>
                   <a:srgbClr val="0F172A"/>
                 </a:solidFill>
@@ -12619,9 +13222,9 @@
                 <a:ea typeface="Inter" pitchFamily="34" charset="-122"/>
                 <a:cs typeface="Inter" pitchFamily="34" charset="-120"/>
               </a:rPr>
-              <a:t>Calendar · meetings, deadlines, availability</a:t>
-            </a:r>
-            <a:endParaRPr lang="en-US" sz="3600" dirty="0"/>
+              <a:t>Tasks · approval, dependencies &amp; groups</a:t>
+            </a:r>
+            <a:endParaRPr lang="en-US" sz="4000" dirty="0"/>
           </a:p>
         </p:txBody>
       </p:sp>
@@ -12633,8 +13236,8 @@
         </p:nvSpPr>
         <p:spPr>
           <a:xfrm>
-            <a:off x="548640" y="1828800"/>
-            <a:ext cx="5486400" cy="3291840"/>
+            <a:off x="548640" y="2194560"/>
+            <a:ext cx="3611880" cy="3566160"/>
           </a:xfrm>
           <a:prstGeom prst="rect">
             <a:avLst/>
@@ -12665,14 +13268,14 @@
         </p:nvSpPr>
         <p:spPr>
           <a:xfrm>
-            <a:off x="548640" y="1828800"/>
-            <a:ext cx="73152" cy="3291840"/>
+            <a:off x="548640" y="2194560"/>
+            <a:ext cx="73152" cy="3566160"/>
           </a:xfrm>
           <a:prstGeom prst="rect">
             <a:avLst/>
           </a:prstGeom>
           <a:solidFill>
-            <a:srgbClr val="00D1C1"/>
+            <a:srgbClr val="FF7A45"/>
           </a:solidFill>
           <a:ln/>
         </p:spPr>
@@ -12685,8 +13288,8 @@
         </p:nvSpPr>
         <p:spPr>
           <a:xfrm>
-            <a:off x="749808" y="1993392"/>
-            <a:ext cx="5166360" cy="502920"/>
+            <a:off x="749808" y="2359152"/>
+            <a:ext cx="3291840" cy="594360"/>
           </a:xfrm>
           <a:prstGeom prst="rect">
             <a:avLst/>
@@ -12702,7 +13305,7 @@
               <a:buNone/>
             </a:pPr>
             <a:r>
-              <a:rPr lang="en-US" sz="1800" b="1" dirty="0">
+              <a:rPr lang="en-US" sz="2200" b="1" dirty="0">
                 <a:solidFill>
                   <a:srgbClr val="0F172A"/>
                 </a:solidFill>
@@ -12710,9 +13313,9 @@
                 <a:ea typeface="Inter" pitchFamily="34" charset="-122"/>
                 <a:cs typeface="Inter" pitchFamily="34" charset="-120"/>
               </a:rPr>
-              <a:t>Create &amp; sync</a:t>
-            </a:r>
-            <a:endParaRPr lang="en-US" sz="1800" dirty="0"/>
+              <a:t>Completion approval</a:t>
+            </a:r>
+            <a:endParaRPr lang="en-US" sz="2200" dirty="0"/>
           </a:p>
         </p:txBody>
       </p:sp>
@@ -12724,8 +13327,8 @@
         </p:nvSpPr>
         <p:spPr>
           <a:xfrm>
-            <a:off x="777240" y="2377440"/>
-            <a:ext cx="5074920" cy="2651760"/>
+            <a:off x="777240" y="3063240"/>
+            <a:ext cx="3246120" cy="2532888"/>
           </a:xfrm>
           <a:prstGeom prst="rect">
             <a:avLst/>
@@ -12739,13 +13342,13 @@
           <a:p>
             <a:pPr marL="342900" indent="-342900">
               <a:spcAft>
-                <a:spcPts val="400"/>
+                <a:spcPts val="600"/>
               </a:spcAft>
               <a:buSzPct val="100000"/>
               <a:buChar char="•"/>
             </a:pPr>
             <a:r>
-              <a:rPr lang="en-US" sz="1300" dirty="0">
+              <a:rPr lang="en-US" sz="1800" dirty="0">
                 <a:solidFill>
                   <a:srgbClr val="334155"/>
                 </a:solidFill>
@@ -12753,20 +13356,20 @@
                 <a:ea typeface="Inter" pitchFamily="34" charset="-122"/>
                 <a:cs typeface="Inter" pitchFamily="34" charset="-120"/>
               </a:rPr>
-              <a:t>Push to Google Calendar lands on the student's shared calendar (or the admin-defined General calendar for unassigned).</a:t>
-            </a:r>
-            <a:endParaRPr lang="en-US" sz="1300" dirty="0"/>
+              <a:t>Students request, or drag to Done.</a:t>
+            </a:r>
+            <a:endParaRPr lang="en-US" sz="1800" dirty="0"/>
           </a:p>
           <a:p>
             <a:pPr marL="342900" indent="-342900">
               <a:spcAft>
-                <a:spcPts val="400"/>
+                <a:spcPts val="600"/>
               </a:spcAft>
               <a:buSzPct val="100000"/>
               <a:buChar char="•"/>
             </a:pPr>
             <a:r>
-              <a:rPr lang="en-US" sz="1300" dirty="0">
+              <a:rPr lang="en-US" sz="1800" dirty="0">
                 <a:solidFill>
                   <a:srgbClr val="334155"/>
                 </a:solidFill>
@@ -12774,20 +13377,20 @@
                 <a:ea typeface="Inter" pitchFamily="34" charset="-122"/>
                 <a:cs typeface="Inter" pitchFamily="34" charset="-120"/>
               </a:rPr>
-              <a:t>Recurring events (daily/weekly/monthly, until a date) — pushed as native recurrence.</a:t>
-            </a:r>
-            <a:endParaRPr lang="en-US" sz="1300" dirty="0"/>
+              <a:t>You get bell + badge + email.</a:t>
+            </a:r>
+            <a:endParaRPr lang="en-US" sz="1800" dirty="0"/>
           </a:p>
           <a:p>
             <a:pPr marL="342900" indent="-342900">
               <a:spcAft>
-                <a:spcPts val="400"/>
+                <a:spcPts val="600"/>
               </a:spcAft>
               <a:buSzPct val="100000"/>
               <a:buChar char="•"/>
             </a:pPr>
             <a:r>
-              <a:rPr lang="en-US" sz="1300" dirty="0">
+              <a:rPr lang="en-US" sz="1800" dirty="0">
                 <a:solidFill>
                   <a:srgbClr val="334155"/>
                 </a:solidFill>
@@ -12795,30 +13398,9 @@
                 <a:ea typeface="Inter" pitchFamily="34" charset="-122"/>
                 <a:cs typeface="Inter" pitchFamily="34" charset="-120"/>
               </a:rPr>
-              <a:t>Re-assign a student via the Edit dialog; ‘Related task’ link makes the event peek-open the task.</a:t>
-            </a:r>
-            <a:endParaRPr lang="en-US" sz="1300" dirty="0"/>
-          </a:p>
-          <a:p>
-            <a:pPr marL="342900" indent="-342900">
-              <a:spcAft>
-                <a:spcPts val="400"/>
-              </a:spcAft>
-              <a:buSzPct val="100000"/>
-              <a:buChar char="•"/>
-            </a:pPr>
-            <a:r>
-              <a:rPr lang="en-US" sz="1300" dirty="0">
-                <a:solidFill>
-                  <a:srgbClr val="334155"/>
-                </a:solidFill>
-                <a:latin typeface="Inter" pitchFamily="34" charset="0"/>
-                <a:ea typeface="Inter" pitchFamily="34" charset="-122"/>
-                <a:cs typeface="Inter" pitchFamily="34" charset="-120"/>
-              </a:rPr>
-              <a:t>Times are timezone-stable across edit/save (no more drift).</a:t>
-            </a:r>
-            <a:endParaRPr lang="en-US" sz="1300" dirty="0"/>
+              <a:t>Confirm in Done, or comment back.</a:t>
+            </a:r>
+            <a:endParaRPr lang="en-US" sz="1800" dirty="0"/>
           </a:p>
         </p:txBody>
       </p:sp>
@@ -12830,8 +13412,8 @@
         </p:nvSpPr>
         <p:spPr>
           <a:xfrm>
-            <a:off x="6400800" y="1828800"/>
-            <a:ext cx="5242255" cy="3291840"/>
+            <a:off x="4343400" y="2194560"/>
+            <a:ext cx="3611880" cy="3566160"/>
           </a:xfrm>
           <a:prstGeom prst="rect">
             <a:avLst/>
@@ -12862,14 +13444,14 @@
         </p:nvSpPr>
         <p:spPr>
           <a:xfrm>
-            <a:off x="6400800" y="1828800"/>
-            <a:ext cx="73152" cy="3291840"/>
+            <a:off x="4343400" y="2194560"/>
+            <a:ext cx="73152" cy="3566160"/>
           </a:xfrm>
           <a:prstGeom prst="rect">
             <a:avLst/>
           </a:prstGeom>
           <a:solidFill>
-            <a:srgbClr val="00D1C1"/>
+            <a:srgbClr val="E2445C"/>
           </a:solidFill>
           <a:ln/>
         </p:spPr>
@@ -12882,8 +13464,8 @@
         </p:nvSpPr>
         <p:spPr>
           <a:xfrm>
-            <a:off x="6601968" y="1993392"/>
-            <a:ext cx="4922215" cy="502920"/>
+            <a:off x="4544568" y="2359152"/>
+            <a:ext cx="3291840" cy="594360"/>
           </a:xfrm>
           <a:prstGeom prst="rect">
             <a:avLst/>
@@ -12899,7 +13481,7 @@
               <a:buNone/>
             </a:pPr>
             <a:r>
-              <a:rPr lang="en-US" sz="1800" b="1" dirty="0">
+              <a:rPr lang="en-US" sz="2200" b="1" dirty="0">
                 <a:solidFill>
                   <a:srgbClr val="0F172A"/>
                 </a:solidFill>
@@ -12907,9 +13489,9 @@
                 <a:ea typeface="Inter" pitchFamily="34" charset="-122"/>
                 <a:cs typeface="Inter" pitchFamily="34" charset="-120"/>
               </a:rPr>
-              <a:t>1:1 meetings &amp; availability</a:t>
-            </a:r>
-            <a:endParaRPr lang="en-US" sz="1800" dirty="0"/>
+              <a:t>Dependencies</a:t>
+            </a:r>
+            <a:endParaRPr lang="en-US" sz="2200" dirty="0"/>
           </a:p>
         </p:txBody>
       </p:sp>
@@ -12921,8 +13503,8 @@
         </p:nvSpPr>
         <p:spPr>
           <a:xfrm>
-            <a:off x="6629400" y="2377440"/>
-            <a:ext cx="4876495" cy="2651760"/>
+            <a:off x="4572000" y="3063240"/>
+            <a:ext cx="3246120" cy="2532888"/>
           </a:xfrm>
           <a:prstGeom prst="rect">
             <a:avLst/>
@@ -12936,13 +13518,13 @@
           <a:p>
             <a:pPr marL="342900" indent="-342900">
               <a:spcAft>
-                <a:spcPts val="400"/>
+                <a:spcPts val="600"/>
               </a:spcAft>
               <a:buSzPct val="100000"/>
               <a:buChar char="•"/>
             </a:pPr>
             <a:r>
-              <a:rPr lang="en-US" sz="1300" dirty="0">
+              <a:rPr lang="en-US" sz="1800" dirty="0">
                 <a:solidFill>
                   <a:srgbClr val="334155"/>
                 </a:solidFill>
@@ -12950,20 +13532,20 @@
                 <a:ea typeface="Inter" pitchFamily="34" charset="-122"/>
                 <a:cs typeface="Inter" pitchFamily="34" charset="-120"/>
               </a:rPr>
-              <a:t>Mark an event as a 1:1 meeting → agenda + notes + action items.</a:t>
-            </a:r>
-            <a:endParaRPr lang="en-US" sz="1300" dirty="0"/>
+              <a:t>Pick parents; child auto-Blocks.</a:t>
+            </a:r>
+            <a:endParaRPr lang="en-US" sz="1800" dirty="0"/>
           </a:p>
           <a:p>
             <a:pPr marL="342900" indent="-342900">
               <a:spcAft>
-                <a:spcPts val="400"/>
+                <a:spcPts val="600"/>
               </a:spcAft>
               <a:buSzPct val="100000"/>
               <a:buChar char="•"/>
             </a:pPr>
             <a:r>
-              <a:rPr lang="en-US" sz="1300" dirty="0">
+              <a:rPr lang="en-US" sz="1800" dirty="0">
                 <a:solidFill>
                   <a:srgbClr val="334155"/>
                 </a:solidFill>
@@ -12971,20 +13553,20 @@
                 <a:ea typeface="Inter" pitchFamily="34" charset="-122"/>
                 <a:cs typeface="Inter" pitchFamily="34" charset="-120"/>
               </a:rPr>
-              <a:t>Action items → tasks: one-click create tasks (priority/category set in the meeting panel).</a:t>
-            </a:r>
-            <a:endParaRPr lang="en-US" sz="1300" dirty="0"/>
+              <a:t>All parents Done → child auto-To-do.</a:t>
+            </a:r>
+            <a:endParaRPr lang="en-US" sz="1800" dirty="0"/>
           </a:p>
           <a:p>
             <a:pPr marL="342900" indent="-342900">
               <a:spcAft>
-                <a:spcPts val="400"/>
+                <a:spcPts val="600"/>
               </a:spcAft>
               <a:buSzPct val="100000"/>
               <a:buChar char="•"/>
             </a:pPr>
             <a:r>
-              <a:rPr lang="en-US" sz="1300" dirty="0">
+              <a:rPr lang="en-US" sz="1800" dirty="0">
                 <a:solidFill>
                   <a:srgbClr val="334155"/>
                 </a:solidFill>
@@ -12992,9 +13574,9 @@
                 <a:ea typeface="Inter" pitchFamily="34" charset="-122"/>
                 <a:cs typeface="Inter" pitchFamily="34" charset="-120"/>
               </a:rPr>
-              <a:t>Mark yourself away via My availability — students see opaque ‘Unavailable’ blocks.</a:t>
-            </a:r>
-            <a:endParaRPr lang="en-US" sz="1300" dirty="0"/>
+              <a:t>Cycles, cross-student rejected.</a:t>
+            </a:r>
+            <a:endParaRPr lang="en-US" sz="1800" dirty="0"/>
           </a:p>
         </p:txBody>
       </p:sp>
@@ -13006,24 +13588,200 @@
         </p:nvSpPr>
         <p:spPr>
           <a:xfrm>
-            <a:off x="548640" y="6355080"/>
-            <a:ext cx="11094415" cy="0"/>
-          </a:xfrm>
-          <a:prstGeom prst="line">
-            <a:avLst/>
-          </a:prstGeom>
-          <a:noFill/>
+            <a:off x="8138160" y="2194560"/>
+            <a:ext cx="3611880" cy="3566160"/>
+          </a:xfrm>
+          <a:prstGeom prst="rect">
+            <a:avLst/>
+          </a:prstGeom>
+          <a:solidFill>
+            <a:srgbClr val="FFFFFF"/>
+          </a:solidFill>
           <a:ln w="9525">
             <a:solidFill>
               <a:srgbClr val="E2E8F0"/>
             </a:solidFill>
             <a:prstDash val="solid"/>
           </a:ln>
-        </p:spPr>
-      </p:sp>
-      <p:sp>
-        <p:nvSpPr>
-          <p:cNvPr id="15" name="Text 12"/>
+          <a:effectLst>
+            <a:outerShdw sx="100000" sy="100000" kx="0" ky="0" algn="bl" rotWithShape="0" blurRad="76200" dist="12700" dir="5400000">
+              <a:srgbClr val="94A3B8">
+                <a:alpha val="12000"/>
+              </a:srgbClr>
+            </a:outerShdw>
+          </a:effectLst>
+        </p:spPr>
+      </p:sp>
+      <p:sp>
+        <p:nvSpPr>
+          <p:cNvPr id="15" name="Shape 12"/>
+          <p:cNvSpPr/>
+          <p:nvPr/>
+        </p:nvSpPr>
+        <p:spPr>
+          <a:xfrm>
+            <a:off x="8138160" y="2194560"/>
+            <a:ext cx="73152" cy="3566160"/>
+          </a:xfrm>
+          <a:prstGeom prst="rect">
+            <a:avLst/>
+          </a:prstGeom>
+          <a:solidFill>
+            <a:srgbClr val="6F4CFF"/>
+          </a:solidFill>
+          <a:ln/>
+        </p:spPr>
+      </p:sp>
+      <p:sp>
+        <p:nvSpPr>
+          <p:cNvPr id="16" name="Text 13"/>
+          <p:cNvSpPr/>
+          <p:nvPr/>
+        </p:nvSpPr>
+        <p:spPr>
+          <a:xfrm>
+            <a:off x="8339328" y="2359152"/>
+            <a:ext cx="3291840" cy="594360"/>
+          </a:xfrm>
+          <a:prstGeom prst="rect">
+            <a:avLst/>
+          </a:prstGeom>
+          <a:noFill/>
+          <a:ln/>
+        </p:spPr>
+        <p:txBody>
+          <a:bodyPr wrap="square" lIns="0" tIns="0" rIns="0" bIns="0" rtlCol="0" anchor="ctr"/>
+          <a:lstStyle/>
+          <a:p>
+            <a:pPr indent="0" marL="0">
+              <a:buNone/>
+            </a:pPr>
+            <a:r>
+              <a:rPr lang="en-US" sz="2200" b="1" dirty="0">
+                <a:solidFill>
+                  <a:srgbClr val="0F172A"/>
+                </a:solidFill>
+                <a:latin typeface="Inter" pitchFamily="34" charset="0"/>
+                <a:ea typeface="Inter" pitchFamily="34" charset="-122"/>
+                <a:cs typeface="Inter" pitchFamily="34" charset="-120"/>
+              </a:rPr>
+              <a:t>Groups &amp; filters</a:t>
+            </a:r>
+            <a:endParaRPr lang="en-US" sz="2200" dirty="0"/>
+          </a:p>
+        </p:txBody>
+      </p:sp>
+      <p:sp>
+        <p:nvSpPr>
+          <p:cNvPr id="17" name="Text 14"/>
+          <p:cNvSpPr/>
+          <p:nvPr/>
+        </p:nvSpPr>
+        <p:spPr>
+          <a:xfrm>
+            <a:off x="8366760" y="3063240"/>
+            <a:ext cx="3246120" cy="2532888"/>
+          </a:xfrm>
+          <a:prstGeom prst="rect">
+            <a:avLst/>
+          </a:prstGeom>
+          <a:noFill/>
+          <a:ln/>
+        </p:spPr>
+        <p:txBody>
+          <a:bodyPr wrap="square" lIns="0" tIns="0" rIns="0" bIns="0" rtlCol="0" anchor="t"/>
+          <a:lstStyle/>
+          <a:p>
+            <a:pPr marL="342900" indent="-342900">
+              <a:spcAft>
+                <a:spcPts val="600"/>
+              </a:spcAft>
+              <a:buSzPct val="100000"/>
+              <a:buChar char="•"/>
+            </a:pPr>
+            <a:r>
+              <a:rPr lang="en-US" sz="1800" dirty="0">
+                <a:solidFill>
+                  <a:srgbClr val="334155"/>
+                </a:solidFill>
+                <a:latin typeface="Inter" pitchFamily="34" charset="0"/>
+                <a:ea typeface="Inter" pitchFamily="34" charset="-122"/>
+                <a:cs typeface="Inter" pitchFamily="34" charset="-120"/>
+              </a:rPr>
+              <a:t>Group from List multi-select.</a:t>
+            </a:r>
+            <a:endParaRPr lang="en-US" sz="1800" dirty="0"/>
+          </a:p>
+          <a:p>
+            <a:pPr marL="342900" indent="-342900">
+              <a:spcAft>
+                <a:spcPts val="600"/>
+              </a:spcAft>
+              <a:buSzPct val="100000"/>
+              <a:buChar char="•"/>
+            </a:pPr>
+            <a:r>
+              <a:rPr lang="en-US" sz="1800" dirty="0">
+                <a:solidFill>
+                  <a:srgbClr val="334155"/>
+                </a:solidFill>
+                <a:latin typeface="Inter" pitchFamily="34" charset="0"/>
+                <a:ea typeface="Inter" pitchFamily="34" charset="-122"/>
+                <a:cs typeface="Inter" pitchFamily="34" charset="-120"/>
+              </a:rPr>
+              <a:t>Or set a group from task detail.</a:t>
+            </a:r>
+            <a:endParaRPr lang="en-US" sz="1800" dirty="0"/>
+          </a:p>
+          <a:p>
+            <a:pPr marL="342900" indent="-342900">
+              <a:spcAft>
+                <a:spcPts val="600"/>
+              </a:spcAft>
+              <a:buSzPct val="100000"/>
+              <a:buChar char="•"/>
+            </a:pPr>
+            <a:r>
+              <a:rPr lang="en-US" sz="1800" dirty="0">
+                <a:solidFill>
+                  <a:srgbClr val="334155"/>
+                </a:solidFill>
+                <a:latin typeface="Inter" pitchFamily="34" charset="0"/>
+                <a:ea typeface="Inter" pitchFamily="34" charset="-122"/>
+                <a:cs typeface="Inter" pitchFamily="34" charset="-120"/>
+              </a:rPr>
+              <a:t>Filter board by group or Individual.</a:t>
+            </a:r>
+            <a:endParaRPr lang="en-US" sz="1800" dirty="0"/>
+          </a:p>
+        </p:txBody>
+      </p:sp>
+      <p:sp>
+        <p:nvSpPr>
+          <p:cNvPr id="18" name="Shape 15"/>
+          <p:cNvSpPr/>
+          <p:nvPr/>
+        </p:nvSpPr>
+        <p:spPr>
+          <a:xfrm>
+            <a:off x="548640" y="6355080"/>
+            <a:ext cx="11094415" cy="0"/>
+          </a:xfrm>
+          <a:prstGeom prst="line">
+            <a:avLst/>
+          </a:prstGeom>
+          <a:noFill/>
+          <a:ln w="9525">
+            <a:solidFill>
+              <a:srgbClr val="E2E8F0"/>
+            </a:solidFill>
+            <a:prstDash val="solid"/>
+          </a:ln>
+        </p:spPr>
+      </p:sp>
+      <p:sp>
+        <p:nvSpPr>
+          <p:cNvPr id="19" name="Text 16"/>
           <p:cNvSpPr/>
           <p:nvPr/>
         </p:nvSpPr>
@@ -13046,7 +13804,7 @@
               <a:buNone/>
             </a:pPr>
             <a:r>
-              <a:rPr lang="en-US" sz="1100" dirty="0">
+              <a:rPr lang="en-US" sz="1300" dirty="0">
                 <a:solidFill>
                   <a:srgbClr val="64748B"/>
                 </a:solidFill>
@@ -13056,13 +13814,13 @@
               </a:rPr>
               <a:t>PhDapp · for supervisors</a:t>
             </a:r>
-            <a:endParaRPr lang="en-US" sz="1100" dirty="0"/>
-          </a:p>
-        </p:txBody>
-      </p:sp>
-      <p:sp>
-        <p:nvSpPr>
-          <p:cNvPr id="16" name="Text 13"/>
+            <a:endParaRPr lang="en-US" sz="1300" dirty="0"/>
+          </a:p>
+        </p:txBody>
+      </p:sp>
+      <p:sp>
+        <p:nvSpPr>
+          <p:cNvPr id="20" name="Text 17"/>
           <p:cNvSpPr/>
           <p:nvPr/>
         </p:nvSpPr>
@@ -13085,7 +13843,7 @@
               <a:buNone/>
             </a:pPr>
             <a:r>
-              <a:rPr lang="en-US" sz="1100" dirty="0">
+              <a:rPr lang="en-US" sz="1300" dirty="0">
                 <a:solidFill>
                   <a:srgbClr val="64748B"/>
                 </a:solidFill>
@@ -13093,9 +13851,9 @@
                 <a:ea typeface="Inter" pitchFamily="34" charset="-122"/>
                 <a:cs typeface="Inter" pitchFamily="34" charset="-120"/>
               </a:rPr>
-              <a:t>8 / 16</a:t>
-            </a:r>
-            <a:endParaRPr lang="en-US" sz="1100" dirty="0"/>
+              <a:t>8 / 17</a:t>
+            </a:r>
+            <a:endParaRPr lang="en-US" sz="1300" dirty="0"/>
           </a:p>
         </p:txBody>
       </p:sp>
@@ -13148,7 +13906,7 @@
             </a:avLst>
           </a:prstGeom>
           <a:solidFill>
-            <a:srgbClr val="00CA72"/>
+            <a:srgbClr val="00D1C1"/>
           </a:solidFill>
           <a:ln/>
         </p:spPr>
@@ -13204,13 +13962,13 @@
             <a:r>
               <a:rPr lang="en-US" sz="1400" b="1" spc="400" kern="0" dirty="0">
                 <a:solidFill>
-                  <a:srgbClr val="00CA72"/>
-                </a:solidFill>
-                <a:latin typeface="Inter" pitchFamily="34" charset="0"/>
-                <a:ea typeface="Inter" pitchFamily="34" charset="-122"/>
-                <a:cs typeface="Inter" pitchFamily="34" charset="-120"/>
-              </a:rPr>
-              <a:t>CHAT</a:t>
+                  <a:srgbClr val="00D1C1"/>
+                </a:solidFill>
+                <a:latin typeface="Inter" pitchFamily="34" charset="0"/>
+                <a:ea typeface="Inter" pitchFamily="34" charset="-122"/>
+                <a:cs typeface="Inter" pitchFamily="34" charset="-120"/>
+              </a:rPr>
+              <a:t>CALENDAR</a:t>
             </a:r>
             <a:endParaRPr lang="en-US" sz="1400" dirty="0"/>
           </a:p>
@@ -13225,7 +13983,7 @@
         <p:spPr>
           <a:xfrm>
             <a:off x="1261872" y="749808"/>
-            <a:ext cx="10381183" cy="640080"/>
+            <a:ext cx="10381183" cy="713232"/>
           </a:xfrm>
           <a:prstGeom prst="rect">
             <a:avLst/>
@@ -13241,7 +13999,7 @@
               <a:buNone/>
             </a:pPr>
             <a:r>
-              <a:rPr lang="en-US" sz="3600" b="1" dirty="0">
+              <a:rPr lang="en-US" sz="4000" b="1" dirty="0">
                 <a:solidFill>
                   <a:srgbClr val="0F172A"/>
                 </a:solidFill>
@@ -13249,9 +14007,9 @@
                 <a:ea typeface="Inter" pitchFamily="34" charset="-122"/>
                 <a:cs typeface="Inter" pitchFamily="34" charset="-120"/>
               </a:rPr>
-              <a:t>Chat · channels for the team</a:t>
-            </a:r>
-            <a:endParaRPr lang="en-US" sz="3600" dirty="0"/>
+              <a:t>Calendar · meetings, deadlines, availability</a:t>
+            </a:r>
+            <a:endParaRPr lang="en-US" sz="4000" dirty="0"/>
           </a:p>
         </p:txBody>
       </p:sp>
@@ -13264,7 +14022,7 @@
         <p:spPr>
           <a:xfrm>
             <a:off x="548640" y="1828800"/>
-            <a:ext cx="5486400" cy="3291840"/>
+            <a:ext cx="5486400" cy="3931920"/>
           </a:xfrm>
           <a:prstGeom prst="rect">
             <a:avLst/>
@@ -13296,13 +14054,13 @@
         <p:spPr>
           <a:xfrm>
             <a:off x="548640" y="1828800"/>
-            <a:ext cx="73152" cy="3291840"/>
+            <a:ext cx="73152" cy="3931920"/>
           </a:xfrm>
           <a:prstGeom prst="rect">
             <a:avLst/>
           </a:prstGeom>
           <a:solidFill>
-            <a:srgbClr val="00CA72"/>
+            <a:srgbClr val="00D1C1"/>
           </a:solidFill>
           <a:ln/>
         </p:spPr>
@@ -13316,7 +14074,7 @@
         <p:spPr>
           <a:xfrm>
             <a:off x="749808" y="1993392"/>
-            <a:ext cx="5166360" cy="502920"/>
+            <a:ext cx="5166360" cy="594360"/>
           </a:xfrm>
           <a:prstGeom prst="rect">
             <a:avLst/>
@@ -13332,7 +14090,7 @@
               <a:buNone/>
             </a:pPr>
             <a:r>
-              <a:rPr lang="en-US" sz="1800" b="1" dirty="0">
+              <a:rPr lang="en-US" sz="2200" b="1" dirty="0">
                 <a:solidFill>
                   <a:srgbClr val="0F172A"/>
                 </a:solidFill>
@@ -13340,9 +14098,9 @@
                 <a:ea typeface="Inter" pitchFamily="34" charset="-122"/>
                 <a:cs typeface="Inter" pitchFamily="34" charset="-120"/>
               </a:rPr>
-              <a:t>Channels</a:t>
-            </a:r>
-            <a:endParaRPr lang="en-US" sz="1800" dirty="0"/>
+              <a:t>Create &amp; sync</a:t>
+            </a:r>
+            <a:endParaRPr lang="en-US" sz="2200" dirty="0"/>
           </a:p>
         </p:txBody>
       </p:sp>
@@ -13354,8 +14112,8 @@
         </p:nvSpPr>
         <p:spPr>
           <a:xfrm>
-            <a:off x="777240" y="2377440"/>
-            <a:ext cx="5074920" cy="2651760"/>
+            <a:off x="777240" y="2697480"/>
+            <a:ext cx="5074920" cy="2926080"/>
           </a:xfrm>
           <a:prstGeom prst="rect">
             <a:avLst/>
@@ -13369,13 +14127,13 @@
           <a:p>
             <a:pPr marL="342900" indent="-342900">
               <a:spcAft>
-                <a:spcPts val="400"/>
+                <a:spcPts val="600"/>
               </a:spcAft>
               <a:buSzPct val="100000"/>
               <a:buChar char="•"/>
             </a:pPr>
             <a:r>
-              <a:rPr lang="en-US" sz="1300" dirty="0">
+              <a:rPr lang="en-US" sz="1800" dirty="0">
                 <a:solidFill>
                   <a:srgbClr val="334155"/>
                 </a:solidFill>
@@ -13383,20 +14141,20 @@
                 <a:ea typeface="Inter" pitchFamily="34" charset="-122"/>
                 <a:cs typeface="Inter" pitchFamily="34" charset="-120"/>
               </a:rPr>
-              <a:t>Auto Team · ‹student› channel includes the whole supervision team + the student.</a:t>
-            </a:r>
-            <a:endParaRPr lang="en-US" sz="1300" dirty="0"/>
+              <a:t>Push to Google Calendar (student's shared, or General).</a:t>
+            </a:r>
+            <a:endParaRPr lang="en-US" sz="1800" dirty="0"/>
           </a:p>
           <a:p>
             <a:pPr marL="342900" indent="-342900">
               <a:spcAft>
-                <a:spcPts val="400"/>
+                <a:spcPts val="600"/>
               </a:spcAft>
               <a:buSzPct val="100000"/>
               <a:buChar char="•"/>
             </a:pPr>
             <a:r>
-              <a:rPr lang="en-US" sz="1300" dirty="0">
+              <a:rPr lang="en-US" sz="1800" dirty="0">
                 <a:solidFill>
                   <a:srgbClr val="334155"/>
                 </a:solidFill>
@@ -13404,20 +14162,20 @@
                 <a:ea typeface="Inter" pitchFamily="34" charset="-122"/>
                 <a:cs typeface="Inter" pitchFamily="34" charset="-120"/>
               </a:rPr>
-              <a:t>Spin up co-supervisor or 1:1 channels as needed.</a:t>
-            </a:r>
-            <a:endParaRPr lang="en-US" sz="1300" dirty="0"/>
+              <a:t>Recurring events (daily/weekly/monthly) pushed natively.</a:t>
+            </a:r>
+            <a:endParaRPr lang="en-US" sz="1800" dirty="0"/>
           </a:p>
           <a:p>
             <a:pPr marL="342900" indent="-342900">
               <a:spcAft>
-                <a:spcPts val="400"/>
+                <a:spcPts val="600"/>
               </a:spcAft>
               <a:buSzPct val="100000"/>
               <a:buChar char="•"/>
             </a:pPr>
             <a:r>
-              <a:rPr lang="en-US" sz="1300" dirty="0">
+              <a:rPr lang="en-US" sz="1800" dirty="0">
                 <a:solidFill>
                   <a:srgbClr val="334155"/>
                 </a:solidFill>
@@ -13425,20 +14183,20 @@
                 <a:ea typeface="Inter" pitchFamily="34" charset="-122"/>
                 <a:cs typeface="Inter" pitchFamily="34" charset="-120"/>
               </a:rPr>
-              <a:t>Edit channel: name, description, colour and members (member changes confirmed).</a:t>
-            </a:r>
-            <a:endParaRPr lang="en-US" sz="1300" dirty="0"/>
+              <a:t>Re-assign a student via Edit; ‘Related task’ peek-opens it.</a:t>
+            </a:r>
+            <a:endParaRPr lang="en-US" sz="1800" dirty="0"/>
           </a:p>
           <a:p>
             <a:pPr marL="342900" indent="-342900">
               <a:spcAft>
-                <a:spcPts val="400"/>
+                <a:spcPts val="600"/>
               </a:spcAft>
               <a:buSzPct val="100000"/>
               <a:buChar char="•"/>
             </a:pPr>
             <a:r>
-              <a:rPr lang="en-US" sz="1300" dirty="0">
+              <a:rPr lang="en-US" sz="1800" dirty="0">
                 <a:solidFill>
                   <a:srgbClr val="334155"/>
                 </a:solidFill>
@@ -13446,9 +14204,9 @@
                 <a:ea typeface="Inter" pitchFamily="34" charset="-122"/>
                 <a:cs typeface="Inter" pitchFamily="34" charset="-120"/>
               </a:rPr>
-              <a:t>Delete a channel removes all messages (no undo).</a:t>
-            </a:r>
-            <a:endParaRPr lang="en-US" sz="1300" dirty="0"/>
+              <a:t>Times are timezone-stable across edit/save.</a:t>
+            </a:r>
+            <a:endParaRPr lang="en-US" sz="1800" dirty="0"/>
           </a:p>
         </p:txBody>
       </p:sp>
@@ -13461,7 +14219,7 @@
         <p:spPr>
           <a:xfrm>
             <a:off x="6400800" y="1828800"/>
-            <a:ext cx="5242255" cy="3291840"/>
+            <a:ext cx="5242255" cy="3931920"/>
           </a:xfrm>
           <a:prstGeom prst="rect">
             <a:avLst/>
@@ -13493,13 +14251,13 @@
         <p:spPr>
           <a:xfrm>
             <a:off x="6400800" y="1828800"/>
-            <a:ext cx="73152" cy="3291840"/>
+            <a:ext cx="73152" cy="3931920"/>
           </a:xfrm>
           <a:prstGeom prst="rect">
             <a:avLst/>
           </a:prstGeom>
           <a:solidFill>
-            <a:srgbClr val="00CA72"/>
+            <a:srgbClr val="00D1C1"/>
           </a:solidFill>
           <a:ln/>
         </p:spPr>
@@ -13513,7 +14271,7 @@
         <p:spPr>
           <a:xfrm>
             <a:off x="6601968" y="1993392"/>
-            <a:ext cx="4922215" cy="502920"/>
+            <a:ext cx="4922215" cy="594360"/>
           </a:xfrm>
           <a:prstGeom prst="rect">
             <a:avLst/>
@@ -13529,7 +14287,7 @@
               <a:buNone/>
             </a:pPr>
             <a:r>
-              <a:rPr lang="en-US" sz="1800" b="1" dirty="0">
+              <a:rPr lang="en-US" sz="2200" b="1" dirty="0">
                 <a:solidFill>
                   <a:srgbClr val="0F172A"/>
                 </a:solidFill>
@@ -13537,9 +14295,9 @@
                 <a:ea typeface="Inter" pitchFamily="34" charset="-122"/>
                 <a:cs typeface="Inter" pitchFamily="34" charset="-120"/>
               </a:rPr>
-              <a:t>Conversation features</a:t>
-            </a:r>
-            <a:endParaRPr lang="en-US" sz="1800" dirty="0"/>
+              <a:t>1:1 meetings &amp; availability</a:t>
+            </a:r>
+            <a:endParaRPr lang="en-US" sz="2200" dirty="0"/>
           </a:p>
         </p:txBody>
       </p:sp>
@@ -13551,8 +14309,8 @@
         </p:nvSpPr>
         <p:spPr>
           <a:xfrm>
-            <a:off x="6629400" y="2377440"/>
-            <a:ext cx="4876495" cy="2651760"/>
+            <a:off x="6629400" y="2697480"/>
+            <a:ext cx="4876495" cy="2926080"/>
           </a:xfrm>
           <a:prstGeom prst="rect">
             <a:avLst/>
@@ -13566,13 +14324,13 @@
           <a:p>
             <a:pPr marL="342900" indent="-342900">
               <a:spcAft>
-                <a:spcPts val="400"/>
+                <a:spcPts val="600"/>
               </a:spcAft>
               <a:buSzPct val="100000"/>
               <a:buChar char="•"/>
             </a:pPr>
             <a:r>
-              <a:rPr lang="en-US" sz="1300" dirty="0">
+              <a:rPr lang="en-US" sz="1800" dirty="0">
                 <a:solidFill>
                   <a:srgbClr val="334155"/>
                 </a:solidFill>
@@ -13580,20 +14338,20 @@
                 <a:ea typeface="Inter" pitchFamily="34" charset="-122"/>
                 <a:cs typeface="Inter" pitchFamily="34" charset="-120"/>
               </a:rPr>
-              <a:t>Reply to a message; quoted snippet in the bubble.</a:t>
-            </a:r>
-            <a:endParaRPr lang="en-US" sz="1300" dirty="0"/>
+              <a:t>Mark an event as a 1:1 meeting → agenda + notes + action items.</a:t>
+            </a:r>
+            <a:endParaRPr lang="en-US" sz="1800" dirty="0"/>
           </a:p>
           <a:p>
             <a:pPr marL="342900" indent="-342900">
               <a:spcAft>
-                <a:spcPts val="400"/>
+                <a:spcPts val="600"/>
               </a:spcAft>
               <a:buSzPct val="100000"/>
               <a:buChar char="•"/>
             </a:pPr>
             <a:r>
-              <a:rPr lang="en-US" sz="1300" dirty="0">
+              <a:rPr lang="en-US" sz="1800" dirty="0">
                 <a:solidFill>
                   <a:srgbClr val="334155"/>
                 </a:solidFill>
@@ -13601,20 +14359,20 @@
                 <a:ea typeface="Inter" pitchFamily="34" charset="-122"/>
                 <a:cs typeface="Inter" pitchFamily="34" charset="-120"/>
               </a:rPr>
-              <a:t>Drag-and-drop files; Ctrl/⌘+V paste images.</a:t>
-            </a:r>
-            <a:endParaRPr lang="en-US" sz="1300" dirty="0"/>
+              <a:t>Action items → tasks: one-click create tasks (priority/category set in the meeting panel).</a:t>
+            </a:r>
+            <a:endParaRPr lang="en-US" sz="1800" dirty="0"/>
           </a:p>
           <a:p>
             <a:pPr marL="342900" indent="-342900">
               <a:spcAft>
-                <a:spcPts val="400"/>
+                <a:spcPts val="600"/>
               </a:spcAft>
               <a:buSzPct val="100000"/>
               <a:buChar char="•"/>
             </a:pPr>
             <a:r>
-              <a:rPr lang="en-US" sz="1300" dirty="0">
+              <a:rPr lang="en-US" sz="1800" dirty="0">
                 <a:solidFill>
                   <a:srgbClr val="334155"/>
                 </a:solidFill>
@@ -13622,30 +14380,9 @@
                 <a:ea typeface="Inter" pitchFamily="34" charset="-122"/>
                 <a:cs typeface="Inter" pitchFamily="34" charset="-120"/>
               </a:rPr>
-              <a:t>Delivery ticks (sent/delivered/seen).</a:t>
-            </a:r>
-            <a:endParaRPr lang="en-US" sz="1300" dirty="0"/>
-          </a:p>
-          <a:p>
-            <a:pPr marL="342900" indent="-342900">
-              <a:spcAft>
-                <a:spcPts val="400"/>
-              </a:spcAft>
-              <a:buSzPct val="100000"/>
-              <a:buChar char="•"/>
-            </a:pPr>
-            <a:r>
-              <a:rPr lang="en-US" sz="1300" dirty="0">
-                <a:solidFill>
-                  <a:srgbClr val="334155"/>
-                </a:solidFill>
-                <a:latin typeface="Inter" pitchFamily="34" charset="0"/>
-                <a:ea typeface="Inter" pitchFamily="34" charset="-122"/>
-                <a:cs typeface="Inter" pitchFamily="34" charset="-120"/>
-              </a:rPr>
-              <a:t>Configure notification sound + volume (⋮ → Notification sound).</a:t>
-            </a:r>
-            <a:endParaRPr lang="en-US" sz="1300" dirty="0"/>
+              <a:t>Mark yourself away via My availability — students see opaque ‘Unavailable’ blocks.</a:t>
+            </a:r>
+            <a:endParaRPr lang="en-US" sz="1800" dirty="0"/>
           </a:p>
         </p:txBody>
       </p:sp>
@@ -13697,7 +14434,7 @@
               <a:buNone/>
             </a:pPr>
             <a:r>
-              <a:rPr lang="en-US" sz="1100" dirty="0">
+              <a:rPr lang="en-US" sz="1300" dirty="0">
                 <a:solidFill>
                   <a:srgbClr val="64748B"/>
                 </a:solidFill>
@@ -13707,7 +14444,7 @@
               </a:rPr>
               <a:t>PhDapp · for supervisors</a:t>
             </a:r>
-            <a:endParaRPr lang="en-US" sz="1100" dirty="0"/>
+            <a:endParaRPr lang="en-US" sz="1300" dirty="0"/>
           </a:p>
         </p:txBody>
       </p:sp>
@@ -13736,7 +14473,7 @@
               <a:buNone/>
             </a:pPr>
             <a:r>
-              <a:rPr lang="en-US" sz="1100" dirty="0">
+              <a:rPr lang="en-US" sz="1300" dirty="0">
                 <a:solidFill>
                   <a:srgbClr val="64748B"/>
                 </a:solidFill>
@@ -13744,9 +14481,9 @@
                 <a:ea typeface="Inter" pitchFamily="34" charset="-122"/>
                 <a:cs typeface="Inter" pitchFamily="34" charset="-120"/>
               </a:rPr>
-              <a:t>9 / 16</a:t>
-            </a:r>
-            <a:endParaRPr lang="en-US" sz="1100" dirty="0"/>
+              <a:t>9 / 17</a:t>
+            </a:r>
+            <a:endParaRPr lang="en-US" sz="1300" dirty="0"/>
           </a:p>
         </p:txBody>
       </p:sp>

--- a/docs/PhDapp_Supervisor_Overview.pptx
+++ b/docs/PhDapp_Supervisor_Overview.pptx
@@ -22,9 +22,11 @@
     <p:sldId id="270" r:id="rId16"/>
     <p:sldId id="271" r:id="rId17"/>
     <p:sldId id="272" r:id="rId18"/>
+    <p:sldId id="273" r:id="rId19"/>
+    <p:sldId id="274" r:id="rId20"/>
   </p:sldIdLst>
   <p:notesMasterIdLst>
-    <p:notesMasterId r:id="rId19"/>
+    <p:notesMasterId r:id="rId21"/>
   </p:notesMasterIdLst>
   <p:sldSz cx="12192000" cy="6858000"/>
   <p:notesSz cx="6858000" cy="12192000"/>
@@ -1246,6 +1248,182 @@
             <a:fld id="{F7021451-1387-4CA6-816F-3879F97B5CBC}" type="slidenum">
               <a:rPr lang="en-US"/>
               <a:t>17</a:t>
+            </a:fld>
+            <a:endParaRPr lang="en-US"/>
+          </a:p>
+        </p:txBody>
+      </p:sp>
+    </p:spTree>
+    <p:extLst>
+      <p:ext uri="{BB962C8B-B14F-4D97-AF65-F5344CB8AC3E}">
+        <p14:creationId xmlns:p14="http://schemas.microsoft.com/office/powerpoint/2010/main" val="1024086991"/>
+      </p:ext>
+    </p:extLst>
+  </p:cSld>
+  <p:clrMapOvr>
+    <a:masterClrMapping/>
+  </p:clrMapOvr>
+</p:notes>
+</file>
+
+<file path=ppt/notesSlides/notesSlide18.xml><?xml version="1.0" encoding="utf-8"?>
+<p:notes xmlns:a="http://schemas.openxmlformats.org/drawingml/2006/main" xmlns:r="http://schemas.openxmlformats.org/officeDocument/2006/relationships" xmlns:p="http://schemas.openxmlformats.org/presentationml/2006/main">
+  <p:cSld>
+    <p:spTree>
+      <p:nvGrpSpPr>
+        <p:cNvPr id="1" name=""/>
+        <p:cNvGrpSpPr/>
+        <p:nvPr/>
+      </p:nvGrpSpPr>
+      <p:grpSpPr>
+        <a:xfrm>
+          <a:off x="0" y="0"/>
+          <a:ext cx="0" cy="0"/>
+          <a:chOff x="0" y="0"/>
+          <a:chExt cx="0" cy="0"/>
+        </a:xfrm>
+      </p:grpSpPr>
+      <p:sp>
+        <p:nvSpPr>
+          <p:cNvPr id="2" name="Slide Image Placeholder 1"/>
+          <p:cNvSpPr>
+            <a:spLocks noGrp="1" noRot="1" noChangeAspect="1"/>
+          </p:cNvSpPr>
+          <p:nvPr>
+            <p:ph type="sldImg"/>
+          </p:nvPr>
+        </p:nvSpPr>
+        <p:spPr/>
+      </p:sp>
+      <p:sp>
+        <p:nvSpPr>
+          <p:cNvPr id="3" name="Notes Placeholder 2"/>
+          <p:cNvSpPr>
+            <a:spLocks noGrp="1"/>
+          </p:cNvSpPr>
+          <p:nvPr>
+            <p:ph type="body" idx="1"/>
+          </p:nvPr>
+        </p:nvSpPr>
+        <p:spPr/>
+        <p:txBody>
+          <a:bodyPr/>
+          <a:lstStyle/>
+          <a:p>
+            <a:r>
+              <a:rPr lang="en-US" dirty="0"/>
+              <a:t/>
+            </a:r>
+            <a:endParaRPr lang="en-US" dirty="0"/>
+          </a:p>
+        </p:txBody>
+      </p:sp>
+      <p:sp>
+        <p:nvSpPr>
+          <p:cNvPr id="4" name="Slide Number Placeholder 3"/>
+          <p:cNvSpPr>
+            <a:spLocks noGrp="1"/>
+          </p:cNvSpPr>
+          <p:nvPr>
+            <p:ph type="sldNum" sz="quarter" idx="10"/>
+          </p:nvPr>
+        </p:nvSpPr>
+        <p:spPr/>
+        <p:txBody>
+          <a:bodyPr/>
+          <a:lstStyle/>
+          <a:p>
+            <a:fld id="{F7021451-1387-4CA6-816F-3879F97B5CBC}" type="slidenum">
+              <a:rPr lang="en-US"/>
+              <a:t>18</a:t>
+            </a:fld>
+            <a:endParaRPr lang="en-US"/>
+          </a:p>
+        </p:txBody>
+      </p:sp>
+    </p:spTree>
+    <p:extLst>
+      <p:ext uri="{BB962C8B-B14F-4D97-AF65-F5344CB8AC3E}">
+        <p14:creationId xmlns:p14="http://schemas.microsoft.com/office/powerpoint/2010/main" val="1024086991"/>
+      </p:ext>
+    </p:extLst>
+  </p:cSld>
+  <p:clrMapOvr>
+    <a:masterClrMapping/>
+  </p:clrMapOvr>
+</p:notes>
+</file>
+
+<file path=ppt/notesSlides/notesSlide19.xml><?xml version="1.0" encoding="utf-8"?>
+<p:notes xmlns:a="http://schemas.openxmlformats.org/drawingml/2006/main" xmlns:r="http://schemas.openxmlformats.org/officeDocument/2006/relationships" xmlns:p="http://schemas.openxmlformats.org/presentationml/2006/main">
+  <p:cSld>
+    <p:spTree>
+      <p:nvGrpSpPr>
+        <p:cNvPr id="1" name=""/>
+        <p:cNvGrpSpPr/>
+        <p:nvPr/>
+      </p:nvGrpSpPr>
+      <p:grpSpPr>
+        <a:xfrm>
+          <a:off x="0" y="0"/>
+          <a:ext cx="0" cy="0"/>
+          <a:chOff x="0" y="0"/>
+          <a:chExt cx="0" cy="0"/>
+        </a:xfrm>
+      </p:grpSpPr>
+      <p:sp>
+        <p:nvSpPr>
+          <p:cNvPr id="2" name="Slide Image Placeholder 1"/>
+          <p:cNvSpPr>
+            <a:spLocks noGrp="1" noRot="1" noChangeAspect="1"/>
+          </p:cNvSpPr>
+          <p:nvPr>
+            <p:ph type="sldImg"/>
+          </p:nvPr>
+        </p:nvSpPr>
+        <p:spPr/>
+      </p:sp>
+      <p:sp>
+        <p:nvSpPr>
+          <p:cNvPr id="3" name="Notes Placeholder 2"/>
+          <p:cNvSpPr>
+            <a:spLocks noGrp="1"/>
+          </p:cNvSpPr>
+          <p:nvPr>
+            <p:ph type="body" idx="1"/>
+          </p:nvPr>
+        </p:nvSpPr>
+        <p:spPr/>
+        <p:txBody>
+          <a:bodyPr/>
+          <a:lstStyle/>
+          <a:p>
+            <a:r>
+              <a:rPr lang="en-US" dirty="0"/>
+              <a:t/>
+            </a:r>
+            <a:endParaRPr lang="en-US" dirty="0"/>
+          </a:p>
+        </p:txBody>
+      </p:sp>
+      <p:sp>
+        <p:nvSpPr>
+          <p:cNvPr id="4" name="Slide Number Placeholder 3"/>
+          <p:cNvSpPr>
+            <a:spLocks noGrp="1"/>
+          </p:cNvSpPr>
+          <p:nvPr>
+            <p:ph type="sldNum" sz="quarter" idx="10"/>
+          </p:nvPr>
+        </p:nvSpPr>
+        <p:spPr/>
+        <p:txBody>
+          <a:bodyPr/>
+          <a:lstStyle/>
+          <a:p>
+            <a:fld id="{F7021451-1387-4CA6-816F-3879F97B5CBC}" type="slidenum">
+              <a:rPr lang="en-US"/>
+              <a:t>19</a:t>
             </a:fld>
             <a:endParaRPr lang="en-US"/>
           </a:p>
@@ -3126,7 +3304,7 @@
                 <a:ea typeface="Inter" pitchFamily="34" charset="-122"/>
                 <a:cs typeface="Inter" pitchFamily="34" charset="-120"/>
               </a:rPr>
-              <a:t>10 / 17</a:t>
+              <a:t>10 / 19</a:t>
             </a:r>
             <a:endParaRPr lang="en-US" sz="1300" dirty="0"/>
           </a:p>
@@ -3756,7 +3934,7 @@
                 <a:ea typeface="Inter" pitchFamily="34" charset="-122"/>
                 <a:cs typeface="Inter" pitchFamily="34" charset="-120"/>
               </a:rPr>
-              <a:t>11 / 17</a:t>
+              <a:t>11 / 19</a:t>
             </a:r>
             <a:endParaRPr lang="en-US" sz="1300" dirty="0"/>
           </a:p>
@@ -4365,7 +4543,7 @@
                 <a:ea typeface="Inter" pitchFamily="34" charset="-122"/>
                 <a:cs typeface="Inter" pitchFamily="34" charset="-120"/>
               </a:rPr>
-              <a:t>12 / 17</a:t>
+              <a:t>12 / 19</a:t>
             </a:r>
             <a:endParaRPr lang="en-US" sz="1300" dirty="0"/>
           </a:p>
@@ -4995,7 +5173,7 @@
                 <a:ea typeface="Inter" pitchFamily="34" charset="-122"/>
                 <a:cs typeface="Inter" pitchFamily="34" charset="-120"/>
               </a:rPr>
-              <a:t>13 / 17</a:t>
+              <a:t>13 / 19</a:t>
             </a:r>
             <a:endParaRPr lang="en-US" sz="1300" dirty="0"/>
           </a:p>
@@ -5780,7 +5958,7 @@
                 <a:ea typeface="Inter" pitchFamily="34" charset="-122"/>
                 <a:cs typeface="Inter" pitchFamily="34" charset="-120"/>
               </a:rPr>
-              <a:t>14 / 17</a:t>
+              <a:t>14 / 19</a:t>
             </a:r>
             <a:endParaRPr lang="en-US" sz="1300" dirty="0"/>
           </a:p>
@@ -6410,7 +6588,7 @@
                 <a:ea typeface="Inter" pitchFamily="34" charset="-122"/>
                 <a:cs typeface="Inter" pitchFamily="34" charset="-120"/>
               </a:rPr>
-              <a:t>15 / 17</a:t>
+              <a:t>15 / 19</a:t>
             </a:r>
             <a:endParaRPr lang="en-US" sz="1300" dirty="0"/>
           </a:p>
@@ -7040,7 +7218,7 @@
                 <a:ea typeface="Inter" pitchFamily="34" charset="-122"/>
                 <a:cs typeface="Inter" pitchFamily="34" charset="-120"/>
               </a:rPr>
-              <a:t>16 / 17</a:t>
+              <a:t>16 / 19</a:t>
             </a:r>
             <a:endParaRPr lang="en-US" sz="1300" dirty="0"/>
           </a:p>
@@ -7095,7 +7273,7 @@
             </a:avLst>
           </a:prstGeom>
           <a:solidFill>
-            <a:srgbClr val="2196F3"/>
+            <a:srgbClr val="6F4CFF"/>
           </a:solidFill>
           <a:ln/>
         </p:spPr>
@@ -7151,13 +7329,13 @@
             <a:r>
               <a:rPr lang="en-US" sz="1400" b="1" spc="400" kern="0" dirty="0">
                 <a:solidFill>
-                  <a:srgbClr val="2196F3"/>
-                </a:solidFill>
-                <a:latin typeface="Inter" pitchFamily="34" charset="0"/>
-                <a:ea typeface="Inter" pitchFamily="34" charset="-122"/>
-                <a:cs typeface="Inter" pitchFamily="34" charset="-120"/>
-              </a:rPr>
-              <a:t>TIPS</a:t>
+                  <a:srgbClr val="6F4CFF"/>
+                </a:solidFill>
+                <a:latin typeface="Inter" pitchFamily="34" charset="0"/>
+                <a:ea typeface="Inter" pitchFamily="34" charset="-122"/>
+                <a:cs typeface="Inter" pitchFamily="34" charset="-120"/>
+              </a:rPr>
+              <a:t>DASHBOARD</a:t>
             </a:r>
             <a:endParaRPr lang="en-US" sz="1400" dirty="0"/>
           </a:p>
@@ -7196,7 +7374,7 @@
                 <a:ea typeface="Inter" pitchFamily="34" charset="-122"/>
                 <a:cs typeface="Inter" pitchFamily="34" charset="-120"/>
               </a:rPr>
-              <a:t>Tips &amp; if something breaks</a:t>
+              <a:t>A day · as a supervisor</a:t>
             </a:r>
             <a:endParaRPr lang="en-US" sz="4000" dirty="0"/>
           </a:p>
@@ -7204,14 +7382,53 @@
       </p:sp>
       <p:sp>
         <p:nvSpPr>
-          <p:cNvPr id="6" name="Shape 3"/>
-          <p:cNvSpPr/>
-          <p:nvPr/>
-        </p:nvSpPr>
-        <p:spPr>
-          <a:xfrm>
-            <a:off x="548640" y="1828800"/>
-            <a:ext cx="5486400" cy="3931920"/>
+          <p:cNvPr id="6" name="Text 3"/>
+          <p:cNvSpPr/>
+          <p:nvPr/>
+        </p:nvSpPr>
+        <p:spPr>
+          <a:xfrm>
+            <a:off x="548640" y="1508760"/>
+            <a:ext cx="11094415" cy="822960"/>
+          </a:xfrm>
+          <a:prstGeom prst="rect">
+            <a:avLst/>
+          </a:prstGeom>
+          <a:noFill/>
+          <a:ln/>
+        </p:spPr>
+        <p:txBody>
+          <a:bodyPr wrap="square" lIns="0" tIns="0" rIns="0" bIns="0" rtlCol="0" anchor="t"/>
+          <a:lstStyle/>
+          <a:p>
+            <a:pPr indent="0" marL="0">
+              <a:buNone/>
+            </a:pPr>
+            <a:r>
+              <a:rPr lang="en-US" sz="2000" i="1" dirty="0">
+                <a:solidFill>
+                  <a:srgbClr val="334155"/>
+                </a:solidFill>
+                <a:latin typeface="Inter" pitchFamily="34" charset="0"/>
+                <a:ea typeface="Inter" pitchFamily="34" charset="-122"/>
+                <a:cs typeface="Inter" pitchFamily="34" charset="-120"/>
+              </a:rPr>
+              <a:t>Six moments from a normal supervision day, end-to-end.</a:t>
+            </a:r>
+            <a:endParaRPr lang="en-US" sz="2000" dirty="0"/>
+          </a:p>
+        </p:txBody>
+      </p:sp>
+      <p:sp>
+        <p:nvSpPr>
+          <p:cNvPr id="7" name="Shape 4"/>
+          <p:cNvSpPr/>
+          <p:nvPr/>
+        </p:nvSpPr>
+        <p:spPr>
+          <a:xfrm>
+            <a:off x="548640" y="2286000"/>
+            <a:ext cx="3611880" cy="1783080"/>
           </a:xfrm>
           <a:prstGeom prst="rect">
             <a:avLst/>
@@ -7236,34 +7453,34 @@
       </p:sp>
       <p:sp>
         <p:nvSpPr>
-          <p:cNvPr id="7" name="Shape 4"/>
-          <p:cNvSpPr/>
-          <p:nvPr/>
-        </p:nvSpPr>
-        <p:spPr>
-          <a:xfrm>
-            <a:off x="548640" y="1828800"/>
-            <a:ext cx="73152" cy="3931920"/>
-          </a:xfrm>
-          <a:prstGeom prst="rect">
+          <p:cNvPr id="8" name="Shape 5"/>
+          <p:cNvSpPr/>
+          <p:nvPr/>
+        </p:nvSpPr>
+        <p:spPr>
+          <a:xfrm>
+            <a:off x="749808" y="2487168"/>
+            <a:ext cx="502920" cy="502920"/>
+          </a:xfrm>
+          <a:prstGeom prst="ellipse">
             <a:avLst/>
           </a:prstGeom>
           <a:solidFill>
-            <a:srgbClr val="2196F3"/>
+            <a:srgbClr val="6F4CFF"/>
           </a:solidFill>
           <a:ln/>
         </p:spPr>
       </p:sp>
       <p:sp>
         <p:nvSpPr>
-          <p:cNvPr id="8" name="Text 5"/>
-          <p:cNvSpPr/>
-          <p:nvPr/>
-        </p:nvSpPr>
-        <p:spPr>
-          <a:xfrm>
-            <a:off x="749808" y="1993392"/>
-            <a:ext cx="5166360" cy="594360"/>
+          <p:cNvPr id="9" name="Text 6"/>
+          <p:cNvSpPr/>
+          <p:nvPr/>
+        </p:nvSpPr>
+        <p:spPr>
+          <a:xfrm>
+            <a:off x="749808" y="2487168"/>
+            <a:ext cx="502920" cy="502920"/>
           </a:xfrm>
           <a:prstGeom prst="rect">
             <a:avLst/>
@@ -7275,6 +7492,45 @@
           <a:bodyPr wrap="square" lIns="0" tIns="0" rIns="0" bIns="0" rtlCol="0" anchor="ctr"/>
           <a:lstStyle/>
           <a:p>
+            <a:pPr algn="ctr" indent="0" marL="0">
+              <a:buNone/>
+            </a:pPr>
+            <a:r>
+              <a:rPr lang="en-US" sz="2200" b="1" dirty="0">
+                <a:solidFill>
+                  <a:srgbClr val="FFFFFF"/>
+                </a:solidFill>
+                <a:latin typeface="Inter" pitchFamily="34" charset="0"/>
+                <a:ea typeface="Inter" pitchFamily="34" charset="-122"/>
+                <a:cs typeface="Inter" pitchFamily="34" charset="-120"/>
+              </a:rPr>
+              <a:t>1</a:t>
+            </a:r>
+            <a:endParaRPr lang="en-US" sz="2200" dirty="0"/>
+          </a:p>
+        </p:txBody>
+      </p:sp>
+      <p:sp>
+        <p:nvSpPr>
+          <p:cNvPr id="10" name="Text 7"/>
+          <p:cNvSpPr/>
+          <p:nvPr/>
+        </p:nvSpPr>
+        <p:spPr>
+          <a:xfrm>
+            <a:off x="1417320" y="2532888"/>
+            <a:ext cx="2542032" cy="411480"/>
+          </a:xfrm>
+          <a:prstGeom prst="rect">
+            <a:avLst/>
+          </a:prstGeom>
+          <a:noFill/>
+          <a:ln/>
+        </p:spPr>
+        <p:txBody>
+          <a:bodyPr wrap="square" lIns="0" tIns="0" rIns="0" bIns="0" rtlCol="0" anchor="ctr"/>
+          <a:lstStyle/>
+          <a:p>
             <a:pPr indent="0" marL="0">
               <a:buNone/>
             </a:pPr>
@@ -7287,7 +7543,7 @@
                 <a:ea typeface="Inter" pitchFamily="34" charset="-122"/>
                 <a:cs typeface="Inter" pitchFamily="34" charset="-120"/>
               </a:rPr>
-              <a:t>Tips</a:t>
+              <a:t>Morning</a:t>
             </a:r>
             <a:endParaRPr lang="en-US" sz="2200" dirty="0"/>
           </a:p>
@@ -7295,14 +7551,14 @@
       </p:sp>
       <p:sp>
         <p:nvSpPr>
-          <p:cNvPr id="9" name="Text 6"/>
-          <p:cNvSpPr/>
-          <p:nvPr/>
-        </p:nvSpPr>
-        <p:spPr>
-          <a:xfrm>
-            <a:off x="777240" y="2697480"/>
-            <a:ext cx="5074920" cy="2926080"/>
+          <p:cNvPr id="11" name="Text 8"/>
+          <p:cNvSpPr/>
+          <p:nvPr/>
+        </p:nvSpPr>
+        <p:spPr>
+          <a:xfrm>
+            <a:off x="749808" y="3154680"/>
+            <a:ext cx="3246120" cy="777240"/>
           </a:xfrm>
           <a:prstGeom prst="rect">
             <a:avLst/>
@@ -7314,12 +7570,8 @@
           <a:bodyPr wrap="square" lIns="0" tIns="0" rIns="0" bIns="0" rtlCol="0" anchor="t"/>
           <a:lstStyle/>
           <a:p>
-            <a:pPr marL="342900" indent="-342900">
-              <a:spcAft>
-                <a:spcPts val="600"/>
-              </a:spcAft>
-              <a:buSzPct val="100000"/>
-              <a:buChar char="•"/>
+            <a:pPr indent="0" marL="0">
+              <a:buNone/>
             </a:pPr>
             <a:r>
               <a:rPr lang="en-US" sz="1800" dirty="0">
@@ -7330,85 +7582,22 @@
                 <a:ea typeface="Inter" pitchFamily="34" charset="-122"/>
                 <a:cs typeface="Inter" pitchFamily="34" charset="-120"/>
               </a:rPr>
-              <a:t>Use the ✨ Catch-up before a 1:1 — paste it into the meeting notes.</a:t>
+              <a:t>Dashboard scan — counts across all students; bell first.</a:t>
             </a:r>
             <a:endParaRPr lang="en-US" sz="1800" dirty="0"/>
           </a:p>
-          <a:p>
-            <a:pPr marL="342900" indent="-342900">
-              <a:spcAft>
-                <a:spcPts val="600"/>
-              </a:spcAft>
-              <a:buSzPct val="100000"/>
-              <a:buChar char="•"/>
-            </a:pPr>
-            <a:r>
-              <a:rPr lang="en-US" sz="1800" dirty="0">
-                <a:solidFill>
-                  <a:srgbClr val="334155"/>
-                </a:solidFill>
-                <a:latin typeface="Inter" pitchFamily="34" charset="0"/>
-                <a:ea typeface="Inter" pitchFamily="34" charset="-122"/>
-                <a:cs typeface="Inter" pitchFamily="34" charset="-120"/>
-              </a:rPr>
-              <a:t>Filter by group when you discuss a specific work-package.</a:t>
-            </a:r>
-            <a:endParaRPr lang="en-US" sz="1800" dirty="0"/>
-          </a:p>
-          <a:p>
-            <a:pPr marL="342900" indent="-342900">
-              <a:spcAft>
-                <a:spcPts val="600"/>
-              </a:spcAft>
-              <a:buSzPct val="100000"/>
-              <a:buChar char="•"/>
-            </a:pPr>
-            <a:r>
-              <a:rPr lang="en-US" sz="1800" dirty="0">
-                <a:solidFill>
-                  <a:srgbClr val="334155"/>
-                </a:solidFill>
-                <a:latin typeface="Inter" pitchFamily="34" charset="0"/>
-                <a:ea typeface="Inter" pitchFamily="34" charset="-122"/>
-                <a:cs typeface="Inter" pitchFamily="34" charset="-120"/>
-              </a:rPr>
-              <a:t>Comment on a task for nudges; chat for back-and-forth.</a:t>
-            </a:r>
-            <a:endParaRPr lang="en-US" sz="1800" dirty="0"/>
-          </a:p>
-          <a:p>
-            <a:pPr marL="342900" indent="-342900">
-              <a:spcAft>
-                <a:spcPts val="600"/>
-              </a:spcAft>
-              <a:buSzPct val="100000"/>
-              <a:buChar char="•"/>
-            </a:pPr>
-            <a:r>
-              <a:rPr lang="en-US" sz="1800" dirty="0">
-                <a:solidFill>
-                  <a:srgbClr val="334155"/>
-                </a:solidFill>
-                <a:latin typeface="Inter" pitchFamily="34" charset="0"/>
-                <a:ea typeface="Inter" pitchFamily="34" charset="-122"/>
-                <a:cs typeface="Inter" pitchFamily="34" charset="-120"/>
-              </a:rPr>
-              <a:t>Run the admin Backfill missing team channels once after this release.</a:t>
-            </a:r>
-            <a:endParaRPr lang="en-US" sz="1800" dirty="0"/>
-          </a:p>
-        </p:txBody>
-      </p:sp>
-      <p:sp>
-        <p:nvSpPr>
-          <p:cNvPr id="10" name="Shape 7"/>
-          <p:cNvSpPr/>
-          <p:nvPr/>
-        </p:nvSpPr>
-        <p:spPr>
-          <a:xfrm>
-            <a:off x="6400800" y="1828800"/>
-            <a:ext cx="5242255" cy="3931920"/>
+        </p:txBody>
+      </p:sp>
+      <p:sp>
+        <p:nvSpPr>
+          <p:cNvPr id="12" name="Shape 9"/>
+          <p:cNvSpPr/>
+          <p:nvPr/>
+        </p:nvSpPr>
+        <p:spPr>
+          <a:xfrm>
+            <a:off x="4343400" y="2286000"/>
+            <a:ext cx="3611880" cy="1783080"/>
           </a:xfrm>
           <a:prstGeom prst="rect">
             <a:avLst/>
@@ -7433,16 +7622,1326 @@
       </p:sp>
       <p:sp>
         <p:nvSpPr>
-          <p:cNvPr id="11" name="Shape 8"/>
-          <p:cNvSpPr/>
-          <p:nvPr/>
-        </p:nvSpPr>
-        <p:spPr>
-          <a:xfrm>
-            <a:off x="6400800" y="1828800"/>
-            <a:ext cx="73152" cy="3931920"/>
-          </a:xfrm>
-          <a:prstGeom prst="rect">
+          <p:cNvPr id="13" name="Shape 10"/>
+          <p:cNvSpPr/>
+          <p:nvPr/>
+        </p:nvSpPr>
+        <p:spPr>
+          <a:xfrm>
+            <a:off x="4544568" y="2487168"/>
+            <a:ext cx="502920" cy="502920"/>
+          </a:xfrm>
+          <a:prstGeom prst="ellipse">
+            <a:avLst/>
+          </a:prstGeom>
+          <a:solidFill>
+            <a:srgbClr val="FF7A45"/>
+          </a:solidFill>
+          <a:ln/>
+        </p:spPr>
+      </p:sp>
+      <p:sp>
+        <p:nvSpPr>
+          <p:cNvPr id="14" name="Text 11"/>
+          <p:cNvSpPr/>
+          <p:nvPr/>
+        </p:nvSpPr>
+        <p:spPr>
+          <a:xfrm>
+            <a:off x="4544568" y="2487168"/>
+            <a:ext cx="502920" cy="502920"/>
+          </a:xfrm>
+          <a:prstGeom prst="rect">
+            <a:avLst/>
+          </a:prstGeom>
+          <a:noFill/>
+          <a:ln/>
+        </p:spPr>
+        <p:txBody>
+          <a:bodyPr wrap="square" lIns="0" tIns="0" rIns="0" bIns="0" rtlCol="0" anchor="ctr"/>
+          <a:lstStyle/>
+          <a:p>
+            <a:pPr algn="ctr" indent="0" marL="0">
+              <a:buNone/>
+            </a:pPr>
+            <a:r>
+              <a:rPr lang="en-US" sz="2200" b="1" dirty="0">
+                <a:solidFill>
+                  <a:srgbClr val="FFFFFF"/>
+                </a:solidFill>
+                <a:latin typeface="Inter" pitchFamily="34" charset="0"/>
+                <a:ea typeface="Inter" pitchFamily="34" charset="-122"/>
+                <a:cs typeface="Inter" pitchFamily="34" charset="-120"/>
+              </a:rPr>
+              <a:t>2</a:t>
+            </a:r>
+            <a:endParaRPr lang="en-US" sz="2200" dirty="0"/>
+          </a:p>
+        </p:txBody>
+      </p:sp>
+      <p:sp>
+        <p:nvSpPr>
+          <p:cNvPr id="15" name="Text 12"/>
+          <p:cNvSpPr/>
+          <p:nvPr/>
+        </p:nvSpPr>
+        <p:spPr>
+          <a:xfrm>
+            <a:off x="5212080" y="2532888"/>
+            <a:ext cx="2542032" cy="411480"/>
+          </a:xfrm>
+          <a:prstGeom prst="rect">
+            <a:avLst/>
+          </a:prstGeom>
+          <a:noFill/>
+          <a:ln/>
+        </p:spPr>
+        <p:txBody>
+          <a:bodyPr wrap="square" lIns="0" tIns="0" rIns="0" bIns="0" rtlCol="0" anchor="ctr"/>
+          <a:lstStyle/>
+          <a:p>
+            <a:pPr indent="0" marL="0">
+              <a:buNone/>
+            </a:pPr>
+            <a:r>
+              <a:rPr lang="en-US" sz="2200" b="1" dirty="0">
+                <a:solidFill>
+                  <a:srgbClr val="0F172A"/>
+                </a:solidFill>
+                <a:latin typeface="Inter" pitchFamily="34" charset="0"/>
+                <a:ea typeface="Inter" pitchFamily="34" charset="-122"/>
+                <a:cs typeface="Inter" pitchFamily="34" charset="-120"/>
+              </a:rPr>
+              <a:t>Triage</a:t>
+            </a:r>
+            <a:endParaRPr lang="en-US" sz="2200" dirty="0"/>
+          </a:p>
+        </p:txBody>
+      </p:sp>
+      <p:sp>
+        <p:nvSpPr>
+          <p:cNvPr id="16" name="Text 13"/>
+          <p:cNvSpPr/>
+          <p:nvPr/>
+        </p:nvSpPr>
+        <p:spPr>
+          <a:xfrm>
+            <a:off x="4544568" y="3154680"/>
+            <a:ext cx="3246120" cy="777240"/>
+          </a:xfrm>
+          <a:prstGeom prst="rect">
+            <a:avLst/>
+          </a:prstGeom>
+          <a:noFill/>
+          <a:ln/>
+        </p:spPr>
+        <p:txBody>
+          <a:bodyPr wrap="square" lIns="0" tIns="0" rIns="0" bIns="0" rtlCol="0" anchor="t"/>
+          <a:lstStyle/>
+          <a:p>
+            <a:pPr indent="0" marL="0">
+              <a:buNone/>
+            </a:pPr>
+            <a:r>
+              <a:rPr lang="en-US" sz="1800" dirty="0">
+                <a:solidFill>
+                  <a:srgbClr val="334155"/>
+                </a:solidFill>
+                <a:latin typeface="Inter" pitchFamily="34" charset="0"/>
+                <a:ea typeface="Inter" pitchFamily="34" charset="-122"/>
+                <a:cs typeface="Inter" pitchFamily="34" charset="-120"/>
+              </a:rPr>
+              <a:t>Approve completion requests; reassign or re-prioritise.</a:t>
+            </a:r>
+            <a:endParaRPr lang="en-US" sz="1800" dirty="0"/>
+          </a:p>
+        </p:txBody>
+      </p:sp>
+      <p:sp>
+        <p:nvSpPr>
+          <p:cNvPr id="17" name="Shape 14"/>
+          <p:cNvSpPr/>
+          <p:nvPr/>
+        </p:nvSpPr>
+        <p:spPr>
+          <a:xfrm>
+            <a:off x="8138160" y="2286000"/>
+            <a:ext cx="3611880" cy="1783080"/>
+          </a:xfrm>
+          <a:prstGeom prst="rect">
+            <a:avLst/>
+          </a:prstGeom>
+          <a:solidFill>
+            <a:srgbClr val="FFFFFF"/>
+          </a:solidFill>
+          <a:ln w="9525">
+            <a:solidFill>
+              <a:srgbClr val="E2E8F0"/>
+            </a:solidFill>
+            <a:prstDash val="solid"/>
+          </a:ln>
+          <a:effectLst>
+            <a:outerShdw sx="100000" sy="100000" kx="0" ky="0" algn="bl" rotWithShape="0" blurRad="76200" dist="12700" dir="5400000">
+              <a:srgbClr val="94A3B8">
+                <a:alpha val="12000"/>
+              </a:srgbClr>
+            </a:outerShdw>
+          </a:effectLst>
+        </p:spPr>
+      </p:sp>
+      <p:sp>
+        <p:nvSpPr>
+          <p:cNvPr id="18" name="Shape 15"/>
+          <p:cNvSpPr/>
+          <p:nvPr/>
+        </p:nvSpPr>
+        <p:spPr>
+          <a:xfrm>
+            <a:off x="8339328" y="2487168"/>
+            <a:ext cx="502920" cy="502920"/>
+          </a:xfrm>
+          <a:prstGeom prst="ellipse">
+            <a:avLst/>
+          </a:prstGeom>
+          <a:solidFill>
+            <a:srgbClr val="FF3D8B"/>
+          </a:solidFill>
+          <a:ln/>
+        </p:spPr>
+      </p:sp>
+      <p:sp>
+        <p:nvSpPr>
+          <p:cNvPr id="19" name="Text 16"/>
+          <p:cNvSpPr/>
+          <p:nvPr/>
+        </p:nvSpPr>
+        <p:spPr>
+          <a:xfrm>
+            <a:off x="8339328" y="2487168"/>
+            <a:ext cx="502920" cy="502920"/>
+          </a:xfrm>
+          <a:prstGeom prst="rect">
+            <a:avLst/>
+          </a:prstGeom>
+          <a:noFill/>
+          <a:ln/>
+        </p:spPr>
+        <p:txBody>
+          <a:bodyPr wrap="square" lIns="0" tIns="0" rIns="0" bIns="0" rtlCol="0" anchor="ctr"/>
+          <a:lstStyle/>
+          <a:p>
+            <a:pPr algn="ctr" indent="0" marL="0">
+              <a:buNone/>
+            </a:pPr>
+            <a:r>
+              <a:rPr lang="en-US" sz="2200" b="1" dirty="0">
+                <a:solidFill>
+                  <a:srgbClr val="FFFFFF"/>
+                </a:solidFill>
+                <a:latin typeface="Inter" pitchFamily="34" charset="0"/>
+                <a:ea typeface="Inter" pitchFamily="34" charset="-122"/>
+                <a:cs typeface="Inter" pitchFamily="34" charset="-120"/>
+              </a:rPr>
+              <a:t>3</a:t>
+            </a:r>
+            <a:endParaRPr lang="en-US" sz="2200" dirty="0"/>
+          </a:p>
+        </p:txBody>
+      </p:sp>
+      <p:sp>
+        <p:nvSpPr>
+          <p:cNvPr id="20" name="Text 17"/>
+          <p:cNvSpPr/>
+          <p:nvPr/>
+        </p:nvSpPr>
+        <p:spPr>
+          <a:xfrm>
+            <a:off x="9006840" y="2532888"/>
+            <a:ext cx="2542032" cy="411480"/>
+          </a:xfrm>
+          <a:prstGeom prst="rect">
+            <a:avLst/>
+          </a:prstGeom>
+          <a:noFill/>
+          <a:ln/>
+        </p:spPr>
+        <p:txBody>
+          <a:bodyPr wrap="square" lIns="0" tIns="0" rIns="0" bIns="0" rtlCol="0" anchor="ctr"/>
+          <a:lstStyle/>
+          <a:p>
+            <a:pPr indent="0" marL="0">
+              <a:buNone/>
+            </a:pPr>
+            <a:r>
+              <a:rPr lang="en-US" sz="2200" b="1" dirty="0">
+                <a:solidFill>
+                  <a:srgbClr val="0F172A"/>
+                </a:solidFill>
+                <a:latin typeface="Inter" pitchFamily="34" charset="0"/>
+                <a:ea typeface="Inter" pitchFamily="34" charset="-122"/>
+                <a:cs typeface="Inter" pitchFamily="34" charset="-120"/>
+              </a:rPr>
+              <a:t>1:1 prep</a:t>
+            </a:r>
+            <a:endParaRPr lang="en-US" sz="2200" dirty="0"/>
+          </a:p>
+        </p:txBody>
+      </p:sp>
+      <p:sp>
+        <p:nvSpPr>
+          <p:cNvPr id="21" name="Text 18"/>
+          <p:cNvSpPr/>
+          <p:nvPr/>
+        </p:nvSpPr>
+        <p:spPr>
+          <a:xfrm>
+            <a:off x="8339328" y="3154680"/>
+            <a:ext cx="3246120" cy="777240"/>
+          </a:xfrm>
+          <a:prstGeom prst="rect">
+            <a:avLst/>
+          </a:prstGeom>
+          <a:noFill/>
+          <a:ln/>
+        </p:spPr>
+        <p:txBody>
+          <a:bodyPr wrap="square" lIns="0" tIns="0" rIns="0" bIns="0" rtlCol="0" anchor="t"/>
+          <a:lstStyle/>
+          <a:p>
+            <a:pPr indent="0" marL="0">
+              <a:buNone/>
+            </a:pPr>
+            <a:r>
+              <a:rPr lang="en-US" sz="1800" dirty="0">
+                <a:solidFill>
+                  <a:srgbClr val="334155"/>
+                </a:solidFill>
+                <a:latin typeface="Inter" pitchFamily="34" charset="0"/>
+                <a:ea typeface="Inter" pitchFamily="34" charset="-122"/>
+                <a:cs typeface="Inter" pitchFamily="34" charset="-120"/>
+              </a:rPr>
+              <a:t>Open the student → ✨ Catch-up → paste into agenda.</a:t>
+            </a:r>
+            <a:endParaRPr lang="en-US" sz="1800" dirty="0"/>
+          </a:p>
+        </p:txBody>
+      </p:sp>
+      <p:sp>
+        <p:nvSpPr>
+          <p:cNvPr id="22" name="Shape 19"/>
+          <p:cNvSpPr/>
+          <p:nvPr/>
+        </p:nvSpPr>
+        <p:spPr>
+          <a:xfrm>
+            <a:off x="548640" y="4297680"/>
+            <a:ext cx="3611880" cy="1783080"/>
+          </a:xfrm>
+          <a:prstGeom prst="rect">
+            <a:avLst/>
+          </a:prstGeom>
+          <a:solidFill>
+            <a:srgbClr val="FFFFFF"/>
+          </a:solidFill>
+          <a:ln w="9525">
+            <a:solidFill>
+              <a:srgbClr val="E2E8F0"/>
+            </a:solidFill>
+            <a:prstDash val="solid"/>
+          </a:ln>
+          <a:effectLst>
+            <a:outerShdw sx="100000" sy="100000" kx="0" ky="0" algn="bl" rotWithShape="0" blurRad="76200" dist="12700" dir="5400000">
+              <a:srgbClr val="94A3B8">
+                <a:alpha val="12000"/>
+              </a:srgbClr>
+            </a:outerShdw>
+          </a:effectLst>
+        </p:spPr>
+      </p:sp>
+      <p:sp>
+        <p:nvSpPr>
+          <p:cNvPr id="23" name="Shape 20"/>
+          <p:cNvSpPr/>
+          <p:nvPr/>
+        </p:nvSpPr>
+        <p:spPr>
+          <a:xfrm>
+            <a:off x="749808" y="4498848"/>
+            <a:ext cx="502920" cy="502920"/>
+          </a:xfrm>
+          <a:prstGeom prst="ellipse">
+            <a:avLst/>
+          </a:prstGeom>
+          <a:solidFill>
+            <a:srgbClr val="00D1C1"/>
+          </a:solidFill>
+          <a:ln/>
+        </p:spPr>
+      </p:sp>
+      <p:sp>
+        <p:nvSpPr>
+          <p:cNvPr id="24" name="Text 21"/>
+          <p:cNvSpPr/>
+          <p:nvPr/>
+        </p:nvSpPr>
+        <p:spPr>
+          <a:xfrm>
+            <a:off x="749808" y="4498848"/>
+            <a:ext cx="502920" cy="502920"/>
+          </a:xfrm>
+          <a:prstGeom prst="rect">
+            <a:avLst/>
+          </a:prstGeom>
+          <a:noFill/>
+          <a:ln/>
+        </p:spPr>
+        <p:txBody>
+          <a:bodyPr wrap="square" lIns="0" tIns="0" rIns="0" bIns="0" rtlCol="0" anchor="ctr"/>
+          <a:lstStyle/>
+          <a:p>
+            <a:pPr algn="ctr" indent="0" marL="0">
+              <a:buNone/>
+            </a:pPr>
+            <a:r>
+              <a:rPr lang="en-US" sz="2200" b="1" dirty="0">
+                <a:solidFill>
+                  <a:srgbClr val="FFFFFF"/>
+                </a:solidFill>
+                <a:latin typeface="Inter" pitchFamily="34" charset="0"/>
+                <a:ea typeface="Inter" pitchFamily="34" charset="-122"/>
+                <a:cs typeface="Inter" pitchFamily="34" charset="-120"/>
+              </a:rPr>
+              <a:t>4</a:t>
+            </a:r>
+            <a:endParaRPr lang="en-US" sz="2200" dirty="0"/>
+          </a:p>
+        </p:txBody>
+      </p:sp>
+      <p:sp>
+        <p:nvSpPr>
+          <p:cNvPr id="25" name="Text 22"/>
+          <p:cNvSpPr/>
+          <p:nvPr/>
+        </p:nvSpPr>
+        <p:spPr>
+          <a:xfrm>
+            <a:off x="1417320" y="4544568"/>
+            <a:ext cx="2542032" cy="411480"/>
+          </a:xfrm>
+          <a:prstGeom prst="rect">
+            <a:avLst/>
+          </a:prstGeom>
+          <a:noFill/>
+          <a:ln/>
+        </p:spPr>
+        <p:txBody>
+          <a:bodyPr wrap="square" lIns="0" tIns="0" rIns="0" bIns="0" rtlCol="0" anchor="ctr"/>
+          <a:lstStyle/>
+          <a:p>
+            <a:pPr indent="0" marL="0">
+              <a:buNone/>
+            </a:pPr>
+            <a:r>
+              <a:rPr lang="en-US" sz="2200" b="1" dirty="0">
+                <a:solidFill>
+                  <a:srgbClr val="0F172A"/>
+                </a:solidFill>
+                <a:latin typeface="Inter" pitchFamily="34" charset="0"/>
+                <a:ea typeface="Inter" pitchFamily="34" charset="-122"/>
+                <a:cs typeface="Inter" pitchFamily="34" charset="-120"/>
+              </a:rPr>
+              <a:t>Meeting</a:t>
+            </a:r>
+            <a:endParaRPr lang="en-US" sz="2200" dirty="0"/>
+          </a:p>
+        </p:txBody>
+      </p:sp>
+      <p:sp>
+        <p:nvSpPr>
+          <p:cNvPr id="26" name="Text 23"/>
+          <p:cNvSpPr/>
+          <p:nvPr/>
+        </p:nvSpPr>
+        <p:spPr>
+          <a:xfrm>
+            <a:off x="749808" y="5166360"/>
+            <a:ext cx="3246120" cy="777240"/>
+          </a:xfrm>
+          <a:prstGeom prst="rect">
+            <a:avLst/>
+          </a:prstGeom>
+          <a:noFill/>
+          <a:ln/>
+        </p:spPr>
+        <p:txBody>
+          <a:bodyPr wrap="square" lIns="0" tIns="0" rIns="0" bIns="0" rtlCol="0" anchor="t"/>
+          <a:lstStyle/>
+          <a:p>
+            <a:pPr indent="0" marL="0">
+              <a:buNone/>
+            </a:pPr>
+            <a:r>
+              <a:rPr lang="en-US" sz="1800" dirty="0">
+                <a:solidFill>
+                  <a:srgbClr val="334155"/>
+                </a:solidFill>
+                <a:latin typeface="Inter" pitchFamily="34" charset="0"/>
+                <a:ea typeface="Inter" pitchFamily="34" charset="-122"/>
+                <a:cs typeface="Inter" pitchFamily="34" charset="-120"/>
+              </a:rPr>
+              <a:t>Mark event as 1:1 → notes + actions → one-click tasks.</a:t>
+            </a:r>
+            <a:endParaRPr lang="en-US" sz="1800" dirty="0"/>
+          </a:p>
+        </p:txBody>
+      </p:sp>
+      <p:sp>
+        <p:nvSpPr>
+          <p:cNvPr id="27" name="Shape 24"/>
+          <p:cNvSpPr/>
+          <p:nvPr/>
+        </p:nvSpPr>
+        <p:spPr>
+          <a:xfrm>
+            <a:off x="4343400" y="4297680"/>
+            <a:ext cx="3611880" cy="1783080"/>
+          </a:xfrm>
+          <a:prstGeom prst="rect">
+            <a:avLst/>
+          </a:prstGeom>
+          <a:solidFill>
+            <a:srgbClr val="FFFFFF"/>
+          </a:solidFill>
+          <a:ln w="9525">
+            <a:solidFill>
+              <a:srgbClr val="E2E8F0"/>
+            </a:solidFill>
+            <a:prstDash val="solid"/>
+          </a:ln>
+          <a:effectLst>
+            <a:outerShdw sx="100000" sy="100000" kx="0" ky="0" algn="bl" rotWithShape="0" blurRad="76200" dist="12700" dir="5400000">
+              <a:srgbClr val="94A3B8">
+                <a:alpha val="12000"/>
+              </a:srgbClr>
+            </a:outerShdw>
+          </a:effectLst>
+        </p:spPr>
+      </p:sp>
+      <p:sp>
+        <p:nvSpPr>
+          <p:cNvPr id="28" name="Shape 25"/>
+          <p:cNvSpPr/>
+          <p:nvPr/>
+        </p:nvSpPr>
+        <p:spPr>
+          <a:xfrm>
+            <a:off x="4544568" y="4498848"/>
+            <a:ext cx="502920" cy="502920"/>
+          </a:xfrm>
+          <a:prstGeom prst="ellipse">
+            <a:avLst/>
+          </a:prstGeom>
+          <a:solidFill>
+            <a:srgbClr val="6F4CFF"/>
+          </a:solidFill>
+          <a:ln/>
+        </p:spPr>
+      </p:sp>
+      <p:sp>
+        <p:nvSpPr>
+          <p:cNvPr id="29" name="Text 26"/>
+          <p:cNvSpPr/>
+          <p:nvPr/>
+        </p:nvSpPr>
+        <p:spPr>
+          <a:xfrm>
+            <a:off x="4544568" y="4498848"/>
+            <a:ext cx="502920" cy="502920"/>
+          </a:xfrm>
+          <a:prstGeom prst="rect">
+            <a:avLst/>
+          </a:prstGeom>
+          <a:noFill/>
+          <a:ln/>
+        </p:spPr>
+        <p:txBody>
+          <a:bodyPr wrap="square" lIns="0" tIns="0" rIns="0" bIns="0" rtlCol="0" anchor="ctr"/>
+          <a:lstStyle/>
+          <a:p>
+            <a:pPr algn="ctr" indent="0" marL="0">
+              <a:buNone/>
+            </a:pPr>
+            <a:r>
+              <a:rPr lang="en-US" sz="2200" b="1" dirty="0">
+                <a:solidFill>
+                  <a:srgbClr val="FFFFFF"/>
+                </a:solidFill>
+                <a:latin typeface="Inter" pitchFamily="34" charset="0"/>
+                <a:ea typeface="Inter" pitchFamily="34" charset="-122"/>
+                <a:cs typeface="Inter" pitchFamily="34" charset="-120"/>
+              </a:rPr>
+              <a:t>5</a:t>
+            </a:r>
+            <a:endParaRPr lang="en-US" sz="2200" dirty="0"/>
+          </a:p>
+        </p:txBody>
+      </p:sp>
+      <p:sp>
+        <p:nvSpPr>
+          <p:cNvPr id="30" name="Text 27"/>
+          <p:cNvSpPr/>
+          <p:nvPr/>
+        </p:nvSpPr>
+        <p:spPr>
+          <a:xfrm>
+            <a:off x="5212080" y="4544568"/>
+            <a:ext cx="2542032" cy="411480"/>
+          </a:xfrm>
+          <a:prstGeom prst="rect">
+            <a:avLst/>
+          </a:prstGeom>
+          <a:noFill/>
+          <a:ln/>
+        </p:spPr>
+        <p:txBody>
+          <a:bodyPr wrap="square" lIns="0" tIns="0" rIns="0" bIns="0" rtlCol="0" anchor="ctr"/>
+          <a:lstStyle/>
+          <a:p>
+            <a:pPr indent="0" marL="0">
+              <a:buNone/>
+            </a:pPr>
+            <a:r>
+              <a:rPr lang="en-US" sz="2200" b="1" dirty="0">
+                <a:solidFill>
+                  <a:srgbClr val="0F172A"/>
+                </a:solidFill>
+                <a:latin typeface="Inter" pitchFamily="34" charset="0"/>
+                <a:ea typeface="Inter" pitchFamily="34" charset="-122"/>
+                <a:cs typeface="Inter" pitchFamily="34" charset="-120"/>
+              </a:rPr>
+              <a:t>Reading</a:t>
+            </a:r>
+            <a:endParaRPr lang="en-US" sz="2200" dirty="0"/>
+          </a:p>
+        </p:txBody>
+      </p:sp>
+      <p:sp>
+        <p:nvSpPr>
+          <p:cNvPr id="31" name="Text 28"/>
+          <p:cNvSpPr/>
+          <p:nvPr/>
+        </p:nvSpPr>
+        <p:spPr>
+          <a:xfrm>
+            <a:off x="4544568" y="5166360"/>
+            <a:ext cx="3246120" cy="777240"/>
+          </a:xfrm>
+          <a:prstGeom prst="rect">
+            <a:avLst/>
+          </a:prstGeom>
+          <a:noFill/>
+          <a:ln/>
+        </p:spPr>
+        <p:txBody>
+          <a:bodyPr wrap="square" lIns="0" tIns="0" rIns="0" bIns="0" rtlCol="0" anchor="t"/>
+          <a:lstStyle/>
+          <a:p>
+            <a:pPr indent="0" marL="0">
+              <a:buNone/>
+            </a:pPr>
+            <a:r>
+              <a:rPr lang="en-US" sz="1800" dirty="0">
+                <a:solidFill>
+                  <a:srgbClr val="334155"/>
+                </a:solidFill>
+                <a:latin typeface="Inter" pitchFamily="34" charset="0"/>
+                <a:ea typeface="Inter" pitchFamily="34" charset="-122"/>
+                <a:cs typeface="Inter" pitchFamily="34" charset="-120"/>
+              </a:rPr>
+              <a:t>Approve / reject paper proposals from students.</a:t>
+            </a:r>
+            <a:endParaRPr lang="en-US" sz="1800" dirty="0"/>
+          </a:p>
+        </p:txBody>
+      </p:sp>
+      <p:sp>
+        <p:nvSpPr>
+          <p:cNvPr id="32" name="Shape 29"/>
+          <p:cNvSpPr/>
+          <p:nvPr/>
+        </p:nvSpPr>
+        <p:spPr>
+          <a:xfrm>
+            <a:off x="8138160" y="4297680"/>
+            <a:ext cx="3611880" cy="1783080"/>
+          </a:xfrm>
+          <a:prstGeom prst="rect">
+            <a:avLst/>
+          </a:prstGeom>
+          <a:solidFill>
+            <a:srgbClr val="FFFFFF"/>
+          </a:solidFill>
+          <a:ln w="9525">
+            <a:solidFill>
+              <a:srgbClr val="E2E8F0"/>
+            </a:solidFill>
+            <a:prstDash val="solid"/>
+          </a:ln>
+          <a:effectLst>
+            <a:outerShdw sx="100000" sy="100000" kx="0" ky="0" algn="bl" rotWithShape="0" blurRad="76200" dist="12700" dir="5400000">
+              <a:srgbClr val="94A3B8">
+                <a:alpha val="12000"/>
+              </a:srgbClr>
+            </a:outerShdw>
+          </a:effectLst>
+        </p:spPr>
+      </p:sp>
+      <p:sp>
+        <p:nvSpPr>
+          <p:cNvPr id="33" name="Shape 30"/>
+          <p:cNvSpPr/>
+          <p:nvPr/>
+        </p:nvSpPr>
+        <p:spPr>
+          <a:xfrm>
+            <a:off x="8339328" y="4498848"/>
+            <a:ext cx="502920" cy="502920"/>
+          </a:xfrm>
+          <a:prstGeom prst="ellipse">
+            <a:avLst/>
+          </a:prstGeom>
+          <a:solidFill>
+            <a:srgbClr val="00CA72"/>
+          </a:solidFill>
+          <a:ln/>
+        </p:spPr>
+      </p:sp>
+      <p:sp>
+        <p:nvSpPr>
+          <p:cNvPr id="34" name="Text 31"/>
+          <p:cNvSpPr/>
+          <p:nvPr/>
+        </p:nvSpPr>
+        <p:spPr>
+          <a:xfrm>
+            <a:off x="8339328" y="4498848"/>
+            <a:ext cx="502920" cy="502920"/>
+          </a:xfrm>
+          <a:prstGeom prst="rect">
+            <a:avLst/>
+          </a:prstGeom>
+          <a:noFill/>
+          <a:ln/>
+        </p:spPr>
+        <p:txBody>
+          <a:bodyPr wrap="square" lIns="0" tIns="0" rIns="0" bIns="0" rtlCol="0" anchor="ctr"/>
+          <a:lstStyle/>
+          <a:p>
+            <a:pPr algn="ctr" indent="0" marL="0">
+              <a:buNone/>
+            </a:pPr>
+            <a:r>
+              <a:rPr lang="en-US" sz="2200" b="1" dirty="0">
+                <a:solidFill>
+                  <a:srgbClr val="FFFFFF"/>
+                </a:solidFill>
+                <a:latin typeface="Inter" pitchFamily="34" charset="0"/>
+                <a:ea typeface="Inter" pitchFamily="34" charset="-122"/>
+                <a:cs typeface="Inter" pitchFamily="34" charset="-120"/>
+              </a:rPr>
+              <a:t>6</a:t>
+            </a:r>
+            <a:endParaRPr lang="en-US" sz="2200" dirty="0"/>
+          </a:p>
+        </p:txBody>
+      </p:sp>
+      <p:sp>
+        <p:nvSpPr>
+          <p:cNvPr id="35" name="Text 32"/>
+          <p:cNvSpPr/>
+          <p:nvPr/>
+        </p:nvSpPr>
+        <p:spPr>
+          <a:xfrm>
+            <a:off x="9006840" y="4544568"/>
+            <a:ext cx="2542032" cy="411480"/>
+          </a:xfrm>
+          <a:prstGeom prst="rect">
+            <a:avLst/>
+          </a:prstGeom>
+          <a:noFill/>
+          <a:ln/>
+        </p:spPr>
+        <p:txBody>
+          <a:bodyPr wrap="square" lIns="0" tIns="0" rIns="0" bIns="0" rtlCol="0" anchor="ctr"/>
+          <a:lstStyle/>
+          <a:p>
+            <a:pPr indent="0" marL="0">
+              <a:buNone/>
+            </a:pPr>
+            <a:r>
+              <a:rPr lang="en-US" sz="2200" b="1" dirty="0">
+                <a:solidFill>
+                  <a:srgbClr val="0F172A"/>
+                </a:solidFill>
+                <a:latin typeface="Inter" pitchFamily="34" charset="0"/>
+                <a:ea typeface="Inter" pitchFamily="34" charset="-122"/>
+                <a:cs typeface="Inter" pitchFamily="34" charset="-120"/>
+              </a:rPr>
+              <a:t>Friday</a:t>
+            </a:r>
+            <a:endParaRPr lang="en-US" sz="2200" dirty="0"/>
+          </a:p>
+        </p:txBody>
+      </p:sp>
+      <p:sp>
+        <p:nvSpPr>
+          <p:cNvPr id="36" name="Text 33"/>
+          <p:cNvSpPr/>
+          <p:nvPr/>
+        </p:nvSpPr>
+        <p:spPr>
+          <a:xfrm>
+            <a:off x="8339328" y="5166360"/>
+            <a:ext cx="3246120" cy="777240"/>
+          </a:xfrm>
+          <a:prstGeom prst="rect">
+            <a:avLst/>
+          </a:prstGeom>
+          <a:noFill/>
+          <a:ln/>
+        </p:spPr>
+        <p:txBody>
+          <a:bodyPr wrap="square" lIns="0" tIns="0" rIns="0" bIns="0" rtlCol="0" anchor="t"/>
+          <a:lstStyle/>
+          <a:p>
+            <a:pPr indent="0" marL="0">
+              <a:buNone/>
+            </a:pPr>
+            <a:r>
+              <a:rPr lang="en-US" sz="1800" dirty="0">
+                <a:solidFill>
+                  <a:srgbClr val="334155"/>
+                </a:solidFill>
+                <a:latin typeface="Inter" pitchFamily="34" charset="0"/>
+                <a:ea typeface="Inter" pitchFamily="34" charset="-122"/>
+                <a:cs typeface="Inter" pitchFamily="34" charset="-120"/>
+              </a:rPr>
+              <a:t>Read check-ins + wellbeing; touch base with anyone low.</a:t>
+            </a:r>
+            <a:endParaRPr lang="en-US" sz="1800" dirty="0"/>
+          </a:p>
+        </p:txBody>
+      </p:sp>
+      <p:sp>
+        <p:nvSpPr>
+          <p:cNvPr id="37" name="Shape 34"/>
+          <p:cNvSpPr/>
+          <p:nvPr/>
+        </p:nvSpPr>
+        <p:spPr>
+          <a:xfrm>
+            <a:off x="548640" y="6355080"/>
+            <a:ext cx="11094415" cy="0"/>
+          </a:xfrm>
+          <a:prstGeom prst="line">
+            <a:avLst/>
+          </a:prstGeom>
+          <a:noFill/>
+          <a:ln w="9525">
+            <a:solidFill>
+              <a:srgbClr val="E2E8F0"/>
+            </a:solidFill>
+            <a:prstDash val="solid"/>
+          </a:ln>
+        </p:spPr>
+      </p:sp>
+      <p:sp>
+        <p:nvSpPr>
+          <p:cNvPr id="38" name="Text 35"/>
+          <p:cNvSpPr/>
+          <p:nvPr/>
+        </p:nvSpPr>
+        <p:spPr>
+          <a:xfrm>
+            <a:off x="548640" y="6446520"/>
+            <a:ext cx="5486400" cy="274320"/>
+          </a:xfrm>
+          <a:prstGeom prst="rect">
+            <a:avLst/>
+          </a:prstGeom>
+          <a:noFill/>
+          <a:ln/>
+        </p:spPr>
+        <p:txBody>
+          <a:bodyPr wrap="square" lIns="0" tIns="0" rIns="0" bIns="0" rtlCol="0" anchor="ctr"/>
+          <a:lstStyle/>
+          <a:p>
+            <a:pPr indent="0" marL="0">
+              <a:buNone/>
+            </a:pPr>
+            <a:r>
+              <a:rPr lang="en-US" sz="1300" dirty="0">
+                <a:solidFill>
+                  <a:srgbClr val="64748B"/>
+                </a:solidFill>
+                <a:latin typeface="Inter" pitchFamily="34" charset="0"/>
+                <a:ea typeface="Inter" pitchFamily="34" charset="-122"/>
+                <a:cs typeface="Inter" pitchFamily="34" charset="-120"/>
+              </a:rPr>
+              <a:t>PhDapp · for supervisors</a:t>
+            </a:r>
+            <a:endParaRPr lang="en-US" sz="1300" dirty="0"/>
+          </a:p>
+        </p:txBody>
+      </p:sp>
+      <p:sp>
+        <p:nvSpPr>
+          <p:cNvPr id="39" name="Text 36"/>
+          <p:cNvSpPr/>
+          <p:nvPr/>
+        </p:nvSpPr>
+        <p:spPr>
+          <a:xfrm>
+            <a:off x="9814255" y="6446520"/>
+            <a:ext cx="1828800" cy="274320"/>
+          </a:xfrm>
+          <a:prstGeom prst="rect">
+            <a:avLst/>
+          </a:prstGeom>
+          <a:noFill/>
+          <a:ln/>
+        </p:spPr>
+        <p:txBody>
+          <a:bodyPr wrap="square" lIns="0" tIns="0" rIns="0" bIns="0" rtlCol="0" anchor="ctr"/>
+          <a:lstStyle/>
+          <a:p>
+            <a:pPr algn="r" indent="0" marL="0">
+              <a:buNone/>
+            </a:pPr>
+            <a:r>
+              <a:rPr lang="en-US" sz="1300" dirty="0">
+                <a:solidFill>
+                  <a:srgbClr val="64748B"/>
+                </a:solidFill>
+                <a:latin typeface="Inter" pitchFamily="34" charset="0"/>
+                <a:ea typeface="Inter" pitchFamily="34" charset="-122"/>
+                <a:cs typeface="Inter" pitchFamily="34" charset="-120"/>
+              </a:rPr>
+              <a:t>17 / 19</a:t>
+            </a:r>
+            <a:endParaRPr lang="en-US" sz="1300" dirty="0"/>
+          </a:p>
+        </p:txBody>
+      </p:sp>
+    </p:spTree>
+  </p:cSld>
+  <p:clrMapOvr>
+    <a:masterClrMapping/>
+  </p:clrMapOvr>
+</p:sld>
+</file>
+
+<file path=ppt/slides/slide18.xml><?xml version="1.0" encoding="utf-8"?>
+<p:sld xmlns:a="http://schemas.openxmlformats.org/drawingml/2006/main" xmlns:r="http://schemas.openxmlformats.org/officeDocument/2006/relationships" xmlns:p="http://schemas.openxmlformats.org/presentationml/2006/main">
+  <p:cSld name="Slide 18">
+    <p:bg>
+      <p:bgPr>
+        <a:solidFill>
+          <a:srgbClr val="FFFFFF"/>
+        </a:solidFill>
+      </p:bgPr>
+    </p:bg>
+    <p:spTree>
+      <p:nvGrpSpPr>
+        <p:cNvPr id="1" name=""/>
+        <p:cNvGrpSpPr/>
+        <p:nvPr/>
+      </p:nvGrpSpPr>
+      <p:grpSpPr>
+        <a:xfrm>
+          <a:off x="0" y="0"/>
+          <a:ext cx="0" cy="0"/>
+          <a:chOff x="0" y="0"/>
+          <a:chExt cx="0" cy="0"/>
+        </a:xfrm>
+      </p:grpSpPr>
+      <p:sp>
+        <p:nvSpPr>
+          <p:cNvPr id="2" name="Shape 0"/>
+          <p:cNvSpPr/>
+          <p:nvPr/>
+        </p:nvSpPr>
+        <p:spPr>
+          <a:xfrm>
+            <a:off x="548640" y="548640"/>
+            <a:ext cx="548640" cy="548640"/>
+          </a:xfrm>
+          <a:prstGeom prst="roundRect">
+            <a:avLst>
+              <a:gd name="adj" fmla="val 20000"/>
+            </a:avLst>
+          </a:prstGeom>
+          <a:solidFill>
+            <a:srgbClr val="F59E0B"/>
+          </a:solidFill>
+          <a:ln/>
+        </p:spPr>
+      </p:sp>
+      <p:pic>
+        <p:nvPicPr>
+          <p:cNvPr id="3" name="Image 0" descr="preencoded.png">    </p:cNvPr>
+          <p:cNvPicPr>
+            <a:picLocks noChangeAspect="1"/>
+          </p:cNvPicPr>
+          <p:nvPr/>
+        </p:nvPicPr>
+        <p:blipFill>
+          <a:blip r:embed="rId1"/>
+          <a:stretch>
+            <a:fillRect/>
+          </a:stretch>
+        </p:blipFill>
+        <p:spPr>
+          <a:xfrm>
+            <a:off x="667512" y="667512"/>
+            <a:ext cx="310896" cy="310896"/>
+          </a:xfrm>
+          <a:prstGeom prst="rect">
+            <a:avLst/>
+          </a:prstGeom>
+        </p:spPr>
+      </p:pic>
+      <p:sp>
+        <p:nvSpPr>
+          <p:cNvPr id="4" name="Text 1"/>
+          <p:cNvSpPr/>
+          <p:nvPr/>
+        </p:nvSpPr>
+        <p:spPr>
+          <a:xfrm>
+            <a:off x="1261872" y="530352"/>
+            <a:ext cx="3657600" cy="292608"/>
+          </a:xfrm>
+          <a:prstGeom prst="rect">
+            <a:avLst/>
+          </a:prstGeom>
+          <a:noFill/>
+          <a:ln/>
+        </p:spPr>
+        <p:txBody>
+          <a:bodyPr wrap="square" lIns="0" tIns="0" rIns="0" bIns="0" rtlCol="0" anchor="ctr"/>
+          <a:lstStyle/>
+          <a:p>
+            <a:pPr indent="0" marL="0">
+              <a:buNone/>
+            </a:pPr>
+            <a:r>
+              <a:rPr lang="en-US" sz="1400" b="1" spc="400" kern="0" dirty="0">
+                <a:solidFill>
+                  <a:srgbClr val="F59E0B"/>
+                </a:solidFill>
+                <a:latin typeface="Inter" pitchFamily="34" charset="0"/>
+                <a:ea typeface="Inter" pitchFamily="34" charset="-122"/>
+                <a:cs typeface="Inter" pitchFamily="34" charset="-120"/>
+              </a:rPr>
+              <a:t>TEAM</a:t>
+            </a:r>
+            <a:endParaRPr lang="en-US" sz="1400" dirty="0"/>
+          </a:p>
+        </p:txBody>
+      </p:sp>
+      <p:sp>
+        <p:nvSpPr>
+          <p:cNvPr id="5" name="Text 2"/>
+          <p:cNvSpPr/>
+          <p:nvPr/>
+        </p:nvSpPr>
+        <p:spPr>
+          <a:xfrm>
+            <a:off x="1261872" y="749808"/>
+            <a:ext cx="10381183" cy="713232"/>
+          </a:xfrm>
+          <a:prstGeom prst="rect">
+            <a:avLst/>
+          </a:prstGeom>
+          <a:noFill/>
+          <a:ln/>
+        </p:spPr>
+        <p:txBody>
+          <a:bodyPr wrap="square" lIns="0" tIns="0" rIns="0" bIns="0" rtlCol="0" anchor="ctr"/>
+          <a:lstStyle/>
+          <a:p>
+            <a:pPr indent="0" marL="0">
+              <a:buNone/>
+            </a:pPr>
+            <a:r>
+              <a:rPr lang="en-US" sz="4000" b="1" dirty="0">
+                <a:solidFill>
+                  <a:srgbClr val="0F172A"/>
+                </a:solidFill>
+                <a:latin typeface="Inter" pitchFamily="34" charset="0"/>
+                <a:ea typeface="Inter" pitchFamily="34" charset="-122"/>
+                <a:cs typeface="Inter" pitchFamily="34" charset="-120"/>
+              </a:rPr>
+              <a:t>A day · as a team advisor</a:t>
+            </a:r>
+            <a:endParaRPr lang="en-US" sz="4000" dirty="0"/>
+          </a:p>
+        </p:txBody>
+      </p:sp>
+      <p:sp>
+        <p:nvSpPr>
+          <p:cNvPr id="6" name="Text 3"/>
+          <p:cNvSpPr/>
+          <p:nvPr/>
+        </p:nvSpPr>
+        <p:spPr>
+          <a:xfrm>
+            <a:off x="548640" y="1508760"/>
+            <a:ext cx="11094415" cy="822960"/>
+          </a:xfrm>
+          <a:prstGeom prst="rect">
+            <a:avLst/>
+          </a:prstGeom>
+          <a:noFill/>
+          <a:ln/>
+        </p:spPr>
+        <p:txBody>
+          <a:bodyPr wrap="square" lIns="0" tIns="0" rIns="0" bIns="0" rtlCol="0" anchor="t"/>
+          <a:lstStyle/>
+          <a:p>
+            <a:pPr indent="0" marL="0">
+              <a:buNone/>
+            </a:pPr>
+            <a:r>
+              <a:rPr lang="en-US" sz="2000" i="1" dirty="0">
+                <a:solidFill>
+                  <a:srgbClr val="334155"/>
+                </a:solidFill>
+                <a:latin typeface="Inter" pitchFamily="34" charset="0"/>
+                <a:ea typeface="Inter" pitchFamily="34" charset="-122"/>
+                <a:cs typeface="Inter" pitchFamily="34" charset="-120"/>
+              </a:rPr>
+              <a:t>Read-only across the students you advise, with one write — suggestions to supervisors.</a:t>
+            </a:r>
+            <a:endParaRPr lang="en-US" sz="2000" dirty="0"/>
+          </a:p>
+        </p:txBody>
+      </p:sp>
+      <p:sp>
+        <p:nvSpPr>
+          <p:cNvPr id="7" name="Shape 4"/>
+          <p:cNvSpPr/>
+          <p:nvPr/>
+        </p:nvSpPr>
+        <p:spPr>
+          <a:xfrm>
+            <a:off x="548640" y="2286000"/>
+            <a:ext cx="3611880" cy="1783080"/>
+          </a:xfrm>
+          <a:prstGeom prst="rect">
+            <a:avLst/>
+          </a:prstGeom>
+          <a:solidFill>
+            <a:srgbClr val="FFFFFF"/>
+          </a:solidFill>
+          <a:ln w="9525">
+            <a:solidFill>
+              <a:srgbClr val="E2E8F0"/>
+            </a:solidFill>
+            <a:prstDash val="solid"/>
+          </a:ln>
+          <a:effectLst>
+            <a:outerShdw sx="100000" sy="100000" kx="0" ky="0" algn="bl" rotWithShape="0" blurRad="76200" dist="12700" dir="5400000">
+              <a:srgbClr val="94A3B8">
+                <a:alpha val="12000"/>
+              </a:srgbClr>
+            </a:outerShdw>
+          </a:effectLst>
+        </p:spPr>
+      </p:sp>
+      <p:sp>
+        <p:nvSpPr>
+          <p:cNvPr id="8" name="Shape 5"/>
+          <p:cNvSpPr/>
+          <p:nvPr/>
+        </p:nvSpPr>
+        <p:spPr>
+          <a:xfrm>
+            <a:off x="749808" y="2487168"/>
+            <a:ext cx="502920" cy="502920"/>
+          </a:xfrm>
+          <a:prstGeom prst="ellipse">
+            <a:avLst/>
+          </a:prstGeom>
+          <a:solidFill>
+            <a:srgbClr val="FF3D8B"/>
+          </a:solidFill>
+          <a:ln/>
+        </p:spPr>
+      </p:sp>
+      <p:sp>
+        <p:nvSpPr>
+          <p:cNvPr id="9" name="Text 6"/>
+          <p:cNvSpPr/>
+          <p:nvPr/>
+        </p:nvSpPr>
+        <p:spPr>
+          <a:xfrm>
+            <a:off x="749808" y="2487168"/>
+            <a:ext cx="502920" cy="502920"/>
+          </a:xfrm>
+          <a:prstGeom prst="rect">
+            <a:avLst/>
+          </a:prstGeom>
+          <a:noFill/>
+          <a:ln/>
+        </p:spPr>
+        <p:txBody>
+          <a:bodyPr wrap="square" lIns="0" tIns="0" rIns="0" bIns="0" rtlCol="0" anchor="ctr"/>
+          <a:lstStyle/>
+          <a:p>
+            <a:pPr algn="ctr" indent="0" marL="0">
+              <a:buNone/>
+            </a:pPr>
+            <a:r>
+              <a:rPr lang="en-US" sz="2200" b="1" dirty="0">
+                <a:solidFill>
+                  <a:srgbClr val="FFFFFF"/>
+                </a:solidFill>
+                <a:latin typeface="Inter" pitchFamily="34" charset="0"/>
+                <a:ea typeface="Inter" pitchFamily="34" charset="-122"/>
+                <a:cs typeface="Inter" pitchFamily="34" charset="-120"/>
+              </a:rPr>
+              <a:t>1</a:t>
+            </a:r>
+            <a:endParaRPr lang="en-US" sz="2200" dirty="0"/>
+          </a:p>
+        </p:txBody>
+      </p:sp>
+      <p:sp>
+        <p:nvSpPr>
+          <p:cNvPr id="10" name="Text 7"/>
+          <p:cNvSpPr/>
+          <p:nvPr/>
+        </p:nvSpPr>
+        <p:spPr>
+          <a:xfrm>
+            <a:off x="1417320" y="2532888"/>
+            <a:ext cx="2542032" cy="411480"/>
+          </a:xfrm>
+          <a:prstGeom prst="rect">
+            <a:avLst/>
+          </a:prstGeom>
+          <a:noFill/>
+          <a:ln/>
+        </p:spPr>
+        <p:txBody>
+          <a:bodyPr wrap="square" lIns="0" tIns="0" rIns="0" bIns="0" rtlCol="0" anchor="ctr"/>
+          <a:lstStyle/>
+          <a:p>
+            <a:pPr indent="0" marL="0">
+              <a:buNone/>
+            </a:pPr>
+            <a:r>
+              <a:rPr lang="en-US" sz="2200" b="1" dirty="0">
+                <a:solidFill>
+                  <a:srgbClr val="0F172A"/>
+                </a:solidFill>
+                <a:latin typeface="Inter" pitchFamily="34" charset="0"/>
+                <a:ea typeface="Inter" pitchFamily="34" charset="-122"/>
+                <a:cs typeface="Inter" pitchFamily="34" charset="-120"/>
+              </a:rPr>
+              <a:t>Open a student</a:t>
+            </a:r>
+            <a:endParaRPr lang="en-US" sz="2200" dirty="0"/>
+          </a:p>
+        </p:txBody>
+      </p:sp>
+      <p:sp>
+        <p:nvSpPr>
+          <p:cNvPr id="11" name="Text 8"/>
+          <p:cNvSpPr/>
+          <p:nvPr/>
+        </p:nvSpPr>
+        <p:spPr>
+          <a:xfrm>
+            <a:off x="749808" y="3154680"/>
+            <a:ext cx="3246120" cy="777240"/>
+          </a:xfrm>
+          <a:prstGeom prst="rect">
+            <a:avLst/>
+          </a:prstGeom>
+          <a:noFill/>
+          <a:ln/>
+        </p:spPr>
+        <p:txBody>
+          <a:bodyPr wrap="square" lIns="0" tIns="0" rIns="0" bIns="0" rtlCol="0" anchor="t"/>
+          <a:lstStyle/>
+          <a:p>
+            <a:pPr indent="0" marL="0">
+              <a:buNone/>
+            </a:pPr>
+            <a:r>
+              <a:rPr lang="en-US" sz="1800" dirty="0">
+                <a:solidFill>
+                  <a:srgbClr val="334155"/>
+                </a:solidFill>
+                <a:latin typeface="Inter" pitchFamily="34" charset="0"/>
+                <a:ea typeface="Inter" pitchFamily="34" charset="-122"/>
+                <a:cs typeface="Inter" pitchFamily="34" charset="-120"/>
+              </a:rPr>
+              <a:t>Only the students you advise show up — pick one.</a:t>
+            </a:r>
+            <a:endParaRPr lang="en-US" sz="1800" dirty="0"/>
+          </a:p>
+        </p:txBody>
+      </p:sp>
+      <p:sp>
+        <p:nvSpPr>
+          <p:cNvPr id="12" name="Shape 9"/>
+          <p:cNvSpPr/>
+          <p:nvPr/>
+        </p:nvSpPr>
+        <p:spPr>
+          <a:xfrm>
+            <a:off x="4343400" y="2286000"/>
+            <a:ext cx="3611880" cy="1783080"/>
+          </a:xfrm>
+          <a:prstGeom prst="rect">
+            <a:avLst/>
+          </a:prstGeom>
+          <a:solidFill>
+            <a:srgbClr val="FFFFFF"/>
+          </a:solidFill>
+          <a:ln w="9525">
+            <a:solidFill>
+              <a:srgbClr val="E2E8F0"/>
+            </a:solidFill>
+            <a:prstDash val="solid"/>
+          </a:ln>
+          <a:effectLst>
+            <a:outerShdw sx="100000" sy="100000" kx="0" ky="0" algn="bl" rotWithShape="0" blurRad="76200" dist="12700" dir="5400000">
+              <a:srgbClr val="94A3B8">
+                <a:alpha val="12000"/>
+              </a:srgbClr>
+            </a:outerShdw>
+          </a:effectLst>
+        </p:spPr>
+      </p:sp>
+      <p:sp>
+        <p:nvSpPr>
+          <p:cNvPr id="13" name="Shape 10"/>
+          <p:cNvSpPr/>
+          <p:nvPr/>
+        </p:nvSpPr>
+        <p:spPr>
+          <a:xfrm>
+            <a:off x="4544568" y="2487168"/>
+            <a:ext cx="502920" cy="502920"/>
+          </a:xfrm>
+          <a:prstGeom prst="ellipse">
             <a:avLst/>
           </a:prstGeom>
           <a:solidFill>
@@ -7453,14 +8952,14 @@
       </p:sp>
       <p:sp>
         <p:nvSpPr>
-          <p:cNvPr id="12" name="Text 9"/>
-          <p:cNvSpPr/>
-          <p:nvPr/>
-        </p:nvSpPr>
-        <p:spPr>
-          <a:xfrm>
-            <a:off x="6601968" y="1993392"/>
-            <a:ext cx="4922215" cy="594360"/>
+          <p:cNvPr id="14" name="Text 11"/>
+          <p:cNvSpPr/>
+          <p:nvPr/>
+        </p:nvSpPr>
+        <p:spPr>
+          <a:xfrm>
+            <a:off x="4544568" y="2487168"/>
+            <a:ext cx="502920" cy="502920"/>
           </a:xfrm>
           <a:prstGeom prst="rect">
             <a:avLst/>
@@ -7472,6 +8971,45 @@
           <a:bodyPr wrap="square" lIns="0" tIns="0" rIns="0" bIns="0" rtlCol="0" anchor="ctr"/>
           <a:lstStyle/>
           <a:p>
+            <a:pPr algn="ctr" indent="0" marL="0">
+              <a:buNone/>
+            </a:pPr>
+            <a:r>
+              <a:rPr lang="en-US" sz="2200" b="1" dirty="0">
+                <a:solidFill>
+                  <a:srgbClr val="FFFFFF"/>
+                </a:solidFill>
+                <a:latin typeface="Inter" pitchFamily="34" charset="0"/>
+                <a:ea typeface="Inter" pitchFamily="34" charset="-122"/>
+                <a:cs typeface="Inter" pitchFamily="34" charset="-120"/>
+              </a:rPr>
+              <a:t>2</a:t>
+            </a:r>
+            <a:endParaRPr lang="en-US" sz="2200" dirty="0"/>
+          </a:p>
+        </p:txBody>
+      </p:sp>
+      <p:sp>
+        <p:nvSpPr>
+          <p:cNvPr id="15" name="Text 12"/>
+          <p:cNvSpPr/>
+          <p:nvPr/>
+        </p:nvSpPr>
+        <p:spPr>
+          <a:xfrm>
+            <a:off x="5212080" y="2532888"/>
+            <a:ext cx="2542032" cy="411480"/>
+          </a:xfrm>
+          <a:prstGeom prst="rect">
+            <a:avLst/>
+          </a:prstGeom>
+          <a:noFill/>
+          <a:ln/>
+        </p:spPr>
+        <p:txBody>
+          <a:bodyPr wrap="square" lIns="0" tIns="0" rIns="0" bIns="0" rtlCol="0" anchor="ctr"/>
+          <a:lstStyle/>
+          <a:p>
             <a:pPr indent="0" marL="0">
               <a:buNone/>
             </a:pPr>
@@ -7484,7 +9022,7 @@
                 <a:ea typeface="Inter" pitchFamily="34" charset="-122"/>
                 <a:cs typeface="Inter" pitchFamily="34" charset="-120"/>
               </a:rPr>
-              <a:t>Troubleshooting</a:t>
+              <a:t>Catch up</a:t>
             </a:r>
             <a:endParaRPr lang="en-US" sz="2200" dirty="0"/>
           </a:p>
@@ -7492,14 +9030,1077 @@
       </p:sp>
       <p:sp>
         <p:nvSpPr>
-          <p:cNvPr id="13" name="Text 10"/>
-          <p:cNvSpPr/>
-          <p:nvPr/>
-        </p:nvSpPr>
-        <p:spPr>
-          <a:xfrm>
-            <a:off x="6629400" y="2697480"/>
-            <a:ext cx="4876495" cy="2926080"/>
+          <p:cNvPr id="16" name="Text 13"/>
+          <p:cNvSpPr/>
+          <p:nvPr/>
+        </p:nvSpPr>
+        <p:spPr>
+          <a:xfrm>
+            <a:off x="4544568" y="3154680"/>
+            <a:ext cx="3246120" cy="777240"/>
+          </a:xfrm>
+          <a:prstGeom prst="rect">
+            <a:avLst/>
+          </a:prstGeom>
+          <a:noFill/>
+          <a:ln/>
+        </p:spPr>
+        <p:txBody>
+          <a:bodyPr wrap="square" lIns="0" tIns="0" rIns="0" bIns="0" rtlCol="0" anchor="t"/>
+          <a:lstStyle/>
+          <a:p>
+            <a:pPr indent="0" marL="0">
+              <a:buNone/>
+            </a:pPr>
+            <a:r>
+              <a:rPr lang="en-US" sz="1800" dirty="0">
+                <a:solidFill>
+                  <a:srgbClr val="334155"/>
+                </a:solidFill>
+                <a:latin typeface="Inter" pitchFamily="34" charset="0"/>
+                <a:ea typeface="Inter" pitchFamily="34" charset="-122"/>
+                <a:cs typeface="Inter" pitchFamily="34" charset="-120"/>
+              </a:rPr>
+              <a:t>Activity log, recent tasks, comments, latest check-in.</a:t>
+            </a:r>
+            <a:endParaRPr lang="en-US" sz="1800" dirty="0"/>
+          </a:p>
+        </p:txBody>
+      </p:sp>
+      <p:sp>
+        <p:nvSpPr>
+          <p:cNvPr id="17" name="Shape 14"/>
+          <p:cNvSpPr/>
+          <p:nvPr/>
+        </p:nvSpPr>
+        <p:spPr>
+          <a:xfrm>
+            <a:off x="8138160" y="2286000"/>
+            <a:ext cx="3611880" cy="1783080"/>
+          </a:xfrm>
+          <a:prstGeom prst="rect">
+            <a:avLst/>
+          </a:prstGeom>
+          <a:solidFill>
+            <a:srgbClr val="FFFFFF"/>
+          </a:solidFill>
+          <a:ln w="9525">
+            <a:solidFill>
+              <a:srgbClr val="E2E8F0"/>
+            </a:solidFill>
+            <a:prstDash val="solid"/>
+          </a:ln>
+          <a:effectLst>
+            <a:outerShdw sx="100000" sy="100000" kx="0" ky="0" algn="bl" rotWithShape="0" blurRad="76200" dist="12700" dir="5400000">
+              <a:srgbClr val="94A3B8">
+                <a:alpha val="12000"/>
+              </a:srgbClr>
+            </a:outerShdw>
+          </a:effectLst>
+        </p:spPr>
+      </p:sp>
+      <p:sp>
+        <p:nvSpPr>
+          <p:cNvPr id="18" name="Shape 15"/>
+          <p:cNvSpPr/>
+          <p:nvPr/>
+        </p:nvSpPr>
+        <p:spPr>
+          <a:xfrm>
+            <a:off x="8339328" y="2487168"/>
+            <a:ext cx="502920" cy="502920"/>
+          </a:xfrm>
+          <a:prstGeom prst="ellipse">
+            <a:avLst/>
+          </a:prstGeom>
+          <a:solidFill>
+            <a:srgbClr val="00D1C1"/>
+          </a:solidFill>
+          <a:ln/>
+        </p:spPr>
+      </p:sp>
+      <p:sp>
+        <p:nvSpPr>
+          <p:cNvPr id="19" name="Text 16"/>
+          <p:cNvSpPr/>
+          <p:nvPr/>
+        </p:nvSpPr>
+        <p:spPr>
+          <a:xfrm>
+            <a:off x="8339328" y="2487168"/>
+            <a:ext cx="502920" cy="502920"/>
+          </a:xfrm>
+          <a:prstGeom prst="rect">
+            <a:avLst/>
+          </a:prstGeom>
+          <a:noFill/>
+          <a:ln/>
+        </p:spPr>
+        <p:txBody>
+          <a:bodyPr wrap="square" lIns="0" tIns="0" rIns="0" bIns="0" rtlCol="0" anchor="ctr"/>
+          <a:lstStyle/>
+          <a:p>
+            <a:pPr algn="ctr" indent="0" marL="0">
+              <a:buNone/>
+            </a:pPr>
+            <a:r>
+              <a:rPr lang="en-US" sz="2200" b="1" dirty="0">
+                <a:solidFill>
+                  <a:srgbClr val="FFFFFF"/>
+                </a:solidFill>
+                <a:latin typeface="Inter" pitchFamily="34" charset="0"/>
+                <a:ea typeface="Inter" pitchFamily="34" charset="-122"/>
+                <a:cs typeface="Inter" pitchFamily="34" charset="-120"/>
+              </a:rPr>
+              <a:t>3</a:t>
+            </a:r>
+            <a:endParaRPr lang="en-US" sz="2200" dirty="0"/>
+          </a:p>
+        </p:txBody>
+      </p:sp>
+      <p:sp>
+        <p:nvSpPr>
+          <p:cNvPr id="20" name="Text 17"/>
+          <p:cNvSpPr/>
+          <p:nvPr/>
+        </p:nvSpPr>
+        <p:spPr>
+          <a:xfrm>
+            <a:off x="9006840" y="2532888"/>
+            <a:ext cx="2542032" cy="411480"/>
+          </a:xfrm>
+          <a:prstGeom prst="rect">
+            <a:avLst/>
+          </a:prstGeom>
+          <a:noFill/>
+          <a:ln/>
+        </p:spPr>
+        <p:txBody>
+          <a:bodyPr wrap="square" lIns="0" tIns="0" rIns="0" bIns="0" rtlCol="0" anchor="ctr"/>
+          <a:lstStyle/>
+          <a:p>
+            <a:pPr indent="0" marL="0">
+              <a:buNone/>
+            </a:pPr>
+            <a:r>
+              <a:rPr lang="en-US" sz="2200" b="1" dirty="0">
+                <a:solidFill>
+                  <a:srgbClr val="0F172A"/>
+                </a:solidFill>
+                <a:latin typeface="Inter" pitchFamily="34" charset="0"/>
+                <a:ea typeface="Inter" pitchFamily="34" charset="-122"/>
+                <a:cs typeface="Inter" pitchFamily="34" charset="-120"/>
+              </a:rPr>
+              <a:t>Meetings</a:t>
+            </a:r>
+            <a:endParaRPr lang="en-US" sz="2200" dirty="0"/>
+          </a:p>
+        </p:txBody>
+      </p:sp>
+      <p:sp>
+        <p:nvSpPr>
+          <p:cNvPr id="21" name="Text 18"/>
+          <p:cNvSpPr/>
+          <p:nvPr/>
+        </p:nvSpPr>
+        <p:spPr>
+          <a:xfrm>
+            <a:off x="8339328" y="3154680"/>
+            <a:ext cx="3246120" cy="777240"/>
+          </a:xfrm>
+          <a:prstGeom prst="rect">
+            <a:avLst/>
+          </a:prstGeom>
+          <a:noFill/>
+          <a:ln/>
+        </p:spPr>
+        <p:txBody>
+          <a:bodyPr wrap="square" lIns="0" tIns="0" rIns="0" bIns="0" rtlCol="0" anchor="t"/>
+          <a:lstStyle/>
+          <a:p>
+            <a:pPr indent="0" marL="0">
+              <a:buNone/>
+            </a:pPr>
+            <a:r>
+              <a:rPr lang="en-US" sz="1800" dirty="0">
+                <a:solidFill>
+                  <a:srgbClr val="334155"/>
+                </a:solidFill>
+                <a:latin typeface="Inter" pitchFamily="34" charset="0"/>
+                <a:ea typeface="Inter" pitchFamily="34" charset="-122"/>
+                <a:cs typeface="Inter" pitchFamily="34" charset="-120"/>
+              </a:rPr>
+              <a:t>Read the team's 1:1 notes and agenda items.</a:t>
+            </a:r>
+            <a:endParaRPr lang="en-US" sz="1800" dirty="0"/>
+          </a:p>
+        </p:txBody>
+      </p:sp>
+      <p:sp>
+        <p:nvSpPr>
+          <p:cNvPr id="22" name="Shape 19"/>
+          <p:cNvSpPr/>
+          <p:nvPr/>
+        </p:nvSpPr>
+        <p:spPr>
+          <a:xfrm>
+            <a:off x="548640" y="4297680"/>
+            <a:ext cx="3611880" cy="1783080"/>
+          </a:xfrm>
+          <a:prstGeom prst="rect">
+            <a:avLst/>
+          </a:prstGeom>
+          <a:solidFill>
+            <a:srgbClr val="FFFFFF"/>
+          </a:solidFill>
+          <a:ln w="9525">
+            <a:solidFill>
+              <a:srgbClr val="E2E8F0"/>
+            </a:solidFill>
+            <a:prstDash val="solid"/>
+          </a:ln>
+          <a:effectLst>
+            <a:outerShdw sx="100000" sy="100000" kx="0" ky="0" algn="bl" rotWithShape="0" blurRad="76200" dist="12700" dir="5400000">
+              <a:srgbClr val="94A3B8">
+                <a:alpha val="12000"/>
+              </a:srgbClr>
+            </a:outerShdw>
+          </a:effectLst>
+        </p:spPr>
+      </p:sp>
+      <p:sp>
+        <p:nvSpPr>
+          <p:cNvPr id="23" name="Shape 20"/>
+          <p:cNvSpPr/>
+          <p:nvPr/>
+        </p:nvSpPr>
+        <p:spPr>
+          <a:xfrm>
+            <a:off x="749808" y="4498848"/>
+            <a:ext cx="502920" cy="502920"/>
+          </a:xfrm>
+          <a:prstGeom prst="ellipse">
+            <a:avLst/>
+          </a:prstGeom>
+          <a:solidFill>
+            <a:srgbClr val="FF3D8B"/>
+          </a:solidFill>
+          <a:ln/>
+        </p:spPr>
+      </p:sp>
+      <p:sp>
+        <p:nvSpPr>
+          <p:cNvPr id="24" name="Text 21"/>
+          <p:cNvSpPr/>
+          <p:nvPr/>
+        </p:nvSpPr>
+        <p:spPr>
+          <a:xfrm>
+            <a:off x="749808" y="4498848"/>
+            <a:ext cx="502920" cy="502920"/>
+          </a:xfrm>
+          <a:prstGeom prst="rect">
+            <a:avLst/>
+          </a:prstGeom>
+          <a:noFill/>
+          <a:ln/>
+        </p:spPr>
+        <p:txBody>
+          <a:bodyPr wrap="square" lIns="0" tIns="0" rIns="0" bIns="0" rtlCol="0" anchor="ctr"/>
+          <a:lstStyle/>
+          <a:p>
+            <a:pPr algn="ctr" indent="0" marL="0">
+              <a:buNone/>
+            </a:pPr>
+            <a:r>
+              <a:rPr lang="en-US" sz="2200" b="1" dirty="0">
+                <a:solidFill>
+                  <a:srgbClr val="FFFFFF"/>
+                </a:solidFill>
+                <a:latin typeface="Inter" pitchFamily="34" charset="0"/>
+                <a:ea typeface="Inter" pitchFamily="34" charset="-122"/>
+                <a:cs typeface="Inter" pitchFamily="34" charset="-120"/>
+              </a:rPr>
+              <a:t>4</a:t>
+            </a:r>
+            <a:endParaRPr lang="en-US" sz="2200" dirty="0"/>
+          </a:p>
+        </p:txBody>
+      </p:sp>
+      <p:sp>
+        <p:nvSpPr>
+          <p:cNvPr id="25" name="Text 22"/>
+          <p:cNvSpPr/>
+          <p:nvPr/>
+        </p:nvSpPr>
+        <p:spPr>
+          <a:xfrm>
+            <a:off x="1417320" y="4544568"/>
+            <a:ext cx="2542032" cy="411480"/>
+          </a:xfrm>
+          <a:prstGeom prst="rect">
+            <a:avLst/>
+          </a:prstGeom>
+          <a:noFill/>
+          <a:ln/>
+        </p:spPr>
+        <p:txBody>
+          <a:bodyPr wrap="square" lIns="0" tIns="0" rIns="0" bIns="0" rtlCol="0" anchor="ctr"/>
+          <a:lstStyle/>
+          <a:p>
+            <a:pPr indent="0" marL="0">
+              <a:buNone/>
+            </a:pPr>
+            <a:r>
+              <a:rPr lang="en-US" sz="2200" b="1" dirty="0">
+                <a:solidFill>
+                  <a:srgbClr val="0F172A"/>
+                </a:solidFill>
+                <a:latin typeface="Inter" pitchFamily="34" charset="0"/>
+                <a:ea typeface="Inter" pitchFamily="34" charset="-122"/>
+                <a:cs typeface="Inter" pitchFamily="34" charset="-120"/>
+              </a:rPr>
+              <a:t>Wellbeing</a:t>
+            </a:r>
+            <a:endParaRPr lang="en-US" sz="2200" dirty="0"/>
+          </a:p>
+        </p:txBody>
+      </p:sp>
+      <p:sp>
+        <p:nvSpPr>
+          <p:cNvPr id="26" name="Text 23"/>
+          <p:cNvSpPr/>
+          <p:nvPr/>
+        </p:nvSpPr>
+        <p:spPr>
+          <a:xfrm>
+            <a:off x="749808" y="5166360"/>
+            <a:ext cx="3246120" cy="777240"/>
+          </a:xfrm>
+          <a:prstGeom prst="rect">
+            <a:avLst/>
+          </a:prstGeom>
+          <a:noFill/>
+          <a:ln/>
+        </p:spPr>
+        <p:txBody>
+          <a:bodyPr wrap="square" lIns="0" tIns="0" rIns="0" bIns="0" rtlCol="0" anchor="t"/>
+          <a:lstStyle/>
+          <a:p>
+            <a:pPr indent="0" marL="0">
+              <a:buNone/>
+            </a:pPr>
+            <a:r>
+              <a:rPr lang="en-US" sz="1800" dirty="0">
+                <a:solidFill>
+                  <a:srgbClr val="334155"/>
+                </a:solidFill>
+                <a:latin typeface="Inter" pitchFamily="34" charset="0"/>
+                <a:ea typeface="Inter" pitchFamily="34" charset="-122"/>
+                <a:cs typeface="Inter" pitchFamily="34" charset="-120"/>
+              </a:rPr>
+              <a:t>You see 1–5 wellbeing scores — flagged trends matter.</a:t>
+            </a:r>
+            <a:endParaRPr lang="en-US" sz="1800" dirty="0"/>
+          </a:p>
+        </p:txBody>
+      </p:sp>
+      <p:sp>
+        <p:nvSpPr>
+          <p:cNvPr id="27" name="Shape 24"/>
+          <p:cNvSpPr/>
+          <p:nvPr/>
+        </p:nvSpPr>
+        <p:spPr>
+          <a:xfrm>
+            <a:off x="4343400" y="4297680"/>
+            <a:ext cx="3611880" cy="1783080"/>
+          </a:xfrm>
+          <a:prstGeom prst="rect">
+            <a:avLst/>
+          </a:prstGeom>
+          <a:solidFill>
+            <a:srgbClr val="FFFFFF"/>
+          </a:solidFill>
+          <a:ln w="9525">
+            <a:solidFill>
+              <a:srgbClr val="E2E8F0"/>
+            </a:solidFill>
+            <a:prstDash val="solid"/>
+          </a:ln>
+          <a:effectLst>
+            <a:outerShdw sx="100000" sy="100000" kx="0" ky="0" algn="bl" rotWithShape="0" blurRad="76200" dist="12700" dir="5400000">
+              <a:srgbClr val="94A3B8">
+                <a:alpha val="12000"/>
+              </a:srgbClr>
+            </a:outerShdw>
+          </a:effectLst>
+        </p:spPr>
+      </p:sp>
+      <p:sp>
+        <p:nvSpPr>
+          <p:cNvPr id="28" name="Shape 25"/>
+          <p:cNvSpPr/>
+          <p:nvPr/>
+        </p:nvSpPr>
+        <p:spPr>
+          <a:xfrm>
+            <a:off x="4544568" y="4498848"/>
+            <a:ext cx="502920" cy="502920"/>
+          </a:xfrm>
+          <a:prstGeom prst="ellipse">
+            <a:avLst/>
+          </a:prstGeom>
+          <a:solidFill>
+            <a:srgbClr val="F59E0B"/>
+          </a:solidFill>
+          <a:ln/>
+        </p:spPr>
+      </p:sp>
+      <p:sp>
+        <p:nvSpPr>
+          <p:cNvPr id="29" name="Text 26"/>
+          <p:cNvSpPr/>
+          <p:nvPr/>
+        </p:nvSpPr>
+        <p:spPr>
+          <a:xfrm>
+            <a:off x="4544568" y="4498848"/>
+            <a:ext cx="502920" cy="502920"/>
+          </a:xfrm>
+          <a:prstGeom prst="rect">
+            <a:avLst/>
+          </a:prstGeom>
+          <a:noFill/>
+          <a:ln/>
+        </p:spPr>
+        <p:txBody>
+          <a:bodyPr wrap="square" lIns="0" tIns="0" rIns="0" bIns="0" rtlCol="0" anchor="ctr"/>
+          <a:lstStyle/>
+          <a:p>
+            <a:pPr algn="ctr" indent="0" marL="0">
+              <a:buNone/>
+            </a:pPr>
+            <a:r>
+              <a:rPr lang="en-US" sz="2200" b="1" dirty="0">
+                <a:solidFill>
+                  <a:srgbClr val="FFFFFF"/>
+                </a:solidFill>
+                <a:latin typeface="Inter" pitchFamily="34" charset="0"/>
+                <a:ea typeface="Inter" pitchFamily="34" charset="-122"/>
+                <a:cs typeface="Inter" pitchFamily="34" charset="-120"/>
+              </a:rPr>
+              <a:t>5</a:t>
+            </a:r>
+            <a:endParaRPr lang="en-US" sz="2200" dirty="0"/>
+          </a:p>
+        </p:txBody>
+      </p:sp>
+      <p:sp>
+        <p:nvSpPr>
+          <p:cNvPr id="30" name="Text 27"/>
+          <p:cNvSpPr/>
+          <p:nvPr/>
+        </p:nvSpPr>
+        <p:spPr>
+          <a:xfrm>
+            <a:off x="5212080" y="4544568"/>
+            <a:ext cx="2542032" cy="411480"/>
+          </a:xfrm>
+          <a:prstGeom prst="rect">
+            <a:avLst/>
+          </a:prstGeom>
+          <a:noFill/>
+          <a:ln/>
+        </p:spPr>
+        <p:txBody>
+          <a:bodyPr wrap="square" lIns="0" tIns="0" rIns="0" bIns="0" rtlCol="0" anchor="ctr"/>
+          <a:lstStyle/>
+          <a:p>
+            <a:pPr indent="0" marL="0">
+              <a:buNone/>
+            </a:pPr>
+            <a:r>
+              <a:rPr lang="en-US" sz="2200" b="1" dirty="0">
+                <a:solidFill>
+                  <a:srgbClr val="0F172A"/>
+                </a:solidFill>
+                <a:latin typeface="Inter" pitchFamily="34" charset="0"/>
+                <a:ea typeface="Inter" pitchFamily="34" charset="-122"/>
+                <a:cs typeface="Inter" pitchFamily="34" charset="-120"/>
+              </a:rPr>
+              <a:t>Suggest</a:t>
+            </a:r>
+            <a:endParaRPr lang="en-US" sz="2200" dirty="0"/>
+          </a:p>
+        </p:txBody>
+      </p:sp>
+      <p:sp>
+        <p:nvSpPr>
+          <p:cNvPr id="31" name="Text 28"/>
+          <p:cNvSpPr/>
+          <p:nvPr/>
+        </p:nvSpPr>
+        <p:spPr>
+          <a:xfrm>
+            <a:off x="4544568" y="5166360"/>
+            <a:ext cx="3246120" cy="777240"/>
+          </a:xfrm>
+          <a:prstGeom prst="rect">
+            <a:avLst/>
+          </a:prstGeom>
+          <a:noFill/>
+          <a:ln/>
+        </p:spPr>
+        <p:txBody>
+          <a:bodyPr wrap="square" lIns="0" tIns="0" rIns="0" bIns="0" rtlCol="0" anchor="t"/>
+          <a:lstStyle/>
+          <a:p>
+            <a:pPr indent="0" marL="0">
+              <a:buNone/>
+            </a:pPr>
+            <a:r>
+              <a:rPr lang="en-US" sz="1800" dirty="0">
+                <a:solidFill>
+                  <a:srgbClr val="334155"/>
+                </a:solidFill>
+                <a:latin typeface="Inter" pitchFamily="34" charset="0"/>
+                <a:ea typeface="Inter" pitchFamily="34" charset="-122"/>
+                <a:cs typeface="Inter" pitchFamily="34" charset="-120"/>
+              </a:rPr>
+              <a:t>Post in Advisor Suggestions, tagged with the student(s).</a:t>
+            </a:r>
+            <a:endParaRPr lang="en-US" sz="1800" dirty="0"/>
+          </a:p>
+        </p:txBody>
+      </p:sp>
+      <p:sp>
+        <p:nvSpPr>
+          <p:cNvPr id="32" name="Shape 29"/>
+          <p:cNvSpPr/>
+          <p:nvPr/>
+        </p:nvSpPr>
+        <p:spPr>
+          <a:xfrm>
+            <a:off x="8138160" y="4297680"/>
+            <a:ext cx="3611880" cy="1783080"/>
+          </a:xfrm>
+          <a:prstGeom prst="rect">
+            <a:avLst/>
+          </a:prstGeom>
+          <a:solidFill>
+            <a:srgbClr val="FFFFFF"/>
+          </a:solidFill>
+          <a:ln w="9525">
+            <a:solidFill>
+              <a:srgbClr val="E2E8F0"/>
+            </a:solidFill>
+            <a:prstDash val="solid"/>
+          </a:ln>
+          <a:effectLst>
+            <a:outerShdw sx="100000" sy="100000" kx="0" ky="0" algn="bl" rotWithShape="0" blurRad="76200" dist="12700" dir="5400000">
+              <a:srgbClr val="94A3B8">
+                <a:alpha val="12000"/>
+              </a:srgbClr>
+            </a:outerShdw>
+          </a:effectLst>
+        </p:spPr>
+      </p:sp>
+      <p:sp>
+        <p:nvSpPr>
+          <p:cNvPr id="33" name="Shape 30"/>
+          <p:cNvSpPr/>
+          <p:nvPr/>
+        </p:nvSpPr>
+        <p:spPr>
+          <a:xfrm>
+            <a:off x="8339328" y="4498848"/>
+            <a:ext cx="502920" cy="502920"/>
+          </a:xfrm>
+          <a:prstGeom prst="ellipse">
+            <a:avLst/>
+          </a:prstGeom>
+          <a:solidFill>
+            <a:srgbClr val="6F4CFF"/>
+          </a:solidFill>
+          <a:ln/>
+        </p:spPr>
+      </p:sp>
+      <p:sp>
+        <p:nvSpPr>
+          <p:cNvPr id="34" name="Text 31"/>
+          <p:cNvSpPr/>
+          <p:nvPr/>
+        </p:nvSpPr>
+        <p:spPr>
+          <a:xfrm>
+            <a:off x="8339328" y="4498848"/>
+            <a:ext cx="502920" cy="502920"/>
+          </a:xfrm>
+          <a:prstGeom prst="rect">
+            <a:avLst/>
+          </a:prstGeom>
+          <a:noFill/>
+          <a:ln/>
+        </p:spPr>
+        <p:txBody>
+          <a:bodyPr wrap="square" lIns="0" tIns="0" rIns="0" bIns="0" rtlCol="0" anchor="ctr"/>
+          <a:lstStyle/>
+          <a:p>
+            <a:pPr algn="ctr" indent="0" marL="0">
+              <a:buNone/>
+            </a:pPr>
+            <a:r>
+              <a:rPr lang="en-US" sz="2200" b="1" dirty="0">
+                <a:solidFill>
+                  <a:srgbClr val="FFFFFF"/>
+                </a:solidFill>
+                <a:latin typeface="Inter" pitchFamily="34" charset="0"/>
+                <a:ea typeface="Inter" pitchFamily="34" charset="-122"/>
+                <a:cs typeface="Inter" pitchFamily="34" charset="-120"/>
+              </a:rPr>
+              <a:t>6</a:t>
+            </a:r>
+            <a:endParaRPr lang="en-US" sz="2200" dirty="0"/>
+          </a:p>
+        </p:txBody>
+      </p:sp>
+      <p:sp>
+        <p:nvSpPr>
+          <p:cNvPr id="35" name="Text 32"/>
+          <p:cNvSpPr/>
+          <p:nvPr/>
+        </p:nvSpPr>
+        <p:spPr>
+          <a:xfrm>
+            <a:off x="9006840" y="4544568"/>
+            <a:ext cx="2542032" cy="411480"/>
+          </a:xfrm>
+          <a:prstGeom prst="rect">
+            <a:avLst/>
+          </a:prstGeom>
+          <a:noFill/>
+          <a:ln/>
+        </p:spPr>
+        <p:txBody>
+          <a:bodyPr wrap="square" lIns="0" tIns="0" rIns="0" bIns="0" rtlCol="0" anchor="ctr"/>
+          <a:lstStyle/>
+          <a:p>
+            <a:pPr indent="0" marL="0">
+              <a:buNone/>
+            </a:pPr>
+            <a:r>
+              <a:rPr lang="en-US" sz="2200" b="1" dirty="0">
+                <a:solidFill>
+                  <a:srgbClr val="0F172A"/>
+                </a:solidFill>
+                <a:latin typeface="Inter" pitchFamily="34" charset="0"/>
+                <a:ea typeface="Inter" pitchFamily="34" charset="-122"/>
+                <a:cs typeface="Inter" pitchFamily="34" charset="-120"/>
+              </a:rPr>
+              <a:t>Annual review</a:t>
+            </a:r>
+            <a:endParaRPr lang="en-US" sz="2200" dirty="0"/>
+          </a:p>
+        </p:txBody>
+      </p:sp>
+      <p:sp>
+        <p:nvSpPr>
+          <p:cNvPr id="36" name="Text 33"/>
+          <p:cNvSpPr/>
+          <p:nvPr/>
+        </p:nvSpPr>
+        <p:spPr>
+          <a:xfrm>
+            <a:off x="8339328" y="5166360"/>
+            <a:ext cx="3246120" cy="777240"/>
+          </a:xfrm>
+          <a:prstGeom prst="rect">
+            <a:avLst/>
+          </a:prstGeom>
+          <a:noFill/>
+          <a:ln/>
+        </p:spPr>
+        <p:txBody>
+          <a:bodyPr wrap="square" lIns="0" tIns="0" rIns="0" bIns="0" rtlCol="0" anchor="t"/>
+          <a:lstStyle/>
+          <a:p>
+            <a:pPr indent="0" marL="0">
+              <a:buNone/>
+            </a:pPr>
+            <a:r>
+              <a:rPr lang="en-US" sz="1800" dirty="0">
+                <a:solidFill>
+                  <a:srgbClr val="334155"/>
+                </a:solidFill>
+                <a:latin typeface="Inter" pitchFamily="34" charset="0"/>
+                <a:ea typeface="Inter" pitchFamily="34" charset="-122"/>
+                <a:cs typeface="Inter" pitchFamily="34" charset="-120"/>
+              </a:rPr>
+              <a:t>Open the Review page when asked for formal input.</a:t>
+            </a:r>
+            <a:endParaRPr lang="en-US" sz="1800" dirty="0"/>
+          </a:p>
+        </p:txBody>
+      </p:sp>
+      <p:sp>
+        <p:nvSpPr>
+          <p:cNvPr id="37" name="Shape 34"/>
+          <p:cNvSpPr/>
+          <p:nvPr/>
+        </p:nvSpPr>
+        <p:spPr>
+          <a:xfrm>
+            <a:off x="548640" y="6355080"/>
+            <a:ext cx="11094415" cy="0"/>
+          </a:xfrm>
+          <a:prstGeom prst="line">
+            <a:avLst/>
+          </a:prstGeom>
+          <a:noFill/>
+          <a:ln w="9525">
+            <a:solidFill>
+              <a:srgbClr val="E2E8F0"/>
+            </a:solidFill>
+            <a:prstDash val="solid"/>
+          </a:ln>
+        </p:spPr>
+      </p:sp>
+      <p:sp>
+        <p:nvSpPr>
+          <p:cNvPr id="38" name="Text 35"/>
+          <p:cNvSpPr/>
+          <p:nvPr/>
+        </p:nvSpPr>
+        <p:spPr>
+          <a:xfrm>
+            <a:off x="548640" y="6446520"/>
+            <a:ext cx="5486400" cy="274320"/>
+          </a:xfrm>
+          <a:prstGeom prst="rect">
+            <a:avLst/>
+          </a:prstGeom>
+          <a:noFill/>
+          <a:ln/>
+        </p:spPr>
+        <p:txBody>
+          <a:bodyPr wrap="square" lIns="0" tIns="0" rIns="0" bIns="0" rtlCol="0" anchor="ctr"/>
+          <a:lstStyle/>
+          <a:p>
+            <a:pPr indent="0" marL="0">
+              <a:buNone/>
+            </a:pPr>
+            <a:r>
+              <a:rPr lang="en-US" sz="1300" dirty="0">
+                <a:solidFill>
+                  <a:srgbClr val="64748B"/>
+                </a:solidFill>
+                <a:latin typeface="Inter" pitchFamily="34" charset="0"/>
+                <a:ea typeface="Inter" pitchFamily="34" charset="-122"/>
+                <a:cs typeface="Inter" pitchFamily="34" charset="-120"/>
+              </a:rPr>
+              <a:t>PhDapp · for supervisors</a:t>
+            </a:r>
+            <a:endParaRPr lang="en-US" sz="1300" dirty="0"/>
+          </a:p>
+        </p:txBody>
+      </p:sp>
+      <p:sp>
+        <p:nvSpPr>
+          <p:cNvPr id="39" name="Text 36"/>
+          <p:cNvSpPr/>
+          <p:nvPr/>
+        </p:nvSpPr>
+        <p:spPr>
+          <a:xfrm>
+            <a:off x="9814255" y="6446520"/>
+            <a:ext cx="1828800" cy="274320"/>
+          </a:xfrm>
+          <a:prstGeom prst="rect">
+            <a:avLst/>
+          </a:prstGeom>
+          <a:noFill/>
+          <a:ln/>
+        </p:spPr>
+        <p:txBody>
+          <a:bodyPr wrap="square" lIns="0" tIns="0" rIns="0" bIns="0" rtlCol="0" anchor="ctr"/>
+          <a:lstStyle/>
+          <a:p>
+            <a:pPr algn="r" indent="0" marL="0">
+              <a:buNone/>
+            </a:pPr>
+            <a:r>
+              <a:rPr lang="en-US" sz="1300" dirty="0">
+                <a:solidFill>
+                  <a:srgbClr val="64748B"/>
+                </a:solidFill>
+                <a:latin typeface="Inter" pitchFamily="34" charset="0"/>
+                <a:ea typeface="Inter" pitchFamily="34" charset="-122"/>
+                <a:cs typeface="Inter" pitchFamily="34" charset="-120"/>
+              </a:rPr>
+              <a:t>18 / 19</a:t>
+            </a:r>
+            <a:endParaRPr lang="en-US" sz="1300" dirty="0"/>
+          </a:p>
+        </p:txBody>
+      </p:sp>
+    </p:spTree>
+  </p:cSld>
+  <p:clrMapOvr>
+    <a:masterClrMapping/>
+  </p:clrMapOvr>
+</p:sld>
+</file>
+
+<file path=ppt/slides/slide19.xml><?xml version="1.0" encoding="utf-8"?>
+<p:sld xmlns:a="http://schemas.openxmlformats.org/drawingml/2006/main" xmlns:r="http://schemas.openxmlformats.org/officeDocument/2006/relationships" xmlns:p="http://schemas.openxmlformats.org/presentationml/2006/main">
+  <p:cSld name="Slide 19">
+    <p:bg>
+      <p:bgPr>
+        <a:solidFill>
+          <a:srgbClr val="FFFFFF"/>
+        </a:solidFill>
+      </p:bgPr>
+    </p:bg>
+    <p:spTree>
+      <p:nvGrpSpPr>
+        <p:cNvPr id="1" name=""/>
+        <p:cNvGrpSpPr/>
+        <p:nvPr/>
+      </p:nvGrpSpPr>
+      <p:grpSpPr>
+        <a:xfrm>
+          <a:off x="0" y="0"/>
+          <a:ext cx="0" cy="0"/>
+          <a:chOff x="0" y="0"/>
+          <a:chExt cx="0" cy="0"/>
+        </a:xfrm>
+      </p:grpSpPr>
+      <p:sp>
+        <p:nvSpPr>
+          <p:cNvPr id="2" name="Shape 0"/>
+          <p:cNvSpPr/>
+          <p:nvPr/>
+        </p:nvSpPr>
+        <p:spPr>
+          <a:xfrm>
+            <a:off x="548640" y="548640"/>
+            <a:ext cx="548640" cy="548640"/>
+          </a:xfrm>
+          <a:prstGeom prst="roundRect">
+            <a:avLst>
+              <a:gd name="adj" fmla="val 20000"/>
+            </a:avLst>
+          </a:prstGeom>
+          <a:solidFill>
+            <a:srgbClr val="2196F3"/>
+          </a:solidFill>
+          <a:ln/>
+        </p:spPr>
+      </p:sp>
+      <p:pic>
+        <p:nvPicPr>
+          <p:cNvPr id="3" name="Image 0" descr="preencoded.png">    </p:cNvPr>
+          <p:cNvPicPr>
+            <a:picLocks noChangeAspect="1"/>
+          </p:cNvPicPr>
+          <p:nvPr/>
+        </p:nvPicPr>
+        <p:blipFill>
+          <a:blip r:embed="rId1"/>
+          <a:stretch>
+            <a:fillRect/>
+          </a:stretch>
+        </p:blipFill>
+        <p:spPr>
+          <a:xfrm>
+            <a:off x="667512" y="667512"/>
+            <a:ext cx="310896" cy="310896"/>
+          </a:xfrm>
+          <a:prstGeom prst="rect">
+            <a:avLst/>
+          </a:prstGeom>
+        </p:spPr>
+      </p:pic>
+      <p:sp>
+        <p:nvSpPr>
+          <p:cNvPr id="4" name="Text 1"/>
+          <p:cNvSpPr/>
+          <p:nvPr/>
+        </p:nvSpPr>
+        <p:spPr>
+          <a:xfrm>
+            <a:off x="1261872" y="530352"/>
+            <a:ext cx="3657600" cy="292608"/>
+          </a:xfrm>
+          <a:prstGeom prst="rect">
+            <a:avLst/>
+          </a:prstGeom>
+          <a:noFill/>
+          <a:ln/>
+        </p:spPr>
+        <p:txBody>
+          <a:bodyPr wrap="square" lIns="0" tIns="0" rIns="0" bIns="0" rtlCol="0" anchor="ctr"/>
+          <a:lstStyle/>
+          <a:p>
+            <a:pPr indent="0" marL="0">
+              <a:buNone/>
+            </a:pPr>
+            <a:r>
+              <a:rPr lang="en-US" sz="1400" b="1" spc="400" kern="0" dirty="0">
+                <a:solidFill>
+                  <a:srgbClr val="2196F3"/>
+                </a:solidFill>
+                <a:latin typeface="Inter" pitchFamily="34" charset="0"/>
+                <a:ea typeface="Inter" pitchFamily="34" charset="-122"/>
+                <a:cs typeface="Inter" pitchFamily="34" charset="-120"/>
+              </a:rPr>
+              <a:t>TIPS</a:t>
+            </a:r>
+            <a:endParaRPr lang="en-US" sz="1400" dirty="0"/>
+          </a:p>
+        </p:txBody>
+      </p:sp>
+      <p:sp>
+        <p:nvSpPr>
+          <p:cNvPr id="5" name="Text 2"/>
+          <p:cNvSpPr/>
+          <p:nvPr/>
+        </p:nvSpPr>
+        <p:spPr>
+          <a:xfrm>
+            <a:off x="1261872" y="749808"/>
+            <a:ext cx="10381183" cy="713232"/>
+          </a:xfrm>
+          <a:prstGeom prst="rect">
+            <a:avLst/>
+          </a:prstGeom>
+          <a:noFill/>
+          <a:ln/>
+        </p:spPr>
+        <p:txBody>
+          <a:bodyPr wrap="square" lIns="0" tIns="0" rIns="0" bIns="0" rtlCol="0" anchor="ctr"/>
+          <a:lstStyle/>
+          <a:p>
+            <a:pPr indent="0" marL="0">
+              <a:buNone/>
+            </a:pPr>
+            <a:r>
+              <a:rPr lang="en-US" sz="4000" b="1" dirty="0">
+                <a:solidFill>
+                  <a:srgbClr val="0F172A"/>
+                </a:solidFill>
+                <a:latin typeface="Inter" pitchFamily="34" charset="0"/>
+                <a:ea typeface="Inter" pitchFamily="34" charset="-122"/>
+                <a:cs typeface="Inter" pitchFamily="34" charset="-120"/>
+              </a:rPr>
+              <a:t>Tips &amp; if something breaks</a:t>
+            </a:r>
+            <a:endParaRPr lang="en-US" sz="4000" dirty="0"/>
+          </a:p>
+        </p:txBody>
+      </p:sp>
+      <p:sp>
+        <p:nvSpPr>
+          <p:cNvPr id="6" name="Shape 3"/>
+          <p:cNvSpPr/>
+          <p:nvPr/>
+        </p:nvSpPr>
+        <p:spPr>
+          <a:xfrm>
+            <a:off x="548640" y="1828800"/>
+            <a:ext cx="5486400" cy="3931920"/>
+          </a:xfrm>
+          <a:prstGeom prst="rect">
+            <a:avLst/>
+          </a:prstGeom>
+          <a:solidFill>
+            <a:srgbClr val="FFFFFF"/>
+          </a:solidFill>
+          <a:ln w="9525">
+            <a:solidFill>
+              <a:srgbClr val="E2E8F0"/>
+            </a:solidFill>
+            <a:prstDash val="solid"/>
+          </a:ln>
+          <a:effectLst>
+            <a:outerShdw sx="100000" sy="100000" kx="0" ky="0" algn="bl" rotWithShape="0" blurRad="76200" dist="12700" dir="5400000">
+              <a:srgbClr val="94A3B8">
+                <a:alpha val="12000"/>
+              </a:srgbClr>
+            </a:outerShdw>
+          </a:effectLst>
+        </p:spPr>
+      </p:sp>
+      <p:sp>
+        <p:nvSpPr>
+          <p:cNvPr id="7" name="Shape 4"/>
+          <p:cNvSpPr/>
+          <p:nvPr/>
+        </p:nvSpPr>
+        <p:spPr>
+          <a:xfrm>
+            <a:off x="548640" y="1828800"/>
+            <a:ext cx="73152" cy="3931920"/>
+          </a:xfrm>
+          <a:prstGeom prst="rect">
+            <a:avLst/>
+          </a:prstGeom>
+          <a:solidFill>
+            <a:srgbClr val="2196F3"/>
+          </a:solidFill>
+          <a:ln/>
+        </p:spPr>
+      </p:sp>
+      <p:sp>
+        <p:nvSpPr>
+          <p:cNvPr id="8" name="Text 5"/>
+          <p:cNvSpPr/>
+          <p:nvPr/>
+        </p:nvSpPr>
+        <p:spPr>
+          <a:xfrm>
+            <a:off x="749808" y="1993392"/>
+            <a:ext cx="5166360" cy="594360"/>
+          </a:xfrm>
+          <a:prstGeom prst="rect">
+            <a:avLst/>
+          </a:prstGeom>
+          <a:noFill/>
+          <a:ln/>
+        </p:spPr>
+        <p:txBody>
+          <a:bodyPr wrap="square" lIns="0" tIns="0" rIns="0" bIns="0" rtlCol="0" anchor="ctr"/>
+          <a:lstStyle/>
+          <a:p>
+            <a:pPr indent="0" marL="0">
+              <a:buNone/>
+            </a:pPr>
+            <a:r>
+              <a:rPr lang="en-US" sz="2200" b="1" dirty="0">
+                <a:solidFill>
+                  <a:srgbClr val="0F172A"/>
+                </a:solidFill>
+                <a:latin typeface="Inter" pitchFamily="34" charset="0"/>
+                <a:ea typeface="Inter" pitchFamily="34" charset="-122"/>
+                <a:cs typeface="Inter" pitchFamily="34" charset="-120"/>
+              </a:rPr>
+              <a:t>Tips</a:t>
+            </a:r>
+            <a:endParaRPr lang="en-US" sz="2200" dirty="0"/>
+          </a:p>
+        </p:txBody>
+      </p:sp>
+      <p:sp>
+        <p:nvSpPr>
+          <p:cNvPr id="9" name="Text 6"/>
+          <p:cNvSpPr/>
+          <p:nvPr/>
+        </p:nvSpPr>
+        <p:spPr>
+          <a:xfrm>
+            <a:off x="777240" y="2697480"/>
+            <a:ext cx="5074920" cy="2926080"/>
           </a:xfrm>
           <a:prstGeom prst="rect">
             <a:avLst/>
@@ -7527,7 +10128,7 @@
                 <a:ea typeface="Inter" pitchFamily="34" charset="-122"/>
                 <a:cs typeface="Inter" pitchFamily="34" charset="-120"/>
               </a:rPr>
-              <a:t>Calendar sync to iCal: use https://www.google.com/calendar/syncselect to tick the shared calendar.</a:t>
+              <a:t>Use the ✨ Catch-up before a 1:1 — paste it into the meeting notes.</a:t>
             </a:r>
             <a:endParaRPr lang="en-US" sz="1800" dirty="0"/>
           </a:p>
@@ -7548,7 +10149,7 @@
                 <a:ea typeface="Inter" pitchFamily="34" charset="-122"/>
                 <a:cs typeface="Inter" pitchFamily="34" charset="-120"/>
               </a:rPr>
-              <a:t>If push to Google fails → ‘Sync calendar’ from the student profile retries ACL grants.</a:t>
+              <a:t>Filter by group when you discuss a specific work-package.</a:t>
             </a:r>
             <a:endParaRPr lang="en-US" sz="1800" dirty="0"/>
           </a:p>
@@ -7569,7 +10170,7 @@
                 <a:ea typeface="Inter" pitchFamily="34" charset="-122"/>
                 <a:cs typeface="Inter" pitchFamily="34" charset="-120"/>
               </a:rPr>
-              <a:t>Stale data → reload (polls reconcile within 8s).</a:t>
+              <a:t>Comment on a task for nudges; chat for back-and-forth.</a:t>
             </a:r>
             <a:endParaRPr lang="en-US" sz="1800" dirty="0"/>
           </a:p>
@@ -7590,7 +10191,7 @@
                 <a:ea typeface="Inter" pitchFamily="34" charset="-122"/>
                 <a:cs typeface="Inter" pitchFamily="34" charset="-120"/>
               </a:rPr>
-              <a:t>Bug? Feedback module, attach a screenshot.</a:t>
+              <a:t>Run the admin Backfill missing team channels once after this release.</a:t>
             </a:r>
             <a:endParaRPr lang="en-US" sz="1800" dirty="0"/>
           </a:p>
@@ -7598,25 +10199,222 @@
       </p:sp>
       <p:sp>
         <p:nvSpPr>
-          <p:cNvPr id="14" name="Shape 11"/>
-          <p:cNvSpPr/>
-          <p:nvPr/>
-        </p:nvSpPr>
-        <p:spPr>
-          <a:xfrm>
-            <a:off x="548640" y="6355080"/>
-            <a:ext cx="11094415" cy="0"/>
-          </a:xfrm>
-          <a:prstGeom prst="line">
-            <a:avLst/>
-          </a:prstGeom>
-          <a:noFill/>
+          <p:cNvPr id="10" name="Shape 7"/>
+          <p:cNvSpPr/>
+          <p:nvPr/>
+        </p:nvSpPr>
+        <p:spPr>
+          <a:xfrm>
+            <a:off x="6400800" y="1828800"/>
+            <a:ext cx="5242255" cy="3931920"/>
+          </a:xfrm>
+          <a:prstGeom prst="rect">
+            <a:avLst/>
+          </a:prstGeom>
+          <a:solidFill>
+            <a:srgbClr val="FFFFFF"/>
+          </a:solidFill>
           <a:ln w="9525">
             <a:solidFill>
               <a:srgbClr val="E2E8F0"/>
             </a:solidFill>
             <a:prstDash val="solid"/>
           </a:ln>
+          <a:effectLst>
+            <a:outerShdw sx="100000" sy="100000" kx="0" ky="0" algn="bl" rotWithShape="0" blurRad="76200" dist="12700" dir="5400000">
+              <a:srgbClr val="94A3B8">
+                <a:alpha val="12000"/>
+              </a:srgbClr>
+            </a:outerShdw>
+          </a:effectLst>
+        </p:spPr>
+      </p:sp>
+      <p:sp>
+        <p:nvSpPr>
+          <p:cNvPr id="11" name="Shape 8"/>
+          <p:cNvSpPr/>
+          <p:nvPr/>
+        </p:nvSpPr>
+        <p:spPr>
+          <a:xfrm>
+            <a:off x="6400800" y="1828800"/>
+            <a:ext cx="73152" cy="3931920"/>
+          </a:xfrm>
+          <a:prstGeom prst="rect">
+            <a:avLst/>
+          </a:prstGeom>
+          <a:solidFill>
+            <a:srgbClr val="E2445C"/>
+          </a:solidFill>
+          <a:ln/>
+        </p:spPr>
+      </p:sp>
+      <p:sp>
+        <p:nvSpPr>
+          <p:cNvPr id="12" name="Text 9"/>
+          <p:cNvSpPr/>
+          <p:nvPr/>
+        </p:nvSpPr>
+        <p:spPr>
+          <a:xfrm>
+            <a:off x="6601968" y="1993392"/>
+            <a:ext cx="4922215" cy="594360"/>
+          </a:xfrm>
+          <a:prstGeom prst="rect">
+            <a:avLst/>
+          </a:prstGeom>
+          <a:noFill/>
+          <a:ln/>
+        </p:spPr>
+        <p:txBody>
+          <a:bodyPr wrap="square" lIns="0" tIns="0" rIns="0" bIns="0" rtlCol="0" anchor="ctr"/>
+          <a:lstStyle/>
+          <a:p>
+            <a:pPr indent="0" marL="0">
+              <a:buNone/>
+            </a:pPr>
+            <a:r>
+              <a:rPr lang="en-US" sz="2200" b="1" dirty="0">
+                <a:solidFill>
+                  <a:srgbClr val="0F172A"/>
+                </a:solidFill>
+                <a:latin typeface="Inter" pitchFamily="34" charset="0"/>
+                <a:ea typeface="Inter" pitchFamily="34" charset="-122"/>
+                <a:cs typeface="Inter" pitchFamily="34" charset="-120"/>
+              </a:rPr>
+              <a:t>Troubleshooting</a:t>
+            </a:r>
+            <a:endParaRPr lang="en-US" sz="2200" dirty="0"/>
+          </a:p>
+        </p:txBody>
+      </p:sp>
+      <p:sp>
+        <p:nvSpPr>
+          <p:cNvPr id="13" name="Text 10"/>
+          <p:cNvSpPr/>
+          <p:nvPr/>
+        </p:nvSpPr>
+        <p:spPr>
+          <a:xfrm>
+            <a:off x="6629400" y="2697480"/>
+            <a:ext cx="4876495" cy="2926080"/>
+          </a:xfrm>
+          <a:prstGeom prst="rect">
+            <a:avLst/>
+          </a:prstGeom>
+          <a:noFill/>
+          <a:ln/>
+        </p:spPr>
+        <p:txBody>
+          <a:bodyPr wrap="square" lIns="0" tIns="0" rIns="0" bIns="0" rtlCol="0" anchor="t"/>
+          <a:lstStyle/>
+          <a:p>
+            <a:pPr marL="342900" indent="-342900">
+              <a:spcAft>
+                <a:spcPts val="600"/>
+              </a:spcAft>
+              <a:buSzPct val="100000"/>
+              <a:buChar char="•"/>
+            </a:pPr>
+            <a:r>
+              <a:rPr lang="en-US" sz="1800" dirty="0">
+                <a:solidFill>
+                  <a:srgbClr val="334155"/>
+                </a:solidFill>
+                <a:latin typeface="Inter" pitchFamily="34" charset="0"/>
+                <a:ea typeface="Inter" pitchFamily="34" charset="-122"/>
+                <a:cs typeface="Inter" pitchFamily="34" charset="-120"/>
+              </a:rPr>
+              <a:t>Calendar sync to iCal: use https://www.google.com/calendar/syncselect to tick the shared calendar.</a:t>
+            </a:r>
+            <a:endParaRPr lang="en-US" sz="1800" dirty="0"/>
+          </a:p>
+          <a:p>
+            <a:pPr marL="342900" indent="-342900">
+              <a:spcAft>
+                <a:spcPts val="600"/>
+              </a:spcAft>
+              <a:buSzPct val="100000"/>
+              <a:buChar char="•"/>
+            </a:pPr>
+            <a:r>
+              <a:rPr lang="en-US" sz="1800" dirty="0">
+                <a:solidFill>
+                  <a:srgbClr val="334155"/>
+                </a:solidFill>
+                <a:latin typeface="Inter" pitchFamily="34" charset="0"/>
+                <a:ea typeface="Inter" pitchFamily="34" charset="-122"/>
+                <a:cs typeface="Inter" pitchFamily="34" charset="-120"/>
+              </a:rPr>
+              <a:t>If push to Google fails → ‘Sync calendar’ from the student profile retries ACL grants.</a:t>
+            </a:r>
+            <a:endParaRPr lang="en-US" sz="1800" dirty="0"/>
+          </a:p>
+          <a:p>
+            <a:pPr marL="342900" indent="-342900">
+              <a:spcAft>
+                <a:spcPts val="600"/>
+              </a:spcAft>
+              <a:buSzPct val="100000"/>
+              <a:buChar char="•"/>
+            </a:pPr>
+            <a:r>
+              <a:rPr lang="en-US" sz="1800" dirty="0">
+                <a:solidFill>
+                  <a:srgbClr val="334155"/>
+                </a:solidFill>
+                <a:latin typeface="Inter" pitchFamily="34" charset="0"/>
+                <a:ea typeface="Inter" pitchFamily="34" charset="-122"/>
+                <a:cs typeface="Inter" pitchFamily="34" charset="-120"/>
+              </a:rPr>
+              <a:t>Stale data → reload (polls reconcile within 8s).</a:t>
+            </a:r>
+            <a:endParaRPr lang="en-US" sz="1800" dirty="0"/>
+          </a:p>
+          <a:p>
+            <a:pPr marL="342900" indent="-342900">
+              <a:spcAft>
+                <a:spcPts val="600"/>
+              </a:spcAft>
+              <a:buSzPct val="100000"/>
+              <a:buChar char="•"/>
+            </a:pPr>
+            <a:r>
+              <a:rPr lang="en-US" sz="1800" dirty="0">
+                <a:solidFill>
+                  <a:srgbClr val="334155"/>
+                </a:solidFill>
+                <a:latin typeface="Inter" pitchFamily="34" charset="0"/>
+                <a:ea typeface="Inter" pitchFamily="34" charset="-122"/>
+                <a:cs typeface="Inter" pitchFamily="34" charset="-120"/>
+              </a:rPr>
+              <a:t>Bug? Feedback module, attach a screenshot.</a:t>
+            </a:r>
+            <a:endParaRPr lang="en-US" sz="1800" dirty="0"/>
+          </a:p>
+        </p:txBody>
+      </p:sp>
+      <p:sp>
+        <p:nvSpPr>
+          <p:cNvPr id="14" name="Shape 11"/>
+          <p:cNvSpPr/>
+          <p:nvPr/>
+        </p:nvSpPr>
+        <p:spPr>
+          <a:xfrm>
+            <a:off x="548640" y="6355080"/>
+            <a:ext cx="11094415" cy="0"/>
+          </a:xfrm>
+          <a:prstGeom prst="line">
+            <a:avLst/>
+          </a:prstGeom>
+          <a:noFill/>
+          <a:ln w="9525">
+            <a:solidFill>
+              <a:srgbClr val="E2E8F0"/>
+            </a:solidFill>
+            <a:prstDash val="solid"/>
+          </a:ln>
         </p:spPr>
       </p:sp>
       <p:sp>
@@ -7691,7 +10489,7 @@
                 <a:ea typeface="Inter" pitchFamily="34" charset="-122"/>
                 <a:cs typeface="Inter" pitchFamily="34" charset="-120"/>
               </a:rPr>
-              <a:t>17 / 17</a:t>
+              <a:t>19 / 19</a:t>
             </a:r>
             <a:endParaRPr lang="en-US" sz="1300" dirty="0"/>
           </a:p>
@@ -9051,7 +11849,7 @@
                 <a:ea typeface="Inter" pitchFamily="34" charset="-122"/>
                 <a:cs typeface="Inter" pitchFamily="34" charset="-120"/>
               </a:rPr>
-              <a:t>2 / 17</a:t>
+              <a:t>2 / 19</a:t>
             </a:r>
             <a:endParaRPr lang="en-US" sz="1300" dirty="0"/>
           </a:p>
@@ -10145,7 +12943,7 @@
                 <a:ea typeface="Inter" pitchFamily="34" charset="-122"/>
                 <a:cs typeface="Inter" pitchFamily="34" charset="-120"/>
               </a:rPr>
-              <a:t>3 / 17</a:t>
+              <a:t>3 / 19</a:t>
             </a:r>
             <a:endParaRPr lang="en-US" sz="1300" dirty="0"/>
           </a:p>
@@ -10775,7 +13573,7 @@
                 <a:ea typeface="Inter" pitchFamily="34" charset="-122"/>
                 <a:cs typeface="Inter" pitchFamily="34" charset="-120"/>
               </a:rPr>
-              <a:t>4 / 17</a:t>
+              <a:t>4 / 19</a:t>
             </a:r>
             <a:endParaRPr lang="en-US" sz="1300" dirty="0"/>
           </a:p>
@@ -11465,7 +14263,7 @@
                 <a:ea typeface="Inter" pitchFamily="34" charset="-122"/>
                 <a:cs typeface="Inter" pitchFamily="34" charset="-120"/>
               </a:rPr>
-              <a:t>5 / 17</a:t>
+              <a:t>5 / 19</a:t>
             </a:r>
             <a:endParaRPr lang="en-US" sz="1300" dirty="0"/>
           </a:p>
@@ -12116,7 +14914,7 @@
                 <a:ea typeface="Inter" pitchFamily="34" charset="-122"/>
                 <a:cs typeface="Inter" pitchFamily="34" charset="-120"/>
               </a:rPr>
-              <a:t>6 / 17</a:t>
+              <a:t>6 / 19</a:t>
             </a:r>
             <a:endParaRPr lang="en-US" sz="1300" dirty="0"/>
           </a:p>
@@ -13066,7 +15864,7 @@
                 <a:ea typeface="Inter" pitchFamily="34" charset="-122"/>
                 <a:cs typeface="Inter" pitchFamily="34" charset="-120"/>
               </a:rPr>
-              <a:t>7 / 17</a:t>
+              <a:t>7 / 19</a:t>
             </a:r>
             <a:endParaRPr lang="en-US" sz="1300" dirty="0"/>
           </a:p>
@@ -13851,7 +16649,7 @@
                 <a:ea typeface="Inter" pitchFamily="34" charset="-122"/>
                 <a:cs typeface="Inter" pitchFamily="34" charset="-120"/>
               </a:rPr>
-              <a:t>8 / 17</a:t>
+              <a:t>8 / 19</a:t>
             </a:r>
             <a:endParaRPr lang="en-US" sz="1300" dirty="0"/>
           </a:p>
@@ -14481,7 +17279,7 @@
                 <a:ea typeface="Inter" pitchFamily="34" charset="-122"/>
                 <a:cs typeface="Inter" pitchFamily="34" charset="-120"/>
               </a:rPr>
-              <a:t>9 / 17</a:t>
+              <a:t>9 / 19</a:t>
             </a:r>
             <a:endParaRPr lang="en-US" sz="1300" dirty="0"/>
           </a:p>

--- a/docs/PhDapp_Supervisor_Overview.pptx
+++ b/docs/PhDapp_Supervisor_Overview.pptx
@@ -2785,16 +2785,16 @@
         <p:spPr>
           <a:xfrm>
             <a:off x="1261872" y="749808"/>
-            <a:ext cx="10381183" cy="713232"/>
-          </a:xfrm>
-          <a:prstGeom prst="rect">
-            <a:avLst/>
-          </a:prstGeom>
-          <a:noFill/>
-          <a:ln/>
-        </p:spPr>
-        <p:txBody>
-          <a:bodyPr wrap="square" lIns="0" tIns="0" rIns="0" bIns="0" rtlCol="0" anchor="ctr"/>
+            <a:ext cx="10381183" cy="777240"/>
+          </a:xfrm>
+          <a:prstGeom prst="rect">
+            <a:avLst/>
+          </a:prstGeom>
+          <a:noFill/>
+          <a:ln/>
+        </p:spPr>
+        <p:txBody>
+          <a:bodyPr wrap="square" lIns="0" tIns="0" rIns="0" bIns="0" rtlCol="0" anchor="t"/>
           <a:lstStyle/>
           <a:p>
             <a:pPr indent="0" marL="0">
@@ -3436,16 +3436,16 @@
         <p:spPr>
           <a:xfrm>
             <a:off x="1261872" y="749808"/>
-            <a:ext cx="10381183" cy="713232"/>
-          </a:xfrm>
-          <a:prstGeom prst="rect">
-            <a:avLst/>
-          </a:prstGeom>
-          <a:noFill/>
-          <a:ln/>
-        </p:spPr>
-        <p:txBody>
-          <a:bodyPr wrap="square" lIns="0" tIns="0" rIns="0" bIns="0" rtlCol="0" anchor="ctr"/>
+            <a:ext cx="10381183" cy="777240"/>
+          </a:xfrm>
+          <a:prstGeom prst="rect">
+            <a:avLst/>
+          </a:prstGeom>
+          <a:noFill/>
+          <a:ln/>
+        </p:spPr>
+        <p:txBody>
+          <a:bodyPr wrap="square" lIns="0" tIns="0" rIns="0" bIns="0" rtlCol="0" anchor="t"/>
           <a:lstStyle/>
           <a:p>
             <a:pPr indent="0" marL="0">
@@ -4066,16 +4066,16 @@
         <p:spPr>
           <a:xfrm>
             <a:off x="1261872" y="749808"/>
-            <a:ext cx="10381183" cy="713232"/>
-          </a:xfrm>
-          <a:prstGeom prst="rect">
-            <a:avLst/>
-          </a:prstGeom>
-          <a:noFill/>
-          <a:ln/>
-        </p:spPr>
-        <p:txBody>
-          <a:bodyPr wrap="square" lIns="0" tIns="0" rIns="0" bIns="0" rtlCol="0" anchor="ctr"/>
+            <a:ext cx="10381183" cy="777240"/>
+          </a:xfrm>
+          <a:prstGeom prst="rect">
+            <a:avLst/>
+          </a:prstGeom>
+          <a:noFill/>
+          <a:ln/>
+        </p:spPr>
+        <p:txBody>
+          <a:bodyPr wrap="square" lIns="0" tIns="0" rIns="0" bIns="0" rtlCol="0" anchor="t"/>
           <a:lstStyle/>
           <a:p>
             <a:pPr indent="0" marL="0">
@@ -4675,16 +4675,16 @@
         <p:spPr>
           <a:xfrm>
             <a:off x="1261872" y="749808"/>
-            <a:ext cx="10381183" cy="713232"/>
-          </a:xfrm>
-          <a:prstGeom prst="rect">
-            <a:avLst/>
-          </a:prstGeom>
-          <a:noFill/>
-          <a:ln/>
-        </p:spPr>
-        <p:txBody>
-          <a:bodyPr wrap="square" lIns="0" tIns="0" rIns="0" bIns="0" rtlCol="0" anchor="ctr"/>
+            <a:ext cx="10381183" cy="777240"/>
+          </a:xfrm>
+          <a:prstGeom prst="rect">
+            <a:avLst/>
+          </a:prstGeom>
+          <a:noFill/>
+          <a:ln/>
+        </p:spPr>
+        <p:txBody>
+          <a:bodyPr wrap="square" lIns="0" tIns="0" rIns="0" bIns="0" rtlCol="0" anchor="t"/>
           <a:lstStyle/>
           <a:p>
             <a:pPr indent="0" marL="0">
@@ -5305,16 +5305,16 @@
         <p:spPr>
           <a:xfrm>
             <a:off x="1261872" y="749808"/>
-            <a:ext cx="10381183" cy="713232"/>
-          </a:xfrm>
-          <a:prstGeom prst="rect">
-            <a:avLst/>
-          </a:prstGeom>
-          <a:noFill/>
-          <a:ln/>
-        </p:spPr>
-        <p:txBody>
-          <a:bodyPr wrap="square" lIns="0" tIns="0" rIns="0" bIns="0" rtlCol="0" anchor="ctr"/>
+            <a:ext cx="10381183" cy="777240"/>
+          </a:xfrm>
+          <a:prstGeom prst="rect">
+            <a:avLst/>
+          </a:prstGeom>
+          <a:noFill/>
+          <a:ln/>
+        </p:spPr>
+        <p:txBody>
+          <a:bodyPr wrap="square" lIns="0" tIns="0" rIns="0" bIns="0" rtlCol="0" anchor="t"/>
           <a:lstStyle/>
           <a:p>
             <a:pPr indent="0" marL="0">
@@ -6090,16 +6090,16 @@
         <p:spPr>
           <a:xfrm>
             <a:off x="1261872" y="749808"/>
-            <a:ext cx="10381183" cy="713232"/>
-          </a:xfrm>
-          <a:prstGeom prst="rect">
-            <a:avLst/>
-          </a:prstGeom>
-          <a:noFill/>
-          <a:ln/>
-        </p:spPr>
-        <p:txBody>
-          <a:bodyPr wrap="square" lIns="0" tIns="0" rIns="0" bIns="0" rtlCol="0" anchor="ctr"/>
+            <a:ext cx="10381183" cy="777240"/>
+          </a:xfrm>
+          <a:prstGeom prst="rect">
+            <a:avLst/>
+          </a:prstGeom>
+          <a:noFill/>
+          <a:ln/>
+        </p:spPr>
+        <p:txBody>
+          <a:bodyPr wrap="square" lIns="0" tIns="0" rIns="0" bIns="0" rtlCol="0" anchor="t"/>
           <a:lstStyle/>
           <a:p>
             <a:pPr indent="0" marL="0">
@@ -6720,16 +6720,16 @@
         <p:spPr>
           <a:xfrm>
             <a:off x="1261872" y="749808"/>
-            <a:ext cx="10381183" cy="713232"/>
-          </a:xfrm>
-          <a:prstGeom prst="rect">
-            <a:avLst/>
-          </a:prstGeom>
-          <a:noFill/>
-          <a:ln/>
-        </p:spPr>
-        <p:txBody>
-          <a:bodyPr wrap="square" lIns="0" tIns="0" rIns="0" bIns="0" rtlCol="0" anchor="ctr"/>
+            <a:ext cx="10381183" cy="777240"/>
+          </a:xfrm>
+          <a:prstGeom prst="rect">
+            <a:avLst/>
+          </a:prstGeom>
+          <a:noFill/>
+          <a:ln/>
+        </p:spPr>
+        <p:txBody>
+          <a:bodyPr wrap="square" lIns="0" tIns="0" rIns="0" bIns="0" rtlCol="0" anchor="t"/>
           <a:lstStyle/>
           <a:p>
             <a:pPr indent="0" marL="0">
@@ -7350,16 +7350,16 @@
         <p:spPr>
           <a:xfrm>
             <a:off x="1261872" y="749808"/>
-            <a:ext cx="10381183" cy="713232"/>
-          </a:xfrm>
-          <a:prstGeom prst="rect">
-            <a:avLst/>
-          </a:prstGeom>
-          <a:noFill/>
-          <a:ln/>
-        </p:spPr>
-        <p:txBody>
-          <a:bodyPr wrap="square" lIns="0" tIns="0" rIns="0" bIns="0" rtlCol="0" anchor="ctr"/>
+            <a:ext cx="10381183" cy="777240"/>
+          </a:xfrm>
+          <a:prstGeom prst="rect">
+            <a:avLst/>
+          </a:prstGeom>
+          <a:noFill/>
+          <a:ln/>
+        </p:spPr>
+        <p:txBody>
+          <a:bodyPr wrap="square" lIns="0" tIns="0" rIns="0" bIns="0" rtlCol="0" anchor="t"/>
           <a:lstStyle/>
           <a:p>
             <a:pPr indent="0" marL="0">
@@ -8660,16 +8660,16 @@
         <p:spPr>
           <a:xfrm>
             <a:off x="1261872" y="749808"/>
-            <a:ext cx="10381183" cy="713232"/>
-          </a:xfrm>
-          <a:prstGeom prst="rect">
-            <a:avLst/>
-          </a:prstGeom>
-          <a:noFill/>
-          <a:ln/>
-        </p:spPr>
-        <p:txBody>
-          <a:bodyPr wrap="square" lIns="0" tIns="0" rIns="0" bIns="0" rtlCol="0" anchor="ctr"/>
+            <a:ext cx="10381183" cy="777240"/>
+          </a:xfrm>
+          <a:prstGeom prst="rect">
+            <a:avLst/>
+          </a:prstGeom>
+          <a:noFill/>
+          <a:ln/>
+        </p:spPr>
+        <p:txBody>
+          <a:bodyPr wrap="square" lIns="0" tIns="0" rIns="0" bIns="0" rtlCol="0" anchor="t"/>
           <a:lstStyle/>
           <a:p>
             <a:pPr indent="0" marL="0">
@@ -9970,16 +9970,16 @@
         <p:spPr>
           <a:xfrm>
             <a:off x="1261872" y="749808"/>
-            <a:ext cx="10381183" cy="713232"/>
-          </a:xfrm>
-          <a:prstGeom prst="rect">
-            <a:avLst/>
-          </a:prstGeom>
-          <a:noFill/>
-          <a:ln/>
-        </p:spPr>
-        <p:txBody>
-          <a:bodyPr wrap="square" lIns="0" tIns="0" rIns="0" bIns="0" rtlCol="0" anchor="ctr"/>
+            <a:ext cx="10381183" cy="777240"/>
+          </a:xfrm>
+          <a:prstGeom prst="rect">
+            <a:avLst/>
+          </a:prstGeom>
+          <a:noFill/>
+          <a:ln/>
+        </p:spPr>
+        <p:txBody>
+          <a:bodyPr wrap="square" lIns="0" tIns="0" rIns="0" bIns="0" rtlCol="0" anchor="t"/>
           <a:lstStyle/>
           <a:p>
             <a:pPr indent="0" marL="0">
@@ -10621,16 +10621,16 @@
         <p:spPr>
           <a:xfrm>
             <a:off x="1261872" y="749808"/>
-            <a:ext cx="10381183" cy="713232"/>
-          </a:xfrm>
-          <a:prstGeom prst="rect">
-            <a:avLst/>
-          </a:prstGeom>
-          <a:noFill/>
-          <a:ln/>
-        </p:spPr>
-        <p:txBody>
-          <a:bodyPr wrap="square" lIns="0" tIns="0" rIns="0" bIns="0" rtlCol="0" anchor="ctr"/>
+            <a:ext cx="10381183" cy="777240"/>
+          </a:xfrm>
+          <a:prstGeom prst="rect">
+            <a:avLst/>
+          </a:prstGeom>
+          <a:noFill/>
+          <a:ln/>
+        </p:spPr>
+        <p:txBody>
+          <a:bodyPr wrap="square" lIns="0" tIns="0" rIns="0" bIns="0" rtlCol="0" anchor="t"/>
           <a:lstStyle/>
           <a:p>
             <a:pPr indent="0" marL="0">
@@ -11981,16 +11981,16 @@
         <p:spPr>
           <a:xfrm>
             <a:off x="1261872" y="749808"/>
-            <a:ext cx="10381183" cy="713232"/>
-          </a:xfrm>
-          <a:prstGeom prst="rect">
-            <a:avLst/>
-          </a:prstGeom>
-          <a:noFill/>
-          <a:ln/>
-        </p:spPr>
-        <p:txBody>
-          <a:bodyPr wrap="square" lIns="0" tIns="0" rIns="0" bIns="0" rtlCol="0" anchor="ctr"/>
+            <a:ext cx="10381183" cy="777240"/>
+          </a:xfrm>
+          <a:prstGeom prst="rect">
+            <a:avLst/>
+          </a:prstGeom>
+          <a:noFill/>
+          <a:ln/>
+        </p:spPr>
+        <p:txBody>
+          <a:bodyPr wrap="square" lIns="0" tIns="0" rIns="0" bIns="0" rtlCol="0" anchor="t"/>
           <a:lstStyle/>
           <a:p>
             <a:pPr indent="0" marL="0">
@@ -13075,16 +13075,16 @@
         <p:spPr>
           <a:xfrm>
             <a:off x="1261872" y="749808"/>
-            <a:ext cx="10381183" cy="713232"/>
-          </a:xfrm>
-          <a:prstGeom prst="rect">
-            <a:avLst/>
-          </a:prstGeom>
-          <a:noFill/>
-          <a:ln/>
-        </p:spPr>
-        <p:txBody>
-          <a:bodyPr wrap="square" lIns="0" tIns="0" rIns="0" bIns="0" rtlCol="0" anchor="ctr"/>
+            <a:ext cx="10381183" cy="777240"/>
+          </a:xfrm>
+          <a:prstGeom prst="rect">
+            <a:avLst/>
+          </a:prstGeom>
+          <a:noFill/>
+          <a:ln/>
+        </p:spPr>
+        <p:txBody>
+          <a:bodyPr wrap="square" lIns="0" tIns="0" rIns="0" bIns="0" rtlCol="0" anchor="t"/>
           <a:lstStyle/>
           <a:p>
             <a:pPr indent="0" marL="0">
@@ -13705,16 +13705,16 @@
         <p:spPr>
           <a:xfrm>
             <a:off x="1261872" y="749808"/>
-            <a:ext cx="10381183" cy="713232"/>
-          </a:xfrm>
-          <a:prstGeom prst="rect">
-            <a:avLst/>
-          </a:prstGeom>
-          <a:noFill/>
-          <a:ln/>
-        </p:spPr>
-        <p:txBody>
-          <a:bodyPr wrap="square" lIns="0" tIns="0" rIns="0" bIns="0" rtlCol="0" anchor="ctr"/>
+            <a:ext cx="10381183" cy="777240"/>
+          </a:xfrm>
+          <a:prstGeom prst="rect">
+            <a:avLst/>
+          </a:prstGeom>
+          <a:noFill/>
+          <a:ln/>
+        </p:spPr>
+        <p:txBody>
+          <a:bodyPr wrap="square" lIns="0" tIns="0" rIns="0" bIns="0" rtlCol="0" anchor="t"/>
           <a:lstStyle/>
           <a:p>
             <a:pPr indent="0" marL="0">
@@ -14395,16 +14395,16 @@
         <p:spPr>
           <a:xfrm>
             <a:off x="1261872" y="749808"/>
-            <a:ext cx="10381183" cy="713232"/>
-          </a:xfrm>
-          <a:prstGeom prst="rect">
-            <a:avLst/>
-          </a:prstGeom>
-          <a:noFill/>
-          <a:ln/>
-        </p:spPr>
-        <p:txBody>
-          <a:bodyPr wrap="square" lIns="0" tIns="0" rIns="0" bIns="0" rtlCol="0" anchor="ctr"/>
+            <a:ext cx="10381183" cy="777240"/>
+          </a:xfrm>
+          <a:prstGeom prst="rect">
+            <a:avLst/>
+          </a:prstGeom>
+          <a:noFill/>
+          <a:ln/>
+        </p:spPr>
+        <p:txBody>
+          <a:bodyPr wrap="square" lIns="0" tIns="0" rIns="0" bIns="0" rtlCol="0" anchor="t"/>
           <a:lstStyle/>
           <a:p>
             <a:pPr indent="0" marL="0">
@@ -15046,16 +15046,16 @@
         <p:spPr>
           <a:xfrm>
             <a:off x="1261872" y="749808"/>
-            <a:ext cx="10381183" cy="713232"/>
-          </a:xfrm>
-          <a:prstGeom prst="rect">
-            <a:avLst/>
-          </a:prstGeom>
-          <a:noFill/>
-          <a:ln/>
-        </p:spPr>
-        <p:txBody>
-          <a:bodyPr wrap="square" lIns="0" tIns="0" rIns="0" bIns="0" rtlCol="0" anchor="ctr"/>
+            <a:ext cx="10381183" cy="777240"/>
+          </a:xfrm>
+          <a:prstGeom prst="rect">
+            <a:avLst/>
+          </a:prstGeom>
+          <a:noFill/>
+          <a:ln/>
+        </p:spPr>
+        <p:txBody>
+          <a:bodyPr wrap="square" lIns="0" tIns="0" rIns="0" bIns="0" rtlCol="0" anchor="t"/>
           <a:lstStyle/>
           <a:p>
             <a:pPr indent="0" marL="0">
@@ -15524,7 +15524,7 @@
                 <a:ea typeface="Inter" pitchFamily="34" charset="-122"/>
                 <a:cs typeface="Inter" pitchFamily="34" charset="-120"/>
               </a:rPr>
-              <a:t>‘Individual tasks’ separates ungrouped.</a:t>
+              <a:t>📅 N badge: events linked to the task.</a:t>
             </a:r>
             <a:endParaRPr lang="en-US" sz="1800" dirty="0"/>
           </a:p>
@@ -15996,16 +15996,16 @@
         <p:spPr>
           <a:xfrm>
             <a:off x="1261872" y="749808"/>
-            <a:ext cx="10381183" cy="713232"/>
-          </a:xfrm>
-          <a:prstGeom prst="rect">
-            <a:avLst/>
-          </a:prstGeom>
-          <a:noFill/>
-          <a:ln/>
-        </p:spPr>
-        <p:txBody>
-          <a:bodyPr wrap="square" lIns="0" tIns="0" rIns="0" bIns="0" rtlCol="0" anchor="ctr"/>
+            <a:ext cx="10381183" cy="777240"/>
+          </a:xfrm>
+          <a:prstGeom prst="rect">
+            <a:avLst/>
+          </a:prstGeom>
+          <a:noFill/>
+          <a:ln/>
+        </p:spPr>
+        <p:txBody>
+          <a:bodyPr wrap="square" lIns="0" tIns="0" rIns="0" bIns="0" rtlCol="0" anchor="t"/>
           <a:lstStyle/>
           <a:p>
             <a:pPr indent="0" marL="0">
@@ -16781,16 +16781,16 @@
         <p:spPr>
           <a:xfrm>
             <a:off x="1261872" y="749808"/>
-            <a:ext cx="10381183" cy="713232"/>
-          </a:xfrm>
-          <a:prstGeom prst="rect">
-            <a:avLst/>
-          </a:prstGeom>
-          <a:noFill/>
-          <a:ln/>
-        </p:spPr>
-        <p:txBody>
-          <a:bodyPr wrap="square" lIns="0" tIns="0" rIns="0" bIns="0" rtlCol="0" anchor="ctr"/>
+            <a:ext cx="10381183" cy="777240"/>
+          </a:xfrm>
+          <a:prstGeom prst="rect">
+            <a:avLst/>
+          </a:prstGeom>
+          <a:noFill/>
+          <a:ln/>
+        </p:spPr>
+        <p:txBody>
+          <a:bodyPr wrap="square" lIns="0" tIns="0" rIns="0" bIns="0" rtlCol="0" anchor="t"/>
           <a:lstStyle/>
           <a:p>
             <a:pPr indent="0" marL="0">
@@ -16805,7 +16805,7 @@
                 <a:ea typeface="Inter" pitchFamily="34" charset="-122"/>
                 <a:cs typeface="Inter" pitchFamily="34" charset="-120"/>
               </a:rPr>
-              <a:t>Calendar · meetings, deadlines, availability</a:t>
+              <a:t>Calendar &amp; availability</a:t>
             </a:r>
             <a:endParaRPr lang="en-US" sz="4000" dirty="0"/>
           </a:p>
@@ -17002,6 +17002,27 @@
                 <a:ea typeface="Inter" pitchFamily="34" charset="-122"/>
                 <a:cs typeface="Inter" pitchFamily="34" charset="-120"/>
               </a:rPr>
+              <a:t>Threaded comments on every event (mirrors task comments).</a:t>
+            </a:r>
+            <a:endParaRPr lang="en-US" sz="1800" dirty="0"/>
+          </a:p>
+          <a:p>
+            <a:pPr marL="342900" indent="-342900">
+              <a:spcAft>
+                <a:spcPts val="600"/>
+              </a:spcAft>
+              <a:buSzPct val="100000"/>
+              <a:buChar char="•"/>
+            </a:pPr>
+            <a:r>
+              <a:rPr lang="en-US" sz="1800" dirty="0">
+                <a:solidFill>
+                  <a:srgbClr val="334155"/>
+                </a:solidFill>
+                <a:latin typeface="Inter" pitchFamily="34" charset="0"/>
+                <a:ea typeface="Inter" pitchFamily="34" charset="-122"/>
+                <a:cs typeface="Inter" pitchFamily="34" charset="-120"/>
+              </a:rPr>
               <a:t>Times are timezone-stable across edit/save.</a:t>
             </a:r>
             <a:endParaRPr lang="en-US" sz="1800" dirty="0"/>
@@ -17157,7 +17178,7 @@
                 <a:ea typeface="Inter" pitchFamily="34" charset="-122"/>
                 <a:cs typeface="Inter" pitchFamily="34" charset="-120"/>
               </a:rPr>
-              <a:t>Action items → tasks: one-click create tasks (priority/category set in the meeting panel).</a:t>
+              <a:t>Action items → tasks: one-click create tasks for the meeting's student.</a:t>
             </a:r>
             <a:endParaRPr lang="en-US" sz="1800" dirty="0"/>
           </a:p>

--- a/docs/PhDapp_Supervisor_Overview.pptx
+++ b/docs/PhDapp_Supervisor_Overview.pptx
@@ -6835,7 +6835,7 @@
                 <a:ea typeface="Inter" pitchFamily="34" charset="-122"/>
                 <a:cs typeface="Inter" pitchFamily="34" charset="-120"/>
               </a:rPr>
-              <a:t>Feedback</a:t>
+              <a:t>Feedback (threaded)</a:t>
             </a:r>
             <a:endParaRPr lang="en-US" sz="2200" dirty="0"/>
           </a:p>
@@ -6878,7 +6878,7 @@
                 <a:ea typeface="Inter" pitchFamily="34" charset="-122"/>
                 <a:cs typeface="Inter" pitchFamily="34" charset="-120"/>
               </a:rPr>
-              <a:t>Bug / Suggestion / Other, with an optional photo.</a:t>
+              <a:t>Bug / Suggestion / Other + optional photo.</a:t>
             </a:r>
             <a:endParaRPr lang="en-US" sz="1800" dirty="0"/>
           </a:p>
@@ -6899,7 +6899,7 @@
                 <a:ea typeface="Inter" pitchFamily="34" charset="-122"/>
                 <a:cs typeface="Inter" pitchFamily="34" charset="-120"/>
               </a:rPr>
-              <a:t>Status (Open / Planned / In progress / Done / Declined) + admin reply inline.</a:t>
+              <a:t>Status: Open / Planned / In progress / Done / Declined.</a:t>
             </a:r>
             <a:endParaRPr lang="en-US" sz="1800" dirty="0"/>
           </a:p>
@@ -6920,7 +6920,49 @@
                 <a:ea typeface="Inter" pitchFamily="34" charset="-122"/>
                 <a:cs typeface="Inter" pitchFamily="34" charset="-120"/>
               </a:rPr>
-              <a:t>Collapse old entries; it remembers your collapsed set.</a:t>
+              <a:t>Back-and-forth thread — submitter ↔ admin can reply each other.</a:t>
+            </a:r>
+            <a:endParaRPr lang="en-US" sz="1800" dirty="0"/>
+          </a:p>
+          <a:p>
+            <a:pPr marL="342900" indent="-342900">
+              <a:spcAft>
+                <a:spcPts val="600"/>
+              </a:spcAft>
+              <a:buSzPct val="100000"/>
+              <a:buChar char="•"/>
+            </a:pPr>
+            <a:r>
+              <a:rPr lang="en-US" sz="1800" dirty="0">
+                <a:solidFill>
+                  <a:srgbClr val="334155"/>
+                </a:solidFill>
+                <a:latin typeface="Inter" pitchFamily="34" charset="0"/>
+                <a:ea typeface="Inter" pitchFamily="34" charset="-122"/>
+                <a:cs typeface="Inter" pitchFamily="34" charset="-120"/>
+              </a:rPr>
+              <a:t>Sidebar badge + email on every new reply in your thread.</a:t>
+            </a:r>
+            <a:endParaRPr lang="en-US" sz="1800" dirty="0"/>
+          </a:p>
+          <a:p>
+            <a:pPr marL="342900" indent="-342900">
+              <a:spcAft>
+                <a:spcPts val="600"/>
+              </a:spcAft>
+              <a:buSzPct val="100000"/>
+              <a:buChar char="•"/>
+            </a:pPr>
+            <a:r>
+              <a:rPr lang="en-US" sz="1800" dirty="0">
+                <a:solidFill>
+                  <a:srgbClr val="334155"/>
+                </a:solidFill>
+                <a:latin typeface="Inter" pitchFamily="34" charset="0"/>
+                <a:ea typeface="Inter" pitchFamily="34" charset="-122"/>
+                <a:cs typeface="Inter" pitchFamily="34" charset="-120"/>
+              </a:rPr>
+              <a:t>Collapse old entries; remembered across visits.</a:t>
             </a:r>
             <a:endParaRPr lang="en-US" sz="1800" dirty="0"/>
           </a:p>
@@ -17002,7 +17044,7 @@
                 <a:ea typeface="Inter" pitchFamily="34" charset="-122"/>
                 <a:cs typeface="Inter" pitchFamily="34" charset="-120"/>
               </a:rPr>
-              <a:t>Threaded comments on every event (mirrors task comments).</a:t>
+              <a:t>Threaded comments + Links list on every event.</a:t>
             </a:r>
             <a:endParaRPr lang="en-US" sz="1800" dirty="0"/>
           </a:p>

--- a/docs/PhDapp_Supervisor_Overview.pptx
+++ b/docs/PhDapp_Supervisor_Overview.pptx
@@ -14098,7 +14098,7 @@
                 <a:ea typeface="Inter" pitchFamily="34" charset="-122"/>
                 <a:cs typeface="Inter" pitchFamily="34" charset="-120"/>
               </a:rPr>
-              <a:t>Supported links</a:t>
+              <a:t>Supported fields</a:t>
             </a:r>
             <a:endParaRPr lang="en-US" sz="2200" dirty="0"/>
           </a:p>
@@ -14141,7 +14141,7 @@
                 <a:ea typeface="Inter" pitchFamily="34" charset="-122"/>
                 <a:cs typeface="Inter" pitchFamily="34" charset="-120"/>
               </a:rPr>
-              <a:t>LinkedIn — paste a full URL or just the handle (e.g. ada-lovelace).</a:t>
+              <a:t>LinkedIn — full URL or just the handle.</a:t>
             </a:r>
             <a:endParaRPr lang="en-US" sz="1800" dirty="0"/>
           </a:p>
@@ -14162,7 +14162,7 @@
                 <a:ea typeface="Inter" pitchFamily="34" charset="-122"/>
                 <a:cs typeface="Inter" pitchFamily="34" charset="-120"/>
               </a:rPr>
-              <a:t>ORCID — the 0000-0000-0000-0000 id, or the orcid.org URL.</a:t>
+              <a:t>ORCID — the 0000-0000-0000-0000 id or full URL.</a:t>
             </a:r>
             <a:endParaRPr lang="en-US" sz="1800" dirty="0"/>
           </a:p>
@@ -14183,7 +14183,7 @@
                 <a:ea typeface="Inter" pitchFamily="34" charset="-122"/>
                 <a:cs typeface="Inter" pitchFamily="34" charset="-120"/>
               </a:rPr>
-              <a:t>Google Scholar — the citations URL, or just your Scholar user id.</a:t>
+              <a:t>Google Scholar — citations URL or just the user id.</a:t>
             </a:r>
             <a:endParaRPr lang="en-US" sz="1800" dirty="0"/>
           </a:p>
@@ -14204,7 +14204,28 @@
                 <a:ea typeface="Inter" pitchFamily="34" charset="-122"/>
                 <a:cs typeface="Inter" pitchFamily="34" charset="-120"/>
               </a:rPr>
-              <a:t>Personal website (students only) — any URL.</a:t>
+              <a:t>Personal website (students only).</a:t>
+            </a:r>
+            <a:endParaRPr lang="en-US" sz="1800" dirty="0"/>
+          </a:p>
+          <a:p>
+            <a:pPr marL="342900" indent="-342900">
+              <a:spcAft>
+                <a:spcPts val="600"/>
+              </a:spcAft>
+              <a:buSzPct val="100000"/>
+              <a:buChar char="•"/>
+            </a:pPr>
+            <a:r>
+              <a:rPr lang="en-US" sz="1800" dirty="0">
+                <a:solidFill>
+                  <a:srgbClr val="334155"/>
+                </a:solidFill>
+                <a:latin typeface="Inter" pitchFamily="34" charset="0"/>
+                <a:ea typeface="Inter" pitchFamily="34" charset="-122"/>
+                <a:cs typeface="Inter" pitchFamily="34" charset="-120"/>
+              </a:rPr>
+              <a:t>Alternate emails (info only — login stays Google).</a:t>
             </a:r>
             <a:endParaRPr lang="en-US" sz="1800" dirty="0"/>
           </a:p>
@@ -16505,7 +16526,7 @@
                 <a:ea typeface="Inter" pitchFamily="34" charset="-122"/>
                 <a:cs typeface="Inter" pitchFamily="34" charset="-120"/>
               </a:rPr>
-              <a:t>Groups &amp; filters</a:t>
+              <a:t>Visibility &amp; groups</a:t>
             </a:r>
             <a:endParaRPr lang="en-US" sz="2200" dirty="0"/>
           </a:p>
@@ -16548,7 +16569,7 @@
                 <a:ea typeface="Inter" pitchFamily="34" charset="-122"/>
                 <a:cs typeface="Inter" pitchFamily="34" charset="-120"/>
               </a:rPr>
-              <a:t>Group from List multi-select.</a:t>
+              <a:t>Student / Team-only / General — three visibility states.</a:t>
             </a:r>
             <a:endParaRPr lang="en-US" sz="1800" dirty="0"/>
           </a:p>
@@ -16569,7 +16590,7 @@
                 <a:ea typeface="Inter" pitchFamily="34" charset="-122"/>
                 <a:cs typeface="Inter" pitchFamily="34" charset="-120"/>
               </a:rPr>
-              <a:t>Or set a group from task detail.</a:t>
+              <a:t>Group from List multi-select (per-student).</a:t>
             </a:r>
             <a:endParaRPr lang="en-US" sz="1800" dirty="0"/>
           </a:p>
@@ -16590,7 +16611,7 @@
                 <a:ea typeface="Inter" pitchFamily="34" charset="-122"/>
                 <a:cs typeface="Inter" pitchFamily="34" charset="-120"/>
               </a:rPr>
-              <a:t>Filter board by group or Individual.</a:t>
+              <a:t>Filter by student, group, or visibility state.</a:t>
             </a:r>
             <a:endParaRPr lang="en-US" sz="1800" dirty="0"/>
           </a:p>

--- a/docs/PhDapp_Supervisor_Overview.pptx
+++ b/docs/PhDapp_Supervisor_Overview.pptx
@@ -16526,7 +16526,7 @@
                 <a:ea typeface="Inter" pitchFamily="34" charset="-122"/>
                 <a:cs typeface="Inter" pitchFamily="34" charset="-120"/>
               </a:rPr>
-              <a:t>Visibility &amp; groups</a:t>
+              <a:t>Groups &amp; filters</a:t>
             </a:r>
             <a:endParaRPr lang="en-US" sz="2200" dirty="0"/>
           </a:p>
@@ -16569,7 +16569,7 @@
                 <a:ea typeface="Inter" pitchFamily="34" charset="-122"/>
                 <a:cs typeface="Inter" pitchFamily="34" charset="-120"/>
               </a:rPr>
-              <a:t>Student / Team-only / General — three visibility states.</a:t>
+              <a:t>Group from List multi-select (per-student).</a:t>
             </a:r>
             <a:endParaRPr lang="en-US" sz="1800" dirty="0"/>
           </a:p>
@@ -16590,7 +16590,7 @@
                 <a:ea typeface="Inter" pitchFamily="34" charset="-122"/>
                 <a:cs typeface="Inter" pitchFamily="34" charset="-120"/>
               </a:rPr>
-              <a:t>Group from List multi-select (per-student).</a:t>
+              <a:t>Filter board by student or group.</a:t>
             </a:r>
             <a:endParaRPr lang="en-US" sz="1800" dirty="0"/>
           </a:p>
@@ -16611,7 +16611,7 @@
                 <a:ea typeface="Inter" pitchFamily="34" charset="-122"/>
                 <a:cs typeface="Inter" pitchFamily="34" charset="-120"/>
               </a:rPr>
-              <a:t>Filter by student, group, or visibility state.</a:t>
+              <a:t>Tasks are always student-scoped (no team / general).</a:t>
             </a:r>
             <a:endParaRPr lang="en-US" sz="1800" dirty="0"/>
           </a:p>

--- a/docs/PhDapp_Supervisor_Overview.pptx
+++ b/docs/PhDapp_Supervisor_Overview.pptx
@@ -17044,7 +17044,7 @@
                 <a:ea typeface="Inter" pitchFamily="34" charset="-122"/>
                 <a:cs typeface="Inter" pitchFamily="34" charset="-120"/>
               </a:rPr>
-              <a:t>Re-assign a student via Edit; ‘Related task’ peek-opens it.</a:t>
+              <a:t>Tasks AND sub-task deadlines auto-sync as all-day Google entries.</a:t>
             </a:r>
             <a:endParaRPr lang="en-US" sz="1800" dirty="0"/>
           </a:p>
@@ -17065,7 +17065,7 @@
                 <a:ea typeface="Inter" pitchFamily="34" charset="-122"/>
                 <a:cs typeface="Inter" pitchFamily="34" charset="-120"/>
               </a:rPr>
-              <a:t>Threaded comments + Links list on every event.</a:t>
+              <a:t>Week/Day view covers all 24h + all-day strip above hours.</a:t>
             </a:r>
             <a:endParaRPr lang="en-US" sz="1800" dirty="0"/>
           </a:p>
@@ -17086,7 +17086,7 @@
                 <a:ea typeface="Inter" pitchFamily="34" charset="-122"/>
                 <a:cs typeface="Inter" pitchFamily="34" charset="-120"/>
               </a:rPr>
-              <a:t>Times are timezone-stable across edit/save.</a:t>
+              <a:t>Admin → Maintenance → Calendar cleanup repairs legacy disparities.</a:t>
             </a:r>
             <a:endParaRPr lang="en-US" sz="1800" dirty="0"/>
           </a:p>

--- a/docs/PhDapp_Supervisor_Overview.pptx
+++ b/docs/PhDapp_Supervisor_Overview.pptx
@@ -13317,7 +13317,7 @@
                 <a:ea typeface="Inter" pitchFamily="34" charset="-122"/>
                 <a:cs typeface="Inter" pitchFamily="34" charset="-120"/>
               </a:rPr>
-              <a:t>Profile → Share Drive + Share calendar set up shared resources.</a:t>
+              <a:t>Profile → Share Drive + Share calendar set up shared resources (auto-shared with supervisors + team advisors; external advisors and committee excluded).</a:t>
             </a:r>
             <a:endParaRPr lang="en-US" sz="1800" dirty="0"/>
           </a:p>

--- a/docs/PhDapp_Supervisor_Overview.pptx
+++ b/docs/PhDapp_Supervisor_Overview.pptx
@@ -3203,7 +3203,7 @@
                 <a:ea typeface="Inter" pitchFamily="34" charset="-122"/>
                 <a:cs typeface="Inter" pitchFamily="34" charset="-120"/>
               </a:rPr>
-              <a:t>Configure notification sound + volume (⋮ → Notification sound).</a:t>
+              <a:t>Configure notification sound + volume (⋮ → Notification sound). 📊 Polls — Q + 2-10 options, single/multi-vote, optional close date; vote tallies + voter avatars visible. Author/admin can Edit/Close/Delete; question + options lock after first vote. URLs auto-link.</a:t>
             </a:r>
             <a:endParaRPr lang="en-US" sz="1800" dirty="0"/>
           </a:p>
@@ -17086,7 +17086,7 @@
                 <a:ea typeface="Inter" pitchFamily="34" charset="-122"/>
                 <a:cs typeface="Inter" pitchFamily="34" charset="-120"/>
               </a:rPr>
-              <a:t>Admin → Maintenance → Calendar cleanup repairs legacy disparities.</a:t>
+              <a:t>Admin → Maintenance → Calendar cleanup repairs legacy disparities. 🎉 Sevilla public holidays (incl. Corpus Christi) marked across Month/Week/Day/Year.</a:t>
             </a:r>
             <a:endParaRPr lang="en-US" sz="1800" dirty="0"/>
           </a:p>

--- a/docs/PhDapp_Supervisor_Overview.pptx
+++ b/docs/PhDapp_Supervisor_Overview.pptx
@@ -17262,7 +17262,7 @@
                 <a:ea typeface="Inter" pitchFamily="34" charset="-122"/>
                 <a:cs typeface="Inter" pitchFamily="34" charset="-120"/>
               </a:rPr>
-              <a:t>Mark yourself away via My availability — students see opaque ‘Unavailable’ blocks.</a:t>
+              <a:t>Mark yourself away (or your students mark themselves) via ⊘ My availability — optional time range and optional public reason, default ‘Unavailable’. Timed blocks draw as striped bands in Week/Day.</a:t>
             </a:r>
             <a:endParaRPr lang="en-US" sz="1800" dirty="0"/>
           </a:p>

--- a/docs/PhDapp_Supervisor_Overview.pptx
+++ b/docs/PhDapp_Supervisor_Overview.pptx
@@ -17262,7 +17262,7 @@
                 <a:ea typeface="Inter" pitchFamily="34" charset="-122"/>
                 <a:cs typeface="Inter" pitchFamily="34" charset="-120"/>
               </a:rPr>
-              <a:t>Mark yourself away (or your students mark themselves) via ⊘ My availability — optional time range and optional public reason, default ‘Unavailable’. Timed blocks draw as striped bands in Week/Day.</a:t>
+              <a:t>Anyone marks ⊘ availability or 🏠 Remote work (green) via My availability — optional time range and public reason. Timed blocks draw as striped bands in Week/Day. Click any chip → trash button on your own rows to delete inline.</a:t>
             </a:r>
             <a:endParaRPr lang="en-US" sz="1800" dirty="0"/>
           </a:p>

--- a/docs/PhDapp_Supervisor_Overview.pptx
+++ b/docs/PhDapp_Supervisor_Overview.pptx
@@ -15,6 +15,7 @@
     <p:sldId id="263" r:id="rId9"/>
     <p:sldId id="264" r:id="rId10"/>
     <p:sldId id="265" r:id="rId11"/>
+    <p:sldId id="275" r:id="rId26"/>
     <p:sldId id="266" r:id="rId12"/>
     <p:sldId id="267" r:id="rId13"/>
     <p:sldId id="268" r:id="rId14"/>
@@ -3304,7 +3305,7 @@
                 <a:ea typeface="Inter" pitchFamily="34" charset="-122"/>
                 <a:cs typeface="Inter" pitchFamily="34" charset="-120"/>
               </a:rPr>
-              <a:t>10 / 19</a:t>
+              <a:t>10 / 20</a:t>
             </a:r>
             <a:endParaRPr lang="en-US" sz="1300" dirty="0"/>
           </a:p>
@@ -3934,7 +3935,7 @@
                 <a:ea typeface="Inter" pitchFamily="34" charset="-122"/>
                 <a:cs typeface="Inter" pitchFamily="34" charset="-120"/>
               </a:rPr>
-              <a:t>11 / 19</a:t>
+              <a:t>12 / 20</a:t>
             </a:r>
             <a:endParaRPr lang="en-US" sz="1300" dirty="0"/>
           </a:p>
@@ -4543,7 +4544,7 @@
                 <a:ea typeface="Inter" pitchFamily="34" charset="-122"/>
                 <a:cs typeface="Inter" pitchFamily="34" charset="-120"/>
               </a:rPr>
-              <a:t>12 / 19</a:t>
+              <a:t>13 / 20</a:t>
             </a:r>
             <a:endParaRPr lang="en-US" sz="1300" dirty="0"/>
           </a:p>
@@ -5173,7 +5174,7 @@
                 <a:ea typeface="Inter" pitchFamily="34" charset="-122"/>
                 <a:cs typeface="Inter" pitchFamily="34" charset="-120"/>
               </a:rPr>
-              <a:t>13 / 19</a:t>
+              <a:t>14 / 20</a:t>
             </a:r>
             <a:endParaRPr lang="en-US" sz="1300" dirty="0"/>
           </a:p>
@@ -5958,7 +5959,7 @@
                 <a:ea typeface="Inter" pitchFamily="34" charset="-122"/>
                 <a:cs typeface="Inter" pitchFamily="34" charset="-120"/>
               </a:rPr>
-              <a:t>14 / 19</a:t>
+              <a:t>15 / 20</a:t>
             </a:r>
             <a:endParaRPr lang="en-US" sz="1300" dirty="0"/>
           </a:p>
@@ -6588,7 +6589,7 @@
                 <a:ea typeface="Inter" pitchFamily="34" charset="-122"/>
                 <a:cs typeface="Inter" pitchFamily="34" charset="-120"/>
               </a:rPr>
-              <a:t>15 / 19</a:t>
+              <a:t>16 / 20</a:t>
             </a:r>
             <a:endParaRPr lang="en-US" sz="1300" dirty="0"/>
           </a:p>
@@ -7260,7 +7261,7 @@
                 <a:ea typeface="Inter" pitchFamily="34" charset="-122"/>
                 <a:cs typeface="Inter" pitchFamily="34" charset="-120"/>
               </a:rPr>
-              <a:t>16 / 19</a:t>
+              <a:t>17 / 20</a:t>
             </a:r>
             <a:endParaRPr lang="en-US" sz="1300" dirty="0"/>
           </a:p>
@@ -8570,7 +8571,7 @@
                 <a:ea typeface="Inter" pitchFamily="34" charset="-122"/>
                 <a:cs typeface="Inter" pitchFamily="34" charset="-120"/>
               </a:rPr>
-              <a:t>17 / 19</a:t>
+              <a:t>18 / 20</a:t>
             </a:r>
             <a:endParaRPr lang="en-US" sz="1300" dirty="0"/>
           </a:p>
@@ -9880,7 +9881,7 @@
                 <a:ea typeface="Inter" pitchFamily="34" charset="-122"/>
                 <a:cs typeface="Inter" pitchFamily="34" charset="-120"/>
               </a:rPr>
-              <a:t>18 / 19</a:t>
+              <a:t>19 / 20</a:t>
             </a:r>
             <a:endParaRPr lang="en-US" sz="1300" dirty="0"/>
           </a:p>
@@ -10531,7 +10532,7 @@
                 <a:ea typeface="Inter" pitchFamily="34" charset="-122"/>
                 <a:cs typeface="Inter" pitchFamily="34" charset="-120"/>
               </a:rPr>
-              <a:t>19 / 19</a:t>
+              <a:t>20 / 20</a:t>
             </a:r>
             <a:endParaRPr lang="en-US" sz="1300" dirty="0"/>
           </a:p>
@@ -11891,7 +11892,670 @@
                 <a:ea typeface="Inter" pitchFamily="34" charset="-122"/>
                 <a:cs typeface="Inter" pitchFamily="34" charset="-120"/>
               </a:rPr>
-              <a:t>2 / 19</a:t>
+              <a:t>2 / 20</a:t>
+            </a:r>
+            <a:endParaRPr lang="en-US" sz="1300" dirty="0"/>
+          </a:p>
+        </p:txBody>
+      </p:sp>
+    </p:spTree>
+  </p:cSld>
+  <p:clrMapOvr>
+    <a:masterClrMapping/>
+  </p:clrMapOvr>
+</p:sld>
+</file>
+
+<file path=ppt/slides/slide20.xml><?xml version="1.0" encoding="utf-8"?>
+<p:sld xmlns:a="http://schemas.openxmlformats.org/drawingml/2006/main" xmlns:r="http://schemas.openxmlformats.org/officeDocument/2006/relationships" xmlns:p="http://schemas.openxmlformats.org/presentationml/2006/main">
+  <p:cSld name="Slide 10">
+    <p:bg>
+      <p:bgPr>
+        <a:solidFill>
+          <a:srgbClr val="FFFFFF"/>
+        </a:solidFill>
+      </p:bgPr>
+    </p:bg>
+    <p:spTree>
+      <p:nvGrpSpPr>
+        <p:cNvPr id="1" name=""/>
+        <p:cNvGrpSpPr/>
+        <p:nvPr/>
+      </p:nvGrpSpPr>
+      <p:grpSpPr>
+        <a:xfrm>
+          <a:off x="0" y="0"/>
+          <a:ext cx="0" cy="0"/>
+          <a:chOff x="0" y="0"/>
+          <a:chExt cx="0" cy="0"/>
+        </a:xfrm>
+      </p:grpSpPr>
+      <p:sp>
+        <p:nvSpPr>
+          <p:cNvPr id="2" name="Shape 0"/>
+          <p:cNvSpPr/>
+          <p:nvPr/>
+        </p:nvSpPr>
+        <p:spPr>
+          <a:xfrm>
+            <a:off x="548640" y="548640"/>
+            <a:ext cx="548640" cy="548640"/>
+          </a:xfrm>
+          <a:prstGeom prst="roundRect">
+            <a:avLst>
+              <a:gd name="adj" fmla="val 20000"/>
+            </a:avLst>
+          </a:prstGeom>
+          <a:solidFill>
+            <a:srgbClr val="6F4CFF"/>
+          </a:solidFill>
+          <a:ln/>
+        </p:spPr>
+      </p:sp>
+      <p:sp>
+        <p:nvSpPr>
+          <p:cNvPr id="3" name="Icon glyph"/>
+          <p:cNvSpPr/>
+          <p:nvPr/>
+        </p:nvSpPr>
+        <p:spPr>
+          <a:xfrm>
+            <a:off x="548640" y="548640"/>
+            <a:ext cx="548640" cy="548640"/>
+          </a:xfrm>
+          <a:prstGeom prst="rect">
+            <a:avLst/>
+          </a:prstGeom>
+          <a:noFill/>
+          <a:ln/>
+        </p:spPr>
+        <p:txBody>
+          <a:bodyPr wrap="square" lIns="0" tIns="0" rIns="0" bIns="0" rtlCol="0" anchor="ctr"/>
+          <a:lstStyle/>
+          <a:p>
+            <a:pPr algn="ctr" indent="0" marL="0">
+              <a:buNone/>
+            </a:pPr>
+            <a:r>
+              <a:rPr lang="en-US" sz="2400" b="1" dirty="0">
+                <a:solidFill>
+                  <a:srgbClr val="FFFFFF"/>
+                </a:solidFill>
+                <a:latin typeface="Inter" pitchFamily="34" charset="0"/>
+              </a:rPr>
+              <a:t>💡</a:t>
+            </a:r>
+          </a:p>
+        </p:txBody>
+      </p:sp>
+      <p:sp>
+        <p:nvSpPr>
+          <p:cNvPr id="4" name="Text 1"/>
+          <p:cNvSpPr/>
+          <p:nvPr/>
+        </p:nvSpPr>
+        <p:spPr>
+          <a:xfrm>
+            <a:off x="1261872" y="530352"/>
+            <a:ext cx="3657600" cy="292608"/>
+          </a:xfrm>
+          <a:prstGeom prst="rect">
+            <a:avLst/>
+          </a:prstGeom>
+          <a:noFill/>
+          <a:ln/>
+        </p:spPr>
+        <p:txBody>
+          <a:bodyPr wrap="square" lIns="0" tIns="0" rIns="0" bIns="0" rtlCol="0" anchor="ctr"/>
+          <a:lstStyle/>
+          <a:p>
+            <a:pPr indent="0" marL="0">
+              <a:buNone/>
+            </a:pPr>
+            <a:r>
+              <a:rPr lang="en-US" sz="1400" b="1" spc="400" kern="0" dirty="0">
+                <a:solidFill>
+                  <a:srgbClr val="6F4CFF"/>
+                </a:solidFill>
+                <a:latin typeface="Inter" pitchFamily="34" charset="0"/>
+                <a:ea typeface="Inter" pitchFamily="34" charset="-122"/>
+                <a:cs typeface="Inter" pitchFamily="34" charset="-120"/>
+              </a:rPr>
+              <a:t>DISCUSSIONS</a:t>
+            </a:r>
+            <a:endParaRPr lang="en-US" sz="1400" dirty="0"/>
+          </a:p>
+        </p:txBody>
+      </p:sp>
+      <p:sp>
+        <p:nvSpPr>
+          <p:cNvPr id="5" name="Text 2"/>
+          <p:cNvSpPr/>
+          <p:nvPr/>
+        </p:nvSpPr>
+        <p:spPr>
+          <a:xfrm>
+            <a:off x="1261872" y="749808"/>
+            <a:ext cx="10381183" cy="777240"/>
+          </a:xfrm>
+          <a:prstGeom prst="rect">
+            <a:avLst/>
+          </a:prstGeom>
+          <a:noFill/>
+          <a:ln/>
+        </p:spPr>
+        <p:txBody>
+          <a:bodyPr wrap="square" lIns="0" tIns="0" rIns="0" bIns="0" rtlCol="0" anchor="t"/>
+          <a:lstStyle/>
+          <a:p>
+            <a:pPr indent="0" marL="0">
+              <a:buNone/>
+            </a:pPr>
+            <a:r>
+              <a:rPr lang="en-US" sz="4000" b="1" dirty="0">
+                <a:solidFill>
+                  <a:srgbClr val="0F172A"/>
+                </a:solidFill>
+                <a:latin typeface="Inter" pitchFamily="34" charset="0"/>
+                <a:ea typeface="Inter" pitchFamily="34" charset="-122"/>
+                <a:cs typeface="Inter" pitchFamily="34" charset="-120"/>
+              </a:rPr>
+              <a:t>Discussions · persistent topic threads</a:t>
+            </a:r>
+            <a:endParaRPr lang="en-US" sz="4000" dirty="0"/>
+          </a:p>
+        </p:txBody>
+      </p:sp>
+      <p:sp>
+        <p:nvSpPr>
+          <p:cNvPr id="6" name="Shape 3"/>
+          <p:cNvSpPr/>
+          <p:nvPr/>
+        </p:nvSpPr>
+        <p:spPr>
+          <a:xfrm>
+            <a:off x="548640" y="1828800"/>
+            <a:ext cx="5486400" cy="3931920"/>
+          </a:xfrm>
+          <a:prstGeom prst="rect">
+            <a:avLst/>
+          </a:prstGeom>
+          <a:solidFill>
+            <a:srgbClr val="FFFFFF"/>
+          </a:solidFill>
+          <a:ln w="9525">
+            <a:solidFill>
+              <a:srgbClr val="E2E8F0"/>
+            </a:solidFill>
+            <a:prstDash val="solid"/>
+          </a:ln>
+          <a:effectLst>
+            <a:outerShdw sx="100000" sy="100000" kx="0" ky="0" algn="bl" rotWithShape="0" blurRad="76200" dist="12700" dir="5400000">
+              <a:srgbClr val="94A3B8">
+                <a:alpha val="12000"/>
+              </a:srgbClr>
+            </a:outerShdw>
+          </a:effectLst>
+        </p:spPr>
+      </p:sp>
+      <p:sp>
+        <p:nvSpPr>
+          <p:cNvPr id="7" name="Shape 4"/>
+          <p:cNvSpPr/>
+          <p:nvPr/>
+        </p:nvSpPr>
+        <p:spPr>
+          <a:xfrm>
+            <a:off x="548640" y="1828800"/>
+            <a:ext cx="73152" cy="3931920"/>
+          </a:xfrm>
+          <a:prstGeom prst="rect">
+            <a:avLst/>
+          </a:prstGeom>
+          <a:solidFill>
+            <a:srgbClr val="6F4CFF"/>
+          </a:solidFill>
+          <a:ln/>
+        </p:spPr>
+      </p:sp>
+      <p:sp>
+        <p:nvSpPr>
+          <p:cNvPr id="8" name="Text 5"/>
+          <p:cNvSpPr/>
+          <p:nvPr/>
+        </p:nvSpPr>
+        <p:spPr>
+          <a:xfrm>
+            <a:off x="749808" y="1993392"/>
+            <a:ext cx="5166360" cy="594360"/>
+          </a:xfrm>
+          <a:prstGeom prst="rect">
+            <a:avLst/>
+          </a:prstGeom>
+          <a:noFill/>
+          <a:ln/>
+        </p:spPr>
+        <p:txBody>
+          <a:bodyPr wrap="square" lIns="0" tIns="0" rIns="0" bIns="0" rtlCol="0" anchor="ctr"/>
+          <a:lstStyle/>
+          <a:p>
+            <a:pPr indent="0" marL="0">
+              <a:buNone/>
+            </a:pPr>
+            <a:r>
+              <a:rPr lang="en-US" sz="2200" b="1" dirty="0">
+                <a:solidFill>
+                  <a:srgbClr val="0F172A"/>
+                </a:solidFill>
+                <a:latin typeface="Inter" pitchFamily="34" charset="0"/>
+                <a:ea typeface="Inter" pitchFamily="34" charset="-122"/>
+                <a:cs typeface="Inter" pitchFamily="34" charset="-120"/>
+              </a:rPr>
+              <a:t>Start a topic</a:t>
+            </a:r>
+            <a:endParaRPr lang="en-US" sz="2200" dirty="0"/>
+          </a:p>
+        </p:txBody>
+      </p:sp>
+      <p:sp>
+        <p:nvSpPr>
+          <p:cNvPr id="9" name="Text 6"/>
+          <p:cNvSpPr/>
+          <p:nvPr/>
+        </p:nvSpPr>
+        <p:spPr>
+          <a:xfrm>
+            <a:off x="777240" y="2697480"/>
+            <a:ext cx="5074920" cy="2926080"/>
+          </a:xfrm>
+          <a:prstGeom prst="rect">
+            <a:avLst/>
+          </a:prstGeom>
+          <a:noFill/>
+          <a:ln/>
+        </p:spPr>
+        <p:txBody>
+          <a:bodyPr wrap="square" lIns="0" tIns="0" rIns="0" bIns="0" rtlCol="0" anchor="t"/>
+          <a:lstStyle/>
+          <a:p>
+            <a:pPr marL="342900" indent="-342900">
+              <a:spcAft>
+                <a:spcPts val="600"/>
+              </a:spcAft>
+              <a:buSzPct val="100000"/>
+              <a:buChar char="•"/>
+            </a:pPr>
+            <a:r>
+              <a:rPr lang="en-US" sz="1800" dirty="0">
+                <a:solidFill>
+                  <a:srgbClr val="334155"/>
+                </a:solidFill>
+                <a:latin typeface="Inter" pitchFamily="34" charset="0"/>
+                <a:ea typeface="Inter" pitchFamily="34" charset="-122"/>
+                <a:cs typeface="Inter" pitchFamily="34" charset="-120"/>
+              </a:rPr>
+              <a:t>Persistent, topic-first space for brainstorms, open questions and decisions — unlike Chat, nothing expires.</a:t>
+            </a:r>
+            <a:endParaRPr lang="en-US" sz="1800" dirty="0"/>
+          </a:p>
+          <a:p>
+            <a:pPr marL="342900" indent="-342900">
+              <a:spcAft>
+                <a:spcPts val="600"/>
+              </a:spcAft>
+              <a:buSzPct val="100000"/>
+              <a:buChar char="•"/>
+            </a:pPr>
+            <a:r>
+              <a:rPr lang="en-US" sz="1800" dirty="0">
+                <a:solidFill>
+                  <a:srgbClr val="334155"/>
+                </a:solidFill>
+                <a:latin typeface="Inter" pitchFamily="34" charset="0"/>
+                <a:ea typeface="Inter" pitchFamily="34" charset="-122"/>
+                <a:cs typeface="Inter" pitchFamily="34" charset="-120"/>
+              </a:rPr>
+              <a:t>New topic: a title + an opening post; you choose who can read it.</a:t>
+            </a:r>
+            <a:endParaRPr lang="en-US" sz="1800" dirty="0"/>
+          </a:p>
+          <a:p>
+            <a:pPr marL="342900" indent="-342900">
+              <a:spcAft>
+                <a:spcPts val="600"/>
+              </a:spcAft>
+              <a:buSzPct val="100000"/>
+              <a:buChar char="•"/>
+            </a:pPr>
+            <a:r>
+              <a:rPr lang="en-US" sz="1800" dirty="0">
+                <a:solidFill>
+                  <a:srgbClr val="334155"/>
+                </a:solidFill>
+                <a:latin typeface="Inter" pitchFamily="34" charset="0"/>
+                <a:ea typeface="Inter" pitchFamily="34" charset="-122"/>
+                <a:cs typeface="Inter" pitchFamily="34" charset="-120"/>
+              </a:rPr>
+              <a:t>Visibility: Supervisors only, or Whole team (students included).</a:t>
+            </a:r>
+            <a:endParaRPr lang="en-US" sz="1800" dirty="0"/>
+          </a:p>
+          <a:p>
+            <a:pPr marL="342900" indent="-342900">
+              <a:spcAft>
+                <a:spcPts val="600"/>
+              </a:spcAft>
+              <a:buSzPct val="100000"/>
+              <a:buChar char="•"/>
+            </a:pPr>
+            <a:r>
+              <a:rPr lang="en-US" sz="1800" dirty="0">
+                <a:solidFill>
+                  <a:srgbClr val="334155"/>
+                </a:solidFill>
+                <a:latin typeface="Inter" pitchFamily="34" charset="0"/>
+                <a:ea typeface="Inter" pitchFamily="34" charset="-122"/>
+                <a:cs typeface="Inter" pitchFamily="34" charset="-120"/>
+              </a:rPr>
+              <a:t>Optionally tag a student — a label, not an access rule.</a:t>
+            </a:r>
+            <a:endParaRPr lang="en-US" sz="1800" dirty="0"/>
+          </a:p>
+        </p:txBody>
+      </p:sp>
+      <p:sp>
+        <p:nvSpPr>
+          <p:cNvPr id="10" name="Shape 7"/>
+          <p:cNvSpPr/>
+          <p:nvPr/>
+        </p:nvSpPr>
+        <p:spPr>
+          <a:xfrm>
+            <a:off x="6400800" y="1828800"/>
+            <a:ext cx="5242255" cy="3931920"/>
+          </a:xfrm>
+          <a:prstGeom prst="rect">
+            <a:avLst/>
+          </a:prstGeom>
+          <a:solidFill>
+            <a:srgbClr val="FFFFFF"/>
+          </a:solidFill>
+          <a:ln w="9525">
+            <a:solidFill>
+              <a:srgbClr val="E2E8F0"/>
+            </a:solidFill>
+            <a:prstDash val="solid"/>
+          </a:ln>
+          <a:effectLst>
+            <a:outerShdw sx="100000" sy="100000" kx="0" ky="0" algn="bl" rotWithShape="0" blurRad="76200" dist="12700" dir="5400000">
+              <a:srgbClr val="94A3B8">
+                <a:alpha val="12000"/>
+              </a:srgbClr>
+            </a:outerShdw>
+          </a:effectLst>
+        </p:spPr>
+      </p:sp>
+      <p:sp>
+        <p:nvSpPr>
+          <p:cNvPr id="11" name="Shape 8"/>
+          <p:cNvSpPr/>
+          <p:nvPr/>
+        </p:nvSpPr>
+        <p:spPr>
+          <a:xfrm>
+            <a:off x="6400800" y="1828800"/>
+            <a:ext cx="73152" cy="3931920"/>
+          </a:xfrm>
+          <a:prstGeom prst="rect">
+            <a:avLst/>
+          </a:prstGeom>
+          <a:solidFill>
+            <a:srgbClr val="6F4CFF"/>
+          </a:solidFill>
+          <a:ln/>
+        </p:spPr>
+      </p:sp>
+      <p:sp>
+        <p:nvSpPr>
+          <p:cNvPr id="12" name="Text 9"/>
+          <p:cNvSpPr/>
+          <p:nvPr/>
+        </p:nvSpPr>
+        <p:spPr>
+          <a:xfrm>
+            <a:off x="6601968" y="1993392"/>
+            <a:ext cx="4922215" cy="594360"/>
+          </a:xfrm>
+          <a:prstGeom prst="rect">
+            <a:avLst/>
+          </a:prstGeom>
+          <a:noFill/>
+          <a:ln/>
+        </p:spPr>
+        <p:txBody>
+          <a:bodyPr wrap="square" lIns="0" tIns="0" rIns="0" bIns="0" rtlCol="0" anchor="ctr"/>
+          <a:lstStyle/>
+          <a:p>
+            <a:pPr indent="0" marL="0">
+              <a:buNone/>
+            </a:pPr>
+            <a:r>
+              <a:rPr lang="en-US" sz="2200" b="1" dirty="0">
+                <a:solidFill>
+                  <a:srgbClr val="0F172A"/>
+                </a:solidFill>
+                <a:latin typeface="Inter" pitchFamily="34" charset="0"/>
+                <a:ea typeface="Inter" pitchFamily="34" charset="-122"/>
+                <a:cs typeface="Inter" pitchFamily="34" charset="-120"/>
+              </a:rPr>
+              <a:t>Inside a topic</a:t>
+            </a:r>
+            <a:endParaRPr lang="en-US" sz="2200" dirty="0"/>
+          </a:p>
+        </p:txBody>
+      </p:sp>
+      <p:sp>
+        <p:nvSpPr>
+          <p:cNvPr id="13" name="Text 10"/>
+          <p:cNvSpPr/>
+          <p:nvPr/>
+        </p:nvSpPr>
+        <p:spPr>
+          <a:xfrm>
+            <a:off x="6629400" y="2697480"/>
+            <a:ext cx="4876495" cy="2926080"/>
+          </a:xfrm>
+          <a:prstGeom prst="rect">
+            <a:avLst/>
+          </a:prstGeom>
+          <a:noFill/>
+          <a:ln/>
+        </p:spPr>
+        <p:txBody>
+          <a:bodyPr wrap="square" lIns="0" tIns="0" rIns="0" bIns="0" rtlCol="0" anchor="t"/>
+          <a:lstStyle/>
+          <a:p>
+            <a:pPr marL="342900" indent="-342900">
+              <a:spcAft>
+                <a:spcPts val="600"/>
+              </a:spcAft>
+              <a:buSzPct val="100000"/>
+              <a:buChar char="•"/>
+            </a:pPr>
+            <a:r>
+              <a:rPr lang="en-US" sz="1800" dirty="0">
+                <a:solidFill>
+                  <a:srgbClr val="334155"/>
+                </a:solidFill>
+                <a:latin typeface="Inter" pitchFamily="34" charset="0"/>
+                <a:ea typeface="Inter" pitchFamily="34" charset="-122"/>
+                <a:cs typeface="Inter" pitchFamily="34" charset="-120"/>
+              </a:rPr>
+              <a:t>A threaded discussion, a Links list, and an optional Drive folder — all permanent.</a:t>
+            </a:r>
+            <a:endParaRPr lang="en-US" sz="1800" dirty="0"/>
+          </a:p>
+          <a:p>
+            <a:pPr marL="342900" indent="-342900">
+              <a:spcAft>
+                <a:spcPts val="600"/>
+              </a:spcAft>
+              <a:buSzPct val="100000"/>
+              <a:buChar char="•"/>
+            </a:pPr>
+            <a:r>
+              <a:rPr lang="en-US" sz="1800" dirty="0">
+                <a:solidFill>
+                  <a:srgbClr val="334155"/>
+                </a:solidFill>
+                <a:latin typeface="Inter" pitchFamily="34" charset="0"/>
+                <a:ea typeface="Inter" pitchFamily="34" charset="-122"/>
+                <a:cs typeface="Inter" pitchFamily="34" charset="-120"/>
+              </a:rPr>
+              <a:t>Email-style comments: text + images + documents (drag-and-drop, up to 25 MB).</a:t>
+            </a:r>
+            <a:endParaRPr lang="en-US" sz="1800" dirty="0"/>
+          </a:p>
+          <a:p>
+            <a:pPr marL="342900" indent="-342900">
+              <a:spcAft>
+                <a:spcPts val="600"/>
+              </a:spcAft>
+              <a:buSzPct val="100000"/>
+              <a:buChar char="•"/>
+            </a:pPr>
+            <a:r>
+              <a:rPr lang="en-US" sz="1800" dirty="0">
+                <a:solidFill>
+                  <a:srgbClr val="334155"/>
+                </a:solidFill>
+                <a:latin typeface="Inter" pitchFamily="34" charset="0"/>
+                <a:ea typeface="Inter" pitchFamily="34" charset="-122"/>
+                <a:cs typeface="Inter" pitchFamily="34" charset="-120"/>
+              </a:rPr>
+              <a:t>Images show inline; documents as download chips; replies can carry files too.</a:t>
+            </a:r>
+            <a:endParaRPr lang="en-US" sz="1800" dirty="0"/>
+          </a:p>
+          <a:p>
+            <a:pPr marL="342900" indent="-342900">
+              <a:spcAft>
+                <a:spcPts val="600"/>
+              </a:spcAft>
+              <a:buSzPct val="100000"/>
+              <a:buChar char="•"/>
+            </a:pPr>
+            <a:r>
+              <a:rPr lang="en-US" sz="1800" dirty="0">
+                <a:solidFill>
+                  <a:srgbClr val="334155"/>
+                </a:solidFill>
+                <a:latin typeface="Inter" pitchFamily="34" charset="0"/>
+                <a:ea typeface="Inter" pitchFamily="34" charset="-122"/>
+                <a:cs typeface="Inter" pitchFamily="34" charset="-120"/>
+              </a:rPr>
+              <a:t>Author/admin can pin, close, or delete a topic. New topics and comments raise a 🔔 and a violet sidebar badge.</a:t>
+            </a:r>
+            <a:endParaRPr lang="en-US" sz="1800" dirty="0"/>
+          </a:p>
+        </p:txBody>
+      </p:sp>
+      <p:sp>
+        <p:nvSpPr>
+          <p:cNvPr id="14" name="Shape 11"/>
+          <p:cNvSpPr/>
+          <p:nvPr/>
+        </p:nvSpPr>
+        <p:spPr>
+          <a:xfrm>
+            <a:off x="548640" y="6355080"/>
+            <a:ext cx="11094415" cy="0"/>
+          </a:xfrm>
+          <a:prstGeom prst="line">
+            <a:avLst/>
+          </a:prstGeom>
+          <a:noFill/>
+          <a:ln w="9525">
+            <a:solidFill>
+              <a:srgbClr val="E2E8F0"/>
+            </a:solidFill>
+            <a:prstDash val="solid"/>
+          </a:ln>
+        </p:spPr>
+      </p:sp>
+      <p:sp>
+        <p:nvSpPr>
+          <p:cNvPr id="15" name="Text 12"/>
+          <p:cNvSpPr/>
+          <p:nvPr/>
+        </p:nvSpPr>
+        <p:spPr>
+          <a:xfrm>
+            <a:off x="548640" y="6446520"/>
+            <a:ext cx="5486400" cy="274320"/>
+          </a:xfrm>
+          <a:prstGeom prst="rect">
+            <a:avLst/>
+          </a:prstGeom>
+          <a:noFill/>
+          <a:ln/>
+        </p:spPr>
+        <p:txBody>
+          <a:bodyPr wrap="square" lIns="0" tIns="0" rIns="0" bIns="0" rtlCol="0" anchor="ctr"/>
+          <a:lstStyle/>
+          <a:p>
+            <a:pPr indent="0" marL="0">
+              <a:buNone/>
+            </a:pPr>
+            <a:r>
+              <a:rPr lang="en-US" sz="1300" dirty="0">
+                <a:solidFill>
+                  <a:srgbClr val="64748B"/>
+                </a:solidFill>
+                <a:latin typeface="Inter" pitchFamily="34" charset="0"/>
+                <a:ea typeface="Inter" pitchFamily="34" charset="-122"/>
+                <a:cs typeface="Inter" pitchFamily="34" charset="-120"/>
+              </a:rPr>
+              <a:t>PhDapp · for supervisors</a:t>
+            </a:r>
+            <a:endParaRPr lang="en-US" sz="1300" dirty="0"/>
+          </a:p>
+        </p:txBody>
+      </p:sp>
+      <p:sp>
+        <p:nvSpPr>
+          <p:cNvPr id="16" name="Text 13"/>
+          <p:cNvSpPr/>
+          <p:nvPr/>
+        </p:nvSpPr>
+        <p:spPr>
+          <a:xfrm>
+            <a:off x="9814255" y="6446520"/>
+            <a:ext cx="1828800" cy="274320"/>
+          </a:xfrm>
+          <a:prstGeom prst="rect">
+            <a:avLst/>
+          </a:prstGeom>
+          <a:noFill/>
+          <a:ln/>
+        </p:spPr>
+        <p:txBody>
+          <a:bodyPr wrap="square" lIns="0" tIns="0" rIns="0" bIns="0" rtlCol="0" anchor="ctr"/>
+          <a:lstStyle/>
+          <a:p>
+            <a:pPr algn="r" indent="0" marL="0">
+              <a:buNone/>
+            </a:pPr>
+            <a:r>
+              <a:rPr lang="en-US" sz="1300" dirty="0">
+                <a:solidFill>
+                  <a:srgbClr val="64748B"/>
+                </a:solidFill>
+                <a:latin typeface="Inter" pitchFamily="34" charset="0"/>
+                <a:ea typeface="Inter" pitchFamily="34" charset="-122"/>
+                <a:cs typeface="Inter" pitchFamily="34" charset="-120"/>
+              </a:rPr>
+              <a:t>11 / 20</a:t>
             </a:r>
             <a:endParaRPr lang="en-US" sz="1300" dirty="0"/>
           </a:p>
@@ -12985,7 +13649,7 @@
                 <a:ea typeface="Inter" pitchFamily="34" charset="-122"/>
                 <a:cs typeface="Inter" pitchFamily="34" charset="-120"/>
               </a:rPr>
-              <a:t>3 / 19</a:t>
+              <a:t>3 / 20</a:t>
             </a:r>
             <a:endParaRPr lang="en-US" sz="1300" dirty="0"/>
           </a:p>
@@ -13615,7 +14279,7 @@
                 <a:ea typeface="Inter" pitchFamily="34" charset="-122"/>
                 <a:cs typeface="Inter" pitchFamily="34" charset="-120"/>
               </a:rPr>
-              <a:t>4 / 19</a:t>
+              <a:t>4 / 20</a:t>
             </a:r>
             <a:endParaRPr lang="en-US" sz="1300" dirty="0"/>
           </a:p>
@@ -14326,7 +14990,7 @@
                 <a:ea typeface="Inter" pitchFamily="34" charset="-122"/>
                 <a:cs typeface="Inter" pitchFamily="34" charset="-120"/>
               </a:rPr>
-              <a:t>5 / 19</a:t>
+              <a:t>5 / 20</a:t>
             </a:r>
             <a:endParaRPr lang="en-US" sz="1300" dirty="0"/>
           </a:p>
@@ -14977,7 +15641,7 @@
                 <a:ea typeface="Inter" pitchFamily="34" charset="-122"/>
                 <a:cs typeface="Inter" pitchFamily="34" charset="-120"/>
               </a:rPr>
-              <a:t>6 / 19</a:t>
+              <a:t>6 / 20</a:t>
             </a:r>
             <a:endParaRPr lang="en-US" sz="1300" dirty="0"/>
           </a:p>
@@ -15927,7 +16591,7 @@
                 <a:ea typeface="Inter" pitchFamily="34" charset="-122"/>
                 <a:cs typeface="Inter" pitchFamily="34" charset="-120"/>
               </a:rPr>
-              <a:t>7 / 19</a:t>
+              <a:t>7 / 20</a:t>
             </a:r>
             <a:endParaRPr lang="en-US" sz="1300" dirty="0"/>
           </a:p>
@@ -16712,7 +17376,7 @@
                 <a:ea typeface="Inter" pitchFamily="34" charset="-122"/>
                 <a:cs typeface="Inter" pitchFamily="34" charset="-120"/>
               </a:rPr>
-              <a:t>8 / 19</a:t>
+              <a:t>8 / 20</a:t>
             </a:r>
             <a:endParaRPr lang="en-US" sz="1300" dirty="0"/>
           </a:p>
@@ -17363,7 +18027,7 @@
                 <a:ea typeface="Inter" pitchFamily="34" charset="-122"/>
                 <a:cs typeface="Inter" pitchFamily="34" charset="-120"/>
               </a:rPr>
-              <a:t>9 / 19</a:t>
+              <a:t>9 / 20</a:t>
             </a:r>
             <a:endParaRPr lang="en-US" sz="1300" dirty="0"/>
           </a:p>

--- a/docs/PhDapp_Supervisor_Overview.pptx
+++ b/docs/PhDapp_Supervisor_Overview.pptx
@@ -12412,7 +12412,7 @@
                 <a:ea typeface="Inter" pitchFamily="34" charset="-122"/>
                 <a:cs typeface="Inter" pitchFamily="34" charset="-120"/>
               </a:rPr>
-              <a:t>Email-style comments: text + images + documents (drag-and-drop, up to 25 MB).</a:t>
+              <a:t>Comments build like a document: type, drop an image below, type more — blocks reorder (up to 25 MB each).</a:t>
             </a:r>
             <a:endParaRPr lang="en-US" sz="1800" dirty="0"/>
           </a:p>
